--- a/python_course/chapter_05_lists/lists.pptx
+++ b/python_course/chapter_05_lists/lists.pptx
@@ -14,16 +14,6 @@
     <p:sldId id="262" r:id="rId13"/>
     <p:sldId id="263" r:id="rId14"/>
     <p:sldId id="264" r:id="rId15"/>
-    <p:sldId id="265" r:id="rId16"/>
-    <p:sldId id="266" r:id="rId17"/>
-    <p:sldId id="267" r:id="rId18"/>
-    <p:sldId id="268" r:id="rId19"/>
-    <p:sldId id="269" r:id="rId20"/>
-    <p:sldId id="270" r:id="rId21"/>
-    <p:sldId id="271" r:id="rId22"/>
-    <p:sldId id="272" r:id="rId23"/>
-    <p:sldId id="273" r:id="rId24"/>
-    <p:sldId id="274" r:id="rId25"/>
   </p:sldIdLst>
   <p:sldSz cx="12191695" cy="6858000" type="screen4x3"/>
   <p:notesSz cx="6858000" cy="9144000"/>
@@ -3157,8 +3147,8 @@
         </p:nvSpPr>
         <p:spPr>
           <a:xfrm>
-            <a:off x="914400" y="1828800"/>
-            <a:ext cx="10360152" cy="1371600"/>
+            <a:off x="914400" y="2286000"/>
+            <a:ext cx="10360152" cy="1097280"/>
           </a:xfrm>
           <a:prstGeom prst="rect">
             <a:avLst/>
@@ -3172,14 +3162,14 @@
           <a:lstStyle/>
           <a:p>
             <a:pPr algn="ctr">
-              <a:defRPr sz="5400" b="1">
+              <a:defRPr sz="4800" b="1">
                 <a:solidFill>
                   <a:srgbClr val="003366"/>
                 </a:solidFill>
               </a:defRPr>
             </a:pPr>
             <a:r>
-              <a:t>Chapter 5</a:t>
+              <a:t>Chapter 5: Lists</a:t>
             </a:r>
           </a:p>
         </p:txBody>
@@ -3193,7 +3183,7 @@
         <p:spPr>
           <a:xfrm>
             <a:off x="914400" y="3657600"/>
-            <a:ext cx="10360152" cy="548640"/>
+            <a:ext cx="10360152" cy="731520"/>
           </a:xfrm>
           <a:prstGeom prst="rect">
             <a:avLst/>
@@ -3214,42 +3204,7 @@
               </a:defRPr>
             </a:pPr>
             <a:r>
-              <a:t>Working with Lists</a:t>
-            </a:r>
-          </a:p>
-        </p:txBody>
-      </p:sp>
-      <p:sp>
-        <p:nvSpPr>
-          <p:cNvPr id="5" name="TextBox 4"/>
-          <p:cNvSpPr txBox="1"/>
-          <p:nvPr/>
-        </p:nvSpPr>
-        <p:spPr>
-          <a:xfrm>
-            <a:off x="914400" y="4297680"/>
-            <a:ext cx="10360152" cy="548640"/>
-          </a:xfrm>
-          <a:prstGeom prst="rect">
-            <a:avLst/>
-          </a:prstGeom>
-          <a:noFill/>
-        </p:spPr>
-        <p:txBody>
-          <a:bodyPr wrap="none">
-            <a:spAutoFit/>
-          </a:bodyPr>
-          <a:lstStyle/>
-          <a:p>
-            <a:pPr algn="ctr">
-              <a:defRPr sz="2800">
-                <a:solidFill>
-                  <a:srgbClr val="4682B4"/>
-                </a:solidFill>
-              </a:defRPr>
-            </a:pPr>
-            <a:r>
-              <a:t>Organizing Data Like a Pro</a:t>
+              <a:t>Working with Ordered Collections</a:t>
             </a:r>
           </a:p>
         </p:txBody>
@@ -3262,7 +3217,7 @@
 </p:sld>
 </file>
 
-<file path=ppt/slides/slide10.xml><?xml version="1.0" encoding="utf-8"?>
+<file path=ppt/slides/slide2.xml><?xml version="1.0" encoding="utf-8"?>
 <p:sld xmlns:a="http://schemas.openxmlformats.org/drawingml/2006/main" xmlns:p="http://schemas.openxmlformats.org/presentationml/2006/main" xmlns:r="http://schemas.openxmlformats.org/officeDocument/2006/relationships">
   <p:cSld>
     <p:spTree>
@@ -3366,8 +3321,8 @@
         </p:nvSpPr>
         <p:spPr>
           <a:xfrm>
-            <a:off x="457200" y="365760"/>
-            <a:ext cx="10972800" cy="731520"/>
+            <a:off x="457200" y="320040"/>
+            <a:ext cx="10972800" cy="640080"/>
           </a:xfrm>
           <a:prstGeom prst="rect">
             <a:avLst/>
@@ -3381,71 +3336,28 @@
           <a:lstStyle/>
           <a:p>
             <a:pPr>
-              <a:defRPr sz="4000" b="1">
+              <a:defRPr sz="3600" b="1">
                 <a:solidFill>
                   <a:srgbClr val="003366"/>
                 </a:solidFill>
               </a:defRPr>
             </a:pPr>
             <a:r>
-              <a:t>Organizing Lists 📊</a:t>
-            </a:r>
-          </a:p>
-        </p:txBody>
-      </p:sp>
-      <p:sp>
-        <p:nvSpPr>
-          <p:cNvPr id="5" name="Rectangle 4"/>
-          <p:cNvSpPr/>
+              <a:t>What Are Lists?</a:t>
+            </a:r>
+          </a:p>
+        </p:txBody>
+      </p:sp>
+      <p:sp>
+        <p:nvSpPr>
+          <p:cNvPr id="5" name="TextBox 4"/>
+          <p:cNvSpPr txBox="1"/>
           <p:nvPr/>
         </p:nvSpPr>
         <p:spPr>
           <a:xfrm>
-            <a:off x="457200" y="1005840"/>
-            <a:ext cx="1828800" cy="45720"/>
-          </a:xfrm>
-          <a:prstGeom prst="rect">
-            <a:avLst/>
-          </a:prstGeom>
-          <a:solidFill>
-            <a:srgbClr val="0066CC"/>
-          </a:solidFill>
-          <a:ln>
-            <a:noFill/>
-          </a:ln>
-        </p:spPr>
-        <p:style>
-          <a:lnRef idx="1">
-            <a:schemeClr val="accent1"/>
-          </a:lnRef>
-          <a:fillRef idx="3">
-            <a:schemeClr val="accent1"/>
-          </a:fillRef>
-          <a:effectRef idx="2">
-            <a:schemeClr val="accent1"/>
-          </a:effectRef>
-          <a:fontRef idx="minor">
-            <a:schemeClr val="lt1"/>
-          </a:fontRef>
-        </p:style>
-        <p:txBody>
-          <a:bodyPr rtlCol="0" anchor="ctr"/>
-          <a:lstStyle/>
-          <a:p>
-            <a:pPr algn="ctr"/>
-          </a:p>
-        </p:txBody>
-      </p:sp>
-      <p:sp>
-        <p:nvSpPr>
-          <p:cNvPr id="6" name="TextBox 5"/>
-          <p:cNvSpPr txBox="1"/>
-          <p:nvPr/>
-        </p:nvSpPr>
-        <p:spPr>
-          <a:xfrm>
-            <a:off x="640080" y="1371600"/>
-            <a:ext cx="10789920" cy="4572000"/>
+            <a:off x="640080" y="1188720"/>
+            <a:ext cx="10789920" cy="5303520"/>
           </a:xfrm>
           <a:prstGeom prst="rect">
             <a:avLst/>
@@ -3460,46 +3372,211 @@
           <a:p>
             <a:pPr>
               <a:spcAft>
-                <a:spcPts val="800"/>
-              </a:spcAft>
-              <a:defRPr sz="2000" b="1">
-                <a:solidFill>
-                  <a:srgbClr val="333333"/>
-                </a:solidFill>
-              </a:defRPr>
-            </a:pPr>
-            <a:r>
-              <a:t>sort() - Sort in place</a:t>
-            </a:r>
-          </a:p>
-          <a:p>
-            <a:pPr>
-              <a:spcAft>
-                <a:spcPts val="800"/>
-              </a:spcAft>
-              <a:defRPr sz="2000" b="1">
-                <a:solidFill>
-                  <a:srgbClr val="333333"/>
-                </a:solidFill>
-              </a:defRPr>
-            </a:pPr>
-            <a:r>
-              <a:t>reverse() - Reverse the order</a:t>
-            </a:r>
-          </a:p>
-          <a:p>
-            <a:pPr>
-              <a:spcAft>
-                <a:spcPts val="800"/>
-              </a:spcAft>
-              <a:defRPr sz="2000" b="1">
-                <a:solidFill>
-                  <a:srgbClr val="333333"/>
-                </a:solidFill>
-              </a:defRPr>
-            </a:pPr>
-            <a:r>
-              <a:t>sorted() - Return sorted copy (doesn't modify original)</a:t>
+                <a:spcPts val="600"/>
+              </a:spcAft>
+              <a:defRPr b="1" sz="2000">
+                <a:solidFill>
+                  <a:srgbClr val="333333"/>
+                </a:solidFill>
+              </a:defRPr>
+            </a:pPr>
+            <a:r>
+              <a:t>Lists: Ordered collections of items</a:t>
+            </a:r>
+          </a:p>
+          <a:p>
+            <a:pPr lvl="1">
+              <a:spcAft>
+                <a:spcPts val="400"/>
+              </a:spcAft>
+              <a:defRPr sz="1600">
+                <a:solidFill>
+                  <a:srgbClr val="333333"/>
+                </a:solidFill>
+              </a:defRPr>
+            </a:pPr>
+            <a:r>
+              <a:t>• Can contain any data types</a:t>
+            </a:r>
+          </a:p>
+          <a:p>
+            <a:pPr lvl="1">
+              <a:spcAft>
+                <a:spcPts val="400"/>
+              </a:spcAft>
+              <a:defRPr sz="1600">
+                <a:solidFill>
+                  <a:srgbClr val="333333"/>
+                </a:solidFill>
+              </a:defRPr>
+            </a:pPr>
+            <a:r>
+              <a:t>• Mutable (can be changed)</a:t>
+            </a:r>
+          </a:p>
+          <a:p>
+            <a:pPr lvl="1">
+              <a:spcAft>
+                <a:spcPts val="400"/>
+              </a:spcAft>
+              <a:defRPr sz="1600">
+                <a:solidFill>
+                  <a:srgbClr val="333333"/>
+                </a:solidFill>
+              </a:defRPr>
+            </a:pPr>
+            <a:r>
+              <a:t>• Indexed starting at 0</a:t>
+            </a:r>
+          </a:p>
+          <a:p>
+            <a:pPr>
+              <a:spcAft>
+                <a:spcPts val="600"/>
+              </a:spcAft>
+              <a:defRPr b="1" sz="2000">
+                <a:solidFill>
+                  <a:srgbClr val="333333"/>
+                </a:solidFill>
+              </a:defRPr>
+            </a:pPr>
+            <a:r>
+              <a:t>Creating Lists:</a:t>
+            </a:r>
+          </a:p>
+          <a:p>
+            <a:pPr>
+              <a:spcAft>
+                <a:spcPts val="600"/>
+              </a:spcAft>
+              <a:defRPr sz="1600">
+                <a:solidFill>
+                  <a:srgbClr val="333333"/>
+                </a:solidFill>
+              </a:defRPr>
+            </a:pPr>
+            <a:r>
+              <a:t>fruits = ["apple", "banana", "orange"]</a:t>
+            </a:r>
+          </a:p>
+          <a:p>
+            <a:pPr>
+              <a:spcAft>
+                <a:spcPts val="600"/>
+              </a:spcAft>
+              <a:defRPr sz="1600">
+                <a:solidFill>
+                  <a:srgbClr val="333333"/>
+                </a:solidFill>
+              </a:defRPr>
+            </a:pPr>
+            <a:r>
+              <a:t>numbers = [1, 2, 3, 4, 5]</a:t>
+            </a:r>
+          </a:p>
+          <a:p>
+            <a:pPr>
+              <a:spcAft>
+                <a:spcPts val="600"/>
+              </a:spcAft>
+              <a:defRPr sz="1600">
+                <a:solidFill>
+                  <a:srgbClr val="333333"/>
+                </a:solidFill>
+              </a:defRPr>
+            </a:pPr>
+            <a:r>
+              <a:t>mixed = [1, "hello", 3.14, True]</a:t>
+            </a:r>
+          </a:p>
+          <a:p>
+            <a:pPr>
+              <a:spcAft>
+                <a:spcPts val="600"/>
+              </a:spcAft>
+              <a:defRPr sz="1600">
+                <a:solidFill>
+                  <a:srgbClr val="333333"/>
+                </a:solidFill>
+              </a:defRPr>
+            </a:pPr>
+            <a:r>
+              <a:t>empty = []</a:t>
+            </a:r>
+          </a:p>
+          <a:p>
+            <a:pPr>
+              <a:spcAft>
+                <a:spcPts val="600"/>
+              </a:spcAft>
+              <a:defRPr b="1" sz="2000">
+                <a:solidFill>
+                  <a:srgbClr val="333333"/>
+                </a:solidFill>
+              </a:defRPr>
+            </a:pPr>
+            <a:r>
+              <a:t>Why Use Lists?:</a:t>
+            </a:r>
+          </a:p>
+          <a:p>
+            <a:pPr lvl="1">
+              <a:spcAft>
+                <a:spcPts val="400"/>
+              </a:spcAft>
+              <a:defRPr sz="1600">
+                <a:solidFill>
+                  <a:srgbClr val="333333"/>
+                </a:solidFill>
+              </a:defRPr>
+            </a:pPr>
+            <a:r>
+              <a:t>• Store multiple related items</a:t>
+            </a:r>
+          </a:p>
+          <a:p>
+            <a:pPr lvl="1">
+              <a:spcAft>
+                <a:spcPts val="400"/>
+              </a:spcAft>
+              <a:defRPr sz="1600">
+                <a:solidFill>
+                  <a:srgbClr val="333333"/>
+                </a:solidFill>
+              </a:defRPr>
+            </a:pPr>
+            <a:r>
+              <a:t>• Organize data</a:t>
+            </a:r>
+          </a:p>
+          <a:p>
+            <a:pPr lvl="1">
+              <a:spcAft>
+                <a:spcPts val="400"/>
+              </a:spcAft>
+              <a:defRPr sz="1600">
+                <a:solidFill>
+                  <a:srgbClr val="333333"/>
+                </a:solidFill>
+              </a:defRPr>
+            </a:pPr>
+            <a:r>
+              <a:t>• Iterate through collections</a:t>
+            </a:r>
+          </a:p>
+          <a:p>
+            <a:pPr lvl="1">
+              <a:spcAft>
+                <a:spcPts val="400"/>
+              </a:spcAft>
+              <a:defRPr sz="1600">
+                <a:solidFill>
+                  <a:srgbClr val="333333"/>
+                </a:solidFill>
+              </a:defRPr>
+            </a:pPr>
+            <a:r>
+              <a:t>• Build dynamic datasets</a:t>
             </a:r>
           </a:p>
         </p:txBody>
@@ -3512,7 +3589,7 @@
 </p:sld>
 </file>
 
-<file path=ppt/slides/slide11.xml><?xml version="1.0" encoding="utf-8"?>
+<file path=ppt/slides/slide3.xml><?xml version="1.0" encoding="utf-8"?>
 <p:sld xmlns:a="http://schemas.openxmlformats.org/drawingml/2006/main" xmlns:p="http://schemas.openxmlformats.org/presentationml/2006/main" xmlns:r="http://schemas.openxmlformats.org/officeDocument/2006/relationships">
   <p:cSld>
     <p:spTree>
@@ -3616,8 +3693,8 @@
         </p:nvSpPr>
         <p:spPr>
           <a:xfrm>
-            <a:off x="457200" y="365760"/>
-            <a:ext cx="10972800" cy="731520"/>
+            <a:off x="457200" y="320040"/>
+            <a:ext cx="10972800" cy="640080"/>
           </a:xfrm>
           <a:prstGeom prst="rect">
             <a:avLst/>
@@ -3631,71 +3708,28 @@
           <a:lstStyle/>
           <a:p>
             <a:pPr>
-              <a:defRPr sz="4000" b="1">
+              <a:defRPr sz="3600" b="1">
                 <a:solidFill>
                   <a:srgbClr val="003366"/>
                 </a:solidFill>
               </a:defRPr>
             </a:pPr>
             <a:r>
-              <a:t>Getting Information ℹ️</a:t>
-            </a:r>
-          </a:p>
-        </p:txBody>
-      </p:sp>
-      <p:sp>
-        <p:nvSpPr>
-          <p:cNvPr id="5" name="Rectangle 4"/>
-          <p:cNvSpPr/>
+              <a:t>Accessing List Elements</a:t>
+            </a:r>
+          </a:p>
+        </p:txBody>
+      </p:sp>
+      <p:sp>
+        <p:nvSpPr>
+          <p:cNvPr id="5" name="TextBox 4"/>
+          <p:cNvSpPr txBox="1"/>
           <p:nvPr/>
         </p:nvSpPr>
         <p:spPr>
           <a:xfrm>
-            <a:off x="457200" y="1005840"/>
-            <a:ext cx="1828800" cy="45720"/>
-          </a:xfrm>
-          <a:prstGeom prst="rect">
-            <a:avLst/>
-          </a:prstGeom>
-          <a:solidFill>
-            <a:srgbClr val="0066CC"/>
-          </a:solidFill>
-          <a:ln>
-            <a:noFill/>
-          </a:ln>
-        </p:spPr>
-        <p:style>
-          <a:lnRef idx="1">
-            <a:schemeClr val="accent1"/>
-          </a:lnRef>
-          <a:fillRef idx="3">
-            <a:schemeClr val="accent1"/>
-          </a:fillRef>
-          <a:effectRef idx="2">
-            <a:schemeClr val="accent1"/>
-          </a:effectRef>
-          <a:fontRef idx="minor">
-            <a:schemeClr val="lt1"/>
-          </a:fontRef>
-        </p:style>
-        <p:txBody>
-          <a:bodyPr rtlCol="0" anchor="ctr"/>
-          <a:lstStyle/>
-          <a:p>
-            <a:pPr algn="ctr"/>
-          </a:p>
-        </p:txBody>
-      </p:sp>
-      <p:sp>
-        <p:nvSpPr>
-          <p:cNvPr id="6" name="TextBox 5"/>
-          <p:cNvSpPr txBox="1"/>
-          <p:nvPr/>
-        </p:nvSpPr>
-        <p:spPr>
-          <a:xfrm>
-            <a:off x="640080" y="1371600"/>
-            <a:ext cx="10789920" cy="4572000"/>
+            <a:off x="640080" y="1188720"/>
+            <a:ext cx="10789920" cy="5303520"/>
           </a:xfrm>
           <a:prstGeom prst="rect">
             <a:avLst/>
@@ -3710,61 +3744,211 @@
           <a:p>
             <a:pPr>
               <a:spcAft>
-                <a:spcPts val="800"/>
-              </a:spcAft>
-              <a:defRPr sz="2000" b="1">
-                <a:solidFill>
-                  <a:srgbClr val="333333"/>
-                </a:solidFill>
-              </a:defRPr>
-            </a:pPr>
-            <a:r>
-              <a:t>len() - Get list length</a:t>
-            </a:r>
-          </a:p>
-          <a:p>
-            <a:pPr>
-              <a:spcAft>
-                <a:spcPts val="800"/>
-              </a:spcAft>
-              <a:defRPr sz="2000" b="1">
-                <a:solidFill>
-                  <a:srgbClr val="333333"/>
-                </a:solidFill>
-              </a:defRPr>
-            </a:pPr>
-            <a:r>
-              <a:t>count() - Count occurrences</a:t>
-            </a:r>
-          </a:p>
-          <a:p>
-            <a:pPr>
-              <a:spcAft>
-                <a:spcPts val="800"/>
-              </a:spcAft>
-              <a:defRPr sz="2000" b="1">
-                <a:solidFill>
-                  <a:srgbClr val="333333"/>
-                </a:solidFill>
-              </a:defRPr>
-            </a:pPr>
-            <a:r>
-              <a:t>index() - Find position</a:t>
-            </a:r>
-          </a:p>
-          <a:p>
-            <a:pPr>
-              <a:spcAft>
-                <a:spcPts val="800"/>
-              </a:spcAft>
-              <a:defRPr sz="2000" b="1">
-                <a:solidFill>
-                  <a:srgbClr val="333333"/>
-                </a:solidFill>
-              </a:defRPr>
-            </a:pPr>
-            <a:r>
-              <a:t>in operator - Check membership</a:t>
+                <a:spcPts val="600"/>
+              </a:spcAft>
+              <a:defRPr b="1" sz="2000">
+                <a:solidFill>
+                  <a:srgbClr val="333333"/>
+                </a:solidFill>
+              </a:defRPr>
+            </a:pPr>
+            <a:r>
+              <a:t>Indexing:</a:t>
+            </a:r>
+          </a:p>
+          <a:p>
+            <a:pPr>
+              <a:spcAft>
+                <a:spcPts val="600"/>
+              </a:spcAft>
+              <a:defRPr sz="1600">
+                <a:solidFill>
+                  <a:srgbClr val="333333"/>
+                </a:solidFill>
+              </a:defRPr>
+            </a:pPr>
+            <a:r>
+              <a:t>fruits = ["apple", "banana", "orange"]</a:t>
+            </a:r>
+          </a:p>
+          <a:p>
+            <a:pPr>
+              <a:spcAft>
+                <a:spcPts val="600"/>
+              </a:spcAft>
+              <a:defRPr sz="1600">
+                <a:solidFill>
+                  <a:srgbClr val="333333"/>
+                </a:solidFill>
+              </a:defRPr>
+            </a:pPr>
+            <a:r>
+              <a:t>fruits[0]  # "apple"</a:t>
+            </a:r>
+          </a:p>
+          <a:p>
+            <a:pPr>
+              <a:spcAft>
+                <a:spcPts val="600"/>
+              </a:spcAft>
+              <a:defRPr sz="1600">
+                <a:solidFill>
+                  <a:srgbClr val="333333"/>
+                </a:solidFill>
+              </a:defRPr>
+            </a:pPr>
+            <a:r>
+              <a:t>fruits[1]  # "banana"</a:t>
+            </a:r>
+          </a:p>
+          <a:p>
+            <a:pPr>
+              <a:spcAft>
+                <a:spcPts val="600"/>
+              </a:spcAft>
+              <a:defRPr sz="1600">
+                <a:solidFill>
+                  <a:srgbClr val="333333"/>
+                </a:solidFill>
+              </a:defRPr>
+            </a:pPr>
+            <a:r>
+              <a:t>fruits[-1]  # "orange" (last)</a:t>
+            </a:r>
+          </a:p>
+          <a:p>
+            <a:pPr>
+              <a:spcAft>
+                <a:spcPts val="600"/>
+              </a:spcAft>
+              <a:defRPr b="1" sz="2000">
+                <a:solidFill>
+                  <a:srgbClr val="333333"/>
+                </a:solidFill>
+              </a:defRPr>
+            </a:pPr>
+            <a:r>
+              <a:t>Slicing:</a:t>
+            </a:r>
+          </a:p>
+          <a:p>
+            <a:pPr>
+              <a:spcAft>
+                <a:spcPts val="600"/>
+              </a:spcAft>
+              <a:defRPr b="1" sz="2000">
+                <a:solidFill>
+                  <a:srgbClr val="333333"/>
+                </a:solidFill>
+              </a:defRPr>
+            </a:pPr>
+            <a:r>
+              <a:t>fruits[0:2]  # ["apple", "banana"]</a:t>
+            </a:r>
+          </a:p>
+          <a:p>
+            <a:pPr>
+              <a:spcAft>
+                <a:spcPts val="600"/>
+              </a:spcAft>
+              <a:defRPr b="1" sz="2000">
+                <a:solidFill>
+                  <a:srgbClr val="333333"/>
+                </a:solidFill>
+              </a:defRPr>
+            </a:pPr>
+            <a:r>
+              <a:t>fruits[1:]   # ["banana", "orange"]</a:t>
+            </a:r>
+          </a:p>
+          <a:p>
+            <a:pPr>
+              <a:spcAft>
+                <a:spcPts val="600"/>
+              </a:spcAft>
+              <a:defRPr b="1" sz="2000">
+                <a:solidFill>
+                  <a:srgbClr val="333333"/>
+                </a:solidFill>
+              </a:defRPr>
+            </a:pPr>
+            <a:r>
+              <a:t>fruits[:2]   # ["apple", "banana"]</a:t>
+            </a:r>
+          </a:p>
+          <a:p>
+            <a:pPr>
+              <a:spcAft>
+                <a:spcPts val="600"/>
+              </a:spcAft>
+              <a:defRPr b="1" sz="2000">
+                <a:solidFill>
+                  <a:srgbClr val="333333"/>
+                </a:solidFill>
+              </a:defRPr>
+            </a:pPr>
+            <a:r>
+              <a:t>Length:</a:t>
+            </a:r>
+          </a:p>
+          <a:p>
+            <a:pPr>
+              <a:spcAft>
+                <a:spcPts val="600"/>
+              </a:spcAft>
+              <a:defRPr sz="1600">
+                <a:solidFill>
+                  <a:srgbClr val="333333"/>
+                </a:solidFill>
+              </a:defRPr>
+            </a:pPr>
+            <a:r>
+              <a:t>len(fruits)  # 3</a:t>
+            </a:r>
+          </a:p>
+          <a:p>
+            <a:pPr>
+              <a:spcAft>
+                <a:spcPts val="600"/>
+              </a:spcAft>
+              <a:defRPr b="1" sz="2000">
+                <a:solidFill>
+                  <a:srgbClr val="333333"/>
+                </a:solidFill>
+              </a:defRPr>
+            </a:pPr>
+            <a:r>
+              <a:t>Checking Membership:</a:t>
+            </a:r>
+          </a:p>
+          <a:p>
+            <a:pPr>
+              <a:spcAft>
+                <a:spcPts val="600"/>
+              </a:spcAft>
+              <a:defRPr sz="1600">
+                <a:solidFill>
+                  <a:srgbClr val="333333"/>
+                </a:solidFill>
+              </a:defRPr>
+            </a:pPr>
+            <a:r>
+              <a:t>"apple" in fruits  # True</a:t>
+            </a:r>
+          </a:p>
+          <a:p>
+            <a:pPr>
+              <a:spcAft>
+                <a:spcPts val="600"/>
+              </a:spcAft>
+              <a:defRPr sz="1600">
+                <a:solidFill>
+                  <a:srgbClr val="333333"/>
+                </a:solidFill>
+              </a:defRPr>
+            </a:pPr>
+            <a:r>
+              <a:t>"grape" not in fruits  # True</a:t>
             </a:r>
           </a:p>
         </p:txBody>
@@ -3777,7 +3961,7 @@
 </p:sld>
 </file>
 
-<file path=ppt/slides/slide12.xml><?xml version="1.0" encoding="utf-8"?>
+<file path=ppt/slides/slide4.xml><?xml version="1.0" encoding="utf-8"?>
 <p:sld xmlns:a="http://schemas.openxmlformats.org/drawingml/2006/main" xmlns:p="http://schemas.openxmlformats.org/presentationml/2006/main" xmlns:r="http://schemas.openxmlformats.org/officeDocument/2006/relationships">
   <p:cSld>
     <p:spTree>
@@ -3881,8 +4065,8 @@
         </p:nvSpPr>
         <p:spPr>
           <a:xfrm>
-            <a:off x="457200" y="365760"/>
-            <a:ext cx="10972800" cy="731520"/>
+            <a:off x="457200" y="320040"/>
+            <a:ext cx="10972800" cy="640080"/>
           </a:xfrm>
           <a:prstGeom prst="rect">
             <a:avLst/>
@@ -3896,71 +4080,28 @@
           <a:lstStyle/>
           <a:p>
             <a:pPr>
-              <a:defRPr sz="4000" b="1">
+              <a:defRPr sz="3600" b="1">
                 <a:solidFill>
                   <a:srgbClr val="003366"/>
                 </a:solidFill>
               </a:defRPr>
             </a:pPr>
             <a:r>
-              <a:t>Iterating Through Lists 🔄</a:t>
-            </a:r>
-          </a:p>
-        </p:txBody>
-      </p:sp>
-      <p:sp>
-        <p:nvSpPr>
-          <p:cNvPr id="5" name="Rectangle 4"/>
-          <p:cNvSpPr/>
+              <a:t>Modifying Lists</a:t>
+            </a:r>
+          </a:p>
+        </p:txBody>
+      </p:sp>
+      <p:sp>
+        <p:nvSpPr>
+          <p:cNvPr id="5" name="TextBox 4"/>
+          <p:cNvSpPr txBox="1"/>
           <p:nvPr/>
         </p:nvSpPr>
         <p:spPr>
           <a:xfrm>
-            <a:off x="457200" y="1005840"/>
-            <a:ext cx="1828800" cy="45720"/>
-          </a:xfrm>
-          <a:prstGeom prst="rect">
-            <a:avLst/>
-          </a:prstGeom>
-          <a:solidFill>
-            <a:srgbClr val="0066CC"/>
-          </a:solidFill>
-          <a:ln>
-            <a:noFill/>
-          </a:ln>
-        </p:spPr>
-        <p:style>
-          <a:lnRef idx="1">
-            <a:schemeClr val="accent1"/>
-          </a:lnRef>
-          <a:fillRef idx="3">
-            <a:schemeClr val="accent1"/>
-          </a:fillRef>
-          <a:effectRef idx="2">
-            <a:schemeClr val="accent1"/>
-          </a:effectRef>
-          <a:fontRef idx="minor">
-            <a:schemeClr val="lt1"/>
-          </a:fontRef>
-        </p:style>
-        <p:txBody>
-          <a:bodyPr rtlCol="0" anchor="ctr"/>
-          <a:lstStyle/>
-          <a:p>
-            <a:pPr algn="ctr"/>
-          </a:p>
-        </p:txBody>
-      </p:sp>
-      <p:sp>
-        <p:nvSpPr>
-          <p:cNvPr id="6" name="TextBox 5"/>
-          <p:cNvSpPr txBox="1"/>
-          <p:nvPr/>
-        </p:nvSpPr>
-        <p:spPr>
-          <a:xfrm>
-            <a:off x="640080" y="1371600"/>
-            <a:ext cx="10789920" cy="4572000"/>
+            <a:off x="640080" y="1188720"/>
+            <a:ext cx="10789920" cy="5303520"/>
           </a:xfrm>
           <a:prstGeom prst="rect">
             <a:avLst/>
@@ -3975,61 +4116,181 @@
           <a:p>
             <a:pPr>
               <a:spcAft>
-                <a:spcPts val="800"/>
-              </a:spcAft>
-              <a:defRPr sz="2000" b="1">
-                <a:solidFill>
-                  <a:srgbClr val="333333"/>
-                </a:solidFill>
-              </a:defRPr>
-            </a:pPr>
-            <a:r>
-              <a:t>Use for loops to process each item</a:t>
-            </a:r>
-          </a:p>
-          <a:p>
-            <a:pPr>
-              <a:spcAft>
-                <a:spcPts val="800"/>
-              </a:spcAft>
-              <a:defRPr sz="2000" b="1">
-                <a:solidFill>
-                  <a:srgbClr val="333333"/>
-                </a:solidFill>
-              </a:defRPr>
-            </a:pPr>
-            <a:r>
-              <a:t>Basic Loop</a:t>
-            </a:r>
-          </a:p>
-          <a:p>
-            <a:pPr>
-              <a:spcAft>
-                <a:spcPts val="800"/>
-              </a:spcAft>
-              <a:defRPr sz="2000" b="1">
-                <a:solidFill>
-                  <a:srgbClr val="333333"/>
-                </a:solidFill>
-              </a:defRPr>
-            </a:pPr>
-            <a:r>
-              <a:t>Loop with Index</a:t>
-            </a:r>
-          </a:p>
-          <a:p>
-            <a:pPr>
-              <a:spcAft>
-                <a:spcPts val="800"/>
-              </a:spcAft>
-              <a:defRPr sz="2000" b="1">
-                <a:solidFill>
-                  <a:srgbClr val="333333"/>
-                </a:solidFill>
-              </a:defRPr>
-            </a:pPr>
-            <a:r>
-              <a:t>Loop with enumerate()</a:t>
+                <a:spcPts val="600"/>
+              </a:spcAft>
+              <a:defRPr b="1" sz="2000">
+                <a:solidFill>
+                  <a:srgbClr val="333333"/>
+                </a:solidFill>
+              </a:defRPr>
+            </a:pPr>
+            <a:r>
+              <a:t>Adding Items:</a:t>
+            </a:r>
+          </a:p>
+          <a:p>
+            <a:pPr>
+              <a:spcAft>
+                <a:spcPts val="600"/>
+              </a:spcAft>
+              <a:defRPr sz="1600">
+                <a:solidFill>
+                  <a:srgbClr val="333333"/>
+                </a:solidFill>
+              </a:defRPr>
+            </a:pPr>
+            <a:r>
+              <a:t>fruits.append("grape")  # Add to end</a:t>
+            </a:r>
+          </a:p>
+          <a:p>
+            <a:pPr>
+              <a:spcAft>
+                <a:spcPts val="600"/>
+              </a:spcAft>
+              <a:defRPr sz="1600">
+                <a:solidFill>
+                  <a:srgbClr val="333333"/>
+                </a:solidFill>
+              </a:defRPr>
+            </a:pPr>
+            <a:r>
+              <a:t>fruits.insert(1, "mango")  # Insert at index</a:t>
+            </a:r>
+          </a:p>
+          <a:p>
+            <a:pPr>
+              <a:spcAft>
+                <a:spcPts val="600"/>
+              </a:spcAft>
+              <a:defRPr sz="1600">
+                <a:solidFill>
+                  <a:srgbClr val="333333"/>
+                </a:solidFill>
+              </a:defRPr>
+            </a:pPr>
+            <a:r>
+              <a:t>fruits.extend(["kiwi", "pear"])  # Add multiple</a:t>
+            </a:r>
+          </a:p>
+          <a:p>
+            <a:pPr>
+              <a:spcAft>
+                <a:spcPts val="600"/>
+              </a:spcAft>
+              <a:defRPr b="1" sz="2000">
+                <a:solidFill>
+                  <a:srgbClr val="333333"/>
+                </a:solidFill>
+              </a:defRPr>
+            </a:pPr>
+            <a:r>
+              <a:t>Removing Items:</a:t>
+            </a:r>
+          </a:p>
+          <a:p>
+            <a:pPr>
+              <a:spcAft>
+                <a:spcPts val="600"/>
+              </a:spcAft>
+              <a:defRPr sz="1600">
+                <a:solidFill>
+                  <a:srgbClr val="333333"/>
+                </a:solidFill>
+              </a:defRPr>
+            </a:pPr>
+            <a:r>
+              <a:t>fruits.remove("banana")  # Remove by value</a:t>
+            </a:r>
+          </a:p>
+          <a:p>
+            <a:pPr>
+              <a:spcAft>
+                <a:spcPts val="600"/>
+              </a:spcAft>
+              <a:defRPr sz="1600">
+                <a:solidFill>
+                  <a:srgbClr val="333333"/>
+                </a:solidFill>
+              </a:defRPr>
+            </a:pPr>
+            <a:r>
+              <a:t>item = fruits.pop()  # Remove and return last</a:t>
+            </a:r>
+          </a:p>
+          <a:p>
+            <a:pPr>
+              <a:spcAft>
+                <a:spcPts val="600"/>
+              </a:spcAft>
+              <a:defRPr sz="1600">
+                <a:solidFill>
+                  <a:srgbClr val="333333"/>
+                </a:solidFill>
+              </a:defRPr>
+            </a:pPr>
+            <a:r>
+              <a:t>item = fruits.pop(0)  # Remove by index</a:t>
+            </a:r>
+          </a:p>
+          <a:p>
+            <a:pPr>
+              <a:spcAft>
+                <a:spcPts val="600"/>
+              </a:spcAft>
+              <a:defRPr sz="1600">
+                <a:solidFill>
+                  <a:srgbClr val="333333"/>
+                </a:solidFill>
+              </a:defRPr>
+            </a:pPr>
+            <a:r>
+              <a:t>del fruits[1]  # Delete by index</a:t>
+            </a:r>
+          </a:p>
+          <a:p>
+            <a:pPr>
+              <a:spcAft>
+                <a:spcPts val="600"/>
+              </a:spcAft>
+              <a:defRPr sz="1600">
+                <a:solidFill>
+                  <a:srgbClr val="333333"/>
+                </a:solidFill>
+              </a:defRPr>
+            </a:pPr>
+            <a:r>
+              <a:t>fruits.clear()  # Remove all</a:t>
+            </a:r>
+          </a:p>
+          <a:p>
+            <a:pPr>
+              <a:spcAft>
+                <a:spcPts val="600"/>
+              </a:spcAft>
+              <a:defRPr b="1" sz="2000">
+                <a:solidFill>
+                  <a:srgbClr val="333333"/>
+                </a:solidFill>
+              </a:defRPr>
+            </a:pPr>
+            <a:r>
+              <a:t>Changing Items:</a:t>
+            </a:r>
+          </a:p>
+          <a:p>
+            <a:pPr>
+              <a:spcAft>
+                <a:spcPts val="600"/>
+              </a:spcAft>
+              <a:defRPr sz="1600">
+                <a:solidFill>
+                  <a:srgbClr val="333333"/>
+                </a:solidFill>
+              </a:defRPr>
+            </a:pPr>
+            <a:r>
+              <a:t>fruits[0] = "pineapple"  # Change by index</a:t>
             </a:r>
           </a:p>
         </p:txBody>
@@ -4042,7 +4303,7 @@
 </p:sld>
 </file>
 
-<file path=ppt/slides/slide13.xml><?xml version="1.0" encoding="utf-8"?>
+<file path=ppt/slides/slide5.xml><?xml version="1.0" encoding="utf-8"?>
 <p:sld xmlns:a="http://schemas.openxmlformats.org/drawingml/2006/main" xmlns:p="http://schemas.openxmlformats.org/presentationml/2006/main" xmlns:r="http://schemas.openxmlformats.org/officeDocument/2006/relationships">
   <p:cSld>
     <p:spTree>
@@ -4146,8 +4407,8 @@
         </p:nvSpPr>
         <p:spPr>
           <a:xfrm>
-            <a:off x="457200" y="365760"/>
-            <a:ext cx="10972800" cy="731520"/>
+            <a:off x="457200" y="320040"/>
+            <a:ext cx="10972800" cy="640080"/>
           </a:xfrm>
           <a:prstGeom prst="rect">
             <a:avLst/>
@@ -4161,71 +4422,28 @@
           <a:lstStyle/>
           <a:p>
             <a:pPr>
-              <a:defRPr sz="4000" b="1">
+              <a:defRPr sz="3600" b="1">
                 <a:solidFill>
                   <a:srgbClr val="003366"/>
                 </a:solidFill>
               </a:defRPr>
             </a:pPr>
             <a:r>
-              <a:t>List Operations 🔧</a:t>
-            </a:r>
-          </a:p>
-        </p:txBody>
-      </p:sp>
-      <p:sp>
-        <p:nvSpPr>
-          <p:cNvPr id="5" name="Rectangle 4"/>
-          <p:cNvSpPr/>
+              <a:t>List Methods</a:t>
+            </a:r>
+          </a:p>
+        </p:txBody>
+      </p:sp>
+      <p:sp>
+        <p:nvSpPr>
+          <p:cNvPr id="5" name="TextBox 4"/>
+          <p:cNvSpPr txBox="1"/>
           <p:nvPr/>
         </p:nvSpPr>
         <p:spPr>
           <a:xfrm>
-            <a:off x="457200" y="1005840"/>
-            <a:ext cx="1828800" cy="45720"/>
-          </a:xfrm>
-          <a:prstGeom prst="rect">
-            <a:avLst/>
-          </a:prstGeom>
-          <a:solidFill>
-            <a:srgbClr val="0066CC"/>
-          </a:solidFill>
-          <a:ln>
-            <a:noFill/>
-          </a:ln>
-        </p:spPr>
-        <p:style>
-          <a:lnRef idx="1">
-            <a:schemeClr val="accent1"/>
-          </a:lnRef>
-          <a:fillRef idx="3">
-            <a:schemeClr val="accent1"/>
-          </a:fillRef>
-          <a:effectRef idx="2">
-            <a:schemeClr val="accent1"/>
-          </a:effectRef>
-          <a:fontRef idx="minor">
-            <a:schemeClr val="lt1"/>
-          </a:fontRef>
-        </p:style>
-        <p:txBody>
-          <a:bodyPr rtlCol="0" anchor="ctr"/>
-          <a:lstStyle/>
-          <a:p>
-            <a:pPr algn="ctr"/>
-          </a:p>
-        </p:txBody>
-      </p:sp>
-      <p:sp>
-        <p:nvSpPr>
-          <p:cNvPr id="6" name="TextBox 5"/>
-          <p:cNvSpPr txBox="1"/>
-          <p:nvPr/>
-        </p:nvSpPr>
-        <p:spPr>
-          <a:xfrm>
-            <a:off x="640080" y="1371600"/>
-            <a:ext cx="10789920" cy="4572000"/>
+            <a:off x="640080" y="1188720"/>
+            <a:ext cx="10789920" cy="5303520"/>
           </a:xfrm>
           <a:prstGeom prst="rect">
             <a:avLst/>
@@ -4240,46 +4458,211 @@
           <a:p>
             <a:pPr>
               <a:spcAft>
-                <a:spcPts val="800"/>
-              </a:spcAft>
-              <a:defRPr sz="2000" b="1">
-                <a:solidFill>
-                  <a:srgbClr val="333333"/>
-                </a:solidFill>
-              </a:defRPr>
-            </a:pPr>
-            <a:r>
-              <a:t>Concatenation (+)</a:t>
-            </a:r>
-          </a:p>
-          <a:p>
-            <a:pPr>
-              <a:spcAft>
-                <a:spcPts val="800"/>
-              </a:spcAft>
-              <a:defRPr sz="2000" b="1">
-                <a:solidFill>
-                  <a:srgbClr val="333333"/>
-                </a:solidFill>
-              </a:defRPr>
-            </a:pPr>
-            <a:r>
-              <a:t>Repetition (*)</a:t>
-            </a:r>
-          </a:p>
-          <a:p>
-            <a:pPr>
-              <a:spcAft>
-                <a:spcPts val="800"/>
-              </a:spcAft>
-              <a:defRPr sz="2000" b="1">
-                <a:solidFill>
-                  <a:srgbClr val="333333"/>
-                </a:solidFill>
-              </a:defRPr>
-            </a:pPr>
-            <a:r>
-              <a:t>Useful Functions</a:t>
+                <a:spcPts val="600"/>
+              </a:spcAft>
+              <a:defRPr b="1" sz="2000">
+                <a:solidFill>
+                  <a:srgbClr val="333333"/>
+                </a:solidFill>
+              </a:defRPr>
+            </a:pPr>
+            <a:r>
+              <a:t>Sorting:</a:t>
+            </a:r>
+          </a:p>
+          <a:p>
+            <a:pPr>
+              <a:spcAft>
+                <a:spcPts val="600"/>
+              </a:spcAft>
+              <a:defRPr sz="1600">
+                <a:solidFill>
+                  <a:srgbClr val="333333"/>
+                </a:solidFill>
+              </a:defRPr>
+            </a:pPr>
+            <a:r>
+              <a:t>numbers.sort()  # Sort in place</a:t>
+            </a:r>
+          </a:p>
+          <a:p>
+            <a:pPr>
+              <a:spcAft>
+                <a:spcPts val="600"/>
+              </a:spcAft>
+              <a:defRPr sz="1600">
+                <a:solidFill>
+                  <a:srgbClr val="333333"/>
+                </a:solidFill>
+              </a:defRPr>
+            </a:pPr>
+            <a:r>
+              <a:t>numbers.sort(reverse=True)  # Descending</a:t>
+            </a:r>
+          </a:p>
+          <a:p>
+            <a:pPr>
+              <a:spcAft>
+                <a:spcPts val="600"/>
+              </a:spcAft>
+              <a:defRPr sz="1600">
+                <a:solidFill>
+                  <a:srgbClr val="333333"/>
+                </a:solidFill>
+              </a:defRPr>
+            </a:pPr>
+            <a:r>
+              <a:t>sorted_nums = sorted(numbers)  # Return sorted copy</a:t>
+            </a:r>
+          </a:p>
+          <a:p>
+            <a:pPr>
+              <a:spcAft>
+                <a:spcPts val="600"/>
+              </a:spcAft>
+              <a:defRPr b="1" sz="2000">
+                <a:solidFill>
+                  <a:srgbClr val="333333"/>
+                </a:solidFill>
+              </a:defRPr>
+            </a:pPr>
+            <a:r>
+              <a:t>Reversing:</a:t>
+            </a:r>
+          </a:p>
+          <a:p>
+            <a:pPr>
+              <a:spcAft>
+                <a:spcPts val="600"/>
+              </a:spcAft>
+              <a:defRPr sz="1600">
+                <a:solidFill>
+                  <a:srgbClr val="333333"/>
+                </a:solidFill>
+              </a:defRPr>
+            </a:pPr>
+            <a:r>
+              <a:t>numbers.reverse()  # Reverse in place</a:t>
+            </a:r>
+          </a:p>
+          <a:p>
+            <a:pPr>
+              <a:spcAft>
+                <a:spcPts val="600"/>
+              </a:spcAft>
+              <a:defRPr b="1" sz="2000">
+                <a:solidFill>
+                  <a:srgbClr val="333333"/>
+                </a:solidFill>
+              </a:defRPr>
+            </a:pPr>
+            <a:r>
+              <a:t>reversed_nums = numbers[::-1]  # Copy reversed</a:t>
+            </a:r>
+          </a:p>
+          <a:p>
+            <a:pPr>
+              <a:spcAft>
+                <a:spcPts val="600"/>
+              </a:spcAft>
+              <a:defRPr b="1" sz="2000">
+                <a:solidFill>
+                  <a:srgbClr val="333333"/>
+                </a:solidFill>
+              </a:defRPr>
+            </a:pPr>
+            <a:r>
+              <a:t>Other Methods:</a:t>
+            </a:r>
+          </a:p>
+          <a:p>
+            <a:pPr>
+              <a:spcAft>
+                <a:spcPts val="600"/>
+              </a:spcAft>
+              <a:defRPr sz="1600">
+                <a:solidFill>
+                  <a:srgbClr val="333333"/>
+                </a:solidFill>
+              </a:defRPr>
+            </a:pPr>
+            <a:r>
+              <a:t>numbers.count(5)  # Count occurrences</a:t>
+            </a:r>
+          </a:p>
+          <a:p>
+            <a:pPr>
+              <a:spcAft>
+                <a:spcPts val="600"/>
+              </a:spcAft>
+              <a:defRPr sz="1600">
+                <a:solidFill>
+                  <a:srgbClr val="333333"/>
+                </a:solidFill>
+              </a:defRPr>
+            </a:pPr>
+            <a:r>
+              <a:t>numbers.index(3)  # Find first index</a:t>
+            </a:r>
+          </a:p>
+          <a:p>
+            <a:pPr>
+              <a:spcAft>
+                <a:spcPts val="600"/>
+              </a:spcAft>
+              <a:defRPr sz="1600">
+                <a:solidFill>
+                  <a:srgbClr val="333333"/>
+                </a:solidFill>
+              </a:defRPr>
+            </a:pPr>
+            <a:r>
+              <a:t>numbers.copy()  # Shallow copy</a:t>
+            </a:r>
+          </a:p>
+          <a:p>
+            <a:pPr>
+              <a:spcAft>
+                <a:spcPts val="600"/>
+              </a:spcAft>
+              <a:defRPr b="1" sz="2000">
+                <a:solidFill>
+                  <a:srgbClr val="333333"/>
+                </a:solidFill>
+              </a:defRPr>
+            </a:pPr>
+            <a:r>
+              <a:t>Concatenation:</a:t>
+            </a:r>
+          </a:p>
+          <a:p>
+            <a:pPr>
+              <a:spcAft>
+                <a:spcPts val="600"/>
+              </a:spcAft>
+              <a:defRPr sz="1600">
+                <a:solidFill>
+                  <a:srgbClr val="333333"/>
+                </a:solidFill>
+              </a:defRPr>
+            </a:pPr>
+            <a:r>
+              <a:t>list1 + list2  # Combine lists</a:t>
+            </a:r>
+          </a:p>
+          <a:p>
+            <a:pPr>
+              <a:spcAft>
+                <a:spcPts val="600"/>
+              </a:spcAft>
+              <a:defRPr sz="1600">
+                <a:solidFill>
+                  <a:srgbClr val="333333"/>
+                </a:solidFill>
+              </a:defRPr>
+            </a:pPr>
+            <a:r>
+              <a:t>[1, 2] * 3  # [1, 2, 1, 2, 1, 2]</a:t>
             </a:r>
           </a:p>
         </p:txBody>
@@ -4292,7 +4675,7 @@
 </p:sld>
 </file>
 
-<file path=ppt/slides/slide14.xml><?xml version="1.0" encoding="utf-8"?>
+<file path=ppt/slides/slide6.xml><?xml version="1.0" encoding="utf-8"?>
 <p:sld xmlns:a="http://schemas.openxmlformats.org/drawingml/2006/main" xmlns:p="http://schemas.openxmlformats.org/presentationml/2006/main" xmlns:r="http://schemas.openxmlformats.org/officeDocument/2006/relationships">
   <p:cSld>
     <p:spTree>
@@ -4396,8 +4779,8 @@
         </p:nvSpPr>
         <p:spPr>
           <a:xfrm>
-            <a:off x="457200" y="365760"/>
-            <a:ext cx="10972800" cy="731520"/>
+            <a:off x="457200" y="320040"/>
+            <a:ext cx="10972800" cy="640080"/>
           </a:xfrm>
           <a:prstGeom prst="rect">
             <a:avLst/>
@@ -4411,71 +4794,28 @@
           <a:lstStyle/>
           <a:p>
             <a:pPr>
-              <a:defRPr sz="4000" b="1">
+              <a:defRPr sz="3600" b="1">
                 <a:solidFill>
                   <a:srgbClr val="003366"/>
                 </a:solidFill>
               </a:defRPr>
             </a:pPr>
             <a:r>
-              <a:t>List Comprehensions</a:t>
-            </a:r>
-          </a:p>
-        </p:txBody>
-      </p:sp>
-      <p:sp>
-        <p:nvSpPr>
-          <p:cNvPr id="5" name="Rectangle 4"/>
-          <p:cNvSpPr/>
+              <a:t>Iterating Through Lists</a:t>
+            </a:r>
+          </a:p>
+        </p:txBody>
+      </p:sp>
+      <p:sp>
+        <p:nvSpPr>
+          <p:cNvPr id="5" name="TextBox 4"/>
+          <p:cNvSpPr txBox="1"/>
           <p:nvPr/>
         </p:nvSpPr>
         <p:spPr>
           <a:xfrm>
-            <a:off x="457200" y="1005840"/>
-            <a:ext cx="1828800" cy="45720"/>
-          </a:xfrm>
-          <a:prstGeom prst="rect">
-            <a:avLst/>
-          </a:prstGeom>
-          <a:solidFill>
-            <a:srgbClr val="0066CC"/>
-          </a:solidFill>
-          <a:ln>
-            <a:noFill/>
-          </a:ln>
-        </p:spPr>
-        <p:style>
-          <a:lnRef idx="1">
-            <a:schemeClr val="accent1"/>
-          </a:lnRef>
-          <a:fillRef idx="3">
-            <a:schemeClr val="accent1"/>
-          </a:fillRef>
-          <a:effectRef idx="2">
-            <a:schemeClr val="accent1"/>
-          </a:effectRef>
-          <a:fontRef idx="minor">
-            <a:schemeClr val="lt1"/>
-          </a:fontRef>
-        </p:style>
-        <p:txBody>
-          <a:bodyPr rtlCol="0" anchor="ctr"/>
-          <a:lstStyle/>
-          <a:p>
-            <a:pPr algn="ctr"/>
-          </a:p>
-        </p:txBody>
-      </p:sp>
-      <p:sp>
-        <p:nvSpPr>
-          <p:cNvPr id="6" name="TextBox 5"/>
-          <p:cNvSpPr txBox="1"/>
-          <p:nvPr/>
-        </p:nvSpPr>
-        <p:spPr>
-          <a:xfrm>
-            <a:off x="640080" y="1371600"/>
-            <a:ext cx="10789920" cy="4572000"/>
+            <a:off x="640080" y="1188720"/>
+            <a:ext cx="10789920" cy="5303520"/>
           </a:xfrm>
           <a:prstGeom prst="rect">
             <a:avLst/>
@@ -4490,76 +4830,241 @@
           <a:p>
             <a:pPr>
               <a:spcAft>
-                <a:spcPts val="800"/>
-              </a:spcAft>
-              <a:defRPr sz="2000" b="1">
-                <a:solidFill>
-                  <a:srgbClr val="333333"/>
-                </a:solidFill>
-              </a:defRPr>
-            </a:pPr>
-            <a:r>
-              <a:t>Create lists in a single, elegant line</a:t>
-            </a:r>
-          </a:p>
-          <a:p>
-            <a:pPr>
-              <a:spcAft>
-                <a:spcPts val="800"/>
-              </a:spcAft>
-              <a:defRPr sz="2000" b="1">
-                <a:solidFill>
-                  <a:srgbClr val="333333"/>
-                </a:solidFill>
-              </a:defRPr>
-            </a:pPr>
-            <a:r>
-              <a:t>Traditional Way</a:t>
-            </a:r>
-          </a:p>
-          <a:p>
-            <a:pPr>
-              <a:spcAft>
-                <a:spcPts val="800"/>
-              </a:spcAft>
-              <a:defRPr sz="2000" b="1">
-                <a:solidFill>
-                  <a:srgbClr val="333333"/>
-                </a:solidFill>
-              </a:defRPr>
-            </a:pPr>
-            <a:r>
-              <a:t>List Comprehension Way</a:t>
-            </a:r>
-          </a:p>
-          <a:p>
-            <a:pPr>
-              <a:spcAft>
-                <a:spcPts val="800"/>
-              </a:spcAft>
-              <a:defRPr sz="2000" b="1">
-                <a:solidFill>
-                  <a:srgbClr val="333333"/>
-                </a:solidFill>
-              </a:defRPr>
-            </a:pPr>
-            <a:r>
-              <a:t>With Condition</a:t>
-            </a:r>
-          </a:p>
-          <a:p>
-            <a:pPr>
-              <a:spcAft>
-                <a:spcPts val="800"/>
-              </a:spcAft>
-              <a:defRPr sz="2000" b="1">
-                <a:solidFill>
-                  <a:srgbClr val="333333"/>
-                </a:solidFill>
-              </a:defRPr>
-            </a:pPr>
-            <a:r>
-              <a:t>💡 Benefits:More concise, faster, and Pythonic!</a:t>
+                <a:spcPts val="600"/>
+              </a:spcAft>
+              <a:defRPr b="1" sz="2000">
+                <a:solidFill>
+                  <a:srgbClr val="333333"/>
+                </a:solidFill>
+              </a:defRPr>
+            </a:pPr>
+            <a:r>
+              <a:t>Basic Iteration:</a:t>
+            </a:r>
+          </a:p>
+          <a:p>
+            <a:pPr>
+              <a:spcAft>
+                <a:spcPts val="600"/>
+              </a:spcAft>
+              <a:defRPr b="1" sz="2000">
+                <a:solidFill>
+                  <a:srgbClr val="333333"/>
+                </a:solidFill>
+              </a:defRPr>
+            </a:pPr>
+            <a:r>
+              <a:t>for fruit in fruits:</a:t>
+            </a:r>
+          </a:p>
+          <a:p>
+            <a:pPr>
+              <a:spcAft>
+                <a:spcPts val="600"/>
+              </a:spcAft>
+              <a:defRPr sz="1600">
+                <a:solidFill>
+                  <a:srgbClr val="333333"/>
+                </a:solidFill>
+              </a:defRPr>
+            </a:pPr>
+            <a:r>
+              <a:t>    print(fruit)</a:t>
+            </a:r>
+          </a:p>
+          <a:p>
+            <a:pPr>
+              <a:spcAft>
+                <a:spcPts val="600"/>
+              </a:spcAft>
+              <a:defRPr b="1" sz="2000">
+                <a:solidFill>
+                  <a:srgbClr val="333333"/>
+                </a:solidFill>
+              </a:defRPr>
+            </a:pPr>
+            <a:r>
+              <a:t>With Index (enumerate):</a:t>
+            </a:r>
+          </a:p>
+          <a:p>
+            <a:pPr>
+              <a:spcAft>
+                <a:spcPts val="600"/>
+              </a:spcAft>
+              <a:defRPr b="1" sz="2000">
+                <a:solidFill>
+                  <a:srgbClr val="333333"/>
+                </a:solidFill>
+              </a:defRPr>
+            </a:pPr>
+            <a:r>
+              <a:t>for i, fruit in enumerate(fruits):</a:t>
+            </a:r>
+          </a:p>
+          <a:p>
+            <a:pPr>
+              <a:spcAft>
+                <a:spcPts val="600"/>
+              </a:spcAft>
+              <a:defRPr sz="1600">
+                <a:solidFill>
+                  <a:srgbClr val="333333"/>
+                </a:solidFill>
+              </a:defRPr>
+            </a:pPr>
+            <a:r>
+              <a:t>    print(f"{i}: {fruit}")</a:t>
+            </a:r>
+          </a:p>
+          <a:p>
+            <a:pPr>
+              <a:spcAft>
+                <a:spcPts val="600"/>
+              </a:spcAft>
+              <a:defRPr b="1" sz="2000">
+                <a:solidFill>
+                  <a:srgbClr val="333333"/>
+                </a:solidFill>
+              </a:defRPr>
+            </a:pPr>
+            <a:r>
+              <a:t>With Index (range):</a:t>
+            </a:r>
+          </a:p>
+          <a:p>
+            <a:pPr>
+              <a:spcAft>
+                <a:spcPts val="600"/>
+              </a:spcAft>
+              <a:defRPr b="1" sz="2000">
+                <a:solidFill>
+                  <a:srgbClr val="333333"/>
+                </a:solidFill>
+              </a:defRPr>
+            </a:pPr>
+            <a:r>
+              <a:t>for i in range(len(fruits)):</a:t>
+            </a:r>
+          </a:p>
+          <a:p>
+            <a:pPr>
+              <a:spcAft>
+                <a:spcPts val="600"/>
+              </a:spcAft>
+              <a:defRPr sz="1600">
+                <a:solidFill>
+                  <a:srgbClr val="333333"/>
+                </a:solidFill>
+              </a:defRPr>
+            </a:pPr>
+            <a:r>
+              <a:t>    print(f"{i}: {fruits[i]}")</a:t>
+            </a:r>
+          </a:p>
+          <a:p>
+            <a:pPr>
+              <a:spcAft>
+                <a:spcPts val="600"/>
+              </a:spcAft>
+              <a:defRPr b="1" sz="2000">
+                <a:solidFill>
+                  <a:srgbClr val="333333"/>
+                </a:solidFill>
+              </a:defRPr>
+            </a:pPr>
+            <a:r>
+              <a:t>List Comprehensions:</a:t>
+            </a:r>
+          </a:p>
+          <a:p>
+            <a:pPr>
+              <a:spcAft>
+                <a:spcPts val="600"/>
+              </a:spcAft>
+              <a:defRPr sz="1600">
+                <a:solidFill>
+                  <a:srgbClr val="333333"/>
+                </a:solidFill>
+              </a:defRPr>
+            </a:pPr>
+            <a:r>
+              <a:t>squares = [x**2 for x in range(10)]</a:t>
+            </a:r>
+          </a:p>
+          <a:p>
+            <a:pPr>
+              <a:spcAft>
+                <a:spcPts val="600"/>
+              </a:spcAft>
+              <a:defRPr sz="1600">
+                <a:solidFill>
+                  <a:srgbClr val="333333"/>
+                </a:solidFill>
+              </a:defRPr>
+            </a:pPr>
+            <a:r>
+              <a:t>evens = [x for x in numbers if x % 2 == 0]</a:t>
+            </a:r>
+          </a:p>
+          <a:p>
+            <a:pPr>
+              <a:spcAft>
+                <a:spcPts val="600"/>
+              </a:spcAft>
+              <a:defRPr b="1" sz="2000">
+                <a:solidFill>
+                  <a:srgbClr val="333333"/>
+                </a:solidFill>
+              </a:defRPr>
+            </a:pPr>
+            <a:r>
+              <a:t>Processing:</a:t>
+            </a:r>
+          </a:p>
+          <a:p>
+            <a:pPr>
+              <a:spcAft>
+                <a:spcPts val="600"/>
+              </a:spcAft>
+              <a:defRPr sz="1600">
+                <a:solidFill>
+                  <a:srgbClr val="333333"/>
+                </a:solidFill>
+              </a:defRPr>
+            </a:pPr>
+            <a:r>
+              <a:t>total = sum(numbers)</a:t>
+            </a:r>
+          </a:p>
+          <a:p>
+            <a:pPr>
+              <a:spcAft>
+                <a:spcPts val="600"/>
+              </a:spcAft>
+              <a:defRPr sz="1600">
+                <a:solidFill>
+                  <a:srgbClr val="333333"/>
+                </a:solidFill>
+              </a:defRPr>
+            </a:pPr>
+            <a:r>
+              <a:t>maximum = max(numbers)</a:t>
+            </a:r>
+          </a:p>
+          <a:p>
+            <a:pPr>
+              <a:spcAft>
+                <a:spcPts val="600"/>
+              </a:spcAft>
+              <a:defRPr sz="1600">
+                <a:solidFill>
+                  <a:srgbClr val="333333"/>
+                </a:solidFill>
+              </a:defRPr>
+            </a:pPr>
+            <a:r>
+              <a:t>minimum = min(numbers)</a:t>
             </a:r>
           </a:p>
         </p:txBody>
@@ -4572,7 +5077,7 @@
 </p:sld>
 </file>
 
-<file path=ppt/slides/slide15.xml><?xml version="1.0" encoding="utf-8"?>
+<file path=ppt/slides/slide7.xml><?xml version="1.0" encoding="utf-8"?>
 <p:sld xmlns:a="http://schemas.openxmlformats.org/drawingml/2006/main" xmlns:p="http://schemas.openxmlformats.org/presentationml/2006/main" xmlns:r="http://schemas.openxmlformats.org/officeDocument/2006/relationships">
   <p:cSld>
     <p:spTree>
@@ -4676,8 +5181,8 @@
         </p:nvSpPr>
         <p:spPr>
           <a:xfrm>
-            <a:off x="457200" y="365760"/>
-            <a:ext cx="10972800" cy="731520"/>
+            <a:off x="457200" y="320040"/>
+            <a:ext cx="10972800" cy="640080"/>
           </a:xfrm>
           <a:prstGeom prst="rect">
             <a:avLst/>
@@ -4691,58 +5196,323 @@
           <a:lstStyle/>
           <a:p>
             <a:pPr>
-              <a:defRPr sz="4000" b="1">
+              <a:defRPr sz="3600" b="1">
                 <a:solidFill>
                   <a:srgbClr val="003366"/>
                 </a:solidFill>
               </a:defRPr>
             </a:pPr>
             <a:r>
-              <a:t>Real-World: Grade Manager 📚</a:t>
-            </a:r>
-          </a:p>
-        </p:txBody>
-      </p:sp>
-      <p:sp>
-        <p:nvSpPr>
-          <p:cNvPr id="5" name="Rectangle 4"/>
-          <p:cNvSpPr/>
+              <a:t>Nested Lists</a:t>
+            </a:r>
+          </a:p>
+        </p:txBody>
+      </p:sp>
+      <p:sp>
+        <p:nvSpPr>
+          <p:cNvPr id="5" name="TextBox 4"/>
+          <p:cNvSpPr txBox="1"/>
           <p:nvPr/>
         </p:nvSpPr>
         <p:spPr>
           <a:xfrm>
-            <a:off x="457200" y="1005840"/>
-            <a:ext cx="1828800" cy="45720"/>
+            <a:off x="640080" y="1188720"/>
+            <a:ext cx="10789920" cy="5303520"/>
           </a:xfrm>
           <a:prstGeom prst="rect">
             <a:avLst/>
           </a:prstGeom>
-          <a:solidFill>
-            <a:srgbClr val="0066CC"/>
-          </a:solidFill>
-          <a:ln>
-            <a:noFill/>
-          </a:ln>
+          <a:noFill/>
         </p:spPr>
-        <p:style>
-          <a:lnRef idx="1">
-            <a:schemeClr val="accent1"/>
-          </a:lnRef>
-          <a:fillRef idx="3">
-            <a:schemeClr val="accent1"/>
-          </a:fillRef>
-          <a:effectRef idx="2">
-            <a:schemeClr val="accent1"/>
-          </a:effectRef>
-          <a:fontRef idx="minor">
-            <a:schemeClr val="lt1"/>
-          </a:fontRef>
-        </p:style>
-        <p:txBody>
-          <a:bodyPr rtlCol="0" anchor="ctr"/>
-          <a:lstStyle/>
-          <a:p>
-            <a:pPr algn="ctr"/>
+        <p:txBody>
+          <a:bodyPr wrap="square">
+            <a:spAutoFit/>
+          </a:bodyPr>
+          <a:lstStyle/>
+          <a:p>
+            <a:pPr>
+              <a:spcAft>
+                <a:spcPts val="600"/>
+              </a:spcAft>
+              <a:defRPr b="1" sz="2000">
+                <a:solidFill>
+                  <a:srgbClr val="333333"/>
+                </a:solidFill>
+              </a:defRPr>
+            </a:pPr>
+            <a:r>
+              <a:t>Lists Within Lists:</a:t>
+            </a:r>
+          </a:p>
+          <a:p>
+            <a:pPr>
+              <a:spcAft>
+                <a:spcPts val="600"/>
+              </a:spcAft>
+              <a:defRPr sz="1600">
+                <a:solidFill>
+                  <a:srgbClr val="333333"/>
+                </a:solidFill>
+              </a:defRPr>
+            </a:pPr>
+            <a:r>
+              <a:t>matrix = [</a:t>
+            </a:r>
+          </a:p>
+          <a:p>
+            <a:pPr>
+              <a:spcAft>
+                <a:spcPts val="600"/>
+              </a:spcAft>
+              <a:defRPr sz="1600">
+                <a:solidFill>
+                  <a:srgbClr val="333333"/>
+                </a:solidFill>
+              </a:defRPr>
+            </a:pPr>
+            <a:r>
+              <a:t>    [1, 2, 3],</a:t>
+            </a:r>
+          </a:p>
+          <a:p>
+            <a:pPr>
+              <a:spcAft>
+                <a:spcPts val="600"/>
+              </a:spcAft>
+              <a:defRPr sz="1600">
+                <a:solidFill>
+                  <a:srgbClr val="333333"/>
+                </a:solidFill>
+              </a:defRPr>
+            </a:pPr>
+            <a:r>
+              <a:t>    [4, 5, 6],</a:t>
+            </a:r>
+          </a:p>
+          <a:p>
+            <a:pPr>
+              <a:spcAft>
+                <a:spcPts val="600"/>
+              </a:spcAft>
+              <a:defRPr sz="1600">
+                <a:solidFill>
+                  <a:srgbClr val="333333"/>
+                </a:solidFill>
+              </a:defRPr>
+            </a:pPr>
+            <a:r>
+              <a:t>    [7, 8, 9]</a:t>
+            </a:r>
+          </a:p>
+          <a:p>
+            <a:pPr>
+              <a:spcAft>
+                <a:spcPts val="600"/>
+              </a:spcAft>
+              <a:defRPr sz="1600">
+                <a:solidFill>
+                  <a:srgbClr val="333333"/>
+                </a:solidFill>
+              </a:defRPr>
+            </a:pPr>
+            <a:r>
+              <a:t>]</a:t>
+            </a:r>
+          </a:p>
+          <a:p>
+            <a:pPr>
+              <a:spcAft>
+                <a:spcPts val="600"/>
+              </a:spcAft>
+              <a:defRPr b="1" sz="2000">
+                <a:solidFill>
+                  <a:srgbClr val="333333"/>
+                </a:solidFill>
+              </a:defRPr>
+            </a:pPr>
+            <a:r>
+              <a:t>Accessing:</a:t>
+            </a:r>
+          </a:p>
+          <a:p>
+            <a:pPr>
+              <a:spcAft>
+                <a:spcPts val="600"/>
+              </a:spcAft>
+              <a:defRPr sz="1600">
+                <a:solidFill>
+                  <a:srgbClr val="333333"/>
+                </a:solidFill>
+              </a:defRPr>
+            </a:pPr>
+            <a:r>
+              <a:t>matrix[0]  # [1, 2, 3]</a:t>
+            </a:r>
+          </a:p>
+          <a:p>
+            <a:pPr>
+              <a:spcAft>
+                <a:spcPts val="600"/>
+              </a:spcAft>
+              <a:defRPr sz="1600">
+                <a:solidFill>
+                  <a:srgbClr val="333333"/>
+                </a:solidFill>
+              </a:defRPr>
+            </a:pPr>
+            <a:r>
+              <a:t>matrix[0][0]  # 1</a:t>
+            </a:r>
+          </a:p>
+          <a:p>
+            <a:pPr>
+              <a:spcAft>
+                <a:spcPts val="600"/>
+              </a:spcAft>
+              <a:defRPr sz="1600">
+                <a:solidFill>
+                  <a:srgbClr val="333333"/>
+                </a:solidFill>
+              </a:defRPr>
+            </a:pPr>
+            <a:r>
+              <a:t>matrix[1][2]  # 6</a:t>
+            </a:r>
+          </a:p>
+          <a:p>
+            <a:pPr>
+              <a:spcAft>
+                <a:spcPts val="600"/>
+              </a:spcAft>
+              <a:defRPr b="1" sz="2000">
+                <a:solidFill>
+                  <a:srgbClr val="333333"/>
+                </a:solidFill>
+              </a:defRPr>
+            </a:pPr>
+            <a:r>
+              <a:t>Iterating:</a:t>
+            </a:r>
+          </a:p>
+          <a:p>
+            <a:pPr>
+              <a:spcAft>
+                <a:spcPts val="600"/>
+              </a:spcAft>
+              <a:defRPr b="1" sz="2000">
+                <a:solidFill>
+                  <a:srgbClr val="333333"/>
+                </a:solidFill>
+              </a:defRPr>
+            </a:pPr>
+            <a:r>
+              <a:t>for row in matrix:</a:t>
+            </a:r>
+          </a:p>
+          <a:p>
+            <a:pPr>
+              <a:spcAft>
+                <a:spcPts val="600"/>
+              </a:spcAft>
+              <a:defRPr sz="1600">
+                <a:solidFill>
+                  <a:srgbClr val="333333"/>
+                </a:solidFill>
+              </a:defRPr>
+            </a:pPr>
+            <a:r>
+              <a:t>    for item in row:</a:t>
+            </a:r>
+          </a:p>
+          <a:p>
+            <a:pPr>
+              <a:spcAft>
+                <a:spcPts val="600"/>
+              </a:spcAft>
+              <a:defRPr sz="1600">
+                <a:solidFill>
+                  <a:srgbClr val="333333"/>
+                </a:solidFill>
+              </a:defRPr>
+            </a:pPr>
+            <a:r>
+              <a:t>        print(item)</a:t>
+            </a:r>
+          </a:p>
+          <a:p>
+            <a:pPr>
+              <a:spcAft>
+                <a:spcPts val="600"/>
+              </a:spcAft>
+              <a:defRPr b="1" sz="2000">
+                <a:solidFill>
+                  <a:srgbClr val="333333"/>
+                </a:solidFill>
+              </a:defRPr>
+            </a:pPr>
+            <a:r>
+              <a:t>Use Cases:</a:t>
+            </a:r>
+          </a:p>
+          <a:p>
+            <a:pPr lvl="1">
+              <a:spcAft>
+                <a:spcPts val="400"/>
+              </a:spcAft>
+              <a:defRPr sz="1600">
+                <a:solidFill>
+                  <a:srgbClr val="333333"/>
+                </a:solidFill>
+              </a:defRPr>
+            </a:pPr>
+            <a:r>
+              <a:t>• 2D grids and boards</a:t>
+            </a:r>
+          </a:p>
+          <a:p>
+            <a:pPr lvl="1">
+              <a:spcAft>
+                <a:spcPts val="400"/>
+              </a:spcAft>
+              <a:defRPr sz="1600">
+                <a:solidFill>
+                  <a:srgbClr val="333333"/>
+                </a:solidFill>
+              </a:defRPr>
+            </a:pPr>
+            <a:r>
+              <a:t>• Tables of data</a:t>
+            </a:r>
+          </a:p>
+          <a:p>
+            <a:pPr lvl="1">
+              <a:spcAft>
+                <a:spcPts val="400"/>
+              </a:spcAft>
+              <a:defRPr sz="1600">
+                <a:solidFill>
+                  <a:srgbClr val="333333"/>
+                </a:solidFill>
+              </a:defRPr>
+            </a:pPr>
+            <a:r>
+              <a:t>• Coordinates</a:t>
+            </a:r>
+          </a:p>
+          <a:p>
+            <a:pPr lvl="1">
+              <a:spcAft>
+                <a:spcPts val="400"/>
+              </a:spcAft>
+              <a:defRPr sz="1600">
+                <a:solidFill>
+                  <a:srgbClr val="333333"/>
+                </a:solidFill>
+              </a:defRPr>
+            </a:pPr>
+            <a:r>
+              <a:t>• Multi-dimensional data</a:t>
+            </a:r>
           </a:p>
         </p:txBody>
       </p:sp>
@@ -4754,7 +5524,7 @@
 </p:sld>
 </file>
 
-<file path=ppt/slides/slide16.xml><?xml version="1.0" encoding="utf-8"?>
+<file path=ppt/slides/slide8.xml><?xml version="1.0" encoding="utf-8"?>
 <p:sld xmlns:a="http://schemas.openxmlformats.org/drawingml/2006/main" xmlns:p="http://schemas.openxmlformats.org/presentationml/2006/main" xmlns:r="http://schemas.openxmlformats.org/officeDocument/2006/relationships">
   <p:cSld>
     <p:spTree>
@@ -4858,8 +5628,8 @@
         </p:nvSpPr>
         <p:spPr>
           <a:xfrm>
-            <a:off x="457200" y="365760"/>
-            <a:ext cx="10972800" cy="731520"/>
+            <a:off x="457200" y="320040"/>
+            <a:ext cx="10972800" cy="640080"/>
           </a:xfrm>
           <a:prstGeom prst="rect">
             <a:avLst/>
@@ -4873,58 +5643,308 @@
           <a:lstStyle/>
           <a:p>
             <a:pPr>
-              <a:defRPr sz="4000" b="1">
+              <a:defRPr sz="3600" b="1">
                 <a:solidFill>
                   <a:srgbClr val="003366"/>
                 </a:solidFill>
               </a:defRPr>
             </a:pPr>
             <a:r>
-              <a:t>Real-World: Shopping Cart</a:t>
-            </a:r>
-          </a:p>
-        </p:txBody>
-      </p:sp>
-      <p:sp>
-        <p:nvSpPr>
-          <p:cNvPr id="5" name="Rectangle 4"/>
-          <p:cNvSpPr/>
+              <a:t>Common List Patterns</a:t>
+            </a:r>
+          </a:p>
+        </p:txBody>
+      </p:sp>
+      <p:sp>
+        <p:nvSpPr>
+          <p:cNvPr id="5" name="TextBox 4"/>
+          <p:cNvSpPr txBox="1"/>
           <p:nvPr/>
         </p:nvSpPr>
         <p:spPr>
           <a:xfrm>
-            <a:off x="457200" y="1005840"/>
-            <a:ext cx="1828800" cy="45720"/>
+            <a:off x="640080" y="1188720"/>
+            <a:ext cx="10789920" cy="5303520"/>
           </a:xfrm>
           <a:prstGeom prst="rect">
             <a:avLst/>
           </a:prstGeom>
-          <a:solidFill>
-            <a:srgbClr val="0066CC"/>
-          </a:solidFill>
-          <a:ln>
-            <a:noFill/>
-          </a:ln>
+          <a:noFill/>
         </p:spPr>
-        <p:style>
-          <a:lnRef idx="1">
-            <a:schemeClr val="accent1"/>
-          </a:lnRef>
-          <a:fillRef idx="3">
-            <a:schemeClr val="accent1"/>
-          </a:fillRef>
-          <a:effectRef idx="2">
-            <a:schemeClr val="accent1"/>
-          </a:effectRef>
-          <a:fontRef idx="minor">
-            <a:schemeClr val="lt1"/>
-          </a:fontRef>
-        </p:style>
-        <p:txBody>
-          <a:bodyPr rtlCol="0" anchor="ctr"/>
-          <a:lstStyle/>
-          <a:p>
-            <a:pPr algn="ctr"/>
+        <p:txBody>
+          <a:bodyPr wrap="square">
+            <a:spAutoFit/>
+          </a:bodyPr>
+          <a:lstStyle/>
+          <a:p>
+            <a:pPr>
+              <a:spcAft>
+                <a:spcPts val="600"/>
+              </a:spcAft>
+              <a:defRPr b="1" sz="2000">
+                <a:solidFill>
+                  <a:srgbClr val="333333"/>
+                </a:solidFill>
+              </a:defRPr>
+            </a:pPr>
+            <a:r>
+              <a:t>Building Lists:</a:t>
+            </a:r>
+          </a:p>
+          <a:p>
+            <a:pPr>
+              <a:spcAft>
+                <a:spcPts val="600"/>
+              </a:spcAft>
+              <a:defRPr sz="1600">
+                <a:solidFill>
+                  <a:srgbClr val="333333"/>
+                </a:solidFill>
+              </a:defRPr>
+            </a:pPr>
+            <a:r>
+              <a:t>numbers = []</a:t>
+            </a:r>
+          </a:p>
+          <a:p>
+            <a:pPr>
+              <a:spcAft>
+                <a:spcPts val="600"/>
+              </a:spcAft>
+              <a:defRPr b="1" sz="2000">
+                <a:solidFill>
+                  <a:srgbClr val="333333"/>
+                </a:solidFill>
+              </a:defRPr>
+            </a:pPr>
+            <a:r>
+              <a:t>for i in range(10):</a:t>
+            </a:r>
+          </a:p>
+          <a:p>
+            <a:pPr>
+              <a:spcAft>
+                <a:spcPts val="600"/>
+              </a:spcAft>
+              <a:defRPr sz="1600">
+                <a:solidFill>
+                  <a:srgbClr val="333333"/>
+                </a:solidFill>
+              </a:defRPr>
+            </a:pPr>
+            <a:r>
+              <a:t>    numbers.append(i * 2)</a:t>
+            </a:r>
+          </a:p>
+          <a:p>
+            <a:pPr>
+              <a:spcAft>
+                <a:spcPts val="600"/>
+              </a:spcAft>
+              <a:defRPr b="1" sz="2000">
+                <a:solidFill>
+                  <a:srgbClr val="333333"/>
+                </a:solidFill>
+              </a:defRPr>
+            </a:pPr>
+            <a:r>
+              <a:t>Filtering:</a:t>
+            </a:r>
+          </a:p>
+          <a:p>
+            <a:pPr>
+              <a:spcAft>
+                <a:spcPts val="600"/>
+              </a:spcAft>
+              <a:defRPr sz="1600">
+                <a:solidFill>
+                  <a:srgbClr val="333333"/>
+                </a:solidFill>
+              </a:defRPr>
+            </a:pPr>
+            <a:r>
+              <a:t>evens = []</a:t>
+            </a:r>
+          </a:p>
+          <a:p>
+            <a:pPr>
+              <a:spcAft>
+                <a:spcPts val="600"/>
+              </a:spcAft>
+              <a:defRPr b="1" sz="2000">
+                <a:solidFill>
+                  <a:srgbClr val="333333"/>
+                </a:solidFill>
+              </a:defRPr>
+            </a:pPr>
+            <a:r>
+              <a:t>for num in numbers:</a:t>
+            </a:r>
+          </a:p>
+          <a:p>
+            <a:pPr>
+              <a:spcAft>
+                <a:spcPts val="600"/>
+              </a:spcAft>
+              <a:defRPr sz="1600">
+                <a:solidFill>
+                  <a:srgbClr val="333333"/>
+                </a:solidFill>
+              </a:defRPr>
+            </a:pPr>
+            <a:r>
+              <a:t>    if num % 2 == 0:</a:t>
+            </a:r>
+          </a:p>
+          <a:p>
+            <a:pPr>
+              <a:spcAft>
+                <a:spcPts val="600"/>
+              </a:spcAft>
+              <a:defRPr sz="1600">
+                <a:solidFill>
+                  <a:srgbClr val="333333"/>
+                </a:solidFill>
+              </a:defRPr>
+            </a:pPr>
+            <a:r>
+              <a:t>        evens.append(num)</a:t>
+            </a:r>
+          </a:p>
+          <a:p>
+            <a:pPr>
+              <a:spcAft>
+                <a:spcPts val="600"/>
+              </a:spcAft>
+              <a:defRPr b="1" sz="2000">
+                <a:solidFill>
+                  <a:srgbClr val="333333"/>
+                </a:solidFill>
+              </a:defRPr>
+            </a:pPr>
+            <a:r>
+              <a:t>Finding Maximum:</a:t>
+            </a:r>
+          </a:p>
+          <a:p>
+            <a:pPr>
+              <a:spcAft>
+                <a:spcPts val="600"/>
+              </a:spcAft>
+              <a:defRPr sz="1600">
+                <a:solidFill>
+                  <a:srgbClr val="333333"/>
+                </a:solidFill>
+              </a:defRPr>
+            </a:pPr>
+            <a:r>
+              <a:t>max_val = numbers[0]</a:t>
+            </a:r>
+          </a:p>
+          <a:p>
+            <a:pPr>
+              <a:spcAft>
+                <a:spcPts val="600"/>
+              </a:spcAft>
+              <a:defRPr b="1" sz="2000">
+                <a:solidFill>
+                  <a:srgbClr val="333333"/>
+                </a:solidFill>
+              </a:defRPr>
+            </a:pPr>
+            <a:r>
+              <a:t>for num in numbers:</a:t>
+            </a:r>
+          </a:p>
+          <a:p>
+            <a:pPr>
+              <a:spcAft>
+                <a:spcPts val="600"/>
+              </a:spcAft>
+              <a:defRPr sz="1600">
+                <a:solidFill>
+                  <a:srgbClr val="333333"/>
+                </a:solidFill>
+              </a:defRPr>
+            </a:pPr>
+            <a:r>
+              <a:t>    if num &gt; max_val:</a:t>
+            </a:r>
+          </a:p>
+          <a:p>
+            <a:pPr>
+              <a:spcAft>
+                <a:spcPts val="600"/>
+              </a:spcAft>
+              <a:defRPr sz="1600">
+                <a:solidFill>
+                  <a:srgbClr val="333333"/>
+                </a:solidFill>
+              </a:defRPr>
+            </a:pPr>
+            <a:r>
+              <a:t>        max_val = num</a:t>
+            </a:r>
+          </a:p>
+          <a:p>
+            <a:pPr>
+              <a:spcAft>
+                <a:spcPts val="600"/>
+              </a:spcAft>
+              <a:defRPr b="1" sz="2000">
+                <a:solidFill>
+                  <a:srgbClr val="333333"/>
+                </a:solidFill>
+              </a:defRPr>
+            </a:pPr>
+            <a:r>
+              <a:t>Copying Lists:</a:t>
+            </a:r>
+          </a:p>
+          <a:p>
+            <a:pPr>
+              <a:spcAft>
+                <a:spcPts val="600"/>
+              </a:spcAft>
+              <a:defRPr sz="1600">
+                <a:solidFill>
+                  <a:srgbClr val="333333"/>
+                </a:solidFill>
+              </a:defRPr>
+            </a:pPr>
+            <a:r>
+              <a:t>copy = original.copy()</a:t>
+            </a:r>
+          </a:p>
+          <a:p>
+            <a:pPr>
+              <a:spcAft>
+                <a:spcPts val="600"/>
+              </a:spcAft>
+              <a:defRPr b="1" sz="2000">
+                <a:solidFill>
+                  <a:srgbClr val="333333"/>
+                </a:solidFill>
+              </a:defRPr>
+            </a:pPr>
+            <a:r>
+              <a:t>copy = original[:]</a:t>
+            </a:r>
+          </a:p>
+          <a:p>
+            <a:pPr>
+              <a:spcAft>
+                <a:spcPts val="600"/>
+              </a:spcAft>
+              <a:defRPr sz="1600">
+                <a:solidFill>
+                  <a:srgbClr val="333333"/>
+                </a:solidFill>
+              </a:defRPr>
+            </a:pPr>
+            <a:r>
+              <a:t>copy = list(original)</a:t>
+            </a:r>
           </a:p>
         </p:txBody>
       </p:sp>
@@ -4936,7 +5956,7 @@
 </p:sld>
 </file>
 
-<file path=ppt/slides/slide17.xml><?xml version="1.0" encoding="utf-8"?>
+<file path=ppt/slides/slide9.xml><?xml version="1.0" encoding="utf-8"?>
 <p:sld xmlns:a="http://schemas.openxmlformats.org/drawingml/2006/main" xmlns:p="http://schemas.openxmlformats.org/presentationml/2006/main" xmlns:r="http://schemas.openxmlformats.org/officeDocument/2006/relationships">
   <p:cSld>
     <p:spTree>
@@ -5040,8 +6060,8 @@
         </p:nvSpPr>
         <p:spPr>
           <a:xfrm>
-            <a:off x="457200" y="365760"/>
-            <a:ext cx="10972800" cy="731520"/>
+            <a:off x="457200" y="320040"/>
+            <a:ext cx="10972800" cy="640080"/>
           </a:xfrm>
           <a:prstGeom prst="rect">
             <a:avLst/>
@@ -5055,71 +6075,28 @@
           <a:lstStyle/>
           <a:p>
             <a:pPr>
-              <a:defRPr sz="4000" b="1">
+              <a:defRPr sz="3600" b="1">
                 <a:solidFill>
                   <a:srgbClr val="003366"/>
                 </a:solidFill>
               </a:defRPr>
             </a:pPr>
             <a:r>
-              <a:t>Common List Patterns 💡</a:t>
-            </a:r>
-          </a:p>
-        </p:txBody>
-      </p:sp>
-      <p:sp>
-        <p:nvSpPr>
-          <p:cNvPr id="5" name="Rectangle 4"/>
-          <p:cNvSpPr/>
+              <a:t>List Best Practices</a:t>
+            </a:r>
+          </a:p>
+        </p:txBody>
+      </p:sp>
+      <p:sp>
+        <p:nvSpPr>
+          <p:cNvPr id="5" name="TextBox 4"/>
+          <p:cNvSpPr txBox="1"/>
           <p:nvPr/>
         </p:nvSpPr>
         <p:spPr>
           <a:xfrm>
-            <a:off x="457200" y="1005840"/>
-            <a:ext cx="1828800" cy="45720"/>
-          </a:xfrm>
-          <a:prstGeom prst="rect">
-            <a:avLst/>
-          </a:prstGeom>
-          <a:solidFill>
-            <a:srgbClr val="0066CC"/>
-          </a:solidFill>
-          <a:ln>
-            <a:noFill/>
-          </a:ln>
-        </p:spPr>
-        <p:style>
-          <a:lnRef idx="1">
-            <a:schemeClr val="accent1"/>
-          </a:lnRef>
-          <a:fillRef idx="3">
-            <a:schemeClr val="accent1"/>
-          </a:fillRef>
-          <a:effectRef idx="2">
-            <a:schemeClr val="accent1"/>
-          </a:effectRef>
-          <a:fontRef idx="minor">
-            <a:schemeClr val="lt1"/>
-          </a:fontRef>
-        </p:style>
-        <p:txBody>
-          <a:bodyPr rtlCol="0" anchor="ctr"/>
-          <a:lstStyle/>
-          <a:p>
-            <a:pPr algn="ctr"/>
-          </a:p>
-        </p:txBody>
-      </p:sp>
-      <p:sp>
-        <p:nvSpPr>
-          <p:cNvPr id="6" name="TextBox 5"/>
-          <p:cNvSpPr txBox="1"/>
-          <p:nvPr/>
-        </p:nvSpPr>
-        <p:spPr>
-          <a:xfrm>
-            <a:off x="640080" y="1371600"/>
-            <a:ext cx="10789920" cy="4572000"/>
+            <a:off x="640080" y="1188720"/>
+            <a:ext cx="10789920" cy="5303520"/>
           </a:xfrm>
           <a:prstGeom prst="rect">
             <a:avLst/>
@@ -5134,2538 +6111,271 @@
           <a:p>
             <a:pPr>
               <a:spcAft>
-                <a:spcPts val="800"/>
-              </a:spcAft>
-              <a:defRPr sz="2000" b="1">
-                <a:solidFill>
-                  <a:srgbClr val="333333"/>
-                </a:solidFill>
-              </a:defRPr>
-            </a:pPr>
-            <a:r>
-              <a:t>Copy a List</a:t>
-            </a:r>
-          </a:p>
-          <a:p>
-            <a:pPr>
-              <a:spcAft>
-                <a:spcPts val="800"/>
-              </a:spcAft>
-              <a:defRPr sz="2000" b="1">
-                <a:solidFill>
-                  <a:srgbClr val="333333"/>
-                </a:solidFill>
-              </a:defRPr>
-            </a:pPr>
-            <a:r>
-              <a:t>Filter Items</a:t>
-            </a:r>
-          </a:p>
-          <a:p>
-            <a:pPr>
-              <a:spcAft>
-                <a:spcPts val="800"/>
-              </a:spcAft>
-              <a:defRPr sz="2000" b="1">
-                <a:solidFill>
-                  <a:srgbClr val="333333"/>
-                </a:solidFill>
-              </a:defRPr>
-            </a:pPr>
-            <a:r>
-              <a:t>Transform Items</a:t>
-            </a:r>
-          </a:p>
-          <a:p>
-            <a:pPr>
-              <a:spcAft>
-                <a:spcPts val="800"/>
-              </a:spcAft>
-              <a:defRPr sz="2000" b="1">
-                <a:solidFill>
-                  <a:srgbClr val="333333"/>
-                </a:solidFill>
-              </a:defRPr>
-            </a:pPr>
-            <a:r>
-              <a:t>Remove Duplicates</a:t>
-            </a:r>
-          </a:p>
-          <a:p>
-            <a:pPr>
-              <a:spcAft>
-                <a:spcPts val="800"/>
-              </a:spcAft>
-              <a:defRPr sz="2000" b="1">
-                <a:solidFill>
-                  <a:srgbClr val="333333"/>
-                </a:solidFill>
-              </a:defRPr>
-            </a:pPr>
-            <a:r>
-              <a:t>Check if Empty</a:t>
-            </a:r>
-          </a:p>
-          <a:p>
-            <a:pPr>
-              <a:spcAft>
-                <a:spcPts val="800"/>
-              </a:spcAft>
-              <a:defRPr sz="2000" b="1">
-                <a:solidFill>
-                  <a:srgbClr val="333333"/>
-                </a:solidFill>
-              </a:defRPr>
-            </a:pPr>
-            <a:r>
-              <a:t>Join to String</a:t>
-            </a:r>
-          </a:p>
-        </p:txBody>
-      </p:sp>
-    </p:spTree>
-  </p:cSld>
-  <p:clrMapOvr>
-    <a:masterClrMapping/>
-  </p:clrMapOvr>
-</p:sld>
-</file>
-
-<file path=ppt/slides/slide18.xml><?xml version="1.0" encoding="utf-8"?>
-<p:sld xmlns:a="http://schemas.openxmlformats.org/drawingml/2006/main" xmlns:p="http://schemas.openxmlformats.org/presentationml/2006/main" xmlns:r="http://schemas.openxmlformats.org/officeDocument/2006/relationships">
-  <p:cSld>
-    <p:spTree>
-      <p:nvGrpSpPr>
-        <p:cNvPr id="1" name=""/>
-        <p:cNvGrpSpPr/>
-        <p:nvPr/>
-      </p:nvGrpSpPr>
-      <p:grpSpPr/>
-      <p:sp>
-        <p:nvSpPr>
-          <p:cNvPr id="2" name="Rectangle 1"/>
-          <p:cNvSpPr/>
-          <p:nvPr/>
-        </p:nvSpPr>
-        <p:spPr>
-          <a:xfrm>
-            <a:off x="0" y="0"/>
-            <a:ext cx="12191695" cy="6858000"/>
-          </a:xfrm>
-          <a:prstGeom prst="rect">
-            <a:avLst/>
-          </a:prstGeom>
-          <a:solidFill>
-            <a:srgbClr val="0066CC"/>
-          </a:solidFill>
-          <a:ln>
-            <a:noFill/>
-          </a:ln>
-        </p:spPr>
-        <p:style>
-          <a:lnRef idx="1">
-            <a:schemeClr val="accent1"/>
-          </a:lnRef>
-          <a:fillRef idx="3">
-            <a:schemeClr val="accent1"/>
-          </a:fillRef>
-          <a:effectRef idx="2">
-            <a:schemeClr val="accent1"/>
-          </a:effectRef>
-          <a:fontRef idx="minor">
-            <a:schemeClr val="lt1"/>
-          </a:fontRef>
-        </p:style>
-        <p:txBody>
-          <a:bodyPr rtlCol="0" anchor="ctr"/>
-          <a:lstStyle/>
-          <a:p>
-            <a:pPr algn="ctr"/>
-          </a:p>
-        </p:txBody>
-      </p:sp>
-      <p:sp>
-        <p:nvSpPr>
-          <p:cNvPr id="3" name="TextBox 2"/>
-          <p:cNvSpPr txBox="1"/>
-          <p:nvPr/>
-        </p:nvSpPr>
-        <p:spPr>
-          <a:xfrm>
-            <a:off x="914400" y="2286000"/>
-            <a:ext cx="10360152" cy="1371600"/>
-          </a:xfrm>
-          <a:prstGeom prst="rect">
-            <a:avLst/>
-          </a:prstGeom>
-          <a:noFill/>
-        </p:spPr>
-        <p:txBody>
-          <a:bodyPr wrap="none">
-            <a:spAutoFit/>
-          </a:bodyPr>
-          <a:lstStyle/>
-          <a:p>
-            <a:pPr algn="ctr">
-              <a:defRPr sz="4800" b="1">
-                <a:solidFill>
-                  <a:srgbClr val="FFFFFF"/>
-                </a:solidFill>
-              </a:defRPr>
-            </a:pPr>
-            <a:r>
-              <a:t>Best Practices ⭐</a:t>
-            </a:r>
-          </a:p>
-        </p:txBody>
-      </p:sp>
-      <p:sp>
-        <p:nvSpPr>
-          <p:cNvPr id="4" name="TextBox 3"/>
-          <p:cNvSpPr txBox="1"/>
-          <p:nvPr/>
-        </p:nvSpPr>
-        <p:spPr>
-          <a:xfrm>
-            <a:off x="914400" y="3840480"/>
-            <a:ext cx="10360152" cy="914400"/>
-          </a:xfrm>
-          <a:prstGeom prst="rect">
-            <a:avLst/>
-          </a:prstGeom>
-          <a:noFill/>
-        </p:spPr>
-        <p:txBody>
-          <a:bodyPr wrap="none">
-            <a:spAutoFit/>
-          </a:bodyPr>
-          <a:lstStyle/>
-          <a:p>
-            <a:pPr algn="ctr">
-              <a:defRPr sz="2400">
-                <a:solidFill>
-                  <a:srgbClr val="FFFFFF"/>
-                </a:solidFill>
-              </a:defRPr>
-            </a:pPr>
-            <a:r>
-              <a:t>✓ DO</a:t>
-            </a:r>
-          </a:p>
-        </p:txBody>
-      </p:sp>
-    </p:spTree>
-  </p:cSld>
-  <p:clrMapOvr>
-    <a:masterClrMapping/>
-  </p:clrMapOvr>
-</p:sld>
-</file>
-
-<file path=ppt/slides/slide19.xml><?xml version="1.0" encoding="utf-8"?>
-<p:sld xmlns:a="http://schemas.openxmlformats.org/drawingml/2006/main" xmlns:p="http://schemas.openxmlformats.org/presentationml/2006/main" xmlns:r="http://schemas.openxmlformats.org/officeDocument/2006/relationships">
-  <p:cSld>
-    <p:spTree>
-      <p:nvGrpSpPr>
-        <p:cNvPr id="1" name=""/>
-        <p:cNvGrpSpPr/>
-        <p:nvPr/>
-      </p:nvGrpSpPr>
-      <p:grpSpPr/>
-      <p:sp>
-        <p:nvSpPr>
-          <p:cNvPr id="2" name="Rectangle 1"/>
-          <p:cNvSpPr/>
-          <p:nvPr/>
-        </p:nvSpPr>
-        <p:spPr>
-          <a:xfrm>
-            <a:off x="0" y="0"/>
-            <a:ext cx="12191695" cy="6858000"/>
-          </a:xfrm>
-          <a:prstGeom prst="rect">
-            <a:avLst/>
-          </a:prstGeom>
-          <a:solidFill>
-            <a:srgbClr val="F0F8FF"/>
-          </a:solidFill>
-          <a:ln>
-            <a:noFill/>
-          </a:ln>
-        </p:spPr>
-        <p:style>
-          <a:lnRef idx="1">
-            <a:schemeClr val="accent1"/>
-          </a:lnRef>
-          <a:fillRef idx="3">
-            <a:schemeClr val="accent1"/>
-          </a:fillRef>
-          <a:effectRef idx="2">
-            <a:schemeClr val="accent1"/>
-          </a:effectRef>
-          <a:fontRef idx="minor">
-            <a:schemeClr val="lt1"/>
-          </a:fontRef>
-        </p:style>
-        <p:txBody>
-          <a:bodyPr rtlCol="0" anchor="ctr"/>
-          <a:lstStyle/>
-          <a:p>
-            <a:pPr algn="ctr"/>
-          </a:p>
-        </p:txBody>
-      </p:sp>
-      <p:sp>
-        <p:nvSpPr>
-          <p:cNvPr id="3" name="TextBox 2"/>
-          <p:cNvSpPr txBox="1"/>
-          <p:nvPr/>
-        </p:nvSpPr>
-        <p:spPr>
-          <a:xfrm>
-            <a:off x="914400" y="1828800"/>
-            <a:ext cx="10360152" cy="1371600"/>
-          </a:xfrm>
-          <a:prstGeom prst="rect">
-            <a:avLst/>
-          </a:prstGeom>
-          <a:noFill/>
-        </p:spPr>
-        <p:txBody>
-          <a:bodyPr wrap="none">
-            <a:spAutoFit/>
-          </a:bodyPr>
-          <a:lstStyle/>
-          <a:p>
-            <a:pPr algn="ctr">
-              <a:defRPr sz="5400" b="1">
-                <a:solidFill>
-                  <a:srgbClr val="003366"/>
-                </a:solidFill>
-              </a:defRPr>
-            </a:pPr>
-            <a:r>
-              <a:t>Time to Practice!</a:t>
-            </a:r>
-          </a:p>
-        </p:txBody>
-      </p:sp>
-      <p:sp>
-        <p:nvSpPr>
-          <p:cNvPr id="4" name="TextBox 3"/>
-          <p:cNvSpPr txBox="1"/>
-          <p:nvPr/>
-        </p:nvSpPr>
-        <p:spPr>
-          <a:xfrm>
-            <a:off x="914400" y="3657600"/>
-            <a:ext cx="10360152" cy="548640"/>
-          </a:xfrm>
-          <a:prstGeom prst="rect">
-            <a:avLst/>
-          </a:prstGeom>
-          <a:noFill/>
-        </p:spPr>
-        <p:txBody>
-          <a:bodyPr wrap="none">
-            <a:spAutoFit/>
-          </a:bodyPr>
-          <a:lstStyle/>
-          <a:p>
-            <a:pPr algn="ctr">
-              <a:defRPr sz="2800">
-                <a:solidFill>
-                  <a:srgbClr val="4682B4"/>
-                </a:solidFill>
-              </a:defRPr>
-            </a:pPr>
-            <a:r>
-              <a:t>Open the practice notebook and master lists</a:t>
-            </a:r>
-          </a:p>
-        </p:txBody>
-      </p:sp>
-      <p:sp>
-        <p:nvSpPr>
-          <p:cNvPr id="5" name="TextBox 4"/>
-          <p:cNvSpPr txBox="1"/>
-          <p:nvPr/>
-        </p:nvSpPr>
-        <p:spPr>
-          <a:xfrm>
-            <a:off x="914400" y="4297680"/>
-            <a:ext cx="10360152" cy="548640"/>
-          </a:xfrm>
-          <a:prstGeom prst="rect">
-            <a:avLst/>
-          </a:prstGeom>
-          <a:noFill/>
-        </p:spPr>
-        <p:txBody>
-          <a:bodyPr wrap="none">
-            <a:spAutoFit/>
-          </a:bodyPr>
-          <a:lstStyle/>
-          <a:p>
-            <a:pPr algn="ctr">
-              <a:defRPr sz="2800">
-                <a:solidFill>
-                  <a:srgbClr val="4682B4"/>
-                </a:solidFill>
-              </a:defRPr>
-            </a:pPr>
-            <a:r>
-              <a:t>Lists are powerful - let's build amazing things!</a:t>
-            </a:r>
-          </a:p>
-        </p:txBody>
-      </p:sp>
-    </p:spTree>
-  </p:cSld>
-  <p:clrMapOvr>
-    <a:masterClrMapping/>
-  </p:clrMapOvr>
-</p:sld>
-</file>
-
-<file path=ppt/slides/slide2.xml><?xml version="1.0" encoding="utf-8"?>
-<p:sld xmlns:a="http://schemas.openxmlformats.org/drawingml/2006/main" xmlns:p="http://schemas.openxmlformats.org/presentationml/2006/main" xmlns:r="http://schemas.openxmlformats.org/officeDocument/2006/relationships">
-  <p:cSld>
-    <p:spTree>
-      <p:nvGrpSpPr>
-        <p:cNvPr id="1" name=""/>
-        <p:cNvGrpSpPr/>
-        <p:nvPr/>
-      </p:nvGrpSpPr>
-      <p:grpSpPr/>
-      <p:sp>
-        <p:nvSpPr>
-          <p:cNvPr id="2" name="Rectangle 1"/>
-          <p:cNvSpPr/>
-          <p:nvPr/>
-        </p:nvSpPr>
-        <p:spPr>
-          <a:xfrm>
-            <a:off x="0" y="0"/>
-            <a:ext cx="12191695" cy="6858000"/>
-          </a:xfrm>
-          <a:prstGeom prst="rect">
-            <a:avLst/>
-          </a:prstGeom>
-          <a:solidFill>
-            <a:srgbClr val="FFFFFF"/>
-          </a:solidFill>
-          <a:ln>
-            <a:noFill/>
-          </a:ln>
-        </p:spPr>
-        <p:style>
-          <a:lnRef idx="1">
-            <a:schemeClr val="accent1"/>
-          </a:lnRef>
-          <a:fillRef idx="3">
-            <a:schemeClr val="accent1"/>
-          </a:fillRef>
-          <a:effectRef idx="2">
-            <a:schemeClr val="accent1"/>
-          </a:effectRef>
-          <a:fontRef idx="minor">
-            <a:schemeClr val="lt1"/>
-          </a:fontRef>
-        </p:style>
-        <p:txBody>
-          <a:bodyPr rtlCol="0" anchor="ctr"/>
-          <a:lstStyle/>
-          <a:p>
-            <a:pPr algn="ctr"/>
-          </a:p>
-        </p:txBody>
-      </p:sp>
-      <p:sp>
-        <p:nvSpPr>
-          <p:cNvPr id="3" name="Rectangle 2"/>
-          <p:cNvSpPr/>
-          <p:nvPr/>
-        </p:nvSpPr>
-        <p:spPr>
-          <a:xfrm>
-            <a:off x="0" y="0"/>
-            <a:ext cx="12191695" cy="137160"/>
-          </a:xfrm>
-          <a:prstGeom prst="rect">
-            <a:avLst/>
-          </a:prstGeom>
-          <a:solidFill>
-            <a:srgbClr val="0066CC"/>
-          </a:solidFill>
-          <a:ln>
-            <a:noFill/>
-          </a:ln>
-        </p:spPr>
-        <p:style>
-          <a:lnRef idx="1">
-            <a:schemeClr val="accent1"/>
-          </a:lnRef>
-          <a:fillRef idx="3">
-            <a:schemeClr val="accent1"/>
-          </a:fillRef>
-          <a:effectRef idx="2">
-            <a:schemeClr val="accent1"/>
-          </a:effectRef>
-          <a:fontRef idx="minor">
-            <a:schemeClr val="lt1"/>
-          </a:fontRef>
-        </p:style>
-        <p:txBody>
-          <a:bodyPr rtlCol="0" anchor="ctr"/>
-          <a:lstStyle/>
-          <a:p>
-            <a:pPr algn="ctr"/>
-          </a:p>
-        </p:txBody>
-      </p:sp>
-      <p:sp>
-        <p:nvSpPr>
-          <p:cNvPr id="4" name="TextBox 3"/>
-          <p:cNvSpPr txBox="1"/>
-          <p:nvPr/>
-        </p:nvSpPr>
-        <p:spPr>
-          <a:xfrm>
-            <a:off x="457200" y="365760"/>
-            <a:ext cx="10972800" cy="731520"/>
-          </a:xfrm>
-          <a:prstGeom prst="rect">
-            <a:avLst/>
-          </a:prstGeom>
-          <a:noFill/>
-        </p:spPr>
-        <p:txBody>
-          <a:bodyPr wrap="none">
-            <a:spAutoFit/>
-          </a:bodyPr>
-          <a:lstStyle/>
-          <a:p>
-            <a:pPr>
-              <a:defRPr sz="4000" b="1">
-                <a:solidFill>
-                  <a:srgbClr val="003366"/>
-                </a:solidFill>
-              </a:defRPr>
-            </a:pPr>
-            <a:r>
-              <a:t>What Are Lists? 📋</a:t>
-            </a:r>
-          </a:p>
-        </p:txBody>
-      </p:sp>
-      <p:sp>
-        <p:nvSpPr>
-          <p:cNvPr id="5" name="Rectangle 4"/>
-          <p:cNvSpPr/>
-          <p:nvPr/>
-        </p:nvSpPr>
-        <p:spPr>
-          <a:xfrm>
-            <a:off x="457200" y="1005840"/>
-            <a:ext cx="1828800" cy="45720"/>
-          </a:xfrm>
-          <a:prstGeom prst="rect">
-            <a:avLst/>
-          </a:prstGeom>
-          <a:solidFill>
-            <a:srgbClr val="0066CC"/>
-          </a:solidFill>
-          <a:ln>
-            <a:noFill/>
-          </a:ln>
-        </p:spPr>
-        <p:style>
-          <a:lnRef idx="1">
-            <a:schemeClr val="accent1"/>
-          </a:lnRef>
-          <a:fillRef idx="3">
-            <a:schemeClr val="accent1"/>
-          </a:fillRef>
-          <a:effectRef idx="2">
-            <a:schemeClr val="accent1"/>
-          </a:effectRef>
-          <a:fontRef idx="minor">
-            <a:schemeClr val="lt1"/>
-          </a:fontRef>
-        </p:style>
-        <p:txBody>
-          <a:bodyPr rtlCol="0" anchor="ctr"/>
-          <a:lstStyle/>
-          <a:p>
-            <a:pPr algn="ctr"/>
-          </a:p>
-        </p:txBody>
-      </p:sp>
-      <p:sp>
-        <p:nvSpPr>
-          <p:cNvPr id="6" name="TextBox 5"/>
-          <p:cNvSpPr txBox="1"/>
-          <p:nvPr/>
-        </p:nvSpPr>
-        <p:spPr>
-          <a:xfrm>
-            <a:off x="640080" y="1371600"/>
-            <a:ext cx="10789920" cy="4572000"/>
-          </a:xfrm>
-          <a:prstGeom prst="rect">
-            <a:avLst/>
-          </a:prstGeom>
-          <a:noFill/>
-        </p:spPr>
-        <p:txBody>
-          <a:bodyPr wrap="square">
-            <a:spAutoFit/>
-          </a:bodyPr>
-          <a:lstStyle/>
-          <a:p>
-            <a:pPr>
-              <a:spcAft>
-                <a:spcPts val="800"/>
-              </a:spcAft>
-              <a:defRPr sz="2000" b="1">
-                <a:solidFill>
-                  <a:srgbClr val="333333"/>
-                </a:solidFill>
-              </a:defRPr>
-            </a:pPr>
-            <a:r>
-              <a:t>A list is a collection of items stored in a single variable</a:t>
-            </a:r>
-          </a:p>
-          <a:p>
-            <a:pPr>
-              <a:spcAft>
-                <a:spcPts val="800"/>
-              </a:spcAft>
-              <a:defRPr sz="2000" b="1">
-                <a:solidFill>
-                  <a:srgbClr val="333333"/>
-                </a:solidFill>
-              </a:defRPr>
-            </a:pPr>
-            <a:r>
-              <a:t>Without Lists</a:t>
-            </a:r>
-          </a:p>
-          <a:p>
-            <a:pPr>
-              <a:spcAft>
-                <a:spcPts val="800"/>
-              </a:spcAft>
-              <a:defRPr sz="2000" b="1">
-                <a:solidFill>
-                  <a:srgbClr val="333333"/>
-                </a:solidFill>
-              </a:defRPr>
-            </a:pPr>
-            <a:r>
-              <a:t>With Lists 🎉</a:t>
-            </a:r>
-          </a:p>
-          <a:p>
-            <a:pPr>
-              <a:spcAft>
-                <a:spcPts val="800"/>
-              </a:spcAft>
-              <a:defRPr sz="2000" b="1">
-                <a:solidFill>
-                  <a:srgbClr val="333333"/>
-                </a:solidFill>
-              </a:defRPr>
-            </a:pPr>
-            <a:r>
-              <a:t>Lists make managing multiple items easy!</a:t>
-            </a:r>
-          </a:p>
-        </p:txBody>
-      </p:sp>
-    </p:spTree>
-  </p:cSld>
-  <p:clrMapOvr>
-    <a:masterClrMapping/>
-  </p:clrMapOvr>
-</p:sld>
-</file>
-
-<file path=ppt/slides/slide3.xml><?xml version="1.0" encoding="utf-8"?>
-<p:sld xmlns:a="http://schemas.openxmlformats.org/drawingml/2006/main" xmlns:p="http://schemas.openxmlformats.org/presentationml/2006/main" xmlns:r="http://schemas.openxmlformats.org/officeDocument/2006/relationships">
-  <p:cSld>
-    <p:spTree>
-      <p:nvGrpSpPr>
-        <p:cNvPr id="1" name=""/>
-        <p:cNvGrpSpPr/>
-        <p:nvPr/>
-      </p:nvGrpSpPr>
-      <p:grpSpPr/>
-      <p:sp>
-        <p:nvSpPr>
-          <p:cNvPr id="2" name="Rectangle 1"/>
-          <p:cNvSpPr/>
-          <p:nvPr/>
-        </p:nvSpPr>
-        <p:spPr>
-          <a:xfrm>
-            <a:off x="0" y="0"/>
-            <a:ext cx="12191695" cy="6858000"/>
-          </a:xfrm>
-          <a:prstGeom prst="rect">
-            <a:avLst/>
-          </a:prstGeom>
-          <a:solidFill>
-            <a:srgbClr val="FFFFFF"/>
-          </a:solidFill>
-          <a:ln>
-            <a:noFill/>
-          </a:ln>
-        </p:spPr>
-        <p:style>
-          <a:lnRef idx="1">
-            <a:schemeClr val="accent1"/>
-          </a:lnRef>
-          <a:fillRef idx="3">
-            <a:schemeClr val="accent1"/>
-          </a:fillRef>
-          <a:effectRef idx="2">
-            <a:schemeClr val="accent1"/>
-          </a:effectRef>
-          <a:fontRef idx="minor">
-            <a:schemeClr val="lt1"/>
-          </a:fontRef>
-        </p:style>
-        <p:txBody>
-          <a:bodyPr rtlCol="0" anchor="ctr"/>
-          <a:lstStyle/>
-          <a:p>
-            <a:pPr algn="ctr"/>
-          </a:p>
-        </p:txBody>
-      </p:sp>
-      <p:sp>
-        <p:nvSpPr>
-          <p:cNvPr id="3" name="Rectangle 2"/>
-          <p:cNvSpPr/>
-          <p:nvPr/>
-        </p:nvSpPr>
-        <p:spPr>
-          <a:xfrm>
-            <a:off x="0" y="0"/>
-            <a:ext cx="12191695" cy="137160"/>
-          </a:xfrm>
-          <a:prstGeom prst="rect">
-            <a:avLst/>
-          </a:prstGeom>
-          <a:solidFill>
-            <a:srgbClr val="0066CC"/>
-          </a:solidFill>
-          <a:ln>
-            <a:noFill/>
-          </a:ln>
-        </p:spPr>
-        <p:style>
-          <a:lnRef idx="1">
-            <a:schemeClr val="accent1"/>
-          </a:lnRef>
-          <a:fillRef idx="3">
-            <a:schemeClr val="accent1"/>
-          </a:fillRef>
-          <a:effectRef idx="2">
-            <a:schemeClr val="accent1"/>
-          </a:effectRef>
-          <a:fontRef idx="minor">
-            <a:schemeClr val="lt1"/>
-          </a:fontRef>
-        </p:style>
-        <p:txBody>
-          <a:bodyPr rtlCol="0" anchor="ctr"/>
-          <a:lstStyle/>
-          <a:p>
-            <a:pPr algn="ctr"/>
-          </a:p>
-        </p:txBody>
-      </p:sp>
-      <p:sp>
-        <p:nvSpPr>
-          <p:cNvPr id="4" name="TextBox 3"/>
-          <p:cNvSpPr txBox="1"/>
-          <p:nvPr/>
-        </p:nvSpPr>
-        <p:spPr>
-          <a:xfrm>
-            <a:off x="457200" y="365760"/>
-            <a:ext cx="10972800" cy="731520"/>
-          </a:xfrm>
-          <a:prstGeom prst="rect">
-            <a:avLst/>
-          </a:prstGeom>
-          <a:noFill/>
-        </p:spPr>
-        <p:txBody>
-          <a:bodyPr wrap="none">
-            <a:spAutoFit/>
-          </a:bodyPr>
-          <a:lstStyle/>
-          <a:p>
-            <a:pPr>
-              <a:defRPr sz="4000" b="1">
-                <a:solidFill>
-                  <a:srgbClr val="003366"/>
-                </a:solidFill>
-              </a:defRPr>
-            </a:pPr>
-            <a:r>
-              <a:t>Why Use Lists? 🤔</a:t>
-            </a:r>
-          </a:p>
-        </p:txBody>
-      </p:sp>
-      <p:sp>
-        <p:nvSpPr>
-          <p:cNvPr id="5" name="Rectangle 4"/>
-          <p:cNvSpPr/>
-          <p:nvPr/>
-        </p:nvSpPr>
-        <p:spPr>
-          <a:xfrm>
-            <a:off x="457200" y="1005840"/>
-            <a:ext cx="1828800" cy="45720"/>
-          </a:xfrm>
-          <a:prstGeom prst="rect">
-            <a:avLst/>
-          </a:prstGeom>
-          <a:solidFill>
-            <a:srgbClr val="0066CC"/>
-          </a:solidFill>
-          <a:ln>
-            <a:noFill/>
-          </a:ln>
-        </p:spPr>
-        <p:style>
-          <a:lnRef idx="1">
-            <a:schemeClr val="accent1"/>
-          </a:lnRef>
-          <a:fillRef idx="3">
-            <a:schemeClr val="accent1"/>
-          </a:fillRef>
-          <a:effectRef idx="2">
-            <a:schemeClr val="accent1"/>
-          </a:effectRef>
-          <a:fontRef idx="minor">
-            <a:schemeClr val="lt1"/>
-          </a:fontRef>
-        </p:style>
-        <p:txBody>
-          <a:bodyPr rtlCol="0" anchor="ctr"/>
-          <a:lstStyle/>
-          <a:p>
-            <a:pPr algn="ctr"/>
-          </a:p>
-        </p:txBody>
-      </p:sp>
-      <p:sp>
-        <p:nvSpPr>
-          <p:cNvPr id="6" name="TextBox 5"/>
-          <p:cNvSpPr txBox="1"/>
-          <p:nvPr/>
-        </p:nvSpPr>
-        <p:spPr>
-          <a:xfrm>
-            <a:off x="640080" y="1371600"/>
-            <a:ext cx="10789920" cy="4572000"/>
-          </a:xfrm>
-          <a:prstGeom prst="rect">
-            <a:avLst/>
-          </a:prstGeom>
-          <a:noFill/>
-        </p:spPr>
-        <p:txBody>
-          <a:bodyPr wrap="square">
-            <a:spAutoFit/>
-          </a:bodyPr>
-          <a:lstStyle/>
-          <a:p>
-            <a:pPr>
-              <a:spcAft>
-                <a:spcPts val="800"/>
-              </a:spcAft>
-              <a:defRPr sz="2000" b="1">
-                <a:solidFill>
-                  <a:srgbClr val="333333"/>
-                </a:solidFill>
-              </a:defRPr>
-            </a:pPr>
-            <a:r>
-              <a:t>Organization</a:t>
-            </a:r>
-          </a:p>
-          <a:p>
-            <a:pPr>
-              <a:spcAft>
-                <a:spcPts val="800"/>
-              </a:spcAft>
-              <a:defRPr sz="2000" b="1">
-                <a:solidFill>
-                  <a:srgbClr val="333333"/>
-                </a:solidFill>
-              </a:defRPr>
-            </a:pPr>
-            <a:r>
-              <a:t>Keep related data together in one place</a:t>
-            </a:r>
-          </a:p>
-          <a:p>
-            <a:pPr>
-              <a:spcAft>
-                <a:spcPts val="800"/>
-              </a:spcAft>
-              <a:defRPr sz="2000" b="1">
-                <a:solidFill>
-                  <a:srgbClr val="333333"/>
-                </a:solidFill>
-              </a:defRPr>
-            </a:pPr>
-            <a:r>
-              <a:t>Flexibility</a:t>
-            </a:r>
-          </a:p>
-          <a:p>
-            <a:pPr>
-              <a:spcAft>
-                <a:spcPts val="800"/>
-              </a:spcAft>
-              <a:defRPr sz="2000" b="1">
-                <a:solidFill>
-                  <a:srgbClr val="333333"/>
-                </a:solidFill>
-              </a:defRPr>
-            </a:pPr>
-            <a:r>
-              <a:t>Add, remove, or modify items anytime</a:t>
-            </a:r>
-          </a:p>
-          <a:p>
-            <a:pPr>
-              <a:spcAft>
-                <a:spcPts val="800"/>
-              </a:spcAft>
-              <a:defRPr sz="2000" b="1">
-                <a:solidFill>
-                  <a:srgbClr val="333333"/>
-                </a:solidFill>
-              </a:defRPr>
-            </a:pPr>
-            <a:r>
-              <a:t>Iteration</a:t>
-            </a:r>
-          </a:p>
-          <a:p>
-            <a:pPr>
-              <a:spcAft>
-                <a:spcPts val="800"/>
-              </a:spcAft>
-              <a:defRPr sz="2000" b="1">
-                <a:solidFill>
-                  <a:srgbClr val="333333"/>
-                </a:solidFill>
-              </a:defRPr>
-            </a:pPr>
-            <a:r>
-              <a:t>Process all items with loops easily</a:t>
-            </a:r>
-          </a:p>
-          <a:p>
-            <a:pPr>
-              <a:spcAft>
-                <a:spcPts val="800"/>
-              </a:spcAft>
-              <a:defRPr sz="2000" b="1">
-                <a:solidFill>
-                  <a:srgbClr val="333333"/>
-                </a:solidFill>
-              </a:defRPr>
-            </a:pPr>
-            <a:r>
-              <a:t>Efficiency</a:t>
-            </a:r>
-          </a:p>
-          <a:p>
-            <a:pPr>
-              <a:spcAft>
-                <a:spcPts val="800"/>
-              </a:spcAft>
-              <a:defRPr sz="2000" b="1">
-                <a:solidFill>
-                  <a:srgbClr val="333333"/>
-                </a:solidFill>
-              </a:defRPr>
-            </a:pPr>
-            <a:r>
-              <a:t>Work with any number of items</a:t>
-            </a:r>
-          </a:p>
-          <a:p>
-            <a:pPr>
-              <a:spcAft>
-                <a:spcPts val="800"/>
-              </a:spcAft>
-              <a:defRPr sz="2000" b="1">
-                <a:solidFill>
-                  <a:srgbClr val="333333"/>
-                </a:solidFill>
-              </a:defRPr>
-            </a:pPr>
-            <a:r>
-              <a:t>Real-world examples:Shopping lists, student grades, to-do tasks, product inventory</a:t>
-            </a:r>
-          </a:p>
-        </p:txBody>
-      </p:sp>
-    </p:spTree>
-  </p:cSld>
-  <p:clrMapOvr>
-    <a:masterClrMapping/>
-  </p:clrMapOvr>
-</p:sld>
-</file>
-
-<file path=ppt/slides/slide4.xml><?xml version="1.0" encoding="utf-8"?>
-<p:sld xmlns:a="http://schemas.openxmlformats.org/drawingml/2006/main" xmlns:p="http://schemas.openxmlformats.org/presentationml/2006/main" xmlns:r="http://schemas.openxmlformats.org/officeDocument/2006/relationships">
-  <p:cSld>
-    <p:spTree>
-      <p:nvGrpSpPr>
-        <p:cNvPr id="1" name=""/>
-        <p:cNvGrpSpPr/>
-        <p:nvPr/>
-      </p:nvGrpSpPr>
-      <p:grpSpPr/>
-      <p:sp>
-        <p:nvSpPr>
-          <p:cNvPr id="2" name="Rectangle 1"/>
-          <p:cNvSpPr/>
-          <p:nvPr/>
-        </p:nvSpPr>
-        <p:spPr>
-          <a:xfrm>
-            <a:off x="0" y="0"/>
-            <a:ext cx="12191695" cy="6858000"/>
-          </a:xfrm>
-          <a:prstGeom prst="rect">
-            <a:avLst/>
-          </a:prstGeom>
-          <a:solidFill>
-            <a:srgbClr val="FFFFFF"/>
-          </a:solidFill>
-          <a:ln>
-            <a:noFill/>
-          </a:ln>
-        </p:spPr>
-        <p:style>
-          <a:lnRef idx="1">
-            <a:schemeClr val="accent1"/>
-          </a:lnRef>
-          <a:fillRef idx="3">
-            <a:schemeClr val="accent1"/>
-          </a:fillRef>
-          <a:effectRef idx="2">
-            <a:schemeClr val="accent1"/>
-          </a:effectRef>
-          <a:fontRef idx="minor">
-            <a:schemeClr val="lt1"/>
-          </a:fontRef>
-        </p:style>
-        <p:txBody>
-          <a:bodyPr rtlCol="0" anchor="ctr"/>
-          <a:lstStyle/>
-          <a:p>
-            <a:pPr algn="ctr"/>
-          </a:p>
-        </p:txBody>
-      </p:sp>
-      <p:sp>
-        <p:nvSpPr>
-          <p:cNvPr id="3" name="Rectangle 2"/>
-          <p:cNvSpPr/>
-          <p:nvPr/>
-        </p:nvSpPr>
-        <p:spPr>
-          <a:xfrm>
-            <a:off x="0" y="0"/>
-            <a:ext cx="12191695" cy="137160"/>
-          </a:xfrm>
-          <a:prstGeom prst="rect">
-            <a:avLst/>
-          </a:prstGeom>
-          <a:solidFill>
-            <a:srgbClr val="0066CC"/>
-          </a:solidFill>
-          <a:ln>
-            <a:noFill/>
-          </a:ln>
-        </p:spPr>
-        <p:style>
-          <a:lnRef idx="1">
-            <a:schemeClr val="accent1"/>
-          </a:lnRef>
-          <a:fillRef idx="3">
-            <a:schemeClr val="accent1"/>
-          </a:fillRef>
-          <a:effectRef idx="2">
-            <a:schemeClr val="accent1"/>
-          </a:effectRef>
-          <a:fontRef idx="minor">
-            <a:schemeClr val="lt1"/>
-          </a:fontRef>
-        </p:style>
-        <p:txBody>
-          <a:bodyPr rtlCol="0" anchor="ctr"/>
-          <a:lstStyle/>
-          <a:p>
-            <a:pPr algn="ctr"/>
-          </a:p>
-        </p:txBody>
-      </p:sp>
-      <p:sp>
-        <p:nvSpPr>
-          <p:cNvPr id="4" name="TextBox 3"/>
-          <p:cNvSpPr txBox="1"/>
-          <p:nvPr/>
-        </p:nvSpPr>
-        <p:spPr>
-          <a:xfrm>
-            <a:off x="457200" y="365760"/>
-            <a:ext cx="10972800" cy="731520"/>
-          </a:xfrm>
-          <a:prstGeom prst="rect">
-            <a:avLst/>
-          </a:prstGeom>
-          <a:noFill/>
-        </p:spPr>
-        <p:txBody>
-          <a:bodyPr wrap="none">
-            <a:spAutoFit/>
-          </a:bodyPr>
-          <a:lstStyle/>
-          <a:p>
-            <a:pPr>
-              <a:defRPr sz="4000" b="1">
-                <a:solidFill>
-                  <a:srgbClr val="003366"/>
-                </a:solidFill>
-              </a:defRPr>
-            </a:pPr>
-            <a:r>
-              <a:t>Creating Lists ✨</a:t>
-            </a:r>
-          </a:p>
-        </p:txBody>
-      </p:sp>
-      <p:sp>
-        <p:nvSpPr>
-          <p:cNvPr id="5" name="Rectangle 4"/>
-          <p:cNvSpPr/>
-          <p:nvPr/>
-        </p:nvSpPr>
-        <p:spPr>
-          <a:xfrm>
-            <a:off x="457200" y="1005840"/>
-            <a:ext cx="1828800" cy="45720"/>
-          </a:xfrm>
-          <a:prstGeom prst="rect">
-            <a:avLst/>
-          </a:prstGeom>
-          <a:solidFill>
-            <a:srgbClr val="0066CC"/>
-          </a:solidFill>
-          <a:ln>
-            <a:noFill/>
-          </a:ln>
-        </p:spPr>
-        <p:style>
-          <a:lnRef idx="1">
-            <a:schemeClr val="accent1"/>
-          </a:lnRef>
-          <a:fillRef idx="3">
-            <a:schemeClr val="accent1"/>
-          </a:fillRef>
-          <a:effectRef idx="2">
-            <a:schemeClr val="accent1"/>
-          </a:effectRef>
-          <a:fontRef idx="minor">
-            <a:schemeClr val="lt1"/>
-          </a:fontRef>
-        </p:style>
-        <p:txBody>
-          <a:bodyPr rtlCol="0" anchor="ctr"/>
-          <a:lstStyle/>
-          <a:p>
-            <a:pPr algn="ctr"/>
-          </a:p>
-        </p:txBody>
-      </p:sp>
-      <p:sp>
-        <p:nvSpPr>
-          <p:cNvPr id="6" name="TextBox 5"/>
-          <p:cNvSpPr txBox="1"/>
-          <p:nvPr/>
-        </p:nvSpPr>
-        <p:spPr>
-          <a:xfrm>
-            <a:off x="640080" y="1371600"/>
-            <a:ext cx="10789920" cy="4572000"/>
-          </a:xfrm>
-          <a:prstGeom prst="rect">
-            <a:avLst/>
-          </a:prstGeom>
-          <a:noFill/>
-        </p:spPr>
-        <p:txBody>
-          <a:bodyPr wrap="square">
-            <a:spAutoFit/>
-          </a:bodyPr>
-          <a:lstStyle/>
-          <a:p>
-            <a:pPr>
-              <a:spcAft>
-                <a:spcPts val="800"/>
-              </a:spcAft>
-              <a:defRPr sz="2000" b="1">
-                <a:solidFill>
-                  <a:srgbClr val="333333"/>
-                </a:solidFill>
-              </a:defRPr>
-            </a:pPr>
-            <a:r>
-              <a:t>Empty List</a:t>
-            </a:r>
-          </a:p>
-          <a:p>
-            <a:pPr>
-              <a:spcAft>
-                <a:spcPts val="800"/>
-              </a:spcAft>
-              <a:defRPr sz="2000" b="1">
-                <a:solidFill>
-                  <a:srgbClr val="333333"/>
-                </a:solidFill>
-              </a:defRPr>
-            </a:pPr>
-            <a:r>
-              <a:t>List of Numbers</a:t>
-            </a:r>
-          </a:p>
-          <a:p>
-            <a:pPr>
-              <a:spcAft>
-                <a:spcPts val="800"/>
-              </a:spcAft>
-              <a:defRPr sz="2000" b="1">
-                <a:solidFill>
-                  <a:srgbClr val="333333"/>
-                </a:solidFill>
-              </a:defRPr>
-            </a:pPr>
-            <a:r>
-              <a:t>List of Strings</a:t>
-            </a:r>
-          </a:p>
-          <a:p>
-            <a:pPr>
-              <a:spcAft>
-                <a:spcPts val="800"/>
-              </a:spcAft>
-              <a:defRPr sz="2000" b="1">
-                <a:solidFill>
-                  <a:srgbClr val="333333"/>
-                </a:solidFill>
-              </a:defRPr>
-            </a:pPr>
-            <a:r>
-              <a:t>Mixed Types (Possible but not recommended)</a:t>
-            </a:r>
-          </a:p>
-        </p:txBody>
-      </p:sp>
-    </p:spTree>
-  </p:cSld>
-  <p:clrMapOvr>
-    <a:masterClrMapping/>
-  </p:clrMapOvr>
-</p:sld>
-</file>
-
-<file path=ppt/slides/slide5.xml><?xml version="1.0" encoding="utf-8"?>
-<p:sld xmlns:a="http://schemas.openxmlformats.org/drawingml/2006/main" xmlns:p="http://schemas.openxmlformats.org/presentationml/2006/main" xmlns:r="http://schemas.openxmlformats.org/officeDocument/2006/relationships">
-  <p:cSld>
-    <p:spTree>
-      <p:nvGrpSpPr>
-        <p:cNvPr id="1" name=""/>
-        <p:cNvGrpSpPr/>
-        <p:nvPr/>
-      </p:nvGrpSpPr>
-      <p:grpSpPr/>
-      <p:sp>
-        <p:nvSpPr>
-          <p:cNvPr id="2" name="Rectangle 1"/>
-          <p:cNvSpPr/>
-          <p:nvPr/>
-        </p:nvSpPr>
-        <p:spPr>
-          <a:xfrm>
-            <a:off x="0" y="0"/>
-            <a:ext cx="12191695" cy="6858000"/>
-          </a:xfrm>
-          <a:prstGeom prst="rect">
-            <a:avLst/>
-          </a:prstGeom>
-          <a:solidFill>
-            <a:srgbClr val="FFFFFF"/>
-          </a:solidFill>
-          <a:ln>
-            <a:noFill/>
-          </a:ln>
-        </p:spPr>
-        <p:style>
-          <a:lnRef idx="1">
-            <a:schemeClr val="accent1"/>
-          </a:lnRef>
-          <a:fillRef idx="3">
-            <a:schemeClr val="accent1"/>
-          </a:fillRef>
-          <a:effectRef idx="2">
-            <a:schemeClr val="accent1"/>
-          </a:effectRef>
-          <a:fontRef idx="minor">
-            <a:schemeClr val="lt1"/>
-          </a:fontRef>
-        </p:style>
-        <p:txBody>
-          <a:bodyPr rtlCol="0" anchor="ctr"/>
-          <a:lstStyle/>
-          <a:p>
-            <a:pPr algn="ctr"/>
-          </a:p>
-        </p:txBody>
-      </p:sp>
-      <p:sp>
-        <p:nvSpPr>
-          <p:cNvPr id="3" name="Rectangle 2"/>
-          <p:cNvSpPr/>
-          <p:nvPr/>
-        </p:nvSpPr>
-        <p:spPr>
-          <a:xfrm>
-            <a:off x="0" y="0"/>
-            <a:ext cx="12191695" cy="137160"/>
-          </a:xfrm>
-          <a:prstGeom prst="rect">
-            <a:avLst/>
-          </a:prstGeom>
-          <a:solidFill>
-            <a:srgbClr val="0066CC"/>
-          </a:solidFill>
-          <a:ln>
-            <a:noFill/>
-          </a:ln>
-        </p:spPr>
-        <p:style>
-          <a:lnRef idx="1">
-            <a:schemeClr val="accent1"/>
-          </a:lnRef>
-          <a:fillRef idx="3">
-            <a:schemeClr val="accent1"/>
-          </a:fillRef>
-          <a:effectRef idx="2">
-            <a:schemeClr val="accent1"/>
-          </a:effectRef>
-          <a:fontRef idx="minor">
-            <a:schemeClr val="lt1"/>
-          </a:fontRef>
-        </p:style>
-        <p:txBody>
-          <a:bodyPr rtlCol="0" anchor="ctr"/>
-          <a:lstStyle/>
-          <a:p>
-            <a:pPr algn="ctr"/>
-          </a:p>
-        </p:txBody>
-      </p:sp>
-      <p:sp>
-        <p:nvSpPr>
-          <p:cNvPr id="4" name="TextBox 3"/>
-          <p:cNvSpPr txBox="1"/>
-          <p:nvPr/>
-        </p:nvSpPr>
-        <p:spPr>
-          <a:xfrm>
-            <a:off x="457200" y="365760"/>
-            <a:ext cx="10972800" cy="731520"/>
-          </a:xfrm>
-          <a:prstGeom prst="rect">
-            <a:avLst/>
-          </a:prstGeom>
-          <a:noFill/>
-        </p:spPr>
-        <p:txBody>
-          <a:bodyPr wrap="none">
-            <a:spAutoFit/>
-          </a:bodyPr>
-          <a:lstStyle/>
-          <a:p>
-            <a:pPr>
-              <a:defRPr sz="4000" b="1">
-                <a:solidFill>
-                  <a:srgbClr val="003366"/>
-                </a:solidFill>
-              </a:defRPr>
-            </a:pPr>
-            <a:r>
-              <a:t>Accessing Elements 🎯</a:t>
-            </a:r>
-          </a:p>
-        </p:txBody>
-      </p:sp>
-      <p:sp>
-        <p:nvSpPr>
-          <p:cNvPr id="5" name="Rectangle 4"/>
-          <p:cNvSpPr/>
-          <p:nvPr/>
-        </p:nvSpPr>
-        <p:spPr>
-          <a:xfrm>
-            <a:off x="457200" y="1005840"/>
-            <a:ext cx="1828800" cy="45720"/>
-          </a:xfrm>
-          <a:prstGeom prst="rect">
-            <a:avLst/>
-          </a:prstGeom>
-          <a:solidFill>
-            <a:srgbClr val="0066CC"/>
-          </a:solidFill>
-          <a:ln>
-            <a:noFill/>
-          </a:ln>
-        </p:spPr>
-        <p:style>
-          <a:lnRef idx="1">
-            <a:schemeClr val="accent1"/>
-          </a:lnRef>
-          <a:fillRef idx="3">
-            <a:schemeClr val="accent1"/>
-          </a:fillRef>
-          <a:effectRef idx="2">
-            <a:schemeClr val="accent1"/>
-          </a:effectRef>
-          <a:fontRef idx="minor">
-            <a:schemeClr val="lt1"/>
-          </a:fontRef>
-        </p:style>
-        <p:txBody>
-          <a:bodyPr rtlCol="0" anchor="ctr"/>
-          <a:lstStyle/>
-          <a:p>
-            <a:pPr algn="ctr"/>
-          </a:p>
-        </p:txBody>
-      </p:sp>
-      <p:sp>
-        <p:nvSpPr>
-          <p:cNvPr id="6" name="TextBox 5"/>
-          <p:cNvSpPr txBox="1"/>
-          <p:nvPr/>
-        </p:nvSpPr>
-        <p:spPr>
-          <a:xfrm>
-            <a:off x="640080" y="1371600"/>
-            <a:ext cx="10789920" cy="4572000"/>
-          </a:xfrm>
-          <a:prstGeom prst="rect">
-            <a:avLst/>
-          </a:prstGeom>
-          <a:noFill/>
-        </p:spPr>
-        <p:txBody>
-          <a:bodyPr wrap="square">
-            <a:spAutoFit/>
-          </a:bodyPr>
-          <a:lstStyle/>
-          <a:p>
-            <a:pPr>
-              <a:spcAft>
-                <a:spcPts val="800"/>
-              </a:spcAft>
-              <a:defRPr sz="2000" b="1">
-                <a:solidFill>
-                  <a:srgbClr val="333333"/>
-                </a:solidFill>
-              </a:defRPr>
-            </a:pPr>
-            <a:r>
-              <a:t>Each item in a list has an index (position number)</a:t>
-            </a:r>
-          </a:p>
-          <a:p>
-            <a:pPr>
-              <a:spcAft>
-                <a:spcPts val="800"/>
-              </a:spcAft>
-              <a:defRPr sz="2000" b="1">
-                <a:solidFill>
-                  <a:srgbClr val="333333"/>
-                </a:solidFill>
-              </a:defRPr>
-            </a:pPr>
-            <a:r>
-              <a:t>Positive Indices (from start)</a:t>
-            </a:r>
-          </a:p>
-          <a:p>
-            <a:pPr>
-              <a:spcAft>
-                <a:spcPts val="800"/>
-              </a:spcAft>
-              <a:defRPr sz="2000" b="1">
-                <a:solidFill>
-                  <a:srgbClr val="333333"/>
-                </a:solidFill>
-              </a:defRPr>
-            </a:pPr>
-            <a:r>
-              <a:t>Examples:</a:t>
-            </a:r>
-          </a:p>
-          <a:p>
-            <a:pPr>
-              <a:spcAft>
-                <a:spcPts val="800"/>
-              </a:spcAft>
-              <a:defRPr sz="2000" b="1">
-                <a:solidFill>
-                  <a:srgbClr val="333333"/>
-                </a:solidFill>
-              </a:defRPr>
-            </a:pPr>
-            <a:r>
-              <a:t>⚠️ Important:Python lists start at index 0, not 1!</a:t>
-            </a:r>
-          </a:p>
-        </p:txBody>
-      </p:sp>
-    </p:spTree>
-  </p:cSld>
-  <p:clrMapOvr>
-    <a:masterClrMapping/>
-  </p:clrMapOvr>
-</p:sld>
-</file>
-
-<file path=ppt/slides/slide6.xml><?xml version="1.0" encoding="utf-8"?>
-<p:sld xmlns:a="http://schemas.openxmlformats.org/drawingml/2006/main" xmlns:p="http://schemas.openxmlformats.org/presentationml/2006/main" xmlns:r="http://schemas.openxmlformats.org/officeDocument/2006/relationships">
-  <p:cSld>
-    <p:spTree>
-      <p:nvGrpSpPr>
-        <p:cNvPr id="1" name=""/>
-        <p:cNvGrpSpPr/>
-        <p:nvPr/>
-      </p:nvGrpSpPr>
-      <p:grpSpPr/>
-      <p:sp>
-        <p:nvSpPr>
-          <p:cNvPr id="2" name="Rectangle 1"/>
-          <p:cNvSpPr/>
-          <p:nvPr/>
-        </p:nvSpPr>
-        <p:spPr>
-          <a:xfrm>
-            <a:off x="0" y="0"/>
-            <a:ext cx="12191695" cy="6858000"/>
-          </a:xfrm>
-          <a:prstGeom prst="rect">
-            <a:avLst/>
-          </a:prstGeom>
-          <a:solidFill>
-            <a:srgbClr val="FFFFFF"/>
-          </a:solidFill>
-          <a:ln>
-            <a:noFill/>
-          </a:ln>
-        </p:spPr>
-        <p:style>
-          <a:lnRef idx="1">
-            <a:schemeClr val="accent1"/>
-          </a:lnRef>
-          <a:fillRef idx="3">
-            <a:schemeClr val="accent1"/>
-          </a:fillRef>
-          <a:effectRef idx="2">
-            <a:schemeClr val="accent1"/>
-          </a:effectRef>
-          <a:fontRef idx="minor">
-            <a:schemeClr val="lt1"/>
-          </a:fontRef>
-        </p:style>
-        <p:txBody>
-          <a:bodyPr rtlCol="0" anchor="ctr"/>
-          <a:lstStyle/>
-          <a:p>
-            <a:pPr algn="ctr"/>
-          </a:p>
-        </p:txBody>
-      </p:sp>
-      <p:sp>
-        <p:nvSpPr>
-          <p:cNvPr id="3" name="Rectangle 2"/>
-          <p:cNvSpPr/>
-          <p:nvPr/>
-        </p:nvSpPr>
-        <p:spPr>
-          <a:xfrm>
-            <a:off x="0" y="0"/>
-            <a:ext cx="12191695" cy="137160"/>
-          </a:xfrm>
-          <a:prstGeom prst="rect">
-            <a:avLst/>
-          </a:prstGeom>
-          <a:solidFill>
-            <a:srgbClr val="0066CC"/>
-          </a:solidFill>
-          <a:ln>
-            <a:noFill/>
-          </a:ln>
-        </p:spPr>
-        <p:style>
-          <a:lnRef idx="1">
-            <a:schemeClr val="accent1"/>
-          </a:lnRef>
-          <a:fillRef idx="3">
-            <a:schemeClr val="accent1"/>
-          </a:fillRef>
-          <a:effectRef idx="2">
-            <a:schemeClr val="accent1"/>
-          </a:effectRef>
-          <a:fontRef idx="minor">
-            <a:schemeClr val="lt1"/>
-          </a:fontRef>
-        </p:style>
-        <p:txBody>
-          <a:bodyPr rtlCol="0" anchor="ctr"/>
-          <a:lstStyle/>
-          <a:p>
-            <a:pPr algn="ctr"/>
-          </a:p>
-        </p:txBody>
-      </p:sp>
-      <p:sp>
-        <p:nvSpPr>
-          <p:cNvPr id="4" name="TextBox 3"/>
-          <p:cNvSpPr txBox="1"/>
-          <p:nvPr/>
-        </p:nvSpPr>
-        <p:spPr>
-          <a:xfrm>
-            <a:off x="457200" y="365760"/>
-            <a:ext cx="10972800" cy="731520"/>
-          </a:xfrm>
-          <a:prstGeom prst="rect">
-            <a:avLst/>
-          </a:prstGeom>
-          <a:noFill/>
-        </p:spPr>
-        <p:txBody>
-          <a:bodyPr wrap="none">
-            <a:spAutoFit/>
-          </a:bodyPr>
-          <a:lstStyle/>
-          <a:p>
-            <a:pPr>
-              <a:defRPr sz="4000" b="1">
-                <a:solidFill>
-                  <a:srgbClr val="003366"/>
-                </a:solidFill>
-              </a:defRPr>
-            </a:pPr>
-            <a:r>
-              <a:t>Negative Indices ⬅️</a:t>
-            </a:r>
-          </a:p>
-        </p:txBody>
-      </p:sp>
-      <p:sp>
-        <p:nvSpPr>
-          <p:cNvPr id="5" name="Rectangle 4"/>
-          <p:cNvSpPr/>
-          <p:nvPr/>
-        </p:nvSpPr>
-        <p:spPr>
-          <a:xfrm>
-            <a:off x="457200" y="1005840"/>
-            <a:ext cx="1828800" cy="45720"/>
-          </a:xfrm>
-          <a:prstGeom prst="rect">
-            <a:avLst/>
-          </a:prstGeom>
-          <a:solidFill>
-            <a:srgbClr val="0066CC"/>
-          </a:solidFill>
-          <a:ln>
-            <a:noFill/>
-          </a:ln>
-        </p:spPr>
-        <p:style>
-          <a:lnRef idx="1">
-            <a:schemeClr val="accent1"/>
-          </a:lnRef>
-          <a:fillRef idx="3">
-            <a:schemeClr val="accent1"/>
-          </a:fillRef>
-          <a:effectRef idx="2">
-            <a:schemeClr val="accent1"/>
-          </a:effectRef>
-          <a:fontRef idx="minor">
-            <a:schemeClr val="lt1"/>
-          </a:fontRef>
-        </p:style>
-        <p:txBody>
-          <a:bodyPr rtlCol="0" anchor="ctr"/>
-          <a:lstStyle/>
-          <a:p>
-            <a:pPr algn="ctr"/>
-          </a:p>
-        </p:txBody>
-      </p:sp>
-      <p:sp>
-        <p:nvSpPr>
-          <p:cNvPr id="6" name="TextBox 5"/>
-          <p:cNvSpPr txBox="1"/>
-          <p:nvPr/>
-        </p:nvSpPr>
-        <p:spPr>
-          <a:xfrm>
-            <a:off x="640080" y="1371600"/>
-            <a:ext cx="10789920" cy="4572000"/>
-          </a:xfrm>
-          <a:prstGeom prst="rect">
-            <a:avLst/>
-          </a:prstGeom>
-          <a:noFill/>
-        </p:spPr>
-        <p:txBody>
-          <a:bodyPr wrap="square">
-            <a:spAutoFit/>
-          </a:bodyPr>
-          <a:lstStyle/>
-          <a:p>
-            <a:pPr>
-              <a:spcAft>
-                <a:spcPts val="800"/>
-              </a:spcAft>
-              <a:defRPr sz="2000" b="1">
-                <a:solidFill>
-                  <a:srgbClr val="333333"/>
-                </a:solidFill>
-              </a:defRPr>
-            </a:pPr>
-            <a:r>
-              <a:t>Access items from the end of the list using negative numbers</a:t>
-            </a:r>
-          </a:p>
-          <a:p>
-            <a:pPr>
-              <a:spcAft>
-                <a:spcPts val="800"/>
-              </a:spcAft>
-              <a:defRPr sz="2000" b="1">
-                <a:solidFill>
-                  <a:srgbClr val="333333"/>
-                </a:solidFill>
-              </a:defRPr>
-            </a:pPr>
-            <a:r>
-              <a:t>Negative Indices (from end)</a:t>
-            </a:r>
-          </a:p>
-          <a:p>
-            <a:pPr>
-              <a:spcAft>
-                <a:spcPts val="800"/>
-              </a:spcAft>
-              <a:defRPr sz="2000" b="1">
-                <a:solidFill>
-                  <a:srgbClr val="333333"/>
-                </a:solidFill>
-              </a:defRPr>
-            </a:pPr>
-            <a:r>
-              <a:t>Examples:</a:t>
-            </a:r>
-          </a:p>
-          <a:p>
-            <a:pPr>
-              <a:spcAft>
-                <a:spcPts val="800"/>
-              </a:spcAft>
-              <a:defRPr sz="2000" b="1">
-                <a:solidFill>
-                  <a:srgbClr val="333333"/>
-                </a:solidFill>
-              </a:defRPr>
-            </a:pPr>
-            <a:r>
-              <a:t>💡 Tip:Use -1 to always get the last item!</a:t>
-            </a:r>
-          </a:p>
-        </p:txBody>
-      </p:sp>
-    </p:spTree>
-  </p:cSld>
-  <p:clrMapOvr>
-    <a:masterClrMapping/>
-  </p:clrMapOvr>
-</p:sld>
-</file>
-
-<file path=ppt/slides/slide7.xml><?xml version="1.0" encoding="utf-8"?>
-<p:sld xmlns:a="http://schemas.openxmlformats.org/drawingml/2006/main" xmlns:p="http://schemas.openxmlformats.org/presentationml/2006/main" xmlns:r="http://schemas.openxmlformats.org/officeDocument/2006/relationships">
-  <p:cSld>
-    <p:spTree>
-      <p:nvGrpSpPr>
-        <p:cNvPr id="1" name=""/>
-        <p:cNvGrpSpPr/>
-        <p:nvPr/>
-      </p:nvGrpSpPr>
-      <p:grpSpPr/>
-      <p:sp>
-        <p:nvSpPr>
-          <p:cNvPr id="2" name="Rectangle 1"/>
-          <p:cNvSpPr/>
-          <p:nvPr/>
-        </p:nvSpPr>
-        <p:spPr>
-          <a:xfrm>
-            <a:off x="0" y="0"/>
-            <a:ext cx="12191695" cy="6858000"/>
-          </a:xfrm>
-          <a:prstGeom prst="rect">
-            <a:avLst/>
-          </a:prstGeom>
-          <a:solidFill>
-            <a:srgbClr val="FFFFFF"/>
-          </a:solidFill>
-          <a:ln>
-            <a:noFill/>
-          </a:ln>
-        </p:spPr>
-        <p:style>
-          <a:lnRef idx="1">
-            <a:schemeClr val="accent1"/>
-          </a:lnRef>
-          <a:fillRef idx="3">
-            <a:schemeClr val="accent1"/>
-          </a:fillRef>
-          <a:effectRef idx="2">
-            <a:schemeClr val="accent1"/>
-          </a:effectRef>
-          <a:fontRef idx="minor">
-            <a:schemeClr val="lt1"/>
-          </a:fontRef>
-        </p:style>
-        <p:txBody>
-          <a:bodyPr rtlCol="0" anchor="ctr"/>
-          <a:lstStyle/>
-          <a:p>
-            <a:pPr algn="ctr"/>
-          </a:p>
-        </p:txBody>
-      </p:sp>
-      <p:sp>
-        <p:nvSpPr>
-          <p:cNvPr id="3" name="Rectangle 2"/>
-          <p:cNvSpPr/>
-          <p:nvPr/>
-        </p:nvSpPr>
-        <p:spPr>
-          <a:xfrm>
-            <a:off x="0" y="0"/>
-            <a:ext cx="12191695" cy="137160"/>
-          </a:xfrm>
-          <a:prstGeom prst="rect">
-            <a:avLst/>
-          </a:prstGeom>
-          <a:solidFill>
-            <a:srgbClr val="0066CC"/>
-          </a:solidFill>
-          <a:ln>
-            <a:noFill/>
-          </a:ln>
-        </p:spPr>
-        <p:style>
-          <a:lnRef idx="1">
-            <a:schemeClr val="accent1"/>
-          </a:lnRef>
-          <a:fillRef idx="3">
-            <a:schemeClr val="accent1"/>
-          </a:fillRef>
-          <a:effectRef idx="2">
-            <a:schemeClr val="accent1"/>
-          </a:effectRef>
-          <a:fontRef idx="minor">
-            <a:schemeClr val="lt1"/>
-          </a:fontRef>
-        </p:style>
-        <p:txBody>
-          <a:bodyPr rtlCol="0" anchor="ctr"/>
-          <a:lstStyle/>
-          <a:p>
-            <a:pPr algn="ctr"/>
-          </a:p>
-        </p:txBody>
-      </p:sp>
-      <p:sp>
-        <p:nvSpPr>
-          <p:cNvPr id="4" name="TextBox 3"/>
-          <p:cNvSpPr txBox="1"/>
-          <p:nvPr/>
-        </p:nvSpPr>
-        <p:spPr>
-          <a:xfrm>
-            <a:off x="457200" y="365760"/>
-            <a:ext cx="10972800" cy="731520"/>
-          </a:xfrm>
-          <a:prstGeom prst="rect">
-            <a:avLst/>
-          </a:prstGeom>
-          <a:noFill/>
-        </p:spPr>
-        <p:txBody>
-          <a:bodyPr wrap="none">
-            <a:spAutoFit/>
-          </a:bodyPr>
-          <a:lstStyle/>
-          <a:p>
-            <a:pPr>
-              <a:defRPr sz="4000" b="1">
-                <a:solidFill>
-                  <a:srgbClr val="003366"/>
-                </a:solidFill>
-              </a:defRPr>
-            </a:pPr>
-            <a:r>
-              <a:t>Slicing Lists ✂️</a:t>
-            </a:r>
-          </a:p>
-        </p:txBody>
-      </p:sp>
-      <p:sp>
-        <p:nvSpPr>
-          <p:cNvPr id="5" name="Rectangle 4"/>
-          <p:cNvSpPr/>
-          <p:nvPr/>
-        </p:nvSpPr>
-        <p:spPr>
-          <a:xfrm>
-            <a:off x="457200" y="1005840"/>
-            <a:ext cx="1828800" cy="45720"/>
-          </a:xfrm>
-          <a:prstGeom prst="rect">
-            <a:avLst/>
-          </a:prstGeom>
-          <a:solidFill>
-            <a:srgbClr val="0066CC"/>
-          </a:solidFill>
-          <a:ln>
-            <a:noFill/>
-          </a:ln>
-        </p:spPr>
-        <p:style>
-          <a:lnRef idx="1">
-            <a:schemeClr val="accent1"/>
-          </a:lnRef>
-          <a:fillRef idx="3">
-            <a:schemeClr val="accent1"/>
-          </a:fillRef>
-          <a:effectRef idx="2">
-            <a:schemeClr val="accent1"/>
-          </a:effectRef>
-          <a:fontRef idx="minor">
-            <a:schemeClr val="lt1"/>
-          </a:fontRef>
-        </p:style>
-        <p:txBody>
-          <a:bodyPr rtlCol="0" anchor="ctr"/>
-          <a:lstStyle/>
-          <a:p>
-            <a:pPr algn="ctr"/>
-          </a:p>
-        </p:txBody>
-      </p:sp>
-      <p:sp>
-        <p:nvSpPr>
-          <p:cNvPr id="6" name="TextBox 5"/>
-          <p:cNvSpPr txBox="1"/>
-          <p:nvPr/>
-        </p:nvSpPr>
-        <p:spPr>
-          <a:xfrm>
-            <a:off x="640080" y="1371600"/>
-            <a:ext cx="10789920" cy="4572000"/>
-          </a:xfrm>
-          <a:prstGeom prst="rect">
-            <a:avLst/>
-          </a:prstGeom>
-          <a:noFill/>
-        </p:spPr>
-        <p:txBody>
-          <a:bodyPr wrap="square">
-            <a:spAutoFit/>
-          </a:bodyPr>
-          <a:lstStyle/>
-          <a:p>
-            <a:pPr>
-              <a:spcAft>
-                <a:spcPts val="800"/>
-              </a:spcAft>
-              <a:defRPr sz="2000" b="1">
-                <a:solidFill>
-                  <a:srgbClr val="333333"/>
-                </a:solidFill>
-              </a:defRPr>
-            </a:pPr>
-            <a:r>
-              <a:t>Extract a portion of a list using [start:end]</a:t>
-            </a:r>
-          </a:p>
-          <a:p>
-            <a:pPr>
-              <a:spcAft>
-                <a:spcPts val="800"/>
-              </a:spcAft>
-              <a:defRPr sz="2000" b="1">
-                <a:solidFill>
-                  <a:srgbClr val="333333"/>
-                </a:solidFill>
-              </a:defRPr>
-            </a:pPr>
-            <a:r>
-              <a:t>Syntax: list[start:end]</a:t>
-            </a:r>
-          </a:p>
-          <a:p>
-            <a:pPr>
-              <a:spcAft>
-                <a:spcPts val="800"/>
-              </a:spcAft>
-              <a:defRPr sz="2000" b="1">
-                <a:solidFill>
-                  <a:srgbClr val="333333"/>
-                </a:solidFill>
-              </a:defRPr>
-            </a:pPr>
-            <a:r>
-              <a:t>Note:End index is NOT included in the slice</a:t>
-            </a:r>
-          </a:p>
-        </p:txBody>
-      </p:sp>
-    </p:spTree>
-  </p:cSld>
-  <p:clrMapOvr>
-    <a:masterClrMapping/>
-  </p:clrMapOvr>
-</p:sld>
-</file>
-
-<file path=ppt/slides/slide8.xml><?xml version="1.0" encoding="utf-8"?>
-<p:sld xmlns:a="http://schemas.openxmlformats.org/drawingml/2006/main" xmlns:p="http://schemas.openxmlformats.org/presentationml/2006/main" xmlns:r="http://schemas.openxmlformats.org/officeDocument/2006/relationships">
-  <p:cSld>
-    <p:spTree>
-      <p:nvGrpSpPr>
-        <p:cNvPr id="1" name=""/>
-        <p:cNvGrpSpPr/>
-        <p:nvPr/>
-      </p:nvGrpSpPr>
-      <p:grpSpPr/>
-      <p:sp>
-        <p:nvSpPr>
-          <p:cNvPr id="2" name="Rectangle 1"/>
-          <p:cNvSpPr/>
-          <p:nvPr/>
-        </p:nvSpPr>
-        <p:spPr>
-          <a:xfrm>
-            <a:off x="0" y="0"/>
-            <a:ext cx="12191695" cy="6858000"/>
-          </a:xfrm>
-          <a:prstGeom prst="rect">
-            <a:avLst/>
-          </a:prstGeom>
-          <a:solidFill>
-            <a:srgbClr val="FFFFFF"/>
-          </a:solidFill>
-          <a:ln>
-            <a:noFill/>
-          </a:ln>
-        </p:spPr>
-        <p:style>
-          <a:lnRef idx="1">
-            <a:schemeClr val="accent1"/>
-          </a:lnRef>
-          <a:fillRef idx="3">
-            <a:schemeClr val="accent1"/>
-          </a:fillRef>
-          <a:effectRef idx="2">
-            <a:schemeClr val="accent1"/>
-          </a:effectRef>
-          <a:fontRef idx="minor">
-            <a:schemeClr val="lt1"/>
-          </a:fontRef>
-        </p:style>
-        <p:txBody>
-          <a:bodyPr rtlCol="0" anchor="ctr"/>
-          <a:lstStyle/>
-          <a:p>
-            <a:pPr algn="ctr"/>
-          </a:p>
-        </p:txBody>
-      </p:sp>
-      <p:sp>
-        <p:nvSpPr>
-          <p:cNvPr id="3" name="Rectangle 2"/>
-          <p:cNvSpPr/>
-          <p:nvPr/>
-        </p:nvSpPr>
-        <p:spPr>
-          <a:xfrm>
-            <a:off x="0" y="0"/>
-            <a:ext cx="12191695" cy="137160"/>
-          </a:xfrm>
-          <a:prstGeom prst="rect">
-            <a:avLst/>
-          </a:prstGeom>
-          <a:solidFill>
-            <a:srgbClr val="0066CC"/>
-          </a:solidFill>
-          <a:ln>
-            <a:noFill/>
-          </a:ln>
-        </p:spPr>
-        <p:style>
-          <a:lnRef idx="1">
-            <a:schemeClr val="accent1"/>
-          </a:lnRef>
-          <a:fillRef idx="3">
-            <a:schemeClr val="accent1"/>
-          </a:fillRef>
-          <a:effectRef idx="2">
-            <a:schemeClr val="accent1"/>
-          </a:effectRef>
-          <a:fontRef idx="minor">
-            <a:schemeClr val="lt1"/>
-          </a:fontRef>
-        </p:style>
-        <p:txBody>
-          <a:bodyPr rtlCol="0" anchor="ctr"/>
-          <a:lstStyle/>
-          <a:p>
-            <a:pPr algn="ctr"/>
-          </a:p>
-        </p:txBody>
-      </p:sp>
-      <p:sp>
-        <p:nvSpPr>
-          <p:cNvPr id="4" name="TextBox 3"/>
-          <p:cNvSpPr txBox="1"/>
-          <p:nvPr/>
-        </p:nvSpPr>
-        <p:spPr>
-          <a:xfrm>
-            <a:off x="457200" y="365760"/>
-            <a:ext cx="10972800" cy="731520"/>
-          </a:xfrm>
-          <a:prstGeom prst="rect">
-            <a:avLst/>
-          </a:prstGeom>
-          <a:noFill/>
-        </p:spPr>
-        <p:txBody>
-          <a:bodyPr wrap="none">
-            <a:spAutoFit/>
-          </a:bodyPr>
-          <a:lstStyle/>
-          <a:p>
-            <a:pPr>
-              <a:defRPr sz="4000" b="1">
-                <a:solidFill>
-                  <a:srgbClr val="003366"/>
-                </a:solidFill>
-              </a:defRPr>
-            </a:pPr>
-            <a:r>
-              <a:t>Adding Items ➕</a:t>
-            </a:r>
-          </a:p>
-        </p:txBody>
-      </p:sp>
-      <p:sp>
-        <p:nvSpPr>
-          <p:cNvPr id="5" name="Rectangle 4"/>
-          <p:cNvSpPr/>
-          <p:nvPr/>
-        </p:nvSpPr>
-        <p:spPr>
-          <a:xfrm>
-            <a:off x="457200" y="1005840"/>
-            <a:ext cx="1828800" cy="45720"/>
-          </a:xfrm>
-          <a:prstGeom prst="rect">
-            <a:avLst/>
-          </a:prstGeom>
-          <a:solidFill>
-            <a:srgbClr val="0066CC"/>
-          </a:solidFill>
-          <a:ln>
-            <a:noFill/>
-          </a:ln>
-        </p:spPr>
-        <p:style>
-          <a:lnRef idx="1">
-            <a:schemeClr val="accent1"/>
-          </a:lnRef>
-          <a:fillRef idx="3">
-            <a:schemeClr val="accent1"/>
-          </a:fillRef>
-          <a:effectRef idx="2">
-            <a:schemeClr val="accent1"/>
-          </a:effectRef>
-          <a:fontRef idx="minor">
-            <a:schemeClr val="lt1"/>
-          </a:fontRef>
-        </p:style>
-        <p:txBody>
-          <a:bodyPr rtlCol="0" anchor="ctr"/>
-          <a:lstStyle/>
-          <a:p>
-            <a:pPr algn="ctr"/>
-          </a:p>
-        </p:txBody>
-      </p:sp>
-      <p:sp>
-        <p:nvSpPr>
-          <p:cNvPr id="6" name="TextBox 5"/>
-          <p:cNvSpPr txBox="1"/>
-          <p:nvPr/>
-        </p:nvSpPr>
-        <p:spPr>
-          <a:xfrm>
-            <a:off x="640080" y="1371600"/>
-            <a:ext cx="10789920" cy="4572000"/>
-          </a:xfrm>
-          <a:prstGeom prst="rect">
-            <a:avLst/>
-          </a:prstGeom>
-          <a:noFill/>
-        </p:spPr>
-        <p:txBody>
-          <a:bodyPr wrap="square">
-            <a:spAutoFit/>
-          </a:bodyPr>
-          <a:lstStyle/>
-          <a:p>
-            <a:pPr>
-              <a:spcAft>
-                <a:spcPts val="800"/>
-              </a:spcAft>
-              <a:defRPr sz="2000" b="1">
-                <a:solidFill>
-                  <a:srgbClr val="333333"/>
-                </a:solidFill>
-              </a:defRPr>
-            </a:pPr>
-            <a:r>
-              <a:t>append() - Add to end</a:t>
-            </a:r>
-          </a:p>
-          <a:p>
-            <a:pPr>
-              <a:spcAft>
-                <a:spcPts val="800"/>
-              </a:spcAft>
-              <a:defRPr sz="2000" b="1">
-                <a:solidFill>
-                  <a:srgbClr val="333333"/>
-                </a:solidFill>
-              </a:defRPr>
-            </a:pPr>
-            <a:r>
-              <a:t>insert() - Add at specific position</a:t>
-            </a:r>
-          </a:p>
-          <a:p>
-            <a:pPr>
-              <a:spcAft>
-                <a:spcPts val="800"/>
-              </a:spcAft>
-              <a:defRPr sz="2000" b="1">
-                <a:solidFill>
-                  <a:srgbClr val="333333"/>
-                </a:solidFill>
-              </a:defRPr>
-            </a:pPr>
-            <a:r>
-              <a:t>extend() - Add multiple items</a:t>
-            </a:r>
-          </a:p>
-        </p:txBody>
-      </p:sp>
-    </p:spTree>
-  </p:cSld>
-  <p:clrMapOvr>
-    <a:masterClrMapping/>
-  </p:clrMapOvr>
-</p:sld>
-</file>
-
-<file path=ppt/slides/slide9.xml><?xml version="1.0" encoding="utf-8"?>
-<p:sld xmlns:a="http://schemas.openxmlformats.org/drawingml/2006/main" xmlns:p="http://schemas.openxmlformats.org/presentationml/2006/main" xmlns:r="http://schemas.openxmlformats.org/officeDocument/2006/relationships">
-  <p:cSld>
-    <p:spTree>
-      <p:nvGrpSpPr>
-        <p:cNvPr id="1" name=""/>
-        <p:cNvGrpSpPr/>
-        <p:nvPr/>
-      </p:nvGrpSpPr>
-      <p:grpSpPr/>
-      <p:sp>
-        <p:nvSpPr>
-          <p:cNvPr id="2" name="Rectangle 1"/>
-          <p:cNvSpPr/>
-          <p:nvPr/>
-        </p:nvSpPr>
-        <p:spPr>
-          <a:xfrm>
-            <a:off x="0" y="0"/>
-            <a:ext cx="12191695" cy="6858000"/>
-          </a:xfrm>
-          <a:prstGeom prst="rect">
-            <a:avLst/>
-          </a:prstGeom>
-          <a:solidFill>
-            <a:srgbClr val="FFFFFF"/>
-          </a:solidFill>
-          <a:ln>
-            <a:noFill/>
-          </a:ln>
-        </p:spPr>
-        <p:style>
-          <a:lnRef idx="1">
-            <a:schemeClr val="accent1"/>
-          </a:lnRef>
-          <a:fillRef idx="3">
-            <a:schemeClr val="accent1"/>
-          </a:fillRef>
-          <a:effectRef idx="2">
-            <a:schemeClr val="accent1"/>
-          </a:effectRef>
-          <a:fontRef idx="minor">
-            <a:schemeClr val="lt1"/>
-          </a:fontRef>
-        </p:style>
-        <p:txBody>
-          <a:bodyPr rtlCol="0" anchor="ctr"/>
-          <a:lstStyle/>
-          <a:p>
-            <a:pPr algn="ctr"/>
-          </a:p>
-        </p:txBody>
-      </p:sp>
-      <p:sp>
-        <p:nvSpPr>
-          <p:cNvPr id="3" name="Rectangle 2"/>
-          <p:cNvSpPr/>
-          <p:nvPr/>
-        </p:nvSpPr>
-        <p:spPr>
-          <a:xfrm>
-            <a:off x="0" y="0"/>
-            <a:ext cx="12191695" cy="137160"/>
-          </a:xfrm>
-          <a:prstGeom prst="rect">
-            <a:avLst/>
-          </a:prstGeom>
-          <a:solidFill>
-            <a:srgbClr val="0066CC"/>
-          </a:solidFill>
-          <a:ln>
-            <a:noFill/>
-          </a:ln>
-        </p:spPr>
-        <p:style>
-          <a:lnRef idx="1">
-            <a:schemeClr val="accent1"/>
-          </a:lnRef>
-          <a:fillRef idx="3">
-            <a:schemeClr val="accent1"/>
-          </a:fillRef>
-          <a:effectRef idx="2">
-            <a:schemeClr val="accent1"/>
-          </a:effectRef>
-          <a:fontRef idx="minor">
-            <a:schemeClr val="lt1"/>
-          </a:fontRef>
-        </p:style>
-        <p:txBody>
-          <a:bodyPr rtlCol="0" anchor="ctr"/>
-          <a:lstStyle/>
-          <a:p>
-            <a:pPr algn="ctr"/>
-          </a:p>
-        </p:txBody>
-      </p:sp>
-      <p:sp>
-        <p:nvSpPr>
-          <p:cNvPr id="4" name="TextBox 3"/>
-          <p:cNvSpPr txBox="1"/>
-          <p:nvPr/>
-        </p:nvSpPr>
-        <p:spPr>
-          <a:xfrm>
-            <a:off x="457200" y="365760"/>
-            <a:ext cx="10972800" cy="731520"/>
-          </a:xfrm>
-          <a:prstGeom prst="rect">
-            <a:avLst/>
-          </a:prstGeom>
-          <a:noFill/>
-        </p:spPr>
-        <p:txBody>
-          <a:bodyPr wrap="none">
-            <a:spAutoFit/>
-          </a:bodyPr>
-          <a:lstStyle/>
-          <a:p>
-            <a:pPr>
-              <a:defRPr sz="4000" b="1">
-                <a:solidFill>
-                  <a:srgbClr val="003366"/>
-                </a:solidFill>
-              </a:defRPr>
-            </a:pPr>
-            <a:r>
-              <a:t>Removing Items ➖</a:t>
-            </a:r>
-          </a:p>
-        </p:txBody>
-      </p:sp>
-      <p:sp>
-        <p:nvSpPr>
-          <p:cNvPr id="5" name="Rectangle 4"/>
-          <p:cNvSpPr/>
-          <p:nvPr/>
-        </p:nvSpPr>
-        <p:spPr>
-          <a:xfrm>
-            <a:off x="457200" y="1005840"/>
-            <a:ext cx="1828800" cy="45720"/>
-          </a:xfrm>
-          <a:prstGeom prst="rect">
-            <a:avLst/>
-          </a:prstGeom>
-          <a:solidFill>
-            <a:srgbClr val="0066CC"/>
-          </a:solidFill>
-          <a:ln>
-            <a:noFill/>
-          </a:ln>
-        </p:spPr>
-        <p:style>
-          <a:lnRef idx="1">
-            <a:schemeClr val="accent1"/>
-          </a:lnRef>
-          <a:fillRef idx="3">
-            <a:schemeClr val="accent1"/>
-          </a:fillRef>
-          <a:effectRef idx="2">
-            <a:schemeClr val="accent1"/>
-          </a:effectRef>
-          <a:fontRef idx="minor">
-            <a:schemeClr val="lt1"/>
-          </a:fontRef>
-        </p:style>
-        <p:txBody>
-          <a:bodyPr rtlCol="0" anchor="ctr"/>
-          <a:lstStyle/>
-          <a:p>
-            <a:pPr algn="ctr"/>
-          </a:p>
-        </p:txBody>
-      </p:sp>
-      <p:sp>
-        <p:nvSpPr>
-          <p:cNvPr id="6" name="TextBox 5"/>
-          <p:cNvSpPr txBox="1"/>
-          <p:nvPr/>
-        </p:nvSpPr>
-        <p:spPr>
-          <a:xfrm>
-            <a:off x="640080" y="1371600"/>
-            <a:ext cx="10789920" cy="4572000"/>
-          </a:xfrm>
-          <a:prstGeom prst="rect">
-            <a:avLst/>
-          </a:prstGeom>
-          <a:noFill/>
-        </p:spPr>
-        <p:txBody>
-          <a:bodyPr wrap="square">
-            <a:spAutoFit/>
-          </a:bodyPr>
-          <a:lstStyle/>
-          <a:p>
-            <a:pPr>
-              <a:spcAft>
-                <a:spcPts val="800"/>
-              </a:spcAft>
-              <a:defRPr sz="2000" b="1">
-                <a:solidFill>
-                  <a:srgbClr val="333333"/>
-                </a:solidFill>
-              </a:defRPr>
-            </a:pPr>
-            <a:r>
-              <a:t>remove() - Remove by value</a:t>
-            </a:r>
-          </a:p>
-          <a:p>
-            <a:pPr>
-              <a:spcAft>
-                <a:spcPts val="800"/>
-              </a:spcAft>
-              <a:defRPr sz="2000" b="1">
-                <a:solidFill>
-                  <a:srgbClr val="333333"/>
-                </a:solidFill>
-              </a:defRPr>
-            </a:pPr>
-            <a:r>
-              <a:t>pop() - Remove by index (returns item)</a:t>
-            </a:r>
-          </a:p>
-          <a:p>
-            <a:pPr>
-              <a:spcAft>
-                <a:spcPts val="800"/>
-              </a:spcAft>
-              <a:defRPr sz="2000" b="1">
-                <a:solidFill>
-                  <a:srgbClr val="333333"/>
-                </a:solidFill>
-              </a:defRPr>
-            </a:pPr>
-            <a:r>
-              <a:t>clear() - Remove all items</a:t>
+                <a:spcPts val="600"/>
+              </a:spcAft>
+              <a:defRPr b="1" sz="2000">
+                <a:solidFill>
+                  <a:srgbClr val="333333"/>
+                </a:solidFill>
+              </a:defRPr>
+            </a:pPr>
+            <a:r>
+              <a:t>Do:</a:t>
+            </a:r>
+          </a:p>
+          <a:p>
+            <a:pPr lvl="1">
+              <a:spcAft>
+                <a:spcPts val="400"/>
+              </a:spcAft>
+              <a:defRPr sz="1600">
+                <a:solidFill>
+                  <a:srgbClr val="333333"/>
+                </a:solidFill>
+              </a:defRPr>
+            </a:pPr>
+            <a:r>
+              <a:t>• Use descriptive names</a:t>
+            </a:r>
+          </a:p>
+          <a:p>
+            <a:pPr lvl="1">
+              <a:spcAft>
+                <a:spcPts val="400"/>
+              </a:spcAft>
+              <a:defRPr sz="1600">
+                <a:solidFill>
+                  <a:srgbClr val="333333"/>
+                </a:solidFill>
+              </a:defRPr>
+            </a:pPr>
+            <a:r>
+              <a:t>• Check for empty: if my_list:</a:t>
+            </a:r>
+          </a:p>
+          <a:p>
+            <a:pPr lvl="1">
+              <a:spcAft>
+                <a:spcPts val="400"/>
+              </a:spcAft>
+              <a:defRPr sz="1600">
+                <a:solidFill>
+                  <a:srgbClr val="333333"/>
+                </a:solidFill>
+              </a:defRPr>
+            </a:pPr>
+            <a:r>
+              <a:t>• Use list comprehensions for simple cases</a:t>
+            </a:r>
+          </a:p>
+          <a:p>
+            <a:pPr lvl="1">
+              <a:spcAft>
+                <a:spcPts val="400"/>
+              </a:spcAft>
+              <a:defRPr sz="1600">
+                <a:solidFill>
+                  <a:srgbClr val="333333"/>
+                </a:solidFill>
+              </a:defRPr>
+            </a:pPr>
+            <a:r>
+              <a:t>• Initialize before building</a:t>
+            </a:r>
+          </a:p>
+          <a:p>
+            <a:pPr>
+              <a:spcAft>
+                <a:spcPts val="600"/>
+              </a:spcAft>
+              <a:defRPr b="1" sz="2000">
+                <a:solidFill>
+                  <a:srgbClr val="333333"/>
+                </a:solidFill>
+              </a:defRPr>
+            </a:pPr>
+            <a:r>
+              <a:t>Avoid:</a:t>
+            </a:r>
+          </a:p>
+          <a:p>
+            <a:pPr lvl="1">
+              <a:spcAft>
+                <a:spcPts val="400"/>
+              </a:spcAft>
+              <a:defRPr sz="1600">
+                <a:solidFill>
+                  <a:srgbClr val="333333"/>
+                </a:solidFill>
+              </a:defRPr>
+            </a:pPr>
+            <a:r>
+              <a:t>• Modifying list while iterating</a:t>
+            </a:r>
+          </a:p>
+          <a:p>
+            <a:pPr lvl="1">
+              <a:spcAft>
+                <a:spcPts val="400"/>
+              </a:spcAft>
+              <a:defRPr sz="1600">
+                <a:solidFill>
+                  <a:srgbClr val="333333"/>
+                </a:solidFill>
+              </a:defRPr>
+            </a:pPr>
+            <a:r>
+              <a:t>• Using list as default parameter</a:t>
+            </a:r>
+          </a:p>
+          <a:p>
+            <a:pPr lvl="1">
+              <a:spcAft>
+                <a:spcPts val="400"/>
+              </a:spcAft>
+              <a:defRPr sz="1600">
+                <a:solidFill>
+                  <a:srgbClr val="333333"/>
+                </a:solidFill>
+              </a:defRPr>
+            </a:pPr>
+            <a:r>
+              <a:t>• Deep nesting (max 2-3 levels)</a:t>
+            </a:r>
+          </a:p>
+          <a:p>
+            <a:pPr>
+              <a:spcAft>
+                <a:spcPts val="600"/>
+              </a:spcAft>
+              <a:defRPr b="1" sz="2000">
+                <a:solidFill>
+                  <a:srgbClr val="333333"/>
+                </a:solidFill>
+              </a:defRPr>
+            </a:pPr>
+            <a:r>
+              <a:t>Common Mistakes:</a:t>
+            </a:r>
+          </a:p>
+          <a:p>
+            <a:pPr lvl="1">
+              <a:spcAft>
+                <a:spcPts val="400"/>
+              </a:spcAft>
+              <a:defRPr sz="1600">
+                <a:solidFill>
+                  <a:srgbClr val="333333"/>
+                </a:solidFill>
+              </a:defRPr>
+            </a:pPr>
+            <a:r>
+              <a:t>• Index out of range</a:t>
+            </a:r>
+          </a:p>
+          <a:p>
+            <a:pPr lvl="1">
+              <a:spcAft>
+                <a:spcPts val="400"/>
+              </a:spcAft>
+              <a:defRPr sz="1600">
+                <a:solidFill>
+                  <a:srgbClr val="333333"/>
+                </a:solidFill>
+              </a:defRPr>
+            </a:pPr>
+            <a:r>
+              <a:t>• Confusing append() and extend()</a:t>
+            </a:r>
+          </a:p>
+          <a:p>
+            <a:pPr lvl="1">
+              <a:spcAft>
+                <a:spcPts val="400"/>
+              </a:spcAft>
+              <a:defRPr sz="1600">
+                <a:solidFill>
+                  <a:srgbClr val="333333"/>
+                </a:solidFill>
+              </a:defRPr>
+            </a:pPr>
+            <a:r>
+              <a:t>• Forgetting lists are mutable</a:t>
+            </a:r>
+          </a:p>
+          <a:p>
+            <a:pPr lvl="1">
+              <a:spcAft>
+                <a:spcPts val="400"/>
+              </a:spcAft>
+              <a:defRPr sz="1600">
+                <a:solidFill>
+                  <a:srgbClr val="333333"/>
+                </a:solidFill>
+              </a:defRPr>
+            </a:pPr>
+            <a:r>
+              <a:t>• Not copying when needed</a:t>
+            </a:r>
+          </a:p>
+          <a:p>
+            <a:pPr>
+              <a:spcAft>
+                <a:spcPts val="600"/>
+              </a:spcAft>
+              <a:defRPr b="1" sz="2000">
+                <a:solidFill>
+                  <a:srgbClr val="333333"/>
+                </a:solidFill>
+              </a:defRPr>
+            </a:pPr>
+            <a:r>
+              <a:t>Performance:</a:t>
+            </a:r>
+          </a:p>
+          <a:p>
+            <a:pPr lvl="1">
+              <a:spcAft>
+                <a:spcPts val="400"/>
+              </a:spcAft>
+              <a:defRPr sz="1600">
+                <a:solidFill>
+                  <a:srgbClr val="333333"/>
+                </a:solidFill>
+              </a:defRPr>
+            </a:pPr>
+            <a:r>
+              <a:t>• append() is fast</a:t>
+            </a:r>
+          </a:p>
+          <a:p>
+            <a:pPr lvl="1">
+              <a:spcAft>
+                <a:spcPts val="400"/>
+              </a:spcAft>
+              <a:defRPr sz="1600">
+                <a:solidFill>
+                  <a:srgbClr val="333333"/>
+                </a:solidFill>
+              </a:defRPr>
+            </a:pPr>
+            <a:r>
+              <a:t>• insert(0, x) is slow</a:t>
+            </a:r>
+          </a:p>
+          <a:p>
+            <a:pPr lvl="1">
+              <a:spcAft>
+                <a:spcPts val="400"/>
+              </a:spcAft>
+              <a:defRPr sz="1600">
+                <a:solidFill>
+                  <a:srgbClr val="333333"/>
+                </a:solidFill>
+              </a:defRPr>
+            </a:pPr>
+            <a:r>
+              <a:t>• Use deque for frequent insertions</a:t>
             </a:r>
           </a:p>
         </p:txBody>

--- a/python_course/chapter_05_lists/lists.pptx
+++ b/python_course/chapter_05_lists/lists.pptx
@@ -14,6 +14,8 @@
     <p:sldId id="262" r:id="rId13"/>
     <p:sldId id="263" r:id="rId14"/>
     <p:sldId id="264" r:id="rId15"/>
+    <p:sldId id="265" r:id="rId16"/>
+    <p:sldId id="266" r:id="rId17"/>
   </p:sldIdLst>
   <p:sldSz cx="12191695" cy="6858000" type="screen4x3"/>
   <p:notesSz cx="6858000" cy="9144000"/>
@@ -3111,7 +3113,7 @@
             <a:avLst/>
           </a:prstGeom>
           <a:solidFill>
-            <a:srgbClr val="F0F8FF"/>
+            <a:srgbClr val="14468C"/>
           </a:solidFill>
           <a:ln>
             <a:noFill/>
@@ -3141,14 +3143,100 @@
       </p:sp>
       <p:sp>
         <p:nvSpPr>
-          <p:cNvPr id="3" name="TextBox 2"/>
+          <p:cNvPr id="3" name="Rectangle 2"/>
+          <p:cNvSpPr/>
+          <p:nvPr/>
+        </p:nvSpPr>
+        <p:spPr>
+          <a:xfrm>
+            <a:off x="0" y="0"/>
+            <a:ext cx="12191695" cy="1828800"/>
+          </a:xfrm>
+          <a:prstGeom prst="rect">
+            <a:avLst/>
+          </a:prstGeom>
+          <a:solidFill>
+            <a:srgbClr val="0078D7"/>
+          </a:solidFill>
+          <a:ln>
+            <a:noFill/>
+          </a:ln>
+        </p:spPr>
+        <p:style>
+          <a:lnRef idx="1">
+            <a:schemeClr val="accent1"/>
+          </a:lnRef>
+          <a:fillRef idx="3">
+            <a:schemeClr val="accent1"/>
+          </a:fillRef>
+          <a:effectRef idx="2">
+            <a:schemeClr val="accent1"/>
+          </a:effectRef>
+          <a:fontRef idx="minor">
+            <a:schemeClr val="lt1"/>
+          </a:fontRef>
+        </p:style>
+        <p:txBody>
+          <a:bodyPr rtlCol="0" anchor="ctr"/>
+          <a:lstStyle/>
+          <a:p>
+            <a:pPr algn="ctr"/>
+          </a:p>
+        </p:txBody>
+      </p:sp>
+      <p:sp>
+        <p:nvSpPr>
+          <p:cNvPr id="4" name="Rectangle 3"/>
+          <p:cNvSpPr/>
+          <p:nvPr/>
+        </p:nvSpPr>
+        <p:spPr>
+          <a:xfrm>
+            <a:off x="0" y="1828800"/>
+            <a:ext cx="274320" cy="5029200"/>
+          </a:xfrm>
+          <a:prstGeom prst="rect">
+            <a:avLst/>
+          </a:prstGeom>
+          <a:solidFill>
+            <a:srgbClr val="FFBB33"/>
+          </a:solidFill>
+          <a:ln>
+            <a:noFill/>
+          </a:ln>
+        </p:spPr>
+        <p:style>
+          <a:lnRef idx="1">
+            <a:schemeClr val="accent1"/>
+          </a:lnRef>
+          <a:fillRef idx="3">
+            <a:schemeClr val="accent1"/>
+          </a:fillRef>
+          <a:effectRef idx="2">
+            <a:schemeClr val="accent1"/>
+          </a:effectRef>
+          <a:fontRef idx="minor">
+            <a:schemeClr val="lt1"/>
+          </a:fontRef>
+        </p:style>
+        <p:txBody>
+          <a:bodyPr rtlCol="0" anchor="ctr"/>
+          <a:lstStyle/>
+          <a:p>
+            <a:pPr algn="ctr"/>
+          </a:p>
+        </p:txBody>
+      </p:sp>
+      <p:sp>
+        <p:nvSpPr>
+          <p:cNvPr id="5" name="TextBox 4"/>
           <p:cNvSpPr txBox="1"/>
           <p:nvPr/>
         </p:nvSpPr>
         <p:spPr>
           <a:xfrm>
-            <a:off x="914400" y="2286000"/>
-            <a:ext cx="10360152" cy="1097280"/>
+            <a:off x="1371600" y="2560320"/>
+            <a:ext cx="10058400" cy="1371600"/>
           </a:xfrm>
           <a:prstGeom prst="rect">
             <a:avLst/>
@@ -3162,9 +3250,9 @@
           <a:lstStyle/>
           <a:p>
             <a:pPr algn="ctr">
-              <a:defRPr sz="4800" b="1">
-                <a:solidFill>
-                  <a:srgbClr val="003366"/>
+              <a:defRPr sz="5200" b="1">
+                <a:solidFill>
+                  <a:srgbClr val="FFFFFF"/>
                 </a:solidFill>
               </a:defRPr>
             </a:pPr>
@@ -3176,14 +3264,57 @@
       </p:sp>
       <p:sp>
         <p:nvSpPr>
-          <p:cNvPr id="4" name="TextBox 3"/>
+          <p:cNvPr id="6" name="Rectangle 5"/>
+          <p:cNvSpPr/>
+          <p:nvPr/>
+        </p:nvSpPr>
+        <p:spPr>
+          <a:xfrm>
+            <a:off x="2743200" y="4114800"/>
+            <a:ext cx="6702552" cy="1097280"/>
+          </a:xfrm>
+          <a:prstGeom prst="rect">
+            <a:avLst/>
+          </a:prstGeom>
+          <a:solidFill>
+            <a:srgbClr val="0066CC"/>
+          </a:solidFill>
+          <a:ln>
+            <a:noFill/>
+          </a:ln>
+        </p:spPr>
+        <p:style>
+          <a:lnRef idx="1">
+            <a:schemeClr val="accent1"/>
+          </a:lnRef>
+          <a:fillRef idx="3">
+            <a:schemeClr val="accent1"/>
+          </a:fillRef>
+          <a:effectRef idx="2">
+            <a:schemeClr val="accent1"/>
+          </a:effectRef>
+          <a:fontRef idx="minor">
+            <a:schemeClr val="lt1"/>
+          </a:fontRef>
+        </p:style>
+        <p:txBody>
+          <a:bodyPr rtlCol="0" anchor="ctr"/>
+          <a:lstStyle/>
+          <a:p>
+            <a:pPr algn="ctr"/>
+          </a:p>
+        </p:txBody>
+      </p:sp>
+      <p:sp>
+        <p:nvSpPr>
+          <p:cNvPr id="7" name="TextBox 6"/>
           <p:cNvSpPr txBox="1"/>
           <p:nvPr/>
         </p:nvSpPr>
         <p:spPr>
           <a:xfrm>
-            <a:off x="914400" y="3657600"/>
-            <a:ext cx="10360152" cy="731520"/>
+            <a:off x="2926080" y="4297680"/>
+            <a:ext cx="6336792" cy="731520"/>
           </a:xfrm>
           <a:prstGeom prst="rect">
             <a:avLst/>
@@ -3199,12 +3330,1191 @@
             <a:pPr algn="ctr">
               <a:defRPr sz="2800">
                 <a:solidFill>
-                  <a:srgbClr val="4682B4"/>
+                  <a:srgbClr val="FFFFFF"/>
                 </a:solidFill>
               </a:defRPr>
             </a:pPr>
             <a:r>
               <a:t>Working with Ordered Collections</a:t>
+            </a:r>
+          </a:p>
+        </p:txBody>
+      </p:sp>
+    </p:spTree>
+  </p:cSld>
+  <p:clrMapOvr>
+    <a:masterClrMapping/>
+  </p:clrMapOvr>
+</p:sld>
+</file>
+
+<file path=ppt/slides/slide10.xml><?xml version="1.0" encoding="utf-8"?>
+<p:sld xmlns:a="http://schemas.openxmlformats.org/drawingml/2006/main" xmlns:p="http://schemas.openxmlformats.org/presentationml/2006/main" xmlns:r="http://schemas.openxmlformats.org/officeDocument/2006/relationships">
+  <p:cSld>
+    <p:spTree>
+      <p:nvGrpSpPr>
+        <p:cNvPr id="1" name=""/>
+        <p:cNvGrpSpPr/>
+        <p:nvPr/>
+      </p:nvGrpSpPr>
+      <p:grpSpPr/>
+      <p:sp>
+        <p:nvSpPr>
+          <p:cNvPr id="2" name="Rectangle 1"/>
+          <p:cNvSpPr/>
+          <p:nvPr/>
+        </p:nvSpPr>
+        <p:spPr>
+          <a:xfrm>
+            <a:off x="0" y="0"/>
+            <a:ext cx="12191695" cy="6858000"/>
+          </a:xfrm>
+          <a:prstGeom prst="rect">
+            <a:avLst/>
+          </a:prstGeom>
+          <a:solidFill>
+            <a:srgbClr val="FAFAFA"/>
+          </a:solidFill>
+          <a:ln>
+            <a:noFill/>
+          </a:ln>
+        </p:spPr>
+        <p:style>
+          <a:lnRef idx="1">
+            <a:schemeClr val="accent1"/>
+          </a:lnRef>
+          <a:fillRef idx="3">
+            <a:schemeClr val="accent1"/>
+          </a:fillRef>
+          <a:effectRef idx="2">
+            <a:schemeClr val="accent1"/>
+          </a:effectRef>
+          <a:fontRef idx="minor">
+            <a:schemeClr val="lt1"/>
+          </a:fontRef>
+        </p:style>
+        <p:txBody>
+          <a:bodyPr rtlCol="0" anchor="ctr"/>
+          <a:lstStyle/>
+          <a:p>
+            <a:pPr algn="ctr"/>
+          </a:p>
+        </p:txBody>
+      </p:sp>
+      <p:sp>
+        <p:nvSpPr>
+          <p:cNvPr id="3" name="Rectangle 2"/>
+          <p:cNvSpPr/>
+          <p:nvPr/>
+        </p:nvSpPr>
+        <p:spPr>
+          <a:xfrm>
+            <a:off x="0" y="0"/>
+            <a:ext cx="12191695" cy="1097280"/>
+          </a:xfrm>
+          <a:prstGeom prst="rect">
+            <a:avLst/>
+          </a:prstGeom>
+          <a:solidFill>
+            <a:srgbClr val="0066CC"/>
+          </a:solidFill>
+          <a:ln>
+            <a:noFill/>
+          </a:ln>
+        </p:spPr>
+        <p:style>
+          <a:lnRef idx="1">
+            <a:schemeClr val="accent1"/>
+          </a:lnRef>
+          <a:fillRef idx="3">
+            <a:schemeClr val="accent1"/>
+          </a:fillRef>
+          <a:effectRef idx="2">
+            <a:schemeClr val="accent1"/>
+          </a:effectRef>
+          <a:fontRef idx="minor">
+            <a:schemeClr val="lt1"/>
+          </a:fontRef>
+        </p:style>
+        <p:txBody>
+          <a:bodyPr rtlCol="0" anchor="ctr"/>
+          <a:lstStyle/>
+          <a:p>
+            <a:pPr algn="ctr"/>
+          </a:p>
+        </p:txBody>
+      </p:sp>
+      <p:sp>
+        <p:nvSpPr>
+          <p:cNvPr id="4" name="Rectangle 3"/>
+          <p:cNvSpPr/>
+          <p:nvPr/>
+        </p:nvSpPr>
+        <p:spPr>
+          <a:xfrm>
+            <a:off x="0" y="1097280"/>
+            <a:ext cx="137160" cy="5760720"/>
+          </a:xfrm>
+          <a:prstGeom prst="rect">
+            <a:avLst/>
+          </a:prstGeom>
+          <a:solidFill>
+            <a:srgbClr val="FFBB33"/>
+          </a:solidFill>
+          <a:ln>
+            <a:noFill/>
+          </a:ln>
+        </p:spPr>
+        <p:style>
+          <a:lnRef idx="1">
+            <a:schemeClr val="accent1"/>
+          </a:lnRef>
+          <a:fillRef idx="3">
+            <a:schemeClr val="accent1"/>
+          </a:fillRef>
+          <a:effectRef idx="2">
+            <a:schemeClr val="accent1"/>
+          </a:effectRef>
+          <a:fontRef idx="minor">
+            <a:schemeClr val="lt1"/>
+          </a:fontRef>
+        </p:style>
+        <p:txBody>
+          <a:bodyPr rtlCol="0" anchor="ctr"/>
+          <a:lstStyle/>
+          <a:p>
+            <a:pPr algn="ctr"/>
+          </a:p>
+        </p:txBody>
+      </p:sp>
+      <p:sp>
+        <p:nvSpPr>
+          <p:cNvPr id="5" name="TextBox 4"/>
+          <p:cNvSpPr txBox="1"/>
+          <p:nvPr/>
+        </p:nvSpPr>
+        <p:spPr>
+          <a:xfrm>
+            <a:off x="365760" y="274320"/>
+            <a:ext cx="10972800" cy="640080"/>
+          </a:xfrm>
+          <a:prstGeom prst="rect">
+            <a:avLst/>
+          </a:prstGeom>
+          <a:noFill/>
+        </p:spPr>
+        <p:txBody>
+          <a:bodyPr wrap="none">
+            <a:spAutoFit/>
+          </a:bodyPr>
+          <a:lstStyle/>
+          <a:p>
+            <a:pPr>
+              <a:defRPr sz="3600" b="1">
+                <a:solidFill>
+                  <a:srgbClr val="FFFFFF"/>
+                </a:solidFill>
+              </a:defRPr>
+            </a:pPr>
+            <a:r>
+              <a:t>List Best Practices</a:t>
+            </a:r>
+          </a:p>
+        </p:txBody>
+      </p:sp>
+      <p:sp>
+        <p:nvSpPr>
+          <p:cNvPr id="6" name="Rectangle 5"/>
+          <p:cNvSpPr/>
+          <p:nvPr/>
+        </p:nvSpPr>
+        <p:spPr>
+          <a:xfrm>
+            <a:off x="365760" y="1325880"/>
+            <a:ext cx="11430000" cy="365760"/>
+          </a:xfrm>
+          <a:prstGeom prst="rect">
+            <a:avLst/>
+          </a:prstGeom>
+          <a:solidFill>
+            <a:srgbClr val="0078D7"/>
+          </a:solidFill>
+          <a:ln>
+            <a:noFill/>
+          </a:ln>
+        </p:spPr>
+        <p:style>
+          <a:lnRef idx="1">
+            <a:schemeClr val="accent1"/>
+          </a:lnRef>
+          <a:fillRef idx="3">
+            <a:schemeClr val="accent1"/>
+          </a:fillRef>
+          <a:effectRef idx="2">
+            <a:schemeClr val="accent1"/>
+          </a:effectRef>
+          <a:fontRef idx="minor">
+            <a:schemeClr val="lt1"/>
+          </a:fontRef>
+        </p:style>
+        <p:txBody>
+          <a:bodyPr rtlCol="0" anchor="ctr"/>
+          <a:lstStyle/>
+          <a:p>
+            <a:pPr algn="ctr"/>
+          </a:p>
+        </p:txBody>
+      </p:sp>
+      <p:sp>
+        <p:nvSpPr>
+          <p:cNvPr id="7" name="TextBox 6"/>
+          <p:cNvSpPr txBox="1"/>
+          <p:nvPr/>
+        </p:nvSpPr>
+        <p:spPr>
+          <a:xfrm>
+            <a:off x="548640" y="1371600"/>
+            <a:ext cx="10972800" cy="274320"/>
+          </a:xfrm>
+          <a:prstGeom prst="rect">
+            <a:avLst/>
+          </a:prstGeom>
+          <a:noFill/>
+        </p:spPr>
+        <p:txBody>
+          <a:bodyPr wrap="none">
+            <a:spAutoFit/>
+          </a:bodyPr>
+          <a:lstStyle/>
+          <a:p>
+            <a:pPr>
+              <a:defRPr sz="2000" b="1">
+                <a:solidFill>
+                  <a:srgbClr val="FFFFFF"/>
+                </a:solidFill>
+              </a:defRPr>
+            </a:pPr>
+            <a:r>
+              <a:t>Do:</a:t>
+            </a:r>
+          </a:p>
+        </p:txBody>
+      </p:sp>
+      <p:sp>
+        <p:nvSpPr>
+          <p:cNvPr id="8" name="TextBox 7"/>
+          <p:cNvSpPr txBox="1"/>
+          <p:nvPr/>
+        </p:nvSpPr>
+        <p:spPr>
+          <a:xfrm>
+            <a:off x="457200" y="1828800"/>
+            <a:ext cx="11247120" cy="320040"/>
+          </a:xfrm>
+          <a:prstGeom prst="rect">
+            <a:avLst/>
+          </a:prstGeom>
+          <a:noFill/>
+        </p:spPr>
+        <p:txBody>
+          <a:bodyPr wrap="none">
+            <a:spAutoFit/>
+          </a:bodyPr>
+          <a:lstStyle/>
+          <a:p>
+            <a:pPr lvl="1">
+              <a:defRPr sz="1600">
+                <a:solidFill>
+                  <a:srgbClr val="333333"/>
+                </a:solidFill>
+              </a:defRPr>
+            </a:pPr>
+            <a:r>
+              <a:t>• Use descriptive names</a:t>
+            </a:r>
+          </a:p>
+        </p:txBody>
+      </p:sp>
+      <p:sp>
+        <p:nvSpPr>
+          <p:cNvPr id="9" name="Rectangle 8"/>
+          <p:cNvSpPr/>
+          <p:nvPr/>
+        </p:nvSpPr>
+        <p:spPr>
+          <a:xfrm>
+            <a:off x="640080" y="2057400"/>
+            <a:ext cx="10789920" cy="640080"/>
+          </a:xfrm>
+          <a:prstGeom prst="rect">
+            <a:avLst/>
+          </a:prstGeom>
+          <a:solidFill>
+            <a:srgbClr val="282C34"/>
+          </a:solidFill>
+          <a:ln>
+            <a:noFill/>
+          </a:ln>
+        </p:spPr>
+        <p:style>
+          <a:lnRef idx="1">
+            <a:schemeClr val="accent1"/>
+          </a:lnRef>
+          <a:fillRef idx="3">
+            <a:schemeClr val="accent1"/>
+          </a:fillRef>
+          <a:effectRef idx="2">
+            <a:schemeClr val="accent1"/>
+          </a:effectRef>
+          <a:fontRef idx="minor">
+            <a:schemeClr val="lt1"/>
+          </a:fontRef>
+        </p:style>
+        <p:txBody>
+          <a:bodyPr rtlCol="0" anchor="ctr"/>
+          <a:lstStyle/>
+          <a:p>
+            <a:pPr algn="ctr"/>
+          </a:p>
+        </p:txBody>
+      </p:sp>
+      <p:sp>
+        <p:nvSpPr>
+          <p:cNvPr id="10" name="Rectangle 9"/>
+          <p:cNvSpPr/>
+          <p:nvPr/>
+        </p:nvSpPr>
+        <p:spPr>
+          <a:xfrm>
+            <a:off x="640080" y="2057400"/>
+            <a:ext cx="73152" cy="640080"/>
+          </a:xfrm>
+          <a:prstGeom prst="rect">
+            <a:avLst/>
+          </a:prstGeom>
+          <a:solidFill>
+            <a:srgbClr val="61AFEF"/>
+          </a:solidFill>
+          <a:ln>
+            <a:noFill/>
+          </a:ln>
+        </p:spPr>
+        <p:style>
+          <a:lnRef idx="1">
+            <a:schemeClr val="accent1"/>
+          </a:lnRef>
+          <a:fillRef idx="3">
+            <a:schemeClr val="accent1"/>
+          </a:fillRef>
+          <a:effectRef idx="2">
+            <a:schemeClr val="accent1"/>
+          </a:effectRef>
+          <a:fontRef idx="minor">
+            <a:schemeClr val="lt1"/>
+          </a:fontRef>
+        </p:style>
+        <p:txBody>
+          <a:bodyPr rtlCol="0" anchor="ctr"/>
+          <a:lstStyle/>
+          <a:p>
+            <a:pPr algn="ctr"/>
+          </a:p>
+        </p:txBody>
+      </p:sp>
+      <p:sp>
+        <p:nvSpPr>
+          <p:cNvPr id="11" name="TextBox 10"/>
+          <p:cNvSpPr txBox="1"/>
+          <p:nvPr/>
+        </p:nvSpPr>
+        <p:spPr>
+          <a:xfrm>
+            <a:off x="914400" y="2103120"/>
+            <a:ext cx="10241280" cy="548640"/>
+          </a:xfrm>
+          <a:prstGeom prst="rect">
+            <a:avLst/>
+          </a:prstGeom>
+          <a:noFill/>
+        </p:spPr>
+        <p:txBody>
+          <a:bodyPr wrap="none">
+            <a:spAutoFit/>
+          </a:bodyPr>
+          <a:lstStyle/>
+          <a:p>
+            <a:pPr>
+              <a:spcAft>
+                <a:spcPts val="200"/>
+              </a:spcAft>
+              <a:defRPr sz="1400">
+                <a:solidFill>
+                  <a:srgbClr val="ABB2BF"/>
+                </a:solidFill>
+                <a:latin typeface="Consolas"/>
+              </a:defRPr>
+            </a:pPr>
+            <a:r>
+              <a:t>• Check for empty: if my_list:</a:t>
+            </a:r>
+          </a:p>
+          <a:p>
+            <a:pPr>
+              <a:spcAft>
+                <a:spcPts val="200"/>
+              </a:spcAft>
+              <a:defRPr sz="1400">
+                <a:solidFill>
+                  <a:srgbClr val="ABB2BF"/>
+                </a:solidFill>
+                <a:latin typeface="Consolas"/>
+              </a:defRPr>
+            </a:pPr>
+            <a:r>
+              <a:t>• Use list comprehensions for simple cases</a:t>
+            </a:r>
+          </a:p>
+        </p:txBody>
+      </p:sp>
+      <p:sp>
+        <p:nvSpPr>
+          <p:cNvPr id="12" name="TextBox 11"/>
+          <p:cNvSpPr txBox="1"/>
+          <p:nvPr/>
+        </p:nvSpPr>
+        <p:spPr>
+          <a:xfrm>
+            <a:off x="457200" y="2880360"/>
+            <a:ext cx="11247120" cy="320040"/>
+          </a:xfrm>
+          <a:prstGeom prst="rect">
+            <a:avLst/>
+          </a:prstGeom>
+          <a:noFill/>
+        </p:spPr>
+        <p:txBody>
+          <a:bodyPr wrap="none">
+            <a:spAutoFit/>
+          </a:bodyPr>
+          <a:lstStyle/>
+          <a:p>
+            <a:pPr lvl="1">
+              <a:defRPr sz="1600">
+                <a:solidFill>
+                  <a:srgbClr val="333333"/>
+                </a:solidFill>
+              </a:defRPr>
+            </a:pPr>
+            <a:r>
+              <a:t>• Initialize before building</a:t>
+            </a:r>
+          </a:p>
+        </p:txBody>
+      </p:sp>
+      <p:sp>
+        <p:nvSpPr>
+          <p:cNvPr id="13" name="Rectangle 12"/>
+          <p:cNvSpPr/>
+          <p:nvPr/>
+        </p:nvSpPr>
+        <p:spPr>
+          <a:xfrm>
+            <a:off x="365760" y="3108960"/>
+            <a:ext cx="11430000" cy="365760"/>
+          </a:xfrm>
+          <a:prstGeom prst="rect">
+            <a:avLst/>
+          </a:prstGeom>
+          <a:solidFill>
+            <a:srgbClr val="0078D7"/>
+          </a:solidFill>
+          <a:ln>
+            <a:noFill/>
+          </a:ln>
+        </p:spPr>
+        <p:style>
+          <a:lnRef idx="1">
+            <a:schemeClr val="accent1"/>
+          </a:lnRef>
+          <a:fillRef idx="3">
+            <a:schemeClr val="accent1"/>
+          </a:fillRef>
+          <a:effectRef idx="2">
+            <a:schemeClr val="accent1"/>
+          </a:effectRef>
+          <a:fontRef idx="minor">
+            <a:schemeClr val="lt1"/>
+          </a:fontRef>
+        </p:style>
+        <p:txBody>
+          <a:bodyPr rtlCol="0" anchor="ctr"/>
+          <a:lstStyle/>
+          <a:p>
+            <a:pPr algn="ctr"/>
+          </a:p>
+        </p:txBody>
+      </p:sp>
+      <p:sp>
+        <p:nvSpPr>
+          <p:cNvPr id="14" name="TextBox 13"/>
+          <p:cNvSpPr txBox="1"/>
+          <p:nvPr/>
+        </p:nvSpPr>
+        <p:spPr>
+          <a:xfrm>
+            <a:off x="548640" y="3154679"/>
+            <a:ext cx="10972800" cy="274320"/>
+          </a:xfrm>
+          <a:prstGeom prst="rect">
+            <a:avLst/>
+          </a:prstGeom>
+          <a:noFill/>
+        </p:spPr>
+        <p:txBody>
+          <a:bodyPr wrap="none">
+            <a:spAutoFit/>
+          </a:bodyPr>
+          <a:lstStyle/>
+          <a:p>
+            <a:pPr>
+              <a:defRPr sz="2000" b="1">
+                <a:solidFill>
+                  <a:srgbClr val="FFFFFF"/>
+                </a:solidFill>
+              </a:defRPr>
+            </a:pPr>
+            <a:r>
+              <a:t>Avoid:</a:t>
+            </a:r>
+          </a:p>
+        </p:txBody>
+      </p:sp>
+      <p:sp>
+        <p:nvSpPr>
+          <p:cNvPr id="15" name="Rectangle 14"/>
+          <p:cNvSpPr/>
+          <p:nvPr/>
+        </p:nvSpPr>
+        <p:spPr>
+          <a:xfrm>
+            <a:off x="640080" y="3566160"/>
+            <a:ext cx="10789920" cy="411480"/>
+          </a:xfrm>
+          <a:prstGeom prst="rect">
+            <a:avLst/>
+          </a:prstGeom>
+          <a:solidFill>
+            <a:srgbClr val="282C34"/>
+          </a:solidFill>
+          <a:ln>
+            <a:noFill/>
+          </a:ln>
+        </p:spPr>
+        <p:style>
+          <a:lnRef idx="1">
+            <a:schemeClr val="accent1"/>
+          </a:lnRef>
+          <a:fillRef idx="3">
+            <a:schemeClr val="accent1"/>
+          </a:fillRef>
+          <a:effectRef idx="2">
+            <a:schemeClr val="accent1"/>
+          </a:effectRef>
+          <a:fontRef idx="minor">
+            <a:schemeClr val="lt1"/>
+          </a:fontRef>
+        </p:style>
+        <p:txBody>
+          <a:bodyPr rtlCol="0" anchor="ctr"/>
+          <a:lstStyle/>
+          <a:p>
+            <a:pPr algn="ctr"/>
+          </a:p>
+        </p:txBody>
+      </p:sp>
+      <p:sp>
+        <p:nvSpPr>
+          <p:cNvPr id="16" name="Rectangle 15"/>
+          <p:cNvSpPr/>
+          <p:nvPr/>
+        </p:nvSpPr>
+        <p:spPr>
+          <a:xfrm>
+            <a:off x="640080" y="3566160"/>
+            <a:ext cx="73152" cy="411480"/>
+          </a:xfrm>
+          <a:prstGeom prst="rect">
+            <a:avLst/>
+          </a:prstGeom>
+          <a:solidFill>
+            <a:srgbClr val="61AFEF"/>
+          </a:solidFill>
+          <a:ln>
+            <a:noFill/>
+          </a:ln>
+        </p:spPr>
+        <p:style>
+          <a:lnRef idx="1">
+            <a:schemeClr val="accent1"/>
+          </a:lnRef>
+          <a:fillRef idx="3">
+            <a:schemeClr val="accent1"/>
+          </a:fillRef>
+          <a:effectRef idx="2">
+            <a:schemeClr val="accent1"/>
+          </a:effectRef>
+          <a:fontRef idx="minor">
+            <a:schemeClr val="lt1"/>
+          </a:fontRef>
+        </p:style>
+        <p:txBody>
+          <a:bodyPr rtlCol="0" anchor="ctr"/>
+          <a:lstStyle/>
+          <a:p>
+            <a:pPr algn="ctr"/>
+          </a:p>
+        </p:txBody>
+      </p:sp>
+      <p:sp>
+        <p:nvSpPr>
+          <p:cNvPr id="17" name="TextBox 16"/>
+          <p:cNvSpPr txBox="1"/>
+          <p:nvPr/>
+        </p:nvSpPr>
+        <p:spPr>
+          <a:xfrm>
+            <a:off x="914400" y="3611879"/>
+            <a:ext cx="10241280" cy="320040"/>
+          </a:xfrm>
+          <a:prstGeom prst="rect">
+            <a:avLst/>
+          </a:prstGeom>
+          <a:noFill/>
+        </p:spPr>
+        <p:txBody>
+          <a:bodyPr wrap="none">
+            <a:spAutoFit/>
+          </a:bodyPr>
+          <a:lstStyle/>
+          <a:p>
+            <a:pPr>
+              <a:spcAft>
+                <a:spcPts val="200"/>
+              </a:spcAft>
+              <a:defRPr sz="1400">
+                <a:solidFill>
+                  <a:srgbClr val="ABB2BF"/>
+                </a:solidFill>
+                <a:latin typeface="Consolas"/>
+              </a:defRPr>
+            </a:pPr>
+            <a:r>
+              <a:t>• Modifying list while iterating</a:t>
+            </a:r>
+          </a:p>
+        </p:txBody>
+      </p:sp>
+      <p:sp>
+        <p:nvSpPr>
+          <p:cNvPr id="18" name="TextBox 17"/>
+          <p:cNvSpPr txBox="1"/>
+          <p:nvPr/>
+        </p:nvSpPr>
+        <p:spPr>
+          <a:xfrm>
+            <a:off x="457200" y="4160520"/>
+            <a:ext cx="11247120" cy="320040"/>
+          </a:xfrm>
+          <a:prstGeom prst="rect">
+            <a:avLst/>
+          </a:prstGeom>
+          <a:noFill/>
+        </p:spPr>
+        <p:txBody>
+          <a:bodyPr wrap="none">
+            <a:spAutoFit/>
+          </a:bodyPr>
+          <a:lstStyle/>
+          <a:p>
+            <a:pPr lvl="1">
+              <a:defRPr sz="1600">
+                <a:solidFill>
+                  <a:srgbClr val="333333"/>
+                </a:solidFill>
+              </a:defRPr>
+            </a:pPr>
+            <a:r>
+              <a:t>• Using list as default parameter</a:t>
+            </a:r>
+          </a:p>
+        </p:txBody>
+      </p:sp>
+      <p:sp>
+        <p:nvSpPr>
+          <p:cNvPr id="19" name="TextBox 18"/>
+          <p:cNvSpPr txBox="1"/>
+          <p:nvPr/>
+        </p:nvSpPr>
+        <p:spPr>
+          <a:xfrm>
+            <a:off x="457200" y="4434840"/>
+            <a:ext cx="11247120" cy="320040"/>
+          </a:xfrm>
+          <a:prstGeom prst="rect">
+            <a:avLst/>
+          </a:prstGeom>
+          <a:noFill/>
+        </p:spPr>
+        <p:txBody>
+          <a:bodyPr wrap="none">
+            <a:spAutoFit/>
+          </a:bodyPr>
+          <a:lstStyle/>
+          <a:p>
+            <a:pPr lvl="1">
+              <a:defRPr sz="1600">
+                <a:solidFill>
+                  <a:srgbClr val="333333"/>
+                </a:solidFill>
+              </a:defRPr>
+            </a:pPr>
+            <a:r>
+              <a:t>• Deep nesting (max 2-3 levels)</a:t>
+            </a:r>
+          </a:p>
+        </p:txBody>
+      </p:sp>
+      <p:sp>
+        <p:nvSpPr>
+          <p:cNvPr id="20" name="Rectangle 19"/>
+          <p:cNvSpPr/>
+          <p:nvPr/>
+        </p:nvSpPr>
+        <p:spPr>
+          <a:xfrm>
+            <a:off x="365760" y="4663440"/>
+            <a:ext cx="11430000" cy="365760"/>
+          </a:xfrm>
+          <a:prstGeom prst="rect">
+            <a:avLst/>
+          </a:prstGeom>
+          <a:solidFill>
+            <a:srgbClr val="0078D7"/>
+          </a:solidFill>
+          <a:ln>
+            <a:noFill/>
+          </a:ln>
+        </p:spPr>
+        <p:style>
+          <a:lnRef idx="1">
+            <a:schemeClr val="accent1"/>
+          </a:lnRef>
+          <a:fillRef idx="3">
+            <a:schemeClr val="accent1"/>
+          </a:fillRef>
+          <a:effectRef idx="2">
+            <a:schemeClr val="accent1"/>
+          </a:effectRef>
+          <a:fontRef idx="minor">
+            <a:schemeClr val="lt1"/>
+          </a:fontRef>
+        </p:style>
+        <p:txBody>
+          <a:bodyPr rtlCol="0" anchor="ctr"/>
+          <a:lstStyle/>
+          <a:p>
+            <a:pPr algn="ctr"/>
+          </a:p>
+        </p:txBody>
+      </p:sp>
+      <p:sp>
+        <p:nvSpPr>
+          <p:cNvPr id="21" name="TextBox 20"/>
+          <p:cNvSpPr txBox="1"/>
+          <p:nvPr/>
+        </p:nvSpPr>
+        <p:spPr>
+          <a:xfrm>
+            <a:off x="548640" y="4709159"/>
+            <a:ext cx="10972800" cy="274320"/>
+          </a:xfrm>
+          <a:prstGeom prst="rect">
+            <a:avLst/>
+          </a:prstGeom>
+          <a:noFill/>
+        </p:spPr>
+        <p:txBody>
+          <a:bodyPr wrap="none">
+            <a:spAutoFit/>
+          </a:bodyPr>
+          <a:lstStyle/>
+          <a:p>
+            <a:pPr>
+              <a:defRPr sz="2000" b="1">
+                <a:solidFill>
+                  <a:srgbClr val="FFFFFF"/>
+                </a:solidFill>
+              </a:defRPr>
+            </a:pPr>
+            <a:r>
+              <a:t>Common Mistakes:</a:t>
+            </a:r>
+          </a:p>
+        </p:txBody>
+      </p:sp>
+      <p:sp>
+        <p:nvSpPr>
+          <p:cNvPr id="22" name="TextBox 21"/>
+          <p:cNvSpPr txBox="1"/>
+          <p:nvPr/>
+        </p:nvSpPr>
+        <p:spPr>
+          <a:xfrm>
+            <a:off x="457200" y="5166359"/>
+            <a:ext cx="11247120" cy="320040"/>
+          </a:xfrm>
+          <a:prstGeom prst="rect">
+            <a:avLst/>
+          </a:prstGeom>
+          <a:noFill/>
+        </p:spPr>
+        <p:txBody>
+          <a:bodyPr wrap="none">
+            <a:spAutoFit/>
+          </a:bodyPr>
+          <a:lstStyle/>
+          <a:p>
+            <a:pPr lvl="1">
+              <a:defRPr sz="1600">
+                <a:solidFill>
+                  <a:srgbClr val="333333"/>
+                </a:solidFill>
+              </a:defRPr>
+            </a:pPr>
+            <a:r>
+              <a:t>• Index out of range</a:t>
+            </a:r>
+          </a:p>
+        </p:txBody>
+      </p:sp>
+      <p:sp>
+        <p:nvSpPr>
+          <p:cNvPr id="23" name="TextBox 22"/>
+          <p:cNvSpPr txBox="1"/>
+          <p:nvPr/>
+        </p:nvSpPr>
+        <p:spPr>
+          <a:xfrm>
+            <a:off x="457200" y="5440679"/>
+            <a:ext cx="11247120" cy="320040"/>
+          </a:xfrm>
+          <a:prstGeom prst="rect">
+            <a:avLst/>
+          </a:prstGeom>
+          <a:noFill/>
+        </p:spPr>
+        <p:txBody>
+          <a:bodyPr wrap="none">
+            <a:spAutoFit/>
+          </a:bodyPr>
+          <a:lstStyle/>
+          <a:p>
+            <a:pPr lvl="1">
+              <a:defRPr sz="1600">
+                <a:solidFill>
+                  <a:srgbClr val="333333"/>
+                </a:solidFill>
+              </a:defRPr>
+            </a:pPr>
+            <a:r>
+              <a:t>• Confusing append() and extend()</a:t>
+            </a:r>
+          </a:p>
+        </p:txBody>
+      </p:sp>
+      <p:sp>
+        <p:nvSpPr>
+          <p:cNvPr id="24" name="TextBox 23"/>
+          <p:cNvSpPr txBox="1"/>
+          <p:nvPr/>
+        </p:nvSpPr>
+        <p:spPr>
+          <a:xfrm>
+            <a:off x="457200" y="5714999"/>
+            <a:ext cx="11247120" cy="320040"/>
+          </a:xfrm>
+          <a:prstGeom prst="rect">
+            <a:avLst/>
+          </a:prstGeom>
+          <a:noFill/>
+        </p:spPr>
+        <p:txBody>
+          <a:bodyPr wrap="none">
+            <a:spAutoFit/>
+          </a:bodyPr>
+          <a:lstStyle/>
+          <a:p>
+            <a:pPr lvl="1">
+              <a:defRPr sz="1600">
+                <a:solidFill>
+                  <a:srgbClr val="333333"/>
+                </a:solidFill>
+              </a:defRPr>
+            </a:pPr>
+            <a:r>
+              <a:t>• Forgetting lists are mutable</a:t>
+            </a:r>
+          </a:p>
+        </p:txBody>
+      </p:sp>
+      <p:sp>
+        <p:nvSpPr>
+          <p:cNvPr id="25" name="TextBox 24"/>
+          <p:cNvSpPr txBox="1"/>
+          <p:nvPr/>
+        </p:nvSpPr>
+        <p:spPr>
+          <a:xfrm>
+            <a:off x="457200" y="5989319"/>
+            <a:ext cx="11247120" cy="320040"/>
+          </a:xfrm>
+          <a:prstGeom prst="rect">
+            <a:avLst/>
+          </a:prstGeom>
+          <a:noFill/>
+        </p:spPr>
+        <p:txBody>
+          <a:bodyPr wrap="none">
+            <a:spAutoFit/>
+          </a:bodyPr>
+          <a:lstStyle/>
+          <a:p>
+            <a:pPr lvl="1">
+              <a:defRPr sz="1600">
+                <a:solidFill>
+                  <a:srgbClr val="333333"/>
+                </a:solidFill>
+              </a:defRPr>
+            </a:pPr>
+            <a:r>
+              <a:t>• Not copying when needed</a:t>
+            </a:r>
+          </a:p>
+        </p:txBody>
+      </p:sp>
+    </p:spTree>
+  </p:cSld>
+  <p:clrMapOvr>
+    <a:masterClrMapping/>
+  </p:clrMapOvr>
+</p:sld>
+</file>
+
+<file path=ppt/slides/slide11.xml><?xml version="1.0" encoding="utf-8"?>
+<p:sld xmlns:a="http://schemas.openxmlformats.org/drawingml/2006/main" xmlns:p="http://schemas.openxmlformats.org/presentationml/2006/main" xmlns:r="http://schemas.openxmlformats.org/officeDocument/2006/relationships">
+  <p:cSld>
+    <p:spTree>
+      <p:nvGrpSpPr>
+        <p:cNvPr id="1" name=""/>
+        <p:cNvGrpSpPr/>
+        <p:nvPr/>
+      </p:nvGrpSpPr>
+      <p:grpSpPr/>
+      <p:sp>
+        <p:nvSpPr>
+          <p:cNvPr id="2" name="Rectangle 1"/>
+          <p:cNvSpPr/>
+          <p:nvPr/>
+        </p:nvSpPr>
+        <p:spPr>
+          <a:xfrm>
+            <a:off x="0" y="0"/>
+            <a:ext cx="12191695" cy="6858000"/>
+          </a:xfrm>
+          <a:prstGeom prst="rect">
+            <a:avLst/>
+          </a:prstGeom>
+          <a:solidFill>
+            <a:srgbClr val="0066CC"/>
+          </a:solidFill>
+          <a:ln>
+            <a:noFill/>
+          </a:ln>
+        </p:spPr>
+        <p:style>
+          <a:lnRef idx="1">
+            <a:schemeClr val="accent1"/>
+          </a:lnRef>
+          <a:fillRef idx="3">
+            <a:schemeClr val="accent1"/>
+          </a:fillRef>
+          <a:effectRef idx="2">
+            <a:schemeClr val="accent1"/>
+          </a:effectRef>
+          <a:fontRef idx="minor">
+            <a:schemeClr val="lt1"/>
+          </a:fontRef>
+        </p:style>
+        <p:txBody>
+          <a:bodyPr rtlCol="0" anchor="ctr"/>
+          <a:lstStyle/>
+          <a:p>
+            <a:pPr algn="ctr"/>
+          </a:p>
+        </p:txBody>
+      </p:sp>
+      <p:sp>
+        <p:nvSpPr>
+          <p:cNvPr id="3" name="Rectangle 2"/>
+          <p:cNvSpPr/>
+          <p:nvPr/>
+        </p:nvSpPr>
+        <p:spPr>
+          <a:xfrm>
+            <a:off x="0" y="2743200"/>
+            <a:ext cx="3657600" cy="137160"/>
+          </a:xfrm>
+          <a:prstGeom prst="rect">
+            <a:avLst/>
+          </a:prstGeom>
+          <a:solidFill>
+            <a:srgbClr val="FFBB33"/>
+          </a:solidFill>
+          <a:ln>
+            <a:noFill/>
+          </a:ln>
+        </p:spPr>
+        <p:style>
+          <a:lnRef idx="1">
+            <a:schemeClr val="accent1"/>
+          </a:lnRef>
+          <a:fillRef idx="3">
+            <a:schemeClr val="accent1"/>
+          </a:fillRef>
+          <a:effectRef idx="2">
+            <a:schemeClr val="accent1"/>
+          </a:effectRef>
+          <a:fontRef idx="minor">
+            <a:schemeClr val="lt1"/>
+          </a:fontRef>
+        </p:style>
+        <p:txBody>
+          <a:bodyPr rtlCol="0" anchor="ctr"/>
+          <a:lstStyle/>
+          <a:p>
+            <a:pPr algn="ctr"/>
+          </a:p>
+        </p:txBody>
+      </p:sp>
+      <p:sp>
+        <p:nvSpPr>
+          <p:cNvPr id="4" name="Rectangle 3"/>
+          <p:cNvSpPr/>
+          <p:nvPr/>
+        </p:nvSpPr>
+        <p:spPr>
+          <a:xfrm>
+            <a:off x="8531352" y="4114800"/>
+            <a:ext cx="3657600" cy="137160"/>
+          </a:xfrm>
+          <a:prstGeom prst="rect">
+            <a:avLst/>
+          </a:prstGeom>
+          <a:solidFill>
+            <a:srgbClr val="FFBB33"/>
+          </a:solidFill>
+          <a:ln>
+            <a:noFill/>
+          </a:ln>
+        </p:spPr>
+        <p:style>
+          <a:lnRef idx="1">
+            <a:schemeClr val="accent1"/>
+          </a:lnRef>
+          <a:fillRef idx="3">
+            <a:schemeClr val="accent1"/>
+          </a:fillRef>
+          <a:effectRef idx="2">
+            <a:schemeClr val="accent1"/>
+          </a:effectRef>
+          <a:fontRef idx="minor">
+            <a:schemeClr val="lt1"/>
+          </a:fontRef>
+        </p:style>
+        <p:txBody>
+          <a:bodyPr rtlCol="0" anchor="ctr"/>
+          <a:lstStyle/>
+          <a:p>
+            <a:pPr algn="ctr"/>
+          </a:p>
+        </p:txBody>
+      </p:sp>
+      <p:sp>
+        <p:nvSpPr>
+          <p:cNvPr id="5" name="TextBox 4"/>
+          <p:cNvSpPr txBox="1"/>
+          <p:nvPr/>
+        </p:nvSpPr>
+        <p:spPr>
+          <a:xfrm>
+            <a:off x="914400" y="2560320"/>
+            <a:ext cx="10360152" cy="1371600"/>
+          </a:xfrm>
+          <a:prstGeom prst="rect">
+            <a:avLst/>
+          </a:prstGeom>
+          <a:noFill/>
+        </p:spPr>
+        <p:txBody>
+          <a:bodyPr wrap="none">
+            <a:spAutoFit/>
+          </a:bodyPr>
+          <a:lstStyle/>
+          <a:p>
+            <a:pPr algn="ctr">
+              <a:defRPr sz="4800" b="1">
+                <a:solidFill>
+                  <a:srgbClr val="FFFFFF"/>
+                </a:solidFill>
+              </a:defRPr>
+            </a:pPr>
+            <a:r>
+              <a:t>Time to Practice!</a:t>
+            </a:r>
+          </a:p>
+        </p:txBody>
+      </p:sp>
+      <p:sp>
+        <p:nvSpPr>
+          <p:cNvPr id="6" name="TextBox 5"/>
+          <p:cNvSpPr txBox="1"/>
+          <p:nvPr/>
+        </p:nvSpPr>
+        <p:spPr>
+          <a:xfrm>
+            <a:off x="1828800" y="4389120"/>
+            <a:ext cx="8531352" cy="914400"/>
+          </a:xfrm>
+          <a:prstGeom prst="rect">
+            <a:avLst/>
+          </a:prstGeom>
+          <a:noFill/>
+        </p:spPr>
+        <p:txBody>
+          <a:bodyPr wrap="none">
+            <a:spAutoFit/>
+          </a:bodyPr>
+          <a:lstStyle/>
+          <a:p>
+            <a:pPr algn="ctr">
+              <a:defRPr sz="2400">
+                <a:solidFill>
+                  <a:srgbClr val="FFFFFF"/>
+                </a:solidFill>
+              </a:defRPr>
+            </a:pPr>
+            <a:r>
+              <a:t>Chapter 5 Exercises</a:t>
             </a:r>
           </a:p>
         </p:txBody>
@@ -3242,7 +4552,7 @@
             <a:avLst/>
           </a:prstGeom>
           <a:solidFill>
-            <a:srgbClr val="FFFFFF"/>
+            <a:srgbClr val="FAFAFA"/>
           </a:solidFill>
           <a:ln>
             <a:noFill/>
@@ -3279,7 +4589,7 @@
         <p:spPr>
           <a:xfrm>
             <a:off x="0" y="0"/>
-            <a:ext cx="12191695" cy="137160"/>
+            <a:ext cx="12191695" cy="1097280"/>
           </a:xfrm>
           <a:prstGeom prst="rect">
             <a:avLst/>
@@ -3315,13 +4625,56 @@
       </p:sp>
       <p:sp>
         <p:nvSpPr>
-          <p:cNvPr id="4" name="TextBox 3"/>
+          <p:cNvPr id="4" name="Rectangle 3"/>
+          <p:cNvSpPr/>
+          <p:nvPr/>
+        </p:nvSpPr>
+        <p:spPr>
+          <a:xfrm>
+            <a:off x="0" y="1097280"/>
+            <a:ext cx="137160" cy="5760720"/>
+          </a:xfrm>
+          <a:prstGeom prst="rect">
+            <a:avLst/>
+          </a:prstGeom>
+          <a:solidFill>
+            <a:srgbClr val="FFBB33"/>
+          </a:solidFill>
+          <a:ln>
+            <a:noFill/>
+          </a:ln>
+        </p:spPr>
+        <p:style>
+          <a:lnRef idx="1">
+            <a:schemeClr val="accent1"/>
+          </a:lnRef>
+          <a:fillRef idx="3">
+            <a:schemeClr val="accent1"/>
+          </a:fillRef>
+          <a:effectRef idx="2">
+            <a:schemeClr val="accent1"/>
+          </a:effectRef>
+          <a:fontRef idx="minor">
+            <a:schemeClr val="lt1"/>
+          </a:fontRef>
+        </p:style>
+        <p:txBody>
+          <a:bodyPr rtlCol="0" anchor="ctr"/>
+          <a:lstStyle/>
+          <a:p>
+            <a:pPr algn="ctr"/>
+          </a:p>
+        </p:txBody>
+      </p:sp>
+      <p:sp>
+        <p:nvSpPr>
+          <p:cNvPr id="5" name="TextBox 4"/>
           <p:cNvSpPr txBox="1"/>
           <p:nvPr/>
         </p:nvSpPr>
         <p:spPr>
           <a:xfrm>
-            <a:off x="457200" y="320040"/>
+            <a:off x="365760" y="274320"/>
             <a:ext cx="10972800" cy="640080"/>
           </a:xfrm>
           <a:prstGeom prst="rect">
@@ -3338,7 +4691,7 @@
             <a:pPr>
               <a:defRPr sz="3600" b="1">
                 <a:solidFill>
-                  <a:srgbClr val="003366"/>
+                  <a:srgbClr val="FFFFFF"/>
                 </a:solidFill>
               </a:defRPr>
             </a:pPr>
@@ -3350,14 +4703,57 @@
       </p:sp>
       <p:sp>
         <p:nvSpPr>
-          <p:cNvPr id="5" name="TextBox 4"/>
+          <p:cNvPr id="6" name="Rectangle 5"/>
+          <p:cNvSpPr/>
+          <p:nvPr/>
+        </p:nvSpPr>
+        <p:spPr>
+          <a:xfrm>
+            <a:off x="365760" y="1325880"/>
+            <a:ext cx="11430000" cy="365760"/>
+          </a:xfrm>
+          <a:prstGeom prst="rect">
+            <a:avLst/>
+          </a:prstGeom>
+          <a:solidFill>
+            <a:srgbClr val="0078D7"/>
+          </a:solidFill>
+          <a:ln>
+            <a:noFill/>
+          </a:ln>
+        </p:spPr>
+        <p:style>
+          <a:lnRef idx="1">
+            <a:schemeClr val="accent1"/>
+          </a:lnRef>
+          <a:fillRef idx="3">
+            <a:schemeClr val="accent1"/>
+          </a:fillRef>
+          <a:effectRef idx="2">
+            <a:schemeClr val="accent1"/>
+          </a:effectRef>
+          <a:fontRef idx="minor">
+            <a:schemeClr val="lt1"/>
+          </a:fontRef>
+        </p:style>
+        <p:txBody>
+          <a:bodyPr rtlCol="0" anchor="ctr"/>
+          <a:lstStyle/>
+          <a:p>
+            <a:pPr algn="ctr"/>
+          </a:p>
+        </p:txBody>
+      </p:sp>
+      <p:sp>
+        <p:nvSpPr>
+          <p:cNvPr id="7" name="TextBox 6"/>
           <p:cNvSpPr txBox="1"/>
           <p:nvPr/>
         </p:nvSpPr>
         <p:spPr>
           <a:xfrm>
-            <a:off x="640080" y="1188720"/>
-            <a:ext cx="10789920" cy="5303520"/>
+            <a:off x="548640" y="1371600"/>
+            <a:ext cx="10972800" cy="274320"/>
           </a:xfrm>
           <a:prstGeom prst="rect">
             <a:avLst/>
@@ -3365,30 +4761,82 @@
           <a:noFill/>
         </p:spPr>
         <p:txBody>
-          <a:bodyPr wrap="square">
+          <a:bodyPr wrap="none">
             <a:spAutoFit/>
           </a:bodyPr>
           <a:lstStyle/>
           <a:p>
             <a:pPr>
-              <a:spcAft>
-                <a:spcPts val="600"/>
-              </a:spcAft>
-              <a:defRPr b="1" sz="2000">
+              <a:defRPr sz="2000" b="1">
+                <a:solidFill>
+                  <a:srgbClr val="FFFFFF"/>
+                </a:solidFill>
+              </a:defRPr>
+            </a:pPr>
+            <a:r>
+              <a:t>Lists: Ordered collections of items</a:t>
+            </a:r>
+          </a:p>
+        </p:txBody>
+      </p:sp>
+      <p:sp>
+        <p:nvSpPr>
+          <p:cNvPr id="8" name="TextBox 7"/>
+          <p:cNvSpPr txBox="1"/>
+          <p:nvPr/>
+        </p:nvSpPr>
+        <p:spPr>
+          <a:xfrm>
+            <a:off x="457200" y="1828800"/>
+            <a:ext cx="11247120" cy="320040"/>
+          </a:xfrm>
+          <a:prstGeom prst="rect">
+            <a:avLst/>
+          </a:prstGeom>
+          <a:noFill/>
+        </p:spPr>
+        <p:txBody>
+          <a:bodyPr wrap="none">
+            <a:spAutoFit/>
+          </a:bodyPr>
+          <a:lstStyle/>
+          <a:p>
+            <a:pPr lvl="1">
+              <a:defRPr sz="1600">
                 <a:solidFill>
                   <a:srgbClr val="333333"/>
                 </a:solidFill>
               </a:defRPr>
             </a:pPr>
             <a:r>
-              <a:t>Lists: Ordered collections of items</a:t>
-            </a:r>
-          </a:p>
+              <a:t>• Can contain any data types</a:t>
+            </a:r>
+          </a:p>
+        </p:txBody>
+      </p:sp>
+      <p:sp>
+        <p:nvSpPr>
+          <p:cNvPr id="9" name="TextBox 8"/>
+          <p:cNvSpPr txBox="1"/>
+          <p:nvPr/>
+        </p:nvSpPr>
+        <p:spPr>
+          <a:xfrm>
+            <a:off x="457200" y="2103120"/>
+            <a:ext cx="11247120" cy="320040"/>
+          </a:xfrm>
+          <a:prstGeom prst="rect">
+            <a:avLst/>
+          </a:prstGeom>
+          <a:noFill/>
+        </p:spPr>
+        <p:txBody>
+          <a:bodyPr wrap="none">
+            <a:spAutoFit/>
+          </a:bodyPr>
+          <a:lstStyle/>
           <a:p>
             <a:pPr lvl="1">
-              <a:spcAft>
-                <a:spcPts val="400"/>
-              </a:spcAft>
               <a:defRPr sz="1600">
                 <a:solidFill>
                   <a:srgbClr val="333333"/>
@@ -3396,14 +4844,34 @@
               </a:defRPr>
             </a:pPr>
             <a:r>
-              <a:t>• Can contain any data types</a:t>
-            </a:r>
-          </a:p>
+              <a:t>• Mutable (can be changed)</a:t>
+            </a:r>
+          </a:p>
+        </p:txBody>
+      </p:sp>
+      <p:sp>
+        <p:nvSpPr>
+          <p:cNvPr id="10" name="TextBox 9"/>
+          <p:cNvSpPr txBox="1"/>
+          <p:nvPr/>
+        </p:nvSpPr>
+        <p:spPr>
+          <a:xfrm>
+            <a:off x="457200" y="2377439"/>
+            <a:ext cx="11247120" cy="320040"/>
+          </a:xfrm>
+          <a:prstGeom prst="rect">
+            <a:avLst/>
+          </a:prstGeom>
+          <a:noFill/>
+        </p:spPr>
+        <p:txBody>
+          <a:bodyPr wrap="none">
+            <a:spAutoFit/>
+          </a:bodyPr>
+          <a:lstStyle/>
           <a:p>
             <a:pPr lvl="1">
-              <a:spcAft>
-                <a:spcPts val="400"/>
-              </a:spcAft>
               <a:defRPr sz="1600">
                 <a:solidFill>
                   <a:srgbClr val="333333"/>
@@ -3411,74 +4879,363 @@
               </a:defRPr>
             </a:pPr>
             <a:r>
-              <a:t>• Mutable (can be changed)</a:t>
-            </a:r>
-          </a:p>
-          <a:p>
-            <a:pPr lvl="1">
-              <a:spcAft>
-                <a:spcPts val="400"/>
-              </a:spcAft>
-              <a:defRPr sz="1600">
-                <a:solidFill>
-                  <a:srgbClr val="333333"/>
-                </a:solidFill>
-              </a:defRPr>
-            </a:pPr>
-            <a:r>
               <a:t>• Indexed starting at 0</a:t>
             </a:r>
           </a:p>
+        </p:txBody>
+      </p:sp>
+      <p:sp>
+        <p:nvSpPr>
+          <p:cNvPr id="11" name="Rectangle 10"/>
+          <p:cNvSpPr/>
+          <p:nvPr/>
+        </p:nvSpPr>
+        <p:spPr>
+          <a:xfrm>
+            <a:off x="365760" y="2606039"/>
+            <a:ext cx="11430000" cy="365760"/>
+          </a:xfrm>
+          <a:prstGeom prst="rect">
+            <a:avLst/>
+          </a:prstGeom>
+          <a:solidFill>
+            <a:srgbClr val="0078D7"/>
+          </a:solidFill>
+          <a:ln>
+            <a:noFill/>
+          </a:ln>
+        </p:spPr>
+        <p:style>
+          <a:lnRef idx="1">
+            <a:schemeClr val="accent1"/>
+          </a:lnRef>
+          <a:fillRef idx="3">
+            <a:schemeClr val="accent1"/>
+          </a:fillRef>
+          <a:effectRef idx="2">
+            <a:schemeClr val="accent1"/>
+          </a:effectRef>
+          <a:fontRef idx="minor">
+            <a:schemeClr val="lt1"/>
+          </a:fontRef>
+        </p:style>
+        <p:txBody>
+          <a:bodyPr rtlCol="0" anchor="ctr"/>
+          <a:lstStyle/>
+          <a:p>
+            <a:pPr algn="ctr"/>
+          </a:p>
+        </p:txBody>
+      </p:sp>
+      <p:sp>
+        <p:nvSpPr>
+          <p:cNvPr id="12" name="TextBox 11"/>
+          <p:cNvSpPr txBox="1"/>
+          <p:nvPr/>
+        </p:nvSpPr>
+        <p:spPr>
+          <a:xfrm>
+            <a:off x="548640" y="2651759"/>
+            <a:ext cx="10972800" cy="274320"/>
+          </a:xfrm>
+          <a:prstGeom prst="rect">
+            <a:avLst/>
+          </a:prstGeom>
+          <a:noFill/>
+        </p:spPr>
+        <p:txBody>
+          <a:bodyPr wrap="none">
+            <a:spAutoFit/>
+          </a:bodyPr>
+          <a:lstStyle/>
+          <a:p>
+            <a:pPr>
+              <a:defRPr sz="2000" b="1">
+                <a:solidFill>
+                  <a:srgbClr val="FFFFFF"/>
+                </a:solidFill>
+              </a:defRPr>
+            </a:pPr>
+            <a:r>
+              <a:t>Creating Lists:</a:t>
+            </a:r>
+          </a:p>
+        </p:txBody>
+      </p:sp>
+      <p:sp>
+        <p:nvSpPr>
+          <p:cNvPr id="13" name="Rectangle 12"/>
+          <p:cNvSpPr/>
+          <p:nvPr/>
+        </p:nvSpPr>
+        <p:spPr>
+          <a:xfrm>
+            <a:off x="640080" y="3063239"/>
+            <a:ext cx="10789920" cy="1097280"/>
+          </a:xfrm>
+          <a:prstGeom prst="rect">
+            <a:avLst/>
+          </a:prstGeom>
+          <a:solidFill>
+            <a:srgbClr val="282C34"/>
+          </a:solidFill>
+          <a:ln>
+            <a:noFill/>
+          </a:ln>
+        </p:spPr>
+        <p:style>
+          <a:lnRef idx="1">
+            <a:schemeClr val="accent1"/>
+          </a:lnRef>
+          <a:fillRef idx="3">
+            <a:schemeClr val="accent1"/>
+          </a:fillRef>
+          <a:effectRef idx="2">
+            <a:schemeClr val="accent1"/>
+          </a:effectRef>
+          <a:fontRef idx="minor">
+            <a:schemeClr val="lt1"/>
+          </a:fontRef>
+        </p:style>
+        <p:txBody>
+          <a:bodyPr rtlCol="0" anchor="ctr"/>
+          <a:lstStyle/>
+          <a:p>
+            <a:pPr algn="ctr"/>
+          </a:p>
+        </p:txBody>
+      </p:sp>
+      <p:sp>
+        <p:nvSpPr>
+          <p:cNvPr id="14" name="Rectangle 13"/>
+          <p:cNvSpPr/>
+          <p:nvPr/>
+        </p:nvSpPr>
+        <p:spPr>
+          <a:xfrm>
+            <a:off x="640080" y="3063239"/>
+            <a:ext cx="73152" cy="1097280"/>
+          </a:xfrm>
+          <a:prstGeom prst="rect">
+            <a:avLst/>
+          </a:prstGeom>
+          <a:solidFill>
+            <a:srgbClr val="61AFEF"/>
+          </a:solidFill>
+          <a:ln>
+            <a:noFill/>
+          </a:ln>
+        </p:spPr>
+        <p:style>
+          <a:lnRef idx="1">
+            <a:schemeClr val="accent1"/>
+          </a:lnRef>
+          <a:fillRef idx="3">
+            <a:schemeClr val="accent1"/>
+          </a:fillRef>
+          <a:effectRef idx="2">
+            <a:schemeClr val="accent1"/>
+          </a:effectRef>
+          <a:fontRef idx="minor">
+            <a:schemeClr val="lt1"/>
+          </a:fontRef>
+        </p:style>
+        <p:txBody>
+          <a:bodyPr rtlCol="0" anchor="ctr"/>
+          <a:lstStyle/>
+          <a:p>
+            <a:pPr algn="ctr"/>
+          </a:p>
+        </p:txBody>
+      </p:sp>
+      <p:sp>
+        <p:nvSpPr>
+          <p:cNvPr id="15" name="TextBox 14"/>
+          <p:cNvSpPr txBox="1"/>
+          <p:nvPr/>
+        </p:nvSpPr>
+        <p:spPr>
+          <a:xfrm>
+            <a:off x="914400" y="3108959"/>
+            <a:ext cx="10241280" cy="1005839"/>
+          </a:xfrm>
+          <a:prstGeom prst="rect">
+            <a:avLst/>
+          </a:prstGeom>
+          <a:noFill/>
+        </p:spPr>
+        <p:txBody>
+          <a:bodyPr wrap="none">
+            <a:spAutoFit/>
+          </a:bodyPr>
+          <a:lstStyle/>
           <a:p>
             <a:pPr>
               <a:spcAft>
-                <a:spcPts val="600"/>
+                <a:spcPts val="200"/>
               </a:spcAft>
-              <a:defRPr b="1" sz="2000">
-                <a:solidFill>
-                  <a:srgbClr val="333333"/>
-                </a:solidFill>
-              </a:defRPr>
-            </a:pPr>
-            <a:r>
-              <a:t>Creating Lists:</a:t>
+              <a:defRPr sz="1400">
+                <a:solidFill>
+                  <a:srgbClr val="ABB2BF"/>
+                </a:solidFill>
+                <a:latin typeface="Consolas"/>
+              </a:defRPr>
+            </a:pPr>
+            <a:r>
+              <a:t>fruits = ["apple", "banana", "orange"]</a:t>
             </a:r>
           </a:p>
           <a:p>
             <a:pPr>
               <a:spcAft>
-                <a:spcPts val="600"/>
+                <a:spcPts val="200"/>
               </a:spcAft>
-              <a:defRPr sz="1600">
-                <a:solidFill>
-                  <a:srgbClr val="333333"/>
-                </a:solidFill>
-              </a:defRPr>
-            </a:pPr>
-            <a:r>
-              <a:t>fruits = ["apple", "banana", "orange"]</a:t>
+              <a:defRPr sz="1400">
+                <a:solidFill>
+                  <a:srgbClr val="ABB2BF"/>
+                </a:solidFill>
+                <a:latin typeface="Consolas"/>
+              </a:defRPr>
+            </a:pPr>
+            <a:r>
+              <a:t>numbers = [1, 2, 3, 4, 5]</a:t>
             </a:r>
           </a:p>
           <a:p>
             <a:pPr>
               <a:spcAft>
-                <a:spcPts val="600"/>
+                <a:spcPts val="200"/>
               </a:spcAft>
-              <a:defRPr sz="1600">
-                <a:solidFill>
-                  <a:srgbClr val="333333"/>
-                </a:solidFill>
-              </a:defRPr>
-            </a:pPr>
-            <a:r>
-              <a:t>numbers = [1, 2, 3, 4, 5]</a:t>
+              <a:defRPr sz="1400">
+                <a:solidFill>
+                  <a:srgbClr val="ABB2BF"/>
+                </a:solidFill>
+                <a:latin typeface="Consolas"/>
+              </a:defRPr>
+            </a:pPr>
+            <a:r>
+              <a:t>mixed = [1, "hello", 3.14, True]</a:t>
             </a:r>
           </a:p>
           <a:p>
             <a:pPr>
               <a:spcAft>
-                <a:spcPts val="600"/>
+                <a:spcPts val="200"/>
               </a:spcAft>
+              <a:defRPr sz="1400">
+                <a:solidFill>
+                  <a:srgbClr val="ABB2BF"/>
+                </a:solidFill>
+                <a:latin typeface="Consolas"/>
+              </a:defRPr>
+            </a:pPr>
+            <a:r>
+              <a:t>empty = []</a:t>
+            </a:r>
+          </a:p>
+        </p:txBody>
+      </p:sp>
+      <p:sp>
+        <p:nvSpPr>
+          <p:cNvPr id="16" name="Rectangle 15"/>
+          <p:cNvSpPr/>
+          <p:nvPr/>
+        </p:nvSpPr>
+        <p:spPr>
+          <a:xfrm>
+            <a:off x="365760" y="4297680"/>
+            <a:ext cx="11430000" cy="365760"/>
+          </a:xfrm>
+          <a:prstGeom prst="rect">
+            <a:avLst/>
+          </a:prstGeom>
+          <a:solidFill>
+            <a:srgbClr val="0078D7"/>
+          </a:solidFill>
+          <a:ln>
+            <a:noFill/>
+          </a:ln>
+        </p:spPr>
+        <p:style>
+          <a:lnRef idx="1">
+            <a:schemeClr val="accent1"/>
+          </a:lnRef>
+          <a:fillRef idx="3">
+            <a:schemeClr val="accent1"/>
+          </a:fillRef>
+          <a:effectRef idx="2">
+            <a:schemeClr val="accent1"/>
+          </a:effectRef>
+          <a:fontRef idx="minor">
+            <a:schemeClr val="lt1"/>
+          </a:fontRef>
+        </p:style>
+        <p:txBody>
+          <a:bodyPr rtlCol="0" anchor="ctr"/>
+          <a:lstStyle/>
+          <a:p>
+            <a:pPr algn="ctr"/>
+          </a:p>
+        </p:txBody>
+      </p:sp>
+      <p:sp>
+        <p:nvSpPr>
+          <p:cNvPr id="17" name="TextBox 16"/>
+          <p:cNvSpPr txBox="1"/>
+          <p:nvPr/>
+        </p:nvSpPr>
+        <p:spPr>
+          <a:xfrm>
+            <a:off x="548640" y="4343400"/>
+            <a:ext cx="10972800" cy="274320"/>
+          </a:xfrm>
+          <a:prstGeom prst="rect">
+            <a:avLst/>
+          </a:prstGeom>
+          <a:noFill/>
+        </p:spPr>
+        <p:txBody>
+          <a:bodyPr wrap="none">
+            <a:spAutoFit/>
+          </a:bodyPr>
+          <a:lstStyle/>
+          <a:p>
+            <a:pPr>
+              <a:defRPr sz="2000" b="1">
+                <a:solidFill>
+                  <a:srgbClr val="FFFFFF"/>
+                </a:solidFill>
+              </a:defRPr>
+            </a:pPr>
+            <a:r>
+              <a:t>Why Use Lists?:</a:t>
+            </a:r>
+          </a:p>
+        </p:txBody>
+      </p:sp>
+      <p:sp>
+        <p:nvSpPr>
+          <p:cNvPr id="18" name="TextBox 17"/>
+          <p:cNvSpPr txBox="1"/>
+          <p:nvPr/>
+        </p:nvSpPr>
+        <p:spPr>
+          <a:xfrm>
+            <a:off x="457200" y="4800600"/>
+            <a:ext cx="11247120" cy="320040"/>
+          </a:xfrm>
+          <a:prstGeom prst="rect">
+            <a:avLst/>
+          </a:prstGeom>
+          <a:noFill/>
+        </p:spPr>
+        <p:txBody>
+          <a:bodyPr wrap="none">
+            <a:spAutoFit/>
+          </a:bodyPr>
+          <a:lstStyle/>
+          <a:p>
+            <a:pPr lvl="1">
               <a:defRPr sz="1600">
                 <a:solidFill>
                   <a:srgbClr val="333333"/>
@@ -3486,14 +5243,34 @@
               </a:defRPr>
             </a:pPr>
             <a:r>
-              <a:t>mixed = [1, "hello", 3.14, True]</a:t>
-            </a:r>
-          </a:p>
-          <a:p>
-            <a:pPr>
-              <a:spcAft>
-                <a:spcPts val="600"/>
-              </a:spcAft>
+              <a:t>• Store multiple related items</a:t>
+            </a:r>
+          </a:p>
+        </p:txBody>
+      </p:sp>
+      <p:sp>
+        <p:nvSpPr>
+          <p:cNvPr id="19" name="TextBox 18"/>
+          <p:cNvSpPr txBox="1"/>
+          <p:nvPr/>
+        </p:nvSpPr>
+        <p:spPr>
+          <a:xfrm>
+            <a:off x="457200" y="5074920"/>
+            <a:ext cx="11247120" cy="320040"/>
+          </a:xfrm>
+          <a:prstGeom prst="rect">
+            <a:avLst/>
+          </a:prstGeom>
+          <a:noFill/>
+        </p:spPr>
+        <p:txBody>
+          <a:bodyPr wrap="none">
+            <a:spAutoFit/>
+          </a:bodyPr>
+          <a:lstStyle/>
+          <a:p>
+            <a:pPr lvl="1">
               <a:defRPr sz="1600">
                 <a:solidFill>
                   <a:srgbClr val="333333"/>
@@ -3501,74 +5278,69 @@
               </a:defRPr>
             </a:pPr>
             <a:r>
-              <a:t>empty = []</a:t>
-            </a:r>
-          </a:p>
-          <a:p>
-            <a:pPr>
-              <a:spcAft>
-                <a:spcPts val="600"/>
-              </a:spcAft>
-              <a:defRPr b="1" sz="2000">
+              <a:t>• Organize data</a:t>
+            </a:r>
+          </a:p>
+        </p:txBody>
+      </p:sp>
+      <p:sp>
+        <p:nvSpPr>
+          <p:cNvPr id="20" name="TextBox 19"/>
+          <p:cNvSpPr txBox="1"/>
+          <p:nvPr/>
+        </p:nvSpPr>
+        <p:spPr>
+          <a:xfrm>
+            <a:off x="457200" y="5349240"/>
+            <a:ext cx="11247120" cy="320040"/>
+          </a:xfrm>
+          <a:prstGeom prst="rect">
+            <a:avLst/>
+          </a:prstGeom>
+          <a:noFill/>
+        </p:spPr>
+        <p:txBody>
+          <a:bodyPr wrap="none">
+            <a:spAutoFit/>
+          </a:bodyPr>
+          <a:lstStyle/>
+          <a:p>
+            <a:pPr lvl="1">
+              <a:defRPr sz="1600">
                 <a:solidFill>
                   <a:srgbClr val="333333"/>
                 </a:solidFill>
               </a:defRPr>
             </a:pPr>
             <a:r>
-              <a:t>Why Use Lists?:</a:t>
-            </a:r>
-          </a:p>
+              <a:t>• Iterate through collections</a:t>
+            </a:r>
+          </a:p>
+        </p:txBody>
+      </p:sp>
+      <p:sp>
+        <p:nvSpPr>
+          <p:cNvPr id="21" name="TextBox 20"/>
+          <p:cNvSpPr txBox="1"/>
+          <p:nvPr/>
+        </p:nvSpPr>
+        <p:spPr>
+          <a:xfrm>
+            <a:off x="457200" y="5623559"/>
+            <a:ext cx="11247120" cy="320040"/>
+          </a:xfrm>
+          <a:prstGeom prst="rect">
+            <a:avLst/>
+          </a:prstGeom>
+          <a:noFill/>
+        </p:spPr>
+        <p:txBody>
+          <a:bodyPr wrap="none">
+            <a:spAutoFit/>
+          </a:bodyPr>
+          <a:lstStyle/>
           <a:p>
             <a:pPr lvl="1">
-              <a:spcAft>
-                <a:spcPts val="400"/>
-              </a:spcAft>
-              <a:defRPr sz="1600">
-                <a:solidFill>
-                  <a:srgbClr val="333333"/>
-                </a:solidFill>
-              </a:defRPr>
-            </a:pPr>
-            <a:r>
-              <a:t>• Store multiple related items</a:t>
-            </a:r>
-          </a:p>
-          <a:p>
-            <a:pPr lvl="1">
-              <a:spcAft>
-                <a:spcPts val="400"/>
-              </a:spcAft>
-              <a:defRPr sz="1600">
-                <a:solidFill>
-                  <a:srgbClr val="333333"/>
-                </a:solidFill>
-              </a:defRPr>
-            </a:pPr>
-            <a:r>
-              <a:t>• Organize data</a:t>
-            </a:r>
-          </a:p>
-          <a:p>
-            <a:pPr lvl="1">
-              <a:spcAft>
-                <a:spcPts val="400"/>
-              </a:spcAft>
-              <a:defRPr sz="1600">
-                <a:solidFill>
-                  <a:srgbClr val="333333"/>
-                </a:solidFill>
-              </a:defRPr>
-            </a:pPr>
-            <a:r>
-              <a:t>• Iterate through collections</a:t>
-            </a:r>
-          </a:p>
-          <a:p>
-            <a:pPr lvl="1">
-              <a:spcAft>
-                <a:spcPts val="400"/>
-              </a:spcAft>
               <a:defRPr sz="1600">
                 <a:solidFill>
                   <a:srgbClr val="333333"/>
@@ -3614,7 +5386,7 @@
             <a:avLst/>
           </a:prstGeom>
           <a:solidFill>
-            <a:srgbClr val="FFFFFF"/>
+            <a:srgbClr val="FAFAFA"/>
           </a:solidFill>
           <a:ln>
             <a:noFill/>
@@ -3651,7 +5423,7 @@
         <p:spPr>
           <a:xfrm>
             <a:off x="0" y="0"/>
-            <a:ext cx="12191695" cy="137160"/>
+            <a:ext cx="12191695" cy="1097280"/>
           </a:xfrm>
           <a:prstGeom prst="rect">
             <a:avLst/>
@@ -3687,13 +5459,56 @@
       </p:sp>
       <p:sp>
         <p:nvSpPr>
-          <p:cNvPr id="4" name="TextBox 3"/>
+          <p:cNvPr id="4" name="Rectangle 3"/>
+          <p:cNvSpPr/>
+          <p:nvPr/>
+        </p:nvSpPr>
+        <p:spPr>
+          <a:xfrm>
+            <a:off x="0" y="1097280"/>
+            <a:ext cx="137160" cy="5760720"/>
+          </a:xfrm>
+          <a:prstGeom prst="rect">
+            <a:avLst/>
+          </a:prstGeom>
+          <a:solidFill>
+            <a:srgbClr val="FFBB33"/>
+          </a:solidFill>
+          <a:ln>
+            <a:noFill/>
+          </a:ln>
+        </p:spPr>
+        <p:style>
+          <a:lnRef idx="1">
+            <a:schemeClr val="accent1"/>
+          </a:lnRef>
+          <a:fillRef idx="3">
+            <a:schemeClr val="accent1"/>
+          </a:fillRef>
+          <a:effectRef idx="2">
+            <a:schemeClr val="accent1"/>
+          </a:effectRef>
+          <a:fontRef idx="minor">
+            <a:schemeClr val="lt1"/>
+          </a:fontRef>
+        </p:style>
+        <p:txBody>
+          <a:bodyPr rtlCol="0" anchor="ctr"/>
+          <a:lstStyle/>
+          <a:p>
+            <a:pPr algn="ctr"/>
+          </a:p>
+        </p:txBody>
+      </p:sp>
+      <p:sp>
+        <p:nvSpPr>
+          <p:cNvPr id="5" name="TextBox 4"/>
           <p:cNvSpPr txBox="1"/>
           <p:nvPr/>
         </p:nvSpPr>
         <p:spPr>
           <a:xfrm>
-            <a:off x="457200" y="320040"/>
+            <a:off x="365760" y="274320"/>
             <a:ext cx="10972800" cy="640080"/>
           </a:xfrm>
           <a:prstGeom prst="rect">
@@ -3710,7 +5525,7 @@
             <a:pPr>
               <a:defRPr sz="3600" b="1">
                 <a:solidFill>
-                  <a:srgbClr val="003366"/>
+                  <a:srgbClr val="FFFFFF"/>
                 </a:solidFill>
               </a:defRPr>
             </a:pPr>
@@ -3722,14 +5537,57 @@
       </p:sp>
       <p:sp>
         <p:nvSpPr>
-          <p:cNvPr id="5" name="TextBox 4"/>
+          <p:cNvPr id="6" name="Rectangle 5"/>
+          <p:cNvSpPr/>
+          <p:nvPr/>
+        </p:nvSpPr>
+        <p:spPr>
+          <a:xfrm>
+            <a:off x="365760" y="1325880"/>
+            <a:ext cx="11430000" cy="365760"/>
+          </a:xfrm>
+          <a:prstGeom prst="rect">
+            <a:avLst/>
+          </a:prstGeom>
+          <a:solidFill>
+            <a:srgbClr val="0078D7"/>
+          </a:solidFill>
+          <a:ln>
+            <a:noFill/>
+          </a:ln>
+        </p:spPr>
+        <p:style>
+          <a:lnRef idx="1">
+            <a:schemeClr val="accent1"/>
+          </a:lnRef>
+          <a:fillRef idx="3">
+            <a:schemeClr val="accent1"/>
+          </a:fillRef>
+          <a:effectRef idx="2">
+            <a:schemeClr val="accent1"/>
+          </a:effectRef>
+          <a:fontRef idx="minor">
+            <a:schemeClr val="lt1"/>
+          </a:fontRef>
+        </p:style>
+        <p:txBody>
+          <a:bodyPr rtlCol="0" anchor="ctr"/>
+          <a:lstStyle/>
+          <a:p>
+            <a:pPr algn="ctr"/>
+          </a:p>
+        </p:txBody>
+      </p:sp>
+      <p:sp>
+        <p:nvSpPr>
+          <p:cNvPr id="7" name="TextBox 6"/>
           <p:cNvSpPr txBox="1"/>
           <p:nvPr/>
         </p:nvSpPr>
         <p:spPr>
           <a:xfrm>
-            <a:off x="640080" y="1188720"/>
-            <a:ext cx="10789920" cy="5303520"/>
+            <a:off x="548640" y="1371600"/>
+            <a:ext cx="10972800" cy="274320"/>
           </a:xfrm>
           <a:prstGeom prst="rect">
             <a:avLst/>
@@ -3737,18 +5595,15 @@
           <a:noFill/>
         </p:spPr>
         <p:txBody>
-          <a:bodyPr wrap="square">
+          <a:bodyPr wrap="none">
             <a:spAutoFit/>
           </a:bodyPr>
           <a:lstStyle/>
           <a:p>
             <a:pPr>
-              <a:spcAft>
-                <a:spcPts val="600"/>
-              </a:spcAft>
-              <a:defRPr b="1" sz="2000">
-                <a:solidFill>
-                  <a:srgbClr val="333333"/>
+              <a:defRPr sz="2000" b="1">
+                <a:solidFill>
+                  <a:srgbClr val="FFFFFF"/>
                 </a:solidFill>
               </a:defRPr>
             </a:pPr>
@@ -3756,199 +5611,772 @@
               <a:t>Indexing:</a:t>
             </a:r>
           </a:p>
+        </p:txBody>
+      </p:sp>
+      <p:sp>
+        <p:nvSpPr>
+          <p:cNvPr id="8" name="Rectangle 7"/>
+          <p:cNvSpPr/>
+          <p:nvPr/>
+        </p:nvSpPr>
+        <p:spPr>
+          <a:xfrm>
+            <a:off x="640080" y="1783080"/>
+            <a:ext cx="10789920" cy="411480"/>
+          </a:xfrm>
+          <a:prstGeom prst="rect">
+            <a:avLst/>
+          </a:prstGeom>
+          <a:solidFill>
+            <a:srgbClr val="282C34"/>
+          </a:solidFill>
+          <a:ln>
+            <a:noFill/>
+          </a:ln>
+        </p:spPr>
+        <p:style>
+          <a:lnRef idx="1">
+            <a:schemeClr val="accent1"/>
+          </a:lnRef>
+          <a:fillRef idx="3">
+            <a:schemeClr val="accent1"/>
+          </a:fillRef>
+          <a:effectRef idx="2">
+            <a:schemeClr val="accent1"/>
+          </a:effectRef>
+          <a:fontRef idx="minor">
+            <a:schemeClr val="lt1"/>
+          </a:fontRef>
+        </p:style>
+        <p:txBody>
+          <a:bodyPr rtlCol="0" anchor="ctr"/>
+          <a:lstStyle/>
+          <a:p>
+            <a:pPr algn="ctr"/>
+          </a:p>
+        </p:txBody>
+      </p:sp>
+      <p:sp>
+        <p:nvSpPr>
+          <p:cNvPr id="9" name="Rectangle 8"/>
+          <p:cNvSpPr/>
+          <p:nvPr/>
+        </p:nvSpPr>
+        <p:spPr>
+          <a:xfrm>
+            <a:off x="640080" y="1783080"/>
+            <a:ext cx="73152" cy="411480"/>
+          </a:xfrm>
+          <a:prstGeom prst="rect">
+            <a:avLst/>
+          </a:prstGeom>
+          <a:solidFill>
+            <a:srgbClr val="61AFEF"/>
+          </a:solidFill>
+          <a:ln>
+            <a:noFill/>
+          </a:ln>
+        </p:spPr>
+        <p:style>
+          <a:lnRef idx="1">
+            <a:schemeClr val="accent1"/>
+          </a:lnRef>
+          <a:fillRef idx="3">
+            <a:schemeClr val="accent1"/>
+          </a:fillRef>
+          <a:effectRef idx="2">
+            <a:schemeClr val="accent1"/>
+          </a:effectRef>
+          <a:fontRef idx="minor">
+            <a:schemeClr val="lt1"/>
+          </a:fontRef>
+        </p:style>
+        <p:txBody>
+          <a:bodyPr rtlCol="0" anchor="ctr"/>
+          <a:lstStyle/>
+          <a:p>
+            <a:pPr algn="ctr"/>
+          </a:p>
+        </p:txBody>
+      </p:sp>
+      <p:sp>
+        <p:nvSpPr>
+          <p:cNvPr id="10" name="TextBox 9"/>
+          <p:cNvSpPr txBox="1"/>
+          <p:nvPr/>
+        </p:nvSpPr>
+        <p:spPr>
+          <a:xfrm>
+            <a:off x="914400" y="1828800"/>
+            <a:ext cx="10241280" cy="320040"/>
+          </a:xfrm>
+          <a:prstGeom prst="rect">
+            <a:avLst/>
+          </a:prstGeom>
+          <a:noFill/>
+        </p:spPr>
+        <p:txBody>
+          <a:bodyPr wrap="none">
+            <a:spAutoFit/>
+          </a:bodyPr>
+          <a:lstStyle/>
           <a:p>
             <a:pPr>
               <a:spcAft>
-                <a:spcPts val="600"/>
+                <a:spcPts val="200"/>
               </a:spcAft>
-              <a:defRPr sz="1600">
+              <a:defRPr sz="1400">
+                <a:solidFill>
+                  <a:srgbClr val="ABB2BF"/>
+                </a:solidFill>
+                <a:latin typeface="Consolas"/>
+              </a:defRPr>
+            </a:pPr>
+            <a:r>
+              <a:t>fruits = ["apple", "banana", "orange"]</a:t>
+            </a:r>
+          </a:p>
+        </p:txBody>
+      </p:sp>
+      <p:sp>
+        <p:nvSpPr>
+          <p:cNvPr id="11" name="TextBox 10"/>
+          <p:cNvSpPr txBox="1"/>
+          <p:nvPr/>
+        </p:nvSpPr>
+        <p:spPr>
+          <a:xfrm>
+            <a:off x="457200" y="2377440"/>
+            <a:ext cx="11247120" cy="320040"/>
+          </a:xfrm>
+          <a:prstGeom prst="rect">
+            <a:avLst/>
+          </a:prstGeom>
+          <a:noFill/>
+        </p:spPr>
+        <p:txBody>
+          <a:bodyPr wrap="none">
+            <a:spAutoFit/>
+          </a:bodyPr>
+          <a:lstStyle/>
+          <a:p>
+            <a:pPr>
+              <a:defRPr sz="1700">
                 <a:solidFill>
                   <a:srgbClr val="333333"/>
                 </a:solidFill>
               </a:defRPr>
             </a:pPr>
             <a:r>
-              <a:t>fruits = ["apple", "banana", "orange"]</a:t>
-            </a:r>
-          </a:p>
+              <a:t>fruits[0]  # "apple"</a:t>
+            </a:r>
+          </a:p>
+        </p:txBody>
+      </p:sp>
+      <p:sp>
+        <p:nvSpPr>
+          <p:cNvPr id="12" name="TextBox 11"/>
+          <p:cNvSpPr txBox="1"/>
+          <p:nvPr/>
+        </p:nvSpPr>
+        <p:spPr>
+          <a:xfrm>
+            <a:off x="457200" y="2651760"/>
+            <a:ext cx="11247120" cy="320040"/>
+          </a:xfrm>
+          <a:prstGeom prst="rect">
+            <a:avLst/>
+          </a:prstGeom>
+          <a:noFill/>
+        </p:spPr>
+        <p:txBody>
+          <a:bodyPr wrap="none">
+            <a:spAutoFit/>
+          </a:bodyPr>
+          <a:lstStyle/>
           <a:p>
             <a:pPr>
-              <a:spcAft>
-                <a:spcPts val="600"/>
-              </a:spcAft>
-              <a:defRPr sz="1600">
+              <a:defRPr sz="1700">
                 <a:solidFill>
                   <a:srgbClr val="333333"/>
                 </a:solidFill>
               </a:defRPr>
             </a:pPr>
             <a:r>
-              <a:t>fruits[0]  # "apple"</a:t>
-            </a:r>
-          </a:p>
+              <a:t>fruits[1]  # "banana"</a:t>
+            </a:r>
+          </a:p>
+        </p:txBody>
+      </p:sp>
+      <p:sp>
+        <p:nvSpPr>
+          <p:cNvPr id="13" name="TextBox 12"/>
+          <p:cNvSpPr txBox="1"/>
+          <p:nvPr/>
+        </p:nvSpPr>
+        <p:spPr>
+          <a:xfrm>
+            <a:off x="457200" y="2926079"/>
+            <a:ext cx="11247120" cy="320040"/>
+          </a:xfrm>
+          <a:prstGeom prst="rect">
+            <a:avLst/>
+          </a:prstGeom>
+          <a:noFill/>
+        </p:spPr>
+        <p:txBody>
+          <a:bodyPr wrap="none">
+            <a:spAutoFit/>
+          </a:bodyPr>
+          <a:lstStyle/>
           <a:p>
             <a:pPr>
-              <a:spcAft>
-                <a:spcPts val="600"/>
-              </a:spcAft>
-              <a:defRPr sz="1600">
+              <a:defRPr sz="1700">
                 <a:solidFill>
                   <a:srgbClr val="333333"/>
                 </a:solidFill>
               </a:defRPr>
             </a:pPr>
             <a:r>
-              <a:t>fruits[1]  # "banana"</a:t>
-            </a:r>
-          </a:p>
+              <a:t>fruits[-1]  # "orange" (last)</a:t>
+            </a:r>
+          </a:p>
+        </p:txBody>
+      </p:sp>
+      <p:sp>
+        <p:nvSpPr>
+          <p:cNvPr id="14" name="Rectangle 13"/>
+          <p:cNvSpPr/>
+          <p:nvPr/>
+        </p:nvSpPr>
+        <p:spPr>
+          <a:xfrm>
+            <a:off x="365760" y="3154679"/>
+            <a:ext cx="11430000" cy="365760"/>
+          </a:xfrm>
+          <a:prstGeom prst="rect">
+            <a:avLst/>
+          </a:prstGeom>
+          <a:solidFill>
+            <a:srgbClr val="0078D7"/>
+          </a:solidFill>
+          <a:ln>
+            <a:noFill/>
+          </a:ln>
+        </p:spPr>
+        <p:style>
+          <a:lnRef idx="1">
+            <a:schemeClr val="accent1"/>
+          </a:lnRef>
+          <a:fillRef idx="3">
+            <a:schemeClr val="accent1"/>
+          </a:fillRef>
+          <a:effectRef idx="2">
+            <a:schemeClr val="accent1"/>
+          </a:effectRef>
+          <a:fontRef idx="minor">
+            <a:schemeClr val="lt1"/>
+          </a:fontRef>
+        </p:style>
+        <p:txBody>
+          <a:bodyPr rtlCol="0" anchor="ctr"/>
+          <a:lstStyle/>
+          <a:p>
+            <a:pPr algn="ctr"/>
+          </a:p>
+        </p:txBody>
+      </p:sp>
+      <p:sp>
+        <p:nvSpPr>
+          <p:cNvPr id="15" name="TextBox 14"/>
+          <p:cNvSpPr txBox="1"/>
+          <p:nvPr/>
+        </p:nvSpPr>
+        <p:spPr>
+          <a:xfrm>
+            <a:off x="548640" y="3200399"/>
+            <a:ext cx="10972800" cy="274320"/>
+          </a:xfrm>
+          <a:prstGeom prst="rect">
+            <a:avLst/>
+          </a:prstGeom>
+          <a:noFill/>
+        </p:spPr>
+        <p:txBody>
+          <a:bodyPr wrap="none">
+            <a:spAutoFit/>
+          </a:bodyPr>
+          <a:lstStyle/>
           <a:p>
             <a:pPr>
-              <a:spcAft>
-                <a:spcPts val="600"/>
-              </a:spcAft>
-              <a:defRPr sz="1600">
+              <a:defRPr sz="2000" b="1">
+                <a:solidFill>
+                  <a:srgbClr val="FFFFFF"/>
+                </a:solidFill>
+              </a:defRPr>
+            </a:pPr>
+            <a:r>
+              <a:t>Slicing:</a:t>
+            </a:r>
+          </a:p>
+        </p:txBody>
+      </p:sp>
+      <p:sp>
+        <p:nvSpPr>
+          <p:cNvPr id="16" name="Rectangle 15"/>
+          <p:cNvSpPr/>
+          <p:nvPr/>
+        </p:nvSpPr>
+        <p:spPr>
+          <a:xfrm>
+            <a:off x="365760" y="3611879"/>
+            <a:ext cx="11430000" cy="365760"/>
+          </a:xfrm>
+          <a:prstGeom prst="rect">
+            <a:avLst/>
+          </a:prstGeom>
+          <a:solidFill>
+            <a:srgbClr val="0078D7"/>
+          </a:solidFill>
+          <a:ln>
+            <a:noFill/>
+          </a:ln>
+        </p:spPr>
+        <p:style>
+          <a:lnRef idx="1">
+            <a:schemeClr val="accent1"/>
+          </a:lnRef>
+          <a:fillRef idx="3">
+            <a:schemeClr val="accent1"/>
+          </a:fillRef>
+          <a:effectRef idx="2">
+            <a:schemeClr val="accent1"/>
+          </a:effectRef>
+          <a:fontRef idx="minor">
+            <a:schemeClr val="lt1"/>
+          </a:fontRef>
+        </p:style>
+        <p:txBody>
+          <a:bodyPr rtlCol="0" anchor="ctr"/>
+          <a:lstStyle/>
+          <a:p>
+            <a:pPr algn="ctr"/>
+          </a:p>
+        </p:txBody>
+      </p:sp>
+      <p:sp>
+        <p:nvSpPr>
+          <p:cNvPr id="17" name="TextBox 16"/>
+          <p:cNvSpPr txBox="1"/>
+          <p:nvPr/>
+        </p:nvSpPr>
+        <p:spPr>
+          <a:xfrm>
+            <a:off x="548640" y="3657599"/>
+            <a:ext cx="10972800" cy="274320"/>
+          </a:xfrm>
+          <a:prstGeom prst="rect">
+            <a:avLst/>
+          </a:prstGeom>
+          <a:noFill/>
+        </p:spPr>
+        <p:txBody>
+          <a:bodyPr wrap="none">
+            <a:spAutoFit/>
+          </a:bodyPr>
+          <a:lstStyle/>
+          <a:p>
+            <a:pPr>
+              <a:defRPr sz="2000" b="1">
+                <a:solidFill>
+                  <a:srgbClr val="FFFFFF"/>
+                </a:solidFill>
+              </a:defRPr>
+            </a:pPr>
+            <a:r>
+              <a:t>fruits[0:2]  # ["apple", "banana"]</a:t>
+            </a:r>
+          </a:p>
+        </p:txBody>
+      </p:sp>
+      <p:sp>
+        <p:nvSpPr>
+          <p:cNvPr id="18" name="Rectangle 17"/>
+          <p:cNvSpPr/>
+          <p:nvPr/>
+        </p:nvSpPr>
+        <p:spPr>
+          <a:xfrm>
+            <a:off x="365760" y="4069080"/>
+            <a:ext cx="11430000" cy="365760"/>
+          </a:xfrm>
+          <a:prstGeom prst="rect">
+            <a:avLst/>
+          </a:prstGeom>
+          <a:solidFill>
+            <a:srgbClr val="0078D7"/>
+          </a:solidFill>
+          <a:ln>
+            <a:noFill/>
+          </a:ln>
+        </p:spPr>
+        <p:style>
+          <a:lnRef idx="1">
+            <a:schemeClr val="accent1"/>
+          </a:lnRef>
+          <a:fillRef idx="3">
+            <a:schemeClr val="accent1"/>
+          </a:fillRef>
+          <a:effectRef idx="2">
+            <a:schemeClr val="accent1"/>
+          </a:effectRef>
+          <a:fontRef idx="minor">
+            <a:schemeClr val="lt1"/>
+          </a:fontRef>
+        </p:style>
+        <p:txBody>
+          <a:bodyPr rtlCol="0" anchor="ctr"/>
+          <a:lstStyle/>
+          <a:p>
+            <a:pPr algn="ctr"/>
+          </a:p>
+        </p:txBody>
+      </p:sp>
+      <p:sp>
+        <p:nvSpPr>
+          <p:cNvPr id="19" name="TextBox 18"/>
+          <p:cNvSpPr txBox="1"/>
+          <p:nvPr/>
+        </p:nvSpPr>
+        <p:spPr>
+          <a:xfrm>
+            <a:off x="548640" y="4114800"/>
+            <a:ext cx="10972800" cy="274320"/>
+          </a:xfrm>
+          <a:prstGeom prst="rect">
+            <a:avLst/>
+          </a:prstGeom>
+          <a:noFill/>
+        </p:spPr>
+        <p:txBody>
+          <a:bodyPr wrap="none">
+            <a:spAutoFit/>
+          </a:bodyPr>
+          <a:lstStyle/>
+          <a:p>
+            <a:pPr>
+              <a:defRPr sz="2000" b="1">
+                <a:solidFill>
+                  <a:srgbClr val="FFFFFF"/>
+                </a:solidFill>
+              </a:defRPr>
+            </a:pPr>
+            <a:r>
+              <a:t>fruits[1:]   # ["banana", "orange"]</a:t>
+            </a:r>
+          </a:p>
+        </p:txBody>
+      </p:sp>
+      <p:sp>
+        <p:nvSpPr>
+          <p:cNvPr id="20" name="Rectangle 19"/>
+          <p:cNvSpPr/>
+          <p:nvPr/>
+        </p:nvSpPr>
+        <p:spPr>
+          <a:xfrm>
+            <a:off x="365760" y="4526280"/>
+            <a:ext cx="11430000" cy="365760"/>
+          </a:xfrm>
+          <a:prstGeom prst="rect">
+            <a:avLst/>
+          </a:prstGeom>
+          <a:solidFill>
+            <a:srgbClr val="0078D7"/>
+          </a:solidFill>
+          <a:ln>
+            <a:noFill/>
+          </a:ln>
+        </p:spPr>
+        <p:style>
+          <a:lnRef idx="1">
+            <a:schemeClr val="accent1"/>
+          </a:lnRef>
+          <a:fillRef idx="3">
+            <a:schemeClr val="accent1"/>
+          </a:fillRef>
+          <a:effectRef idx="2">
+            <a:schemeClr val="accent1"/>
+          </a:effectRef>
+          <a:fontRef idx="minor">
+            <a:schemeClr val="lt1"/>
+          </a:fontRef>
+        </p:style>
+        <p:txBody>
+          <a:bodyPr rtlCol="0" anchor="ctr"/>
+          <a:lstStyle/>
+          <a:p>
+            <a:pPr algn="ctr"/>
+          </a:p>
+        </p:txBody>
+      </p:sp>
+      <p:sp>
+        <p:nvSpPr>
+          <p:cNvPr id="21" name="TextBox 20"/>
+          <p:cNvSpPr txBox="1"/>
+          <p:nvPr/>
+        </p:nvSpPr>
+        <p:spPr>
+          <a:xfrm>
+            <a:off x="548640" y="4572000"/>
+            <a:ext cx="10972800" cy="274320"/>
+          </a:xfrm>
+          <a:prstGeom prst="rect">
+            <a:avLst/>
+          </a:prstGeom>
+          <a:noFill/>
+        </p:spPr>
+        <p:txBody>
+          <a:bodyPr wrap="none">
+            <a:spAutoFit/>
+          </a:bodyPr>
+          <a:lstStyle/>
+          <a:p>
+            <a:pPr>
+              <a:defRPr sz="2000" b="1">
+                <a:solidFill>
+                  <a:srgbClr val="FFFFFF"/>
+                </a:solidFill>
+              </a:defRPr>
+            </a:pPr>
+            <a:r>
+              <a:t>fruits[:2]   # ["apple", "banana"]</a:t>
+            </a:r>
+          </a:p>
+        </p:txBody>
+      </p:sp>
+      <p:sp>
+        <p:nvSpPr>
+          <p:cNvPr id="22" name="Rectangle 21"/>
+          <p:cNvSpPr/>
+          <p:nvPr/>
+        </p:nvSpPr>
+        <p:spPr>
+          <a:xfrm>
+            <a:off x="365760" y="4983480"/>
+            <a:ext cx="11430000" cy="365760"/>
+          </a:xfrm>
+          <a:prstGeom prst="rect">
+            <a:avLst/>
+          </a:prstGeom>
+          <a:solidFill>
+            <a:srgbClr val="0078D7"/>
+          </a:solidFill>
+          <a:ln>
+            <a:noFill/>
+          </a:ln>
+        </p:spPr>
+        <p:style>
+          <a:lnRef idx="1">
+            <a:schemeClr val="accent1"/>
+          </a:lnRef>
+          <a:fillRef idx="3">
+            <a:schemeClr val="accent1"/>
+          </a:fillRef>
+          <a:effectRef idx="2">
+            <a:schemeClr val="accent1"/>
+          </a:effectRef>
+          <a:fontRef idx="minor">
+            <a:schemeClr val="lt1"/>
+          </a:fontRef>
+        </p:style>
+        <p:txBody>
+          <a:bodyPr rtlCol="0" anchor="ctr"/>
+          <a:lstStyle/>
+          <a:p>
+            <a:pPr algn="ctr"/>
+          </a:p>
+        </p:txBody>
+      </p:sp>
+      <p:sp>
+        <p:nvSpPr>
+          <p:cNvPr id="23" name="TextBox 22"/>
+          <p:cNvSpPr txBox="1"/>
+          <p:nvPr/>
+        </p:nvSpPr>
+        <p:spPr>
+          <a:xfrm>
+            <a:off x="548640" y="5029200"/>
+            <a:ext cx="10972800" cy="274320"/>
+          </a:xfrm>
+          <a:prstGeom prst="rect">
+            <a:avLst/>
+          </a:prstGeom>
+          <a:noFill/>
+        </p:spPr>
+        <p:txBody>
+          <a:bodyPr wrap="none">
+            <a:spAutoFit/>
+          </a:bodyPr>
+          <a:lstStyle/>
+          <a:p>
+            <a:pPr>
+              <a:defRPr sz="2000" b="1">
+                <a:solidFill>
+                  <a:srgbClr val="FFFFFF"/>
+                </a:solidFill>
+              </a:defRPr>
+            </a:pPr>
+            <a:r>
+              <a:t>Length:</a:t>
+            </a:r>
+          </a:p>
+        </p:txBody>
+      </p:sp>
+      <p:sp>
+        <p:nvSpPr>
+          <p:cNvPr id="24" name="TextBox 23"/>
+          <p:cNvSpPr txBox="1"/>
+          <p:nvPr/>
+        </p:nvSpPr>
+        <p:spPr>
+          <a:xfrm>
+            <a:off x="457200" y="5486400"/>
+            <a:ext cx="11247120" cy="320040"/>
+          </a:xfrm>
+          <a:prstGeom prst="rect">
+            <a:avLst/>
+          </a:prstGeom>
+          <a:noFill/>
+        </p:spPr>
+        <p:txBody>
+          <a:bodyPr wrap="none">
+            <a:spAutoFit/>
+          </a:bodyPr>
+          <a:lstStyle/>
+          <a:p>
+            <a:pPr>
+              <a:defRPr sz="1700">
                 <a:solidFill>
                   <a:srgbClr val="333333"/>
                 </a:solidFill>
               </a:defRPr>
             </a:pPr>
             <a:r>
-              <a:t>fruits[-1]  # "orange" (last)</a:t>
-            </a:r>
-          </a:p>
+              <a:t>len(fruits)  # 3</a:t>
+            </a:r>
+          </a:p>
+        </p:txBody>
+      </p:sp>
+      <p:sp>
+        <p:nvSpPr>
+          <p:cNvPr id="25" name="Rectangle 24"/>
+          <p:cNvSpPr/>
+          <p:nvPr/>
+        </p:nvSpPr>
+        <p:spPr>
+          <a:xfrm>
+            <a:off x="365760" y="5715000"/>
+            <a:ext cx="11430000" cy="365760"/>
+          </a:xfrm>
+          <a:prstGeom prst="rect">
+            <a:avLst/>
+          </a:prstGeom>
+          <a:solidFill>
+            <a:srgbClr val="0078D7"/>
+          </a:solidFill>
+          <a:ln>
+            <a:noFill/>
+          </a:ln>
+        </p:spPr>
+        <p:style>
+          <a:lnRef idx="1">
+            <a:schemeClr val="accent1"/>
+          </a:lnRef>
+          <a:fillRef idx="3">
+            <a:schemeClr val="accent1"/>
+          </a:fillRef>
+          <a:effectRef idx="2">
+            <a:schemeClr val="accent1"/>
+          </a:effectRef>
+          <a:fontRef idx="minor">
+            <a:schemeClr val="lt1"/>
+          </a:fontRef>
+        </p:style>
+        <p:txBody>
+          <a:bodyPr rtlCol="0" anchor="ctr"/>
+          <a:lstStyle/>
+          <a:p>
+            <a:pPr algn="ctr"/>
+          </a:p>
+        </p:txBody>
+      </p:sp>
+      <p:sp>
+        <p:nvSpPr>
+          <p:cNvPr id="26" name="TextBox 25"/>
+          <p:cNvSpPr txBox="1"/>
+          <p:nvPr/>
+        </p:nvSpPr>
+        <p:spPr>
+          <a:xfrm>
+            <a:off x="548640" y="5760720"/>
+            <a:ext cx="10972800" cy="274320"/>
+          </a:xfrm>
+          <a:prstGeom prst="rect">
+            <a:avLst/>
+          </a:prstGeom>
+          <a:noFill/>
+        </p:spPr>
+        <p:txBody>
+          <a:bodyPr wrap="none">
+            <a:spAutoFit/>
+          </a:bodyPr>
+          <a:lstStyle/>
           <a:p>
             <a:pPr>
-              <a:spcAft>
-                <a:spcPts val="600"/>
-              </a:spcAft>
-              <a:defRPr b="1" sz="2000">
+              <a:defRPr sz="2000" b="1">
+                <a:solidFill>
+                  <a:srgbClr val="FFFFFF"/>
+                </a:solidFill>
+              </a:defRPr>
+            </a:pPr>
+            <a:r>
+              <a:t>Checking Membership:</a:t>
+            </a:r>
+          </a:p>
+        </p:txBody>
+      </p:sp>
+      <p:sp>
+        <p:nvSpPr>
+          <p:cNvPr id="27" name="TextBox 26"/>
+          <p:cNvSpPr txBox="1"/>
+          <p:nvPr/>
+        </p:nvSpPr>
+        <p:spPr>
+          <a:xfrm>
+            <a:off x="457200" y="6217920"/>
+            <a:ext cx="11247120" cy="320040"/>
+          </a:xfrm>
+          <a:prstGeom prst="rect">
+            <a:avLst/>
+          </a:prstGeom>
+          <a:noFill/>
+        </p:spPr>
+        <p:txBody>
+          <a:bodyPr wrap="none">
+            <a:spAutoFit/>
+          </a:bodyPr>
+          <a:lstStyle/>
+          <a:p>
+            <a:pPr>
+              <a:defRPr sz="1700">
                 <a:solidFill>
                   <a:srgbClr val="333333"/>
                 </a:solidFill>
               </a:defRPr>
             </a:pPr>
             <a:r>
-              <a:t>Slicing:</a:t>
-            </a:r>
-          </a:p>
-          <a:p>
-            <a:pPr>
-              <a:spcAft>
-                <a:spcPts val="600"/>
-              </a:spcAft>
-              <a:defRPr b="1" sz="2000">
-                <a:solidFill>
-                  <a:srgbClr val="333333"/>
-                </a:solidFill>
-              </a:defRPr>
-            </a:pPr>
-            <a:r>
-              <a:t>fruits[0:2]  # ["apple", "banana"]</a:t>
-            </a:r>
-          </a:p>
-          <a:p>
-            <a:pPr>
-              <a:spcAft>
-                <a:spcPts val="600"/>
-              </a:spcAft>
-              <a:defRPr b="1" sz="2000">
-                <a:solidFill>
-                  <a:srgbClr val="333333"/>
-                </a:solidFill>
-              </a:defRPr>
-            </a:pPr>
-            <a:r>
-              <a:t>fruits[1:]   # ["banana", "orange"]</a:t>
-            </a:r>
-          </a:p>
-          <a:p>
-            <a:pPr>
-              <a:spcAft>
-                <a:spcPts val="600"/>
-              </a:spcAft>
-              <a:defRPr b="1" sz="2000">
-                <a:solidFill>
-                  <a:srgbClr val="333333"/>
-                </a:solidFill>
-              </a:defRPr>
-            </a:pPr>
-            <a:r>
-              <a:t>fruits[:2]   # ["apple", "banana"]</a:t>
-            </a:r>
-          </a:p>
-          <a:p>
-            <a:pPr>
-              <a:spcAft>
-                <a:spcPts val="600"/>
-              </a:spcAft>
-              <a:defRPr b="1" sz="2000">
-                <a:solidFill>
-                  <a:srgbClr val="333333"/>
-                </a:solidFill>
-              </a:defRPr>
-            </a:pPr>
-            <a:r>
-              <a:t>Length:</a:t>
-            </a:r>
-          </a:p>
-          <a:p>
-            <a:pPr>
-              <a:spcAft>
-                <a:spcPts val="600"/>
-              </a:spcAft>
-              <a:defRPr sz="1600">
-                <a:solidFill>
-                  <a:srgbClr val="333333"/>
-                </a:solidFill>
-              </a:defRPr>
-            </a:pPr>
-            <a:r>
-              <a:t>len(fruits)  # 3</a:t>
-            </a:r>
-          </a:p>
-          <a:p>
-            <a:pPr>
-              <a:spcAft>
-                <a:spcPts val="600"/>
-              </a:spcAft>
-              <a:defRPr b="1" sz="2000">
-                <a:solidFill>
-                  <a:srgbClr val="333333"/>
-                </a:solidFill>
-              </a:defRPr>
-            </a:pPr>
-            <a:r>
-              <a:t>Checking Membership:</a:t>
-            </a:r>
-          </a:p>
-          <a:p>
-            <a:pPr>
-              <a:spcAft>
-                <a:spcPts val="600"/>
-              </a:spcAft>
-              <a:defRPr sz="1600">
-                <a:solidFill>
-                  <a:srgbClr val="333333"/>
-                </a:solidFill>
-              </a:defRPr>
-            </a:pPr>
-            <a:r>
               <a:t>"apple" in fruits  # True</a:t>
-            </a:r>
-          </a:p>
-          <a:p>
-            <a:pPr>
-              <a:spcAft>
-                <a:spcPts val="600"/>
-              </a:spcAft>
-              <a:defRPr sz="1600">
-                <a:solidFill>
-                  <a:srgbClr val="333333"/>
-                </a:solidFill>
-              </a:defRPr>
-            </a:pPr>
-            <a:r>
-              <a:t>"grape" not in fruits  # True</a:t>
             </a:r>
           </a:p>
         </p:txBody>
@@ -3986,7 +6414,7 @@
             <a:avLst/>
           </a:prstGeom>
           <a:solidFill>
-            <a:srgbClr val="FFFFFF"/>
+            <a:srgbClr val="FAFAFA"/>
           </a:solidFill>
           <a:ln>
             <a:noFill/>
@@ -4023,7 +6451,7 @@
         <p:spPr>
           <a:xfrm>
             <a:off x="0" y="0"/>
-            <a:ext cx="12191695" cy="137160"/>
+            <a:ext cx="12191695" cy="1097280"/>
           </a:xfrm>
           <a:prstGeom prst="rect">
             <a:avLst/>
@@ -4059,13 +6487,56 @@
       </p:sp>
       <p:sp>
         <p:nvSpPr>
-          <p:cNvPr id="4" name="TextBox 3"/>
+          <p:cNvPr id="4" name="Rectangle 3"/>
+          <p:cNvSpPr/>
+          <p:nvPr/>
+        </p:nvSpPr>
+        <p:spPr>
+          <a:xfrm>
+            <a:off x="0" y="1097280"/>
+            <a:ext cx="137160" cy="5760720"/>
+          </a:xfrm>
+          <a:prstGeom prst="rect">
+            <a:avLst/>
+          </a:prstGeom>
+          <a:solidFill>
+            <a:srgbClr val="FFBB33"/>
+          </a:solidFill>
+          <a:ln>
+            <a:noFill/>
+          </a:ln>
+        </p:spPr>
+        <p:style>
+          <a:lnRef idx="1">
+            <a:schemeClr val="accent1"/>
+          </a:lnRef>
+          <a:fillRef idx="3">
+            <a:schemeClr val="accent1"/>
+          </a:fillRef>
+          <a:effectRef idx="2">
+            <a:schemeClr val="accent1"/>
+          </a:effectRef>
+          <a:fontRef idx="minor">
+            <a:schemeClr val="lt1"/>
+          </a:fontRef>
+        </p:style>
+        <p:txBody>
+          <a:bodyPr rtlCol="0" anchor="ctr"/>
+          <a:lstStyle/>
+          <a:p>
+            <a:pPr algn="ctr"/>
+          </a:p>
+        </p:txBody>
+      </p:sp>
+      <p:sp>
+        <p:nvSpPr>
+          <p:cNvPr id="5" name="TextBox 4"/>
           <p:cNvSpPr txBox="1"/>
           <p:nvPr/>
         </p:nvSpPr>
         <p:spPr>
           <a:xfrm>
-            <a:off x="457200" y="320040"/>
+            <a:off x="365760" y="274320"/>
             <a:ext cx="10972800" cy="640080"/>
           </a:xfrm>
           <a:prstGeom prst="rect">
@@ -4082,7 +6553,7 @@
             <a:pPr>
               <a:defRPr sz="3600" b="1">
                 <a:solidFill>
-                  <a:srgbClr val="003366"/>
+                  <a:srgbClr val="FFFFFF"/>
                 </a:solidFill>
               </a:defRPr>
             </a:pPr>
@@ -4094,14 +6565,57 @@
       </p:sp>
       <p:sp>
         <p:nvSpPr>
-          <p:cNvPr id="5" name="TextBox 4"/>
+          <p:cNvPr id="6" name="Rectangle 5"/>
+          <p:cNvSpPr/>
+          <p:nvPr/>
+        </p:nvSpPr>
+        <p:spPr>
+          <a:xfrm>
+            <a:off x="365760" y="1325880"/>
+            <a:ext cx="11430000" cy="365760"/>
+          </a:xfrm>
+          <a:prstGeom prst="rect">
+            <a:avLst/>
+          </a:prstGeom>
+          <a:solidFill>
+            <a:srgbClr val="0078D7"/>
+          </a:solidFill>
+          <a:ln>
+            <a:noFill/>
+          </a:ln>
+        </p:spPr>
+        <p:style>
+          <a:lnRef idx="1">
+            <a:schemeClr val="accent1"/>
+          </a:lnRef>
+          <a:fillRef idx="3">
+            <a:schemeClr val="accent1"/>
+          </a:fillRef>
+          <a:effectRef idx="2">
+            <a:schemeClr val="accent1"/>
+          </a:effectRef>
+          <a:fontRef idx="minor">
+            <a:schemeClr val="lt1"/>
+          </a:fontRef>
+        </p:style>
+        <p:txBody>
+          <a:bodyPr rtlCol="0" anchor="ctr"/>
+          <a:lstStyle/>
+          <a:p>
+            <a:pPr algn="ctr"/>
+          </a:p>
+        </p:txBody>
+      </p:sp>
+      <p:sp>
+        <p:nvSpPr>
+          <p:cNvPr id="7" name="TextBox 6"/>
           <p:cNvSpPr txBox="1"/>
           <p:nvPr/>
         </p:nvSpPr>
         <p:spPr>
           <a:xfrm>
-            <a:off x="640080" y="1188720"/>
-            <a:ext cx="10789920" cy="5303520"/>
+            <a:off x="548640" y="1371600"/>
+            <a:ext cx="10972800" cy="274320"/>
           </a:xfrm>
           <a:prstGeom prst="rect">
             <a:avLst/>
@@ -4109,184 +6623,648 @@
           <a:noFill/>
         </p:spPr>
         <p:txBody>
-          <a:bodyPr wrap="square">
+          <a:bodyPr wrap="none">
             <a:spAutoFit/>
           </a:bodyPr>
           <a:lstStyle/>
           <a:p>
             <a:pPr>
-              <a:spcAft>
-                <a:spcPts val="600"/>
-              </a:spcAft>
-              <a:defRPr b="1" sz="2000">
+              <a:defRPr sz="2000" b="1">
+                <a:solidFill>
+                  <a:srgbClr val="FFFFFF"/>
+                </a:solidFill>
+              </a:defRPr>
+            </a:pPr>
+            <a:r>
+              <a:t>Adding Items:</a:t>
+            </a:r>
+          </a:p>
+        </p:txBody>
+      </p:sp>
+      <p:sp>
+        <p:nvSpPr>
+          <p:cNvPr id="8" name="TextBox 7"/>
+          <p:cNvSpPr txBox="1"/>
+          <p:nvPr/>
+        </p:nvSpPr>
+        <p:spPr>
+          <a:xfrm>
+            <a:off x="457200" y="1828800"/>
+            <a:ext cx="11247120" cy="320040"/>
+          </a:xfrm>
+          <a:prstGeom prst="rect">
+            <a:avLst/>
+          </a:prstGeom>
+          <a:noFill/>
+        </p:spPr>
+        <p:txBody>
+          <a:bodyPr wrap="none">
+            <a:spAutoFit/>
+          </a:bodyPr>
+          <a:lstStyle/>
+          <a:p>
+            <a:pPr>
+              <a:defRPr sz="1700">
                 <a:solidFill>
                   <a:srgbClr val="333333"/>
                 </a:solidFill>
               </a:defRPr>
             </a:pPr>
             <a:r>
-              <a:t>Adding Items:</a:t>
-            </a:r>
-          </a:p>
+              <a:t>fruits.append("grape")  # Add to end</a:t>
+            </a:r>
+          </a:p>
+        </p:txBody>
+      </p:sp>
+      <p:sp>
+        <p:nvSpPr>
+          <p:cNvPr id="9" name="TextBox 8"/>
+          <p:cNvSpPr txBox="1"/>
+          <p:nvPr/>
+        </p:nvSpPr>
+        <p:spPr>
+          <a:xfrm>
+            <a:off x="457200" y="2103120"/>
+            <a:ext cx="11247120" cy="320040"/>
+          </a:xfrm>
+          <a:prstGeom prst="rect">
+            <a:avLst/>
+          </a:prstGeom>
+          <a:noFill/>
+        </p:spPr>
+        <p:txBody>
+          <a:bodyPr wrap="none">
+            <a:spAutoFit/>
+          </a:bodyPr>
+          <a:lstStyle/>
+          <a:p>
+            <a:pPr>
+              <a:defRPr sz="1700">
+                <a:solidFill>
+                  <a:srgbClr val="333333"/>
+                </a:solidFill>
+              </a:defRPr>
+            </a:pPr>
+            <a:r>
+              <a:t>fruits.insert(1, "mango")  # Insert at index</a:t>
+            </a:r>
+          </a:p>
+        </p:txBody>
+      </p:sp>
+      <p:sp>
+        <p:nvSpPr>
+          <p:cNvPr id="10" name="TextBox 9"/>
+          <p:cNvSpPr txBox="1"/>
+          <p:nvPr/>
+        </p:nvSpPr>
+        <p:spPr>
+          <a:xfrm>
+            <a:off x="457200" y="2377439"/>
+            <a:ext cx="11247120" cy="320040"/>
+          </a:xfrm>
+          <a:prstGeom prst="rect">
+            <a:avLst/>
+          </a:prstGeom>
+          <a:noFill/>
+        </p:spPr>
+        <p:txBody>
+          <a:bodyPr wrap="none">
+            <a:spAutoFit/>
+          </a:bodyPr>
+          <a:lstStyle/>
+          <a:p>
+            <a:pPr>
+              <a:defRPr sz="1700">
+                <a:solidFill>
+                  <a:srgbClr val="333333"/>
+                </a:solidFill>
+              </a:defRPr>
+            </a:pPr>
+            <a:r>
+              <a:t>fruits.extend(["kiwi", "pear"])  # Add multiple</a:t>
+            </a:r>
+          </a:p>
+        </p:txBody>
+      </p:sp>
+      <p:sp>
+        <p:nvSpPr>
+          <p:cNvPr id="11" name="Rectangle 10"/>
+          <p:cNvSpPr/>
+          <p:nvPr/>
+        </p:nvSpPr>
+        <p:spPr>
+          <a:xfrm>
+            <a:off x="365760" y="2606039"/>
+            <a:ext cx="11430000" cy="365760"/>
+          </a:xfrm>
+          <a:prstGeom prst="rect">
+            <a:avLst/>
+          </a:prstGeom>
+          <a:solidFill>
+            <a:srgbClr val="0078D7"/>
+          </a:solidFill>
+          <a:ln>
+            <a:noFill/>
+          </a:ln>
+        </p:spPr>
+        <p:style>
+          <a:lnRef idx="1">
+            <a:schemeClr val="accent1"/>
+          </a:lnRef>
+          <a:fillRef idx="3">
+            <a:schemeClr val="accent1"/>
+          </a:fillRef>
+          <a:effectRef idx="2">
+            <a:schemeClr val="accent1"/>
+          </a:effectRef>
+          <a:fontRef idx="minor">
+            <a:schemeClr val="lt1"/>
+          </a:fontRef>
+        </p:style>
+        <p:txBody>
+          <a:bodyPr rtlCol="0" anchor="ctr"/>
+          <a:lstStyle/>
+          <a:p>
+            <a:pPr algn="ctr"/>
+          </a:p>
+        </p:txBody>
+      </p:sp>
+      <p:sp>
+        <p:nvSpPr>
+          <p:cNvPr id="12" name="TextBox 11"/>
+          <p:cNvSpPr txBox="1"/>
+          <p:nvPr/>
+        </p:nvSpPr>
+        <p:spPr>
+          <a:xfrm>
+            <a:off x="548640" y="2651759"/>
+            <a:ext cx="10972800" cy="274320"/>
+          </a:xfrm>
+          <a:prstGeom prst="rect">
+            <a:avLst/>
+          </a:prstGeom>
+          <a:noFill/>
+        </p:spPr>
+        <p:txBody>
+          <a:bodyPr wrap="none">
+            <a:spAutoFit/>
+          </a:bodyPr>
+          <a:lstStyle/>
+          <a:p>
+            <a:pPr>
+              <a:defRPr sz="2000" b="1">
+                <a:solidFill>
+                  <a:srgbClr val="FFFFFF"/>
+                </a:solidFill>
+              </a:defRPr>
+            </a:pPr>
+            <a:r>
+              <a:t>Removing Items:</a:t>
+            </a:r>
+          </a:p>
+        </p:txBody>
+      </p:sp>
+      <p:sp>
+        <p:nvSpPr>
+          <p:cNvPr id="13" name="TextBox 12"/>
+          <p:cNvSpPr txBox="1"/>
+          <p:nvPr/>
+        </p:nvSpPr>
+        <p:spPr>
+          <a:xfrm>
+            <a:off x="457200" y="3108959"/>
+            <a:ext cx="11247120" cy="320040"/>
+          </a:xfrm>
+          <a:prstGeom prst="rect">
+            <a:avLst/>
+          </a:prstGeom>
+          <a:noFill/>
+        </p:spPr>
+        <p:txBody>
+          <a:bodyPr wrap="none">
+            <a:spAutoFit/>
+          </a:bodyPr>
+          <a:lstStyle/>
+          <a:p>
+            <a:pPr>
+              <a:defRPr sz="1700">
+                <a:solidFill>
+                  <a:srgbClr val="333333"/>
+                </a:solidFill>
+              </a:defRPr>
+            </a:pPr>
+            <a:r>
+              <a:t>fruits.remove("banana")  # Remove by value</a:t>
+            </a:r>
+          </a:p>
+        </p:txBody>
+      </p:sp>
+      <p:sp>
+        <p:nvSpPr>
+          <p:cNvPr id="14" name="Rectangle 13"/>
+          <p:cNvSpPr/>
+          <p:nvPr/>
+        </p:nvSpPr>
+        <p:spPr>
+          <a:xfrm>
+            <a:off x="640080" y="3337559"/>
+            <a:ext cx="10789920" cy="640080"/>
+          </a:xfrm>
+          <a:prstGeom prst="rect">
+            <a:avLst/>
+          </a:prstGeom>
+          <a:solidFill>
+            <a:srgbClr val="282C34"/>
+          </a:solidFill>
+          <a:ln>
+            <a:noFill/>
+          </a:ln>
+        </p:spPr>
+        <p:style>
+          <a:lnRef idx="1">
+            <a:schemeClr val="accent1"/>
+          </a:lnRef>
+          <a:fillRef idx="3">
+            <a:schemeClr val="accent1"/>
+          </a:fillRef>
+          <a:effectRef idx="2">
+            <a:schemeClr val="accent1"/>
+          </a:effectRef>
+          <a:fontRef idx="minor">
+            <a:schemeClr val="lt1"/>
+          </a:fontRef>
+        </p:style>
+        <p:txBody>
+          <a:bodyPr rtlCol="0" anchor="ctr"/>
+          <a:lstStyle/>
+          <a:p>
+            <a:pPr algn="ctr"/>
+          </a:p>
+        </p:txBody>
+      </p:sp>
+      <p:sp>
+        <p:nvSpPr>
+          <p:cNvPr id="15" name="Rectangle 14"/>
+          <p:cNvSpPr/>
+          <p:nvPr/>
+        </p:nvSpPr>
+        <p:spPr>
+          <a:xfrm>
+            <a:off x="640080" y="3337559"/>
+            <a:ext cx="73152" cy="640080"/>
+          </a:xfrm>
+          <a:prstGeom prst="rect">
+            <a:avLst/>
+          </a:prstGeom>
+          <a:solidFill>
+            <a:srgbClr val="61AFEF"/>
+          </a:solidFill>
+          <a:ln>
+            <a:noFill/>
+          </a:ln>
+        </p:spPr>
+        <p:style>
+          <a:lnRef idx="1">
+            <a:schemeClr val="accent1"/>
+          </a:lnRef>
+          <a:fillRef idx="3">
+            <a:schemeClr val="accent1"/>
+          </a:fillRef>
+          <a:effectRef idx="2">
+            <a:schemeClr val="accent1"/>
+          </a:effectRef>
+          <a:fontRef idx="minor">
+            <a:schemeClr val="lt1"/>
+          </a:fontRef>
+        </p:style>
+        <p:txBody>
+          <a:bodyPr rtlCol="0" anchor="ctr"/>
+          <a:lstStyle/>
+          <a:p>
+            <a:pPr algn="ctr"/>
+          </a:p>
+        </p:txBody>
+      </p:sp>
+      <p:sp>
+        <p:nvSpPr>
+          <p:cNvPr id="16" name="TextBox 15"/>
+          <p:cNvSpPr txBox="1"/>
+          <p:nvPr/>
+        </p:nvSpPr>
+        <p:spPr>
+          <a:xfrm>
+            <a:off x="914400" y="3383279"/>
+            <a:ext cx="10241280" cy="548640"/>
+          </a:xfrm>
+          <a:prstGeom prst="rect">
+            <a:avLst/>
+          </a:prstGeom>
+          <a:noFill/>
+        </p:spPr>
+        <p:txBody>
+          <a:bodyPr wrap="none">
+            <a:spAutoFit/>
+          </a:bodyPr>
+          <a:lstStyle/>
           <a:p>
             <a:pPr>
               <a:spcAft>
-                <a:spcPts val="600"/>
+                <a:spcPts val="200"/>
               </a:spcAft>
-              <a:defRPr sz="1600">
-                <a:solidFill>
-                  <a:srgbClr val="333333"/>
-                </a:solidFill>
-              </a:defRPr>
-            </a:pPr>
-            <a:r>
-              <a:t>fruits.append("grape")  # Add to end</a:t>
+              <a:defRPr sz="1400">
+                <a:solidFill>
+                  <a:srgbClr val="ABB2BF"/>
+                </a:solidFill>
+                <a:latin typeface="Consolas"/>
+              </a:defRPr>
+            </a:pPr>
+            <a:r>
+              <a:t>item = fruits.pop()  # Remove and return last</a:t>
             </a:r>
           </a:p>
           <a:p>
             <a:pPr>
               <a:spcAft>
-                <a:spcPts val="600"/>
+                <a:spcPts val="200"/>
               </a:spcAft>
-              <a:defRPr sz="1600">
+              <a:defRPr sz="1400">
+                <a:solidFill>
+                  <a:srgbClr val="ABB2BF"/>
+                </a:solidFill>
+                <a:latin typeface="Consolas"/>
+              </a:defRPr>
+            </a:pPr>
+            <a:r>
+              <a:t>item = fruits.pop(0)  # Remove by index</a:t>
+            </a:r>
+          </a:p>
+        </p:txBody>
+      </p:sp>
+      <p:sp>
+        <p:nvSpPr>
+          <p:cNvPr id="17" name="TextBox 16"/>
+          <p:cNvSpPr txBox="1"/>
+          <p:nvPr/>
+        </p:nvSpPr>
+        <p:spPr>
+          <a:xfrm>
+            <a:off x="457200" y="4160520"/>
+            <a:ext cx="11247120" cy="320040"/>
+          </a:xfrm>
+          <a:prstGeom prst="rect">
+            <a:avLst/>
+          </a:prstGeom>
+          <a:noFill/>
+        </p:spPr>
+        <p:txBody>
+          <a:bodyPr wrap="none">
+            <a:spAutoFit/>
+          </a:bodyPr>
+          <a:lstStyle/>
+          <a:p>
+            <a:pPr>
+              <a:defRPr sz="1700">
                 <a:solidFill>
                   <a:srgbClr val="333333"/>
                 </a:solidFill>
               </a:defRPr>
             </a:pPr>
             <a:r>
-              <a:t>fruits.insert(1, "mango")  # Insert at index</a:t>
-            </a:r>
-          </a:p>
+              <a:t>del fruits[1]  # Delete by index</a:t>
+            </a:r>
+          </a:p>
+        </p:txBody>
+      </p:sp>
+      <p:sp>
+        <p:nvSpPr>
+          <p:cNvPr id="18" name="TextBox 17"/>
+          <p:cNvSpPr txBox="1"/>
+          <p:nvPr/>
+        </p:nvSpPr>
+        <p:spPr>
+          <a:xfrm>
+            <a:off x="457200" y="4434840"/>
+            <a:ext cx="11247120" cy="320040"/>
+          </a:xfrm>
+          <a:prstGeom prst="rect">
+            <a:avLst/>
+          </a:prstGeom>
+          <a:noFill/>
+        </p:spPr>
+        <p:txBody>
+          <a:bodyPr wrap="none">
+            <a:spAutoFit/>
+          </a:bodyPr>
+          <a:lstStyle/>
+          <a:p>
+            <a:pPr>
+              <a:defRPr sz="1700">
+                <a:solidFill>
+                  <a:srgbClr val="333333"/>
+                </a:solidFill>
+              </a:defRPr>
+            </a:pPr>
+            <a:r>
+              <a:t>fruits.clear()  # Remove all</a:t>
+            </a:r>
+          </a:p>
+        </p:txBody>
+      </p:sp>
+      <p:sp>
+        <p:nvSpPr>
+          <p:cNvPr id="19" name="Rectangle 18"/>
+          <p:cNvSpPr/>
+          <p:nvPr/>
+        </p:nvSpPr>
+        <p:spPr>
+          <a:xfrm>
+            <a:off x="365760" y="4663440"/>
+            <a:ext cx="11430000" cy="365760"/>
+          </a:xfrm>
+          <a:prstGeom prst="rect">
+            <a:avLst/>
+          </a:prstGeom>
+          <a:solidFill>
+            <a:srgbClr val="0078D7"/>
+          </a:solidFill>
+          <a:ln>
+            <a:noFill/>
+          </a:ln>
+        </p:spPr>
+        <p:style>
+          <a:lnRef idx="1">
+            <a:schemeClr val="accent1"/>
+          </a:lnRef>
+          <a:fillRef idx="3">
+            <a:schemeClr val="accent1"/>
+          </a:fillRef>
+          <a:effectRef idx="2">
+            <a:schemeClr val="accent1"/>
+          </a:effectRef>
+          <a:fontRef idx="minor">
+            <a:schemeClr val="lt1"/>
+          </a:fontRef>
+        </p:style>
+        <p:txBody>
+          <a:bodyPr rtlCol="0" anchor="ctr"/>
+          <a:lstStyle/>
+          <a:p>
+            <a:pPr algn="ctr"/>
+          </a:p>
+        </p:txBody>
+      </p:sp>
+      <p:sp>
+        <p:nvSpPr>
+          <p:cNvPr id="20" name="TextBox 19"/>
+          <p:cNvSpPr txBox="1"/>
+          <p:nvPr/>
+        </p:nvSpPr>
+        <p:spPr>
+          <a:xfrm>
+            <a:off x="548640" y="4709159"/>
+            <a:ext cx="10972800" cy="274320"/>
+          </a:xfrm>
+          <a:prstGeom prst="rect">
+            <a:avLst/>
+          </a:prstGeom>
+          <a:noFill/>
+        </p:spPr>
+        <p:txBody>
+          <a:bodyPr wrap="none">
+            <a:spAutoFit/>
+          </a:bodyPr>
+          <a:lstStyle/>
+          <a:p>
+            <a:pPr>
+              <a:defRPr sz="2000" b="1">
+                <a:solidFill>
+                  <a:srgbClr val="FFFFFF"/>
+                </a:solidFill>
+              </a:defRPr>
+            </a:pPr>
+            <a:r>
+              <a:t>Changing Items:</a:t>
+            </a:r>
+          </a:p>
+        </p:txBody>
+      </p:sp>
+      <p:sp>
+        <p:nvSpPr>
+          <p:cNvPr id="21" name="Rectangle 20"/>
+          <p:cNvSpPr/>
+          <p:nvPr/>
+        </p:nvSpPr>
+        <p:spPr>
+          <a:xfrm>
+            <a:off x="640080" y="5120640"/>
+            <a:ext cx="10789920" cy="411480"/>
+          </a:xfrm>
+          <a:prstGeom prst="rect">
+            <a:avLst/>
+          </a:prstGeom>
+          <a:solidFill>
+            <a:srgbClr val="282C34"/>
+          </a:solidFill>
+          <a:ln>
+            <a:noFill/>
+          </a:ln>
+        </p:spPr>
+        <p:style>
+          <a:lnRef idx="1">
+            <a:schemeClr val="accent1"/>
+          </a:lnRef>
+          <a:fillRef idx="3">
+            <a:schemeClr val="accent1"/>
+          </a:fillRef>
+          <a:effectRef idx="2">
+            <a:schemeClr val="accent1"/>
+          </a:effectRef>
+          <a:fontRef idx="minor">
+            <a:schemeClr val="lt1"/>
+          </a:fontRef>
+        </p:style>
+        <p:txBody>
+          <a:bodyPr rtlCol="0" anchor="ctr"/>
+          <a:lstStyle/>
+          <a:p>
+            <a:pPr algn="ctr"/>
+          </a:p>
+        </p:txBody>
+      </p:sp>
+      <p:sp>
+        <p:nvSpPr>
+          <p:cNvPr id="22" name="Rectangle 21"/>
+          <p:cNvSpPr/>
+          <p:nvPr/>
+        </p:nvSpPr>
+        <p:spPr>
+          <a:xfrm>
+            <a:off x="640080" y="5120640"/>
+            <a:ext cx="73152" cy="411480"/>
+          </a:xfrm>
+          <a:prstGeom prst="rect">
+            <a:avLst/>
+          </a:prstGeom>
+          <a:solidFill>
+            <a:srgbClr val="61AFEF"/>
+          </a:solidFill>
+          <a:ln>
+            <a:noFill/>
+          </a:ln>
+        </p:spPr>
+        <p:style>
+          <a:lnRef idx="1">
+            <a:schemeClr val="accent1"/>
+          </a:lnRef>
+          <a:fillRef idx="3">
+            <a:schemeClr val="accent1"/>
+          </a:fillRef>
+          <a:effectRef idx="2">
+            <a:schemeClr val="accent1"/>
+          </a:effectRef>
+          <a:fontRef idx="minor">
+            <a:schemeClr val="lt1"/>
+          </a:fontRef>
+        </p:style>
+        <p:txBody>
+          <a:bodyPr rtlCol="0" anchor="ctr"/>
+          <a:lstStyle/>
+          <a:p>
+            <a:pPr algn="ctr"/>
+          </a:p>
+        </p:txBody>
+      </p:sp>
+      <p:sp>
+        <p:nvSpPr>
+          <p:cNvPr id="23" name="TextBox 22"/>
+          <p:cNvSpPr txBox="1"/>
+          <p:nvPr/>
+        </p:nvSpPr>
+        <p:spPr>
+          <a:xfrm>
+            <a:off x="914400" y="5166359"/>
+            <a:ext cx="10241280" cy="320040"/>
+          </a:xfrm>
+          <a:prstGeom prst="rect">
+            <a:avLst/>
+          </a:prstGeom>
+          <a:noFill/>
+        </p:spPr>
+        <p:txBody>
+          <a:bodyPr wrap="none">
+            <a:spAutoFit/>
+          </a:bodyPr>
+          <a:lstStyle/>
           <a:p>
             <a:pPr>
               <a:spcAft>
-                <a:spcPts val="600"/>
+                <a:spcPts val="200"/>
               </a:spcAft>
-              <a:defRPr sz="1600">
-                <a:solidFill>
-                  <a:srgbClr val="333333"/>
-                </a:solidFill>
-              </a:defRPr>
-            </a:pPr>
-            <a:r>
-              <a:t>fruits.extend(["kiwi", "pear"])  # Add multiple</a:t>
-            </a:r>
-          </a:p>
-          <a:p>
-            <a:pPr>
-              <a:spcAft>
-                <a:spcPts val="600"/>
-              </a:spcAft>
-              <a:defRPr b="1" sz="2000">
-                <a:solidFill>
-                  <a:srgbClr val="333333"/>
-                </a:solidFill>
-              </a:defRPr>
-            </a:pPr>
-            <a:r>
-              <a:t>Removing Items:</a:t>
-            </a:r>
-          </a:p>
-          <a:p>
-            <a:pPr>
-              <a:spcAft>
-                <a:spcPts val="600"/>
-              </a:spcAft>
-              <a:defRPr sz="1600">
-                <a:solidFill>
-                  <a:srgbClr val="333333"/>
-                </a:solidFill>
-              </a:defRPr>
-            </a:pPr>
-            <a:r>
-              <a:t>fruits.remove("banana")  # Remove by value</a:t>
-            </a:r>
-          </a:p>
-          <a:p>
-            <a:pPr>
-              <a:spcAft>
-                <a:spcPts val="600"/>
-              </a:spcAft>
-              <a:defRPr sz="1600">
-                <a:solidFill>
-                  <a:srgbClr val="333333"/>
-                </a:solidFill>
-              </a:defRPr>
-            </a:pPr>
-            <a:r>
-              <a:t>item = fruits.pop()  # Remove and return last</a:t>
-            </a:r>
-          </a:p>
-          <a:p>
-            <a:pPr>
-              <a:spcAft>
-                <a:spcPts val="600"/>
-              </a:spcAft>
-              <a:defRPr sz="1600">
-                <a:solidFill>
-                  <a:srgbClr val="333333"/>
-                </a:solidFill>
-              </a:defRPr>
-            </a:pPr>
-            <a:r>
-              <a:t>item = fruits.pop(0)  # Remove by index</a:t>
-            </a:r>
-          </a:p>
-          <a:p>
-            <a:pPr>
-              <a:spcAft>
-                <a:spcPts val="600"/>
-              </a:spcAft>
-              <a:defRPr sz="1600">
-                <a:solidFill>
-                  <a:srgbClr val="333333"/>
-                </a:solidFill>
-              </a:defRPr>
-            </a:pPr>
-            <a:r>
-              <a:t>del fruits[1]  # Delete by index</a:t>
-            </a:r>
-          </a:p>
-          <a:p>
-            <a:pPr>
-              <a:spcAft>
-                <a:spcPts val="600"/>
-              </a:spcAft>
-              <a:defRPr sz="1600">
-                <a:solidFill>
-                  <a:srgbClr val="333333"/>
-                </a:solidFill>
-              </a:defRPr>
-            </a:pPr>
-            <a:r>
-              <a:t>fruits.clear()  # Remove all</a:t>
-            </a:r>
-          </a:p>
-          <a:p>
-            <a:pPr>
-              <a:spcAft>
-                <a:spcPts val="600"/>
-              </a:spcAft>
-              <a:defRPr b="1" sz="2000">
-                <a:solidFill>
-                  <a:srgbClr val="333333"/>
-                </a:solidFill>
-              </a:defRPr>
-            </a:pPr>
-            <a:r>
-              <a:t>Changing Items:</a:t>
-            </a:r>
-          </a:p>
-          <a:p>
-            <a:pPr>
-              <a:spcAft>
-                <a:spcPts val="600"/>
-              </a:spcAft>
-              <a:defRPr sz="1600">
-                <a:solidFill>
-                  <a:srgbClr val="333333"/>
-                </a:solidFill>
+              <a:defRPr sz="1400">
+                <a:solidFill>
+                  <a:srgbClr val="ABB2BF"/>
+                </a:solidFill>
+                <a:latin typeface="Consolas"/>
               </a:defRPr>
             </a:pPr>
             <a:r>
@@ -4328,7 +7306,7 @@
             <a:avLst/>
           </a:prstGeom>
           <a:solidFill>
-            <a:srgbClr val="FFFFFF"/>
+            <a:srgbClr val="FAFAFA"/>
           </a:solidFill>
           <a:ln>
             <a:noFill/>
@@ -4365,7 +7343,7 @@
         <p:spPr>
           <a:xfrm>
             <a:off x="0" y="0"/>
-            <a:ext cx="12191695" cy="137160"/>
+            <a:ext cx="12191695" cy="1097280"/>
           </a:xfrm>
           <a:prstGeom prst="rect">
             <a:avLst/>
@@ -4401,13 +7379,56 @@
       </p:sp>
       <p:sp>
         <p:nvSpPr>
-          <p:cNvPr id="4" name="TextBox 3"/>
+          <p:cNvPr id="4" name="Rectangle 3"/>
+          <p:cNvSpPr/>
+          <p:nvPr/>
+        </p:nvSpPr>
+        <p:spPr>
+          <a:xfrm>
+            <a:off x="0" y="1097280"/>
+            <a:ext cx="137160" cy="5760720"/>
+          </a:xfrm>
+          <a:prstGeom prst="rect">
+            <a:avLst/>
+          </a:prstGeom>
+          <a:solidFill>
+            <a:srgbClr val="FFBB33"/>
+          </a:solidFill>
+          <a:ln>
+            <a:noFill/>
+          </a:ln>
+        </p:spPr>
+        <p:style>
+          <a:lnRef idx="1">
+            <a:schemeClr val="accent1"/>
+          </a:lnRef>
+          <a:fillRef idx="3">
+            <a:schemeClr val="accent1"/>
+          </a:fillRef>
+          <a:effectRef idx="2">
+            <a:schemeClr val="accent1"/>
+          </a:effectRef>
+          <a:fontRef idx="minor">
+            <a:schemeClr val="lt1"/>
+          </a:fontRef>
+        </p:style>
+        <p:txBody>
+          <a:bodyPr rtlCol="0" anchor="ctr"/>
+          <a:lstStyle/>
+          <a:p>
+            <a:pPr algn="ctr"/>
+          </a:p>
+        </p:txBody>
+      </p:sp>
+      <p:sp>
+        <p:nvSpPr>
+          <p:cNvPr id="5" name="TextBox 4"/>
           <p:cNvSpPr txBox="1"/>
           <p:nvPr/>
         </p:nvSpPr>
         <p:spPr>
           <a:xfrm>
-            <a:off x="457200" y="320040"/>
+            <a:off x="365760" y="274320"/>
             <a:ext cx="10972800" cy="640080"/>
           </a:xfrm>
           <a:prstGeom prst="rect">
@@ -4424,7 +7445,7 @@
             <a:pPr>
               <a:defRPr sz="3600" b="1">
                 <a:solidFill>
-                  <a:srgbClr val="003366"/>
+                  <a:srgbClr val="FFFFFF"/>
                 </a:solidFill>
               </a:defRPr>
             </a:pPr>
@@ -4436,14 +7457,57 @@
       </p:sp>
       <p:sp>
         <p:nvSpPr>
-          <p:cNvPr id="5" name="TextBox 4"/>
+          <p:cNvPr id="6" name="Rectangle 5"/>
+          <p:cNvSpPr/>
+          <p:nvPr/>
+        </p:nvSpPr>
+        <p:spPr>
+          <a:xfrm>
+            <a:off x="365760" y="1325880"/>
+            <a:ext cx="11430000" cy="365760"/>
+          </a:xfrm>
+          <a:prstGeom prst="rect">
+            <a:avLst/>
+          </a:prstGeom>
+          <a:solidFill>
+            <a:srgbClr val="0078D7"/>
+          </a:solidFill>
+          <a:ln>
+            <a:noFill/>
+          </a:ln>
+        </p:spPr>
+        <p:style>
+          <a:lnRef idx="1">
+            <a:schemeClr val="accent1"/>
+          </a:lnRef>
+          <a:fillRef idx="3">
+            <a:schemeClr val="accent1"/>
+          </a:fillRef>
+          <a:effectRef idx="2">
+            <a:schemeClr val="accent1"/>
+          </a:effectRef>
+          <a:fontRef idx="minor">
+            <a:schemeClr val="lt1"/>
+          </a:fontRef>
+        </p:style>
+        <p:txBody>
+          <a:bodyPr rtlCol="0" anchor="ctr"/>
+          <a:lstStyle/>
+          <a:p>
+            <a:pPr algn="ctr"/>
+          </a:p>
+        </p:txBody>
+      </p:sp>
+      <p:sp>
+        <p:nvSpPr>
+          <p:cNvPr id="7" name="TextBox 6"/>
           <p:cNvSpPr txBox="1"/>
           <p:nvPr/>
         </p:nvSpPr>
         <p:spPr>
           <a:xfrm>
-            <a:off x="640080" y="1188720"/>
-            <a:ext cx="10789920" cy="5303520"/>
+            <a:off x="548640" y="1371600"/>
+            <a:ext cx="10972800" cy="274320"/>
           </a:xfrm>
           <a:prstGeom prst="rect">
             <a:avLst/>
@@ -4451,211 +7515,758 @@
           <a:noFill/>
         </p:spPr>
         <p:txBody>
-          <a:bodyPr wrap="square">
+          <a:bodyPr wrap="none">
             <a:spAutoFit/>
           </a:bodyPr>
           <a:lstStyle/>
           <a:p>
             <a:pPr>
-              <a:spcAft>
-                <a:spcPts val="600"/>
-              </a:spcAft>
-              <a:defRPr b="1" sz="2000">
+              <a:defRPr sz="2000" b="1">
+                <a:solidFill>
+                  <a:srgbClr val="FFFFFF"/>
+                </a:solidFill>
+              </a:defRPr>
+            </a:pPr>
+            <a:r>
+              <a:t>Sorting:</a:t>
+            </a:r>
+          </a:p>
+        </p:txBody>
+      </p:sp>
+      <p:sp>
+        <p:nvSpPr>
+          <p:cNvPr id="8" name="TextBox 7"/>
+          <p:cNvSpPr txBox="1"/>
+          <p:nvPr/>
+        </p:nvSpPr>
+        <p:spPr>
+          <a:xfrm>
+            <a:off x="457200" y="1828800"/>
+            <a:ext cx="11247120" cy="320040"/>
+          </a:xfrm>
+          <a:prstGeom prst="rect">
+            <a:avLst/>
+          </a:prstGeom>
+          <a:noFill/>
+        </p:spPr>
+        <p:txBody>
+          <a:bodyPr wrap="none">
+            <a:spAutoFit/>
+          </a:bodyPr>
+          <a:lstStyle/>
+          <a:p>
+            <a:pPr>
+              <a:defRPr sz="1700">
                 <a:solidFill>
                   <a:srgbClr val="333333"/>
                 </a:solidFill>
               </a:defRPr>
             </a:pPr>
             <a:r>
-              <a:t>Sorting:</a:t>
-            </a:r>
-          </a:p>
+              <a:t>numbers.sort()  # Sort in place</a:t>
+            </a:r>
+          </a:p>
+        </p:txBody>
+      </p:sp>
+      <p:sp>
+        <p:nvSpPr>
+          <p:cNvPr id="9" name="Rectangle 8"/>
+          <p:cNvSpPr/>
+          <p:nvPr/>
+        </p:nvSpPr>
+        <p:spPr>
+          <a:xfrm>
+            <a:off x="640080" y="2057400"/>
+            <a:ext cx="10789920" cy="640080"/>
+          </a:xfrm>
+          <a:prstGeom prst="rect">
+            <a:avLst/>
+          </a:prstGeom>
+          <a:solidFill>
+            <a:srgbClr val="282C34"/>
+          </a:solidFill>
+          <a:ln>
+            <a:noFill/>
+          </a:ln>
+        </p:spPr>
+        <p:style>
+          <a:lnRef idx="1">
+            <a:schemeClr val="accent1"/>
+          </a:lnRef>
+          <a:fillRef idx="3">
+            <a:schemeClr val="accent1"/>
+          </a:fillRef>
+          <a:effectRef idx="2">
+            <a:schemeClr val="accent1"/>
+          </a:effectRef>
+          <a:fontRef idx="minor">
+            <a:schemeClr val="lt1"/>
+          </a:fontRef>
+        </p:style>
+        <p:txBody>
+          <a:bodyPr rtlCol="0" anchor="ctr"/>
+          <a:lstStyle/>
+          <a:p>
+            <a:pPr algn="ctr"/>
+          </a:p>
+        </p:txBody>
+      </p:sp>
+      <p:sp>
+        <p:nvSpPr>
+          <p:cNvPr id="10" name="Rectangle 9"/>
+          <p:cNvSpPr/>
+          <p:nvPr/>
+        </p:nvSpPr>
+        <p:spPr>
+          <a:xfrm>
+            <a:off x="640080" y="2057400"/>
+            <a:ext cx="73152" cy="640080"/>
+          </a:xfrm>
+          <a:prstGeom prst="rect">
+            <a:avLst/>
+          </a:prstGeom>
+          <a:solidFill>
+            <a:srgbClr val="61AFEF"/>
+          </a:solidFill>
+          <a:ln>
+            <a:noFill/>
+          </a:ln>
+        </p:spPr>
+        <p:style>
+          <a:lnRef idx="1">
+            <a:schemeClr val="accent1"/>
+          </a:lnRef>
+          <a:fillRef idx="3">
+            <a:schemeClr val="accent1"/>
+          </a:fillRef>
+          <a:effectRef idx="2">
+            <a:schemeClr val="accent1"/>
+          </a:effectRef>
+          <a:fontRef idx="minor">
+            <a:schemeClr val="lt1"/>
+          </a:fontRef>
+        </p:style>
+        <p:txBody>
+          <a:bodyPr rtlCol="0" anchor="ctr"/>
+          <a:lstStyle/>
+          <a:p>
+            <a:pPr algn="ctr"/>
+          </a:p>
+        </p:txBody>
+      </p:sp>
+      <p:sp>
+        <p:nvSpPr>
+          <p:cNvPr id="11" name="TextBox 10"/>
+          <p:cNvSpPr txBox="1"/>
+          <p:nvPr/>
+        </p:nvSpPr>
+        <p:spPr>
+          <a:xfrm>
+            <a:off x="914400" y="2103120"/>
+            <a:ext cx="10241280" cy="548640"/>
+          </a:xfrm>
+          <a:prstGeom prst="rect">
+            <a:avLst/>
+          </a:prstGeom>
+          <a:noFill/>
+        </p:spPr>
+        <p:txBody>
+          <a:bodyPr wrap="none">
+            <a:spAutoFit/>
+          </a:bodyPr>
+          <a:lstStyle/>
           <a:p>
             <a:pPr>
               <a:spcAft>
-                <a:spcPts val="600"/>
+                <a:spcPts val="200"/>
               </a:spcAft>
-              <a:defRPr sz="1600">
-                <a:solidFill>
-                  <a:srgbClr val="333333"/>
-                </a:solidFill>
-              </a:defRPr>
-            </a:pPr>
-            <a:r>
-              <a:t>numbers.sort()  # Sort in place</a:t>
+              <a:defRPr sz="1400">
+                <a:solidFill>
+                  <a:srgbClr val="ABB2BF"/>
+                </a:solidFill>
+                <a:latin typeface="Consolas"/>
+              </a:defRPr>
+            </a:pPr>
+            <a:r>
+              <a:t>numbers.sort(reverse=True)  # Descending</a:t>
             </a:r>
           </a:p>
           <a:p>
             <a:pPr>
               <a:spcAft>
-                <a:spcPts val="600"/>
+                <a:spcPts val="200"/>
               </a:spcAft>
-              <a:defRPr sz="1600">
+              <a:defRPr sz="1400">
+                <a:solidFill>
+                  <a:srgbClr val="ABB2BF"/>
+                </a:solidFill>
+                <a:latin typeface="Consolas"/>
+              </a:defRPr>
+            </a:pPr>
+            <a:r>
+              <a:t>sorted_nums = sorted(numbers)  # Return sorted copy</a:t>
+            </a:r>
+          </a:p>
+        </p:txBody>
+      </p:sp>
+      <p:sp>
+        <p:nvSpPr>
+          <p:cNvPr id="12" name="Rectangle 11"/>
+          <p:cNvSpPr/>
+          <p:nvPr/>
+        </p:nvSpPr>
+        <p:spPr>
+          <a:xfrm>
+            <a:off x="365760" y="2834640"/>
+            <a:ext cx="11430000" cy="365760"/>
+          </a:xfrm>
+          <a:prstGeom prst="rect">
+            <a:avLst/>
+          </a:prstGeom>
+          <a:solidFill>
+            <a:srgbClr val="0078D7"/>
+          </a:solidFill>
+          <a:ln>
+            <a:noFill/>
+          </a:ln>
+        </p:spPr>
+        <p:style>
+          <a:lnRef idx="1">
+            <a:schemeClr val="accent1"/>
+          </a:lnRef>
+          <a:fillRef idx="3">
+            <a:schemeClr val="accent1"/>
+          </a:fillRef>
+          <a:effectRef idx="2">
+            <a:schemeClr val="accent1"/>
+          </a:effectRef>
+          <a:fontRef idx="minor">
+            <a:schemeClr val="lt1"/>
+          </a:fontRef>
+        </p:style>
+        <p:txBody>
+          <a:bodyPr rtlCol="0" anchor="ctr"/>
+          <a:lstStyle/>
+          <a:p>
+            <a:pPr algn="ctr"/>
+          </a:p>
+        </p:txBody>
+      </p:sp>
+      <p:sp>
+        <p:nvSpPr>
+          <p:cNvPr id="13" name="TextBox 12"/>
+          <p:cNvSpPr txBox="1"/>
+          <p:nvPr/>
+        </p:nvSpPr>
+        <p:spPr>
+          <a:xfrm>
+            <a:off x="548640" y="2880360"/>
+            <a:ext cx="10972800" cy="274320"/>
+          </a:xfrm>
+          <a:prstGeom prst="rect">
+            <a:avLst/>
+          </a:prstGeom>
+          <a:noFill/>
+        </p:spPr>
+        <p:txBody>
+          <a:bodyPr wrap="none">
+            <a:spAutoFit/>
+          </a:bodyPr>
+          <a:lstStyle/>
+          <a:p>
+            <a:pPr>
+              <a:defRPr sz="2000" b="1">
+                <a:solidFill>
+                  <a:srgbClr val="FFFFFF"/>
+                </a:solidFill>
+              </a:defRPr>
+            </a:pPr>
+            <a:r>
+              <a:t>Reversing:</a:t>
+            </a:r>
+          </a:p>
+        </p:txBody>
+      </p:sp>
+      <p:sp>
+        <p:nvSpPr>
+          <p:cNvPr id="14" name="TextBox 13"/>
+          <p:cNvSpPr txBox="1"/>
+          <p:nvPr/>
+        </p:nvSpPr>
+        <p:spPr>
+          <a:xfrm>
+            <a:off x="457200" y="3337560"/>
+            <a:ext cx="11247120" cy="320040"/>
+          </a:xfrm>
+          <a:prstGeom prst="rect">
+            <a:avLst/>
+          </a:prstGeom>
+          <a:noFill/>
+        </p:spPr>
+        <p:txBody>
+          <a:bodyPr wrap="none">
+            <a:spAutoFit/>
+          </a:bodyPr>
+          <a:lstStyle/>
+          <a:p>
+            <a:pPr>
+              <a:defRPr sz="1700">
                 <a:solidFill>
                   <a:srgbClr val="333333"/>
                 </a:solidFill>
               </a:defRPr>
             </a:pPr>
             <a:r>
-              <a:t>numbers.sort(reverse=True)  # Descending</a:t>
-            </a:r>
-          </a:p>
+              <a:t>numbers.reverse()  # Reverse in place</a:t>
+            </a:r>
+          </a:p>
+        </p:txBody>
+      </p:sp>
+      <p:sp>
+        <p:nvSpPr>
+          <p:cNvPr id="15" name="Rectangle 14"/>
+          <p:cNvSpPr/>
+          <p:nvPr/>
+        </p:nvSpPr>
+        <p:spPr>
+          <a:xfrm>
+            <a:off x="640080" y="3566160"/>
+            <a:ext cx="10789920" cy="411480"/>
+          </a:xfrm>
+          <a:prstGeom prst="rect">
+            <a:avLst/>
+          </a:prstGeom>
+          <a:solidFill>
+            <a:srgbClr val="282C34"/>
+          </a:solidFill>
+          <a:ln>
+            <a:noFill/>
+          </a:ln>
+        </p:spPr>
+        <p:style>
+          <a:lnRef idx="1">
+            <a:schemeClr val="accent1"/>
+          </a:lnRef>
+          <a:fillRef idx="3">
+            <a:schemeClr val="accent1"/>
+          </a:fillRef>
+          <a:effectRef idx="2">
+            <a:schemeClr val="accent1"/>
+          </a:effectRef>
+          <a:fontRef idx="minor">
+            <a:schemeClr val="lt1"/>
+          </a:fontRef>
+        </p:style>
+        <p:txBody>
+          <a:bodyPr rtlCol="0" anchor="ctr"/>
+          <a:lstStyle/>
+          <a:p>
+            <a:pPr algn="ctr"/>
+          </a:p>
+        </p:txBody>
+      </p:sp>
+      <p:sp>
+        <p:nvSpPr>
+          <p:cNvPr id="16" name="Rectangle 15"/>
+          <p:cNvSpPr/>
+          <p:nvPr/>
+        </p:nvSpPr>
+        <p:spPr>
+          <a:xfrm>
+            <a:off x="640080" y="3566160"/>
+            <a:ext cx="73152" cy="411480"/>
+          </a:xfrm>
+          <a:prstGeom prst="rect">
+            <a:avLst/>
+          </a:prstGeom>
+          <a:solidFill>
+            <a:srgbClr val="61AFEF"/>
+          </a:solidFill>
+          <a:ln>
+            <a:noFill/>
+          </a:ln>
+        </p:spPr>
+        <p:style>
+          <a:lnRef idx="1">
+            <a:schemeClr val="accent1"/>
+          </a:lnRef>
+          <a:fillRef idx="3">
+            <a:schemeClr val="accent1"/>
+          </a:fillRef>
+          <a:effectRef idx="2">
+            <a:schemeClr val="accent1"/>
+          </a:effectRef>
+          <a:fontRef idx="minor">
+            <a:schemeClr val="lt1"/>
+          </a:fontRef>
+        </p:style>
+        <p:txBody>
+          <a:bodyPr rtlCol="0" anchor="ctr"/>
+          <a:lstStyle/>
+          <a:p>
+            <a:pPr algn="ctr"/>
+          </a:p>
+        </p:txBody>
+      </p:sp>
+      <p:sp>
+        <p:nvSpPr>
+          <p:cNvPr id="17" name="TextBox 16"/>
+          <p:cNvSpPr txBox="1"/>
+          <p:nvPr/>
+        </p:nvSpPr>
+        <p:spPr>
+          <a:xfrm>
+            <a:off x="914400" y="3611879"/>
+            <a:ext cx="10241280" cy="320040"/>
+          </a:xfrm>
+          <a:prstGeom prst="rect">
+            <a:avLst/>
+          </a:prstGeom>
+          <a:noFill/>
+        </p:spPr>
+        <p:txBody>
+          <a:bodyPr wrap="none">
+            <a:spAutoFit/>
+          </a:bodyPr>
+          <a:lstStyle/>
           <a:p>
             <a:pPr>
               <a:spcAft>
-                <a:spcPts val="600"/>
+                <a:spcPts val="200"/>
               </a:spcAft>
-              <a:defRPr sz="1600">
+              <a:defRPr sz="1400">
+                <a:solidFill>
+                  <a:srgbClr val="ABB2BF"/>
+                </a:solidFill>
+                <a:latin typeface="Consolas"/>
+              </a:defRPr>
+            </a:pPr>
+            <a:r>
+              <a:t>reversed_nums = numbers[::-1]  # Copy reversed</a:t>
+            </a:r>
+          </a:p>
+        </p:txBody>
+      </p:sp>
+      <p:sp>
+        <p:nvSpPr>
+          <p:cNvPr id="18" name="Rectangle 17"/>
+          <p:cNvSpPr/>
+          <p:nvPr/>
+        </p:nvSpPr>
+        <p:spPr>
+          <a:xfrm>
+            <a:off x="365760" y="4114800"/>
+            <a:ext cx="11430000" cy="365760"/>
+          </a:xfrm>
+          <a:prstGeom prst="rect">
+            <a:avLst/>
+          </a:prstGeom>
+          <a:solidFill>
+            <a:srgbClr val="0078D7"/>
+          </a:solidFill>
+          <a:ln>
+            <a:noFill/>
+          </a:ln>
+        </p:spPr>
+        <p:style>
+          <a:lnRef idx="1">
+            <a:schemeClr val="accent1"/>
+          </a:lnRef>
+          <a:fillRef idx="3">
+            <a:schemeClr val="accent1"/>
+          </a:fillRef>
+          <a:effectRef idx="2">
+            <a:schemeClr val="accent1"/>
+          </a:effectRef>
+          <a:fontRef idx="minor">
+            <a:schemeClr val="lt1"/>
+          </a:fontRef>
+        </p:style>
+        <p:txBody>
+          <a:bodyPr rtlCol="0" anchor="ctr"/>
+          <a:lstStyle/>
+          <a:p>
+            <a:pPr algn="ctr"/>
+          </a:p>
+        </p:txBody>
+      </p:sp>
+      <p:sp>
+        <p:nvSpPr>
+          <p:cNvPr id="19" name="TextBox 18"/>
+          <p:cNvSpPr txBox="1"/>
+          <p:nvPr/>
+        </p:nvSpPr>
+        <p:spPr>
+          <a:xfrm>
+            <a:off x="548640" y="4160520"/>
+            <a:ext cx="10972800" cy="274320"/>
+          </a:xfrm>
+          <a:prstGeom prst="rect">
+            <a:avLst/>
+          </a:prstGeom>
+          <a:noFill/>
+        </p:spPr>
+        <p:txBody>
+          <a:bodyPr wrap="none">
+            <a:spAutoFit/>
+          </a:bodyPr>
+          <a:lstStyle/>
+          <a:p>
+            <a:pPr>
+              <a:defRPr sz="2000" b="1">
+                <a:solidFill>
+                  <a:srgbClr val="FFFFFF"/>
+                </a:solidFill>
+              </a:defRPr>
+            </a:pPr>
+            <a:r>
+              <a:t>Other Methods:</a:t>
+            </a:r>
+          </a:p>
+        </p:txBody>
+      </p:sp>
+      <p:sp>
+        <p:nvSpPr>
+          <p:cNvPr id="20" name="TextBox 19"/>
+          <p:cNvSpPr txBox="1"/>
+          <p:nvPr/>
+        </p:nvSpPr>
+        <p:spPr>
+          <a:xfrm>
+            <a:off x="457200" y="4617720"/>
+            <a:ext cx="11247120" cy="320040"/>
+          </a:xfrm>
+          <a:prstGeom prst="rect">
+            <a:avLst/>
+          </a:prstGeom>
+          <a:noFill/>
+        </p:spPr>
+        <p:txBody>
+          <a:bodyPr wrap="none">
+            <a:spAutoFit/>
+          </a:bodyPr>
+          <a:lstStyle/>
+          <a:p>
+            <a:pPr>
+              <a:defRPr sz="1700">
                 <a:solidFill>
                   <a:srgbClr val="333333"/>
                 </a:solidFill>
               </a:defRPr>
             </a:pPr>
             <a:r>
-              <a:t>sorted_nums = sorted(numbers)  # Return sorted copy</a:t>
-            </a:r>
-          </a:p>
+              <a:t>numbers.count(5)  # Count occurrences</a:t>
+            </a:r>
+          </a:p>
+        </p:txBody>
+      </p:sp>
+      <p:sp>
+        <p:nvSpPr>
+          <p:cNvPr id="21" name="TextBox 20"/>
+          <p:cNvSpPr txBox="1"/>
+          <p:nvPr/>
+        </p:nvSpPr>
+        <p:spPr>
+          <a:xfrm>
+            <a:off x="457200" y="4892040"/>
+            <a:ext cx="11247120" cy="320040"/>
+          </a:xfrm>
+          <a:prstGeom prst="rect">
+            <a:avLst/>
+          </a:prstGeom>
+          <a:noFill/>
+        </p:spPr>
+        <p:txBody>
+          <a:bodyPr wrap="none">
+            <a:spAutoFit/>
+          </a:bodyPr>
+          <a:lstStyle/>
           <a:p>
             <a:pPr>
-              <a:spcAft>
-                <a:spcPts val="600"/>
-              </a:spcAft>
-              <a:defRPr b="1" sz="2000">
+              <a:defRPr sz="1700">
                 <a:solidFill>
                   <a:srgbClr val="333333"/>
                 </a:solidFill>
               </a:defRPr>
             </a:pPr>
             <a:r>
-              <a:t>Reversing:</a:t>
-            </a:r>
-          </a:p>
+              <a:t>numbers.index(3)  # Find first index</a:t>
+            </a:r>
+          </a:p>
+        </p:txBody>
+      </p:sp>
+      <p:sp>
+        <p:nvSpPr>
+          <p:cNvPr id="22" name="TextBox 21"/>
+          <p:cNvSpPr txBox="1"/>
+          <p:nvPr/>
+        </p:nvSpPr>
+        <p:spPr>
+          <a:xfrm>
+            <a:off x="457200" y="5166359"/>
+            <a:ext cx="11247120" cy="320040"/>
+          </a:xfrm>
+          <a:prstGeom prst="rect">
+            <a:avLst/>
+          </a:prstGeom>
+          <a:noFill/>
+        </p:spPr>
+        <p:txBody>
+          <a:bodyPr wrap="none">
+            <a:spAutoFit/>
+          </a:bodyPr>
+          <a:lstStyle/>
           <a:p>
             <a:pPr>
-              <a:spcAft>
-                <a:spcPts val="600"/>
-              </a:spcAft>
-              <a:defRPr sz="1600">
+              <a:defRPr sz="1700">
                 <a:solidFill>
                   <a:srgbClr val="333333"/>
                 </a:solidFill>
               </a:defRPr>
             </a:pPr>
             <a:r>
-              <a:t>numbers.reverse()  # Reverse in place</a:t>
-            </a:r>
-          </a:p>
+              <a:t>numbers.copy()  # Shallow copy</a:t>
+            </a:r>
+          </a:p>
+        </p:txBody>
+      </p:sp>
+      <p:sp>
+        <p:nvSpPr>
+          <p:cNvPr id="23" name="Rectangle 22"/>
+          <p:cNvSpPr/>
+          <p:nvPr/>
+        </p:nvSpPr>
+        <p:spPr>
+          <a:xfrm>
+            <a:off x="365760" y="5394959"/>
+            <a:ext cx="11430000" cy="365760"/>
+          </a:xfrm>
+          <a:prstGeom prst="rect">
+            <a:avLst/>
+          </a:prstGeom>
+          <a:solidFill>
+            <a:srgbClr val="0078D7"/>
+          </a:solidFill>
+          <a:ln>
+            <a:noFill/>
+          </a:ln>
+        </p:spPr>
+        <p:style>
+          <a:lnRef idx="1">
+            <a:schemeClr val="accent1"/>
+          </a:lnRef>
+          <a:fillRef idx="3">
+            <a:schemeClr val="accent1"/>
+          </a:fillRef>
+          <a:effectRef idx="2">
+            <a:schemeClr val="accent1"/>
+          </a:effectRef>
+          <a:fontRef idx="minor">
+            <a:schemeClr val="lt1"/>
+          </a:fontRef>
+        </p:style>
+        <p:txBody>
+          <a:bodyPr rtlCol="0" anchor="ctr"/>
+          <a:lstStyle/>
+          <a:p>
+            <a:pPr algn="ctr"/>
+          </a:p>
+        </p:txBody>
+      </p:sp>
+      <p:sp>
+        <p:nvSpPr>
+          <p:cNvPr id="24" name="TextBox 23"/>
+          <p:cNvSpPr txBox="1"/>
+          <p:nvPr/>
+        </p:nvSpPr>
+        <p:spPr>
+          <a:xfrm>
+            <a:off x="548640" y="5440679"/>
+            <a:ext cx="10972800" cy="274320"/>
+          </a:xfrm>
+          <a:prstGeom prst="rect">
+            <a:avLst/>
+          </a:prstGeom>
+          <a:noFill/>
+        </p:spPr>
+        <p:txBody>
+          <a:bodyPr wrap="none">
+            <a:spAutoFit/>
+          </a:bodyPr>
+          <a:lstStyle/>
           <a:p>
             <a:pPr>
-              <a:spcAft>
-                <a:spcPts val="600"/>
-              </a:spcAft>
-              <a:defRPr b="1" sz="2000">
+              <a:defRPr sz="2000" b="1">
+                <a:solidFill>
+                  <a:srgbClr val="FFFFFF"/>
+                </a:solidFill>
+              </a:defRPr>
+            </a:pPr>
+            <a:r>
+              <a:t>Concatenation:</a:t>
+            </a:r>
+          </a:p>
+        </p:txBody>
+      </p:sp>
+      <p:sp>
+        <p:nvSpPr>
+          <p:cNvPr id="25" name="TextBox 24"/>
+          <p:cNvSpPr txBox="1"/>
+          <p:nvPr/>
+        </p:nvSpPr>
+        <p:spPr>
+          <a:xfrm>
+            <a:off x="457200" y="5897879"/>
+            <a:ext cx="11247120" cy="320040"/>
+          </a:xfrm>
+          <a:prstGeom prst="rect">
+            <a:avLst/>
+          </a:prstGeom>
+          <a:noFill/>
+        </p:spPr>
+        <p:txBody>
+          <a:bodyPr wrap="none">
+            <a:spAutoFit/>
+          </a:bodyPr>
+          <a:lstStyle/>
+          <a:p>
+            <a:pPr>
+              <a:defRPr sz="1700">
                 <a:solidFill>
                   <a:srgbClr val="333333"/>
                 </a:solidFill>
               </a:defRPr>
             </a:pPr>
             <a:r>
-              <a:t>reversed_nums = numbers[::-1]  # Copy reversed</a:t>
-            </a:r>
-          </a:p>
+              <a:t>list1 + list2  # Combine lists</a:t>
+            </a:r>
+          </a:p>
+        </p:txBody>
+      </p:sp>
+      <p:sp>
+        <p:nvSpPr>
+          <p:cNvPr id="26" name="TextBox 25"/>
+          <p:cNvSpPr txBox="1"/>
+          <p:nvPr/>
+        </p:nvSpPr>
+        <p:spPr>
+          <a:xfrm>
+            <a:off x="457200" y="6172199"/>
+            <a:ext cx="11247120" cy="320040"/>
+          </a:xfrm>
+          <a:prstGeom prst="rect">
+            <a:avLst/>
+          </a:prstGeom>
+          <a:noFill/>
+        </p:spPr>
+        <p:txBody>
+          <a:bodyPr wrap="none">
+            <a:spAutoFit/>
+          </a:bodyPr>
+          <a:lstStyle/>
           <a:p>
             <a:pPr>
-              <a:spcAft>
-                <a:spcPts val="600"/>
-              </a:spcAft>
-              <a:defRPr b="1" sz="2000">
-                <a:solidFill>
-                  <a:srgbClr val="333333"/>
-                </a:solidFill>
-              </a:defRPr>
-            </a:pPr>
-            <a:r>
-              <a:t>Other Methods:</a:t>
-            </a:r>
-          </a:p>
-          <a:p>
-            <a:pPr>
-              <a:spcAft>
-                <a:spcPts val="600"/>
-              </a:spcAft>
-              <a:defRPr sz="1600">
-                <a:solidFill>
-                  <a:srgbClr val="333333"/>
-                </a:solidFill>
-              </a:defRPr>
-            </a:pPr>
-            <a:r>
-              <a:t>numbers.count(5)  # Count occurrences</a:t>
-            </a:r>
-          </a:p>
-          <a:p>
-            <a:pPr>
-              <a:spcAft>
-                <a:spcPts val="600"/>
-              </a:spcAft>
-              <a:defRPr sz="1600">
-                <a:solidFill>
-                  <a:srgbClr val="333333"/>
-                </a:solidFill>
-              </a:defRPr>
-            </a:pPr>
-            <a:r>
-              <a:t>numbers.index(3)  # Find first index</a:t>
-            </a:r>
-          </a:p>
-          <a:p>
-            <a:pPr>
-              <a:spcAft>
-                <a:spcPts val="600"/>
-              </a:spcAft>
-              <a:defRPr sz="1600">
-                <a:solidFill>
-                  <a:srgbClr val="333333"/>
-                </a:solidFill>
-              </a:defRPr>
-            </a:pPr>
-            <a:r>
-              <a:t>numbers.copy()  # Shallow copy</a:t>
-            </a:r>
-          </a:p>
-          <a:p>
-            <a:pPr>
-              <a:spcAft>
-                <a:spcPts val="600"/>
-              </a:spcAft>
-              <a:defRPr b="1" sz="2000">
-                <a:solidFill>
-                  <a:srgbClr val="333333"/>
-                </a:solidFill>
-              </a:defRPr>
-            </a:pPr>
-            <a:r>
-              <a:t>Concatenation:</a:t>
-            </a:r>
-          </a:p>
-          <a:p>
-            <a:pPr>
-              <a:spcAft>
-                <a:spcPts val="600"/>
-              </a:spcAft>
-              <a:defRPr sz="1600">
-                <a:solidFill>
-                  <a:srgbClr val="333333"/>
-                </a:solidFill>
-              </a:defRPr>
-            </a:pPr>
-            <a:r>
-              <a:t>list1 + list2  # Combine lists</a:t>
-            </a:r>
-          </a:p>
-          <a:p>
-            <a:pPr>
-              <a:spcAft>
-                <a:spcPts val="600"/>
-              </a:spcAft>
-              <a:defRPr sz="1600">
+              <a:defRPr sz="1700">
                 <a:solidFill>
                   <a:srgbClr val="333333"/>
                 </a:solidFill>
@@ -4700,7 +8311,7 @@
             <a:avLst/>
           </a:prstGeom>
           <a:solidFill>
-            <a:srgbClr val="FFFFFF"/>
+            <a:srgbClr val="0066CC"/>
           </a:solidFill>
           <a:ln>
             <a:noFill/>
@@ -4736,14 +8347,14 @@
         </p:nvSpPr>
         <p:spPr>
           <a:xfrm>
-            <a:off x="0" y="0"/>
-            <a:ext cx="12191695" cy="137160"/>
-          </a:xfrm>
-          <a:prstGeom prst="rect">
-            <a:avLst/>
-          </a:prstGeom>
-          <a:solidFill>
-            <a:srgbClr val="0066CC"/>
+            <a:off x="0" y="2743200"/>
+            <a:ext cx="3657600" cy="137160"/>
+          </a:xfrm>
+          <a:prstGeom prst="rect">
+            <a:avLst/>
+          </a:prstGeom>
+          <a:solidFill>
+            <a:srgbClr val="FFBB33"/>
           </a:solidFill>
           <a:ln>
             <a:noFill/>
@@ -4773,14 +8384,57 @@
       </p:sp>
       <p:sp>
         <p:nvSpPr>
-          <p:cNvPr id="4" name="TextBox 3"/>
+          <p:cNvPr id="4" name="Rectangle 3"/>
+          <p:cNvSpPr/>
+          <p:nvPr/>
+        </p:nvSpPr>
+        <p:spPr>
+          <a:xfrm>
+            <a:off x="8531352" y="4114800"/>
+            <a:ext cx="3657600" cy="137160"/>
+          </a:xfrm>
+          <a:prstGeom prst="rect">
+            <a:avLst/>
+          </a:prstGeom>
+          <a:solidFill>
+            <a:srgbClr val="FFBB33"/>
+          </a:solidFill>
+          <a:ln>
+            <a:noFill/>
+          </a:ln>
+        </p:spPr>
+        <p:style>
+          <a:lnRef idx="1">
+            <a:schemeClr val="accent1"/>
+          </a:lnRef>
+          <a:fillRef idx="3">
+            <a:schemeClr val="accent1"/>
+          </a:fillRef>
+          <a:effectRef idx="2">
+            <a:schemeClr val="accent1"/>
+          </a:effectRef>
+          <a:fontRef idx="minor">
+            <a:schemeClr val="lt1"/>
+          </a:fontRef>
+        </p:style>
+        <p:txBody>
+          <a:bodyPr rtlCol="0" anchor="ctr"/>
+          <a:lstStyle/>
+          <a:p>
+            <a:pPr algn="ctr"/>
+          </a:p>
+        </p:txBody>
+      </p:sp>
+      <p:sp>
+        <p:nvSpPr>
+          <p:cNvPr id="5" name="TextBox 4"/>
           <p:cNvSpPr txBox="1"/>
           <p:nvPr/>
         </p:nvSpPr>
         <p:spPr>
           <a:xfrm>
-            <a:off x="457200" y="320040"/>
-            <a:ext cx="10972800" cy="640080"/>
+            <a:off x="914400" y="2560320"/>
+            <a:ext cx="10360152" cy="1371600"/>
           </a:xfrm>
           <a:prstGeom prst="rect">
             <a:avLst/>
@@ -4793,278 +8447,15 @@
           </a:bodyPr>
           <a:lstStyle/>
           <a:p>
-            <a:pPr>
-              <a:defRPr sz="3600" b="1">
-                <a:solidFill>
-                  <a:srgbClr val="003366"/>
+            <a:pPr algn="ctr">
+              <a:defRPr sz="4800" b="1">
+                <a:solidFill>
+                  <a:srgbClr val="FFFFFF"/>
                 </a:solidFill>
               </a:defRPr>
             </a:pPr>
             <a:r>
               <a:t>Iterating Through Lists</a:t>
-            </a:r>
-          </a:p>
-        </p:txBody>
-      </p:sp>
-      <p:sp>
-        <p:nvSpPr>
-          <p:cNvPr id="5" name="TextBox 4"/>
-          <p:cNvSpPr txBox="1"/>
-          <p:nvPr/>
-        </p:nvSpPr>
-        <p:spPr>
-          <a:xfrm>
-            <a:off x="640080" y="1188720"/>
-            <a:ext cx="10789920" cy="5303520"/>
-          </a:xfrm>
-          <a:prstGeom prst="rect">
-            <a:avLst/>
-          </a:prstGeom>
-          <a:noFill/>
-        </p:spPr>
-        <p:txBody>
-          <a:bodyPr wrap="square">
-            <a:spAutoFit/>
-          </a:bodyPr>
-          <a:lstStyle/>
-          <a:p>
-            <a:pPr>
-              <a:spcAft>
-                <a:spcPts val="600"/>
-              </a:spcAft>
-              <a:defRPr b="1" sz="2000">
-                <a:solidFill>
-                  <a:srgbClr val="333333"/>
-                </a:solidFill>
-              </a:defRPr>
-            </a:pPr>
-            <a:r>
-              <a:t>Basic Iteration:</a:t>
-            </a:r>
-          </a:p>
-          <a:p>
-            <a:pPr>
-              <a:spcAft>
-                <a:spcPts val="600"/>
-              </a:spcAft>
-              <a:defRPr b="1" sz="2000">
-                <a:solidFill>
-                  <a:srgbClr val="333333"/>
-                </a:solidFill>
-              </a:defRPr>
-            </a:pPr>
-            <a:r>
-              <a:t>for fruit in fruits:</a:t>
-            </a:r>
-          </a:p>
-          <a:p>
-            <a:pPr>
-              <a:spcAft>
-                <a:spcPts val="600"/>
-              </a:spcAft>
-              <a:defRPr sz="1600">
-                <a:solidFill>
-                  <a:srgbClr val="333333"/>
-                </a:solidFill>
-              </a:defRPr>
-            </a:pPr>
-            <a:r>
-              <a:t>    print(fruit)</a:t>
-            </a:r>
-          </a:p>
-          <a:p>
-            <a:pPr>
-              <a:spcAft>
-                <a:spcPts val="600"/>
-              </a:spcAft>
-              <a:defRPr b="1" sz="2000">
-                <a:solidFill>
-                  <a:srgbClr val="333333"/>
-                </a:solidFill>
-              </a:defRPr>
-            </a:pPr>
-            <a:r>
-              <a:t>With Index (enumerate):</a:t>
-            </a:r>
-          </a:p>
-          <a:p>
-            <a:pPr>
-              <a:spcAft>
-                <a:spcPts val="600"/>
-              </a:spcAft>
-              <a:defRPr b="1" sz="2000">
-                <a:solidFill>
-                  <a:srgbClr val="333333"/>
-                </a:solidFill>
-              </a:defRPr>
-            </a:pPr>
-            <a:r>
-              <a:t>for i, fruit in enumerate(fruits):</a:t>
-            </a:r>
-          </a:p>
-          <a:p>
-            <a:pPr>
-              <a:spcAft>
-                <a:spcPts val="600"/>
-              </a:spcAft>
-              <a:defRPr sz="1600">
-                <a:solidFill>
-                  <a:srgbClr val="333333"/>
-                </a:solidFill>
-              </a:defRPr>
-            </a:pPr>
-            <a:r>
-              <a:t>    print(f"{i}: {fruit}")</a:t>
-            </a:r>
-          </a:p>
-          <a:p>
-            <a:pPr>
-              <a:spcAft>
-                <a:spcPts val="600"/>
-              </a:spcAft>
-              <a:defRPr b="1" sz="2000">
-                <a:solidFill>
-                  <a:srgbClr val="333333"/>
-                </a:solidFill>
-              </a:defRPr>
-            </a:pPr>
-            <a:r>
-              <a:t>With Index (range):</a:t>
-            </a:r>
-          </a:p>
-          <a:p>
-            <a:pPr>
-              <a:spcAft>
-                <a:spcPts val="600"/>
-              </a:spcAft>
-              <a:defRPr b="1" sz="2000">
-                <a:solidFill>
-                  <a:srgbClr val="333333"/>
-                </a:solidFill>
-              </a:defRPr>
-            </a:pPr>
-            <a:r>
-              <a:t>for i in range(len(fruits)):</a:t>
-            </a:r>
-          </a:p>
-          <a:p>
-            <a:pPr>
-              <a:spcAft>
-                <a:spcPts val="600"/>
-              </a:spcAft>
-              <a:defRPr sz="1600">
-                <a:solidFill>
-                  <a:srgbClr val="333333"/>
-                </a:solidFill>
-              </a:defRPr>
-            </a:pPr>
-            <a:r>
-              <a:t>    print(f"{i}: {fruits[i]}")</a:t>
-            </a:r>
-          </a:p>
-          <a:p>
-            <a:pPr>
-              <a:spcAft>
-                <a:spcPts val="600"/>
-              </a:spcAft>
-              <a:defRPr b="1" sz="2000">
-                <a:solidFill>
-                  <a:srgbClr val="333333"/>
-                </a:solidFill>
-              </a:defRPr>
-            </a:pPr>
-            <a:r>
-              <a:t>List Comprehensions:</a:t>
-            </a:r>
-          </a:p>
-          <a:p>
-            <a:pPr>
-              <a:spcAft>
-                <a:spcPts val="600"/>
-              </a:spcAft>
-              <a:defRPr sz="1600">
-                <a:solidFill>
-                  <a:srgbClr val="333333"/>
-                </a:solidFill>
-              </a:defRPr>
-            </a:pPr>
-            <a:r>
-              <a:t>squares = [x**2 for x in range(10)]</a:t>
-            </a:r>
-          </a:p>
-          <a:p>
-            <a:pPr>
-              <a:spcAft>
-                <a:spcPts val="600"/>
-              </a:spcAft>
-              <a:defRPr sz="1600">
-                <a:solidFill>
-                  <a:srgbClr val="333333"/>
-                </a:solidFill>
-              </a:defRPr>
-            </a:pPr>
-            <a:r>
-              <a:t>evens = [x for x in numbers if x % 2 == 0]</a:t>
-            </a:r>
-          </a:p>
-          <a:p>
-            <a:pPr>
-              <a:spcAft>
-                <a:spcPts val="600"/>
-              </a:spcAft>
-              <a:defRPr b="1" sz="2000">
-                <a:solidFill>
-                  <a:srgbClr val="333333"/>
-                </a:solidFill>
-              </a:defRPr>
-            </a:pPr>
-            <a:r>
-              <a:t>Processing:</a:t>
-            </a:r>
-          </a:p>
-          <a:p>
-            <a:pPr>
-              <a:spcAft>
-                <a:spcPts val="600"/>
-              </a:spcAft>
-              <a:defRPr sz="1600">
-                <a:solidFill>
-                  <a:srgbClr val="333333"/>
-                </a:solidFill>
-              </a:defRPr>
-            </a:pPr>
-            <a:r>
-              <a:t>total = sum(numbers)</a:t>
-            </a:r>
-          </a:p>
-          <a:p>
-            <a:pPr>
-              <a:spcAft>
-                <a:spcPts val="600"/>
-              </a:spcAft>
-              <a:defRPr sz="1600">
-                <a:solidFill>
-                  <a:srgbClr val="333333"/>
-                </a:solidFill>
-              </a:defRPr>
-            </a:pPr>
-            <a:r>
-              <a:t>maximum = max(numbers)</a:t>
-            </a:r>
-          </a:p>
-          <a:p>
-            <a:pPr>
-              <a:spcAft>
-                <a:spcPts val="600"/>
-              </a:spcAft>
-              <a:defRPr sz="1600">
-                <a:solidFill>
-                  <a:srgbClr val="333333"/>
-                </a:solidFill>
-              </a:defRPr>
-            </a:pPr>
-            <a:r>
-              <a:t>minimum = min(numbers)</a:t>
             </a:r>
           </a:p>
         </p:txBody>
@@ -5102,7 +8493,7 @@
             <a:avLst/>
           </a:prstGeom>
           <a:solidFill>
-            <a:srgbClr val="FFFFFF"/>
+            <a:srgbClr val="FAFAFA"/>
           </a:solidFill>
           <a:ln>
             <a:noFill/>
@@ -5139,7 +8530,7 @@
         <p:spPr>
           <a:xfrm>
             <a:off x="0" y="0"/>
-            <a:ext cx="12191695" cy="137160"/>
+            <a:ext cx="12191695" cy="1097280"/>
           </a:xfrm>
           <a:prstGeom prst="rect">
             <a:avLst/>
@@ -5175,13 +8566,56 @@
       </p:sp>
       <p:sp>
         <p:nvSpPr>
-          <p:cNvPr id="4" name="TextBox 3"/>
+          <p:cNvPr id="4" name="Rectangle 3"/>
+          <p:cNvSpPr/>
+          <p:nvPr/>
+        </p:nvSpPr>
+        <p:spPr>
+          <a:xfrm>
+            <a:off x="0" y="1097280"/>
+            <a:ext cx="137160" cy="5760720"/>
+          </a:xfrm>
+          <a:prstGeom prst="rect">
+            <a:avLst/>
+          </a:prstGeom>
+          <a:solidFill>
+            <a:srgbClr val="FFBB33"/>
+          </a:solidFill>
+          <a:ln>
+            <a:noFill/>
+          </a:ln>
+        </p:spPr>
+        <p:style>
+          <a:lnRef idx="1">
+            <a:schemeClr val="accent1"/>
+          </a:lnRef>
+          <a:fillRef idx="3">
+            <a:schemeClr val="accent1"/>
+          </a:fillRef>
+          <a:effectRef idx="2">
+            <a:schemeClr val="accent1"/>
+          </a:effectRef>
+          <a:fontRef idx="minor">
+            <a:schemeClr val="lt1"/>
+          </a:fontRef>
+        </p:style>
+        <p:txBody>
+          <a:bodyPr rtlCol="0" anchor="ctr"/>
+          <a:lstStyle/>
+          <a:p>
+            <a:pPr algn="ctr"/>
+          </a:p>
+        </p:txBody>
+      </p:sp>
+      <p:sp>
+        <p:nvSpPr>
+          <p:cNvPr id="5" name="TextBox 4"/>
           <p:cNvSpPr txBox="1"/>
           <p:nvPr/>
         </p:nvSpPr>
         <p:spPr>
           <a:xfrm>
-            <a:off x="457200" y="320040"/>
+            <a:off x="365760" y="274320"/>
             <a:ext cx="10972800" cy="640080"/>
           </a:xfrm>
           <a:prstGeom prst="rect">
@@ -5198,26 +8632,69 @@
             <a:pPr>
               <a:defRPr sz="3600" b="1">
                 <a:solidFill>
-                  <a:srgbClr val="003366"/>
-                </a:solidFill>
-              </a:defRPr>
-            </a:pPr>
-            <a:r>
-              <a:t>Nested Lists</a:t>
-            </a:r>
-          </a:p>
-        </p:txBody>
-      </p:sp>
-      <p:sp>
-        <p:nvSpPr>
-          <p:cNvPr id="5" name="TextBox 4"/>
+                  <a:srgbClr val="FFFFFF"/>
+                </a:solidFill>
+              </a:defRPr>
+            </a:pPr>
+            <a:r>
+              <a:t>Iterating Through Lists</a:t>
+            </a:r>
+          </a:p>
+        </p:txBody>
+      </p:sp>
+      <p:sp>
+        <p:nvSpPr>
+          <p:cNvPr id="6" name="Rectangle 5"/>
+          <p:cNvSpPr/>
+          <p:nvPr/>
+        </p:nvSpPr>
+        <p:spPr>
+          <a:xfrm>
+            <a:off x="365760" y="1325880"/>
+            <a:ext cx="11430000" cy="365760"/>
+          </a:xfrm>
+          <a:prstGeom prst="rect">
+            <a:avLst/>
+          </a:prstGeom>
+          <a:solidFill>
+            <a:srgbClr val="0078D7"/>
+          </a:solidFill>
+          <a:ln>
+            <a:noFill/>
+          </a:ln>
+        </p:spPr>
+        <p:style>
+          <a:lnRef idx="1">
+            <a:schemeClr val="accent1"/>
+          </a:lnRef>
+          <a:fillRef idx="3">
+            <a:schemeClr val="accent1"/>
+          </a:fillRef>
+          <a:effectRef idx="2">
+            <a:schemeClr val="accent1"/>
+          </a:effectRef>
+          <a:fontRef idx="minor">
+            <a:schemeClr val="lt1"/>
+          </a:fontRef>
+        </p:style>
+        <p:txBody>
+          <a:bodyPr rtlCol="0" anchor="ctr"/>
+          <a:lstStyle/>
+          <a:p>
+            <a:pPr algn="ctr"/>
+          </a:p>
+        </p:txBody>
+      </p:sp>
+      <p:sp>
+        <p:nvSpPr>
+          <p:cNvPr id="7" name="TextBox 6"/>
           <p:cNvSpPr txBox="1"/>
           <p:nvPr/>
         </p:nvSpPr>
         <p:spPr>
           <a:xfrm>
-            <a:off x="640080" y="1188720"/>
-            <a:ext cx="10789920" cy="5303520"/>
+            <a:off x="548640" y="1371600"/>
+            <a:ext cx="10972800" cy="274320"/>
           </a:xfrm>
           <a:prstGeom prst="rect">
             <a:avLst/>
@@ -5225,293 +8702,896 @@
           <a:noFill/>
         </p:spPr>
         <p:txBody>
-          <a:bodyPr wrap="square">
+          <a:bodyPr wrap="none">
             <a:spAutoFit/>
           </a:bodyPr>
           <a:lstStyle/>
           <a:p>
             <a:pPr>
-              <a:spcAft>
-                <a:spcPts val="600"/>
-              </a:spcAft>
-              <a:defRPr b="1" sz="2000">
-                <a:solidFill>
-                  <a:srgbClr val="333333"/>
-                </a:solidFill>
-              </a:defRPr>
-            </a:pPr>
-            <a:r>
-              <a:t>Lists Within Lists:</a:t>
-            </a:r>
-          </a:p>
+              <a:defRPr sz="2000" b="1">
+                <a:solidFill>
+                  <a:srgbClr val="FFFFFF"/>
+                </a:solidFill>
+              </a:defRPr>
+            </a:pPr>
+            <a:r>
+              <a:t>Basic Iteration:</a:t>
+            </a:r>
+          </a:p>
+        </p:txBody>
+      </p:sp>
+      <p:sp>
+        <p:nvSpPr>
+          <p:cNvPr id="8" name="Rectangle 7"/>
+          <p:cNvSpPr/>
+          <p:nvPr/>
+        </p:nvSpPr>
+        <p:spPr>
+          <a:xfrm>
+            <a:off x="640080" y="1783080"/>
+            <a:ext cx="10789920" cy="640080"/>
+          </a:xfrm>
+          <a:prstGeom prst="rect">
+            <a:avLst/>
+          </a:prstGeom>
+          <a:solidFill>
+            <a:srgbClr val="282C34"/>
+          </a:solidFill>
+          <a:ln>
+            <a:noFill/>
+          </a:ln>
+        </p:spPr>
+        <p:style>
+          <a:lnRef idx="1">
+            <a:schemeClr val="accent1"/>
+          </a:lnRef>
+          <a:fillRef idx="3">
+            <a:schemeClr val="accent1"/>
+          </a:fillRef>
+          <a:effectRef idx="2">
+            <a:schemeClr val="accent1"/>
+          </a:effectRef>
+          <a:fontRef idx="minor">
+            <a:schemeClr val="lt1"/>
+          </a:fontRef>
+        </p:style>
+        <p:txBody>
+          <a:bodyPr rtlCol="0" anchor="ctr"/>
+          <a:lstStyle/>
+          <a:p>
+            <a:pPr algn="ctr"/>
+          </a:p>
+        </p:txBody>
+      </p:sp>
+      <p:sp>
+        <p:nvSpPr>
+          <p:cNvPr id="9" name="Rectangle 8"/>
+          <p:cNvSpPr/>
+          <p:nvPr/>
+        </p:nvSpPr>
+        <p:spPr>
+          <a:xfrm>
+            <a:off x="640080" y="1783080"/>
+            <a:ext cx="73152" cy="640080"/>
+          </a:xfrm>
+          <a:prstGeom prst="rect">
+            <a:avLst/>
+          </a:prstGeom>
+          <a:solidFill>
+            <a:srgbClr val="61AFEF"/>
+          </a:solidFill>
+          <a:ln>
+            <a:noFill/>
+          </a:ln>
+        </p:spPr>
+        <p:style>
+          <a:lnRef idx="1">
+            <a:schemeClr val="accent1"/>
+          </a:lnRef>
+          <a:fillRef idx="3">
+            <a:schemeClr val="accent1"/>
+          </a:fillRef>
+          <a:effectRef idx="2">
+            <a:schemeClr val="accent1"/>
+          </a:effectRef>
+          <a:fontRef idx="minor">
+            <a:schemeClr val="lt1"/>
+          </a:fontRef>
+        </p:style>
+        <p:txBody>
+          <a:bodyPr rtlCol="0" anchor="ctr"/>
+          <a:lstStyle/>
+          <a:p>
+            <a:pPr algn="ctr"/>
+          </a:p>
+        </p:txBody>
+      </p:sp>
+      <p:sp>
+        <p:nvSpPr>
+          <p:cNvPr id="10" name="TextBox 9"/>
+          <p:cNvSpPr txBox="1"/>
+          <p:nvPr/>
+        </p:nvSpPr>
+        <p:spPr>
+          <a:xfrm>
+            <a:off x="914400" y="1828800"/>
+            <a:ext cx="10241280" cy="548640"/>
+          </a:xfrm>
+          <a:prstGeom prst="rect">
+            <a:avLst/>
+          </a:prstGeom>
+          <a:noFill/>
+        </p:spPr>
+        <p:txBody>
+          <a:bodyPr wrap="none">
+            <a:spAutoFit/>
+          </a:bodyPr>
+          <a:lstStyle/>
           <a:p>
             <a:pPr>
               <a:spcAft>
-                <a:spcPts val="600"/>
+                <a:spcPts val="200"/>
               </a:spcAft>
-              <a:defRPr sz="1600">
-                <a:solidFill>
-                  <a:srgbClr val="333333"/>
-                </a:solidFill>
-              </a:defRPr>
-            </a:pPr>
-            <a:r>
-              <a:t>matrix = [</a:t>
+              <a:defRPr sz="1400">
+                <a:solidFill>
+                  <a:srgbClr val="ABB2BF"/>
+                </a:solidFill>
+                <a:latin typeface="Consolas"/>
+              </a:defRPr>
+            </a:pPr>
+            <a:r>
+              <a:t>for fruit in fruits:</a:t>
             </a:r>
           </a:p>
           <a:p>
             <a:pPr>
               <a:spcAft>
-                <a:spcPts val="600"/>
+                <a:spcPts val="200"/>
               </a:spcAft>
-              <a:defRPr sz="1600">
-                <a:solidFill>
-                  <a:srgbClr val="333333"/>
-                </a:solidFill>
-              </a:defRPr>
-            </a:pPr>
-            <a:r>
-              <a:t>    [1, 2, 3],</a:t>
-            </a:r>
-          </a:p>
+              <a:defRPr sz="1400">
+                <a:solidFill>
+                  <a:srgbClr val="ABB2BF"/>
+                </a:solidFill>
+                <a:latin typeface="Consolas"/>
+              </a:defRPr>
+            </a:pPr>
+            <a:r>
+              <a:t>    print(fruit)</a:t>
+            </a:r>
+          </a:p>
+        </p:txBody>
+      </p:sp>
+      <p:sp>
+        <p:nvSpPr>
+          <p:cNvPr id="11" name="Rectangle 10"/>
+          <p:cNvSpPr/>
+          <p:nvPr/>
+        </p:nvSpPr>
+        <p:spPr>
+          <a:xfrm>
+            <a:off x="365760" y="2560320"/>
+            <a:ext cx="11430000" cy="365760"/>
+          </a:xfrm>
+          <a:prstGeom prst="rect">
+            <a:avLst/>
+          </a:prstGeom>
+          <a:solidFill>
+            <a:srgbClr val="0078D7"/>
+          </a:solidFill>
+          <a:ln>
+            <a:noFill/>
+          </a:ln>
+        </p:spPr>
+        <p:style>
+          <a:lnRef idx="1">
+            <a:schemeClr val="accent1"/>
+          </a:lnRef>
+          <a:fillRef idx="3">
+            <a:schemeClr val="accent1"/>
+          </a:fillRef>
+          <a:effectRef idx="2">
+            <a:schemeClr val="accent1"/>
+          </a:effectRef>
+          <a:fontRef idx="minor">
+            <a:schemeClr val="lt1"/>
+          </a:fontRef>
+        </p:style>
+        <p:txBody>
+          <a:bodyPr rtlCol="0" anchor="ctr"/>
+          <a:lstStyle/>
+          <a:p>
+            <a:pPr algn="ctr"/>
+          </a:p>
+        </p:txBody>
+      </p:sp>
+      <p:sp>
+        <p:nvSpPr>
+          <p:cNvPr id="12" name="TextBox 11"/>
+          <p:cNvSpPr txBox="1"/>
+          <p:nvPr/>
+        </p:nvSpPr>
+        <p:spPr>
+          <a:xfrm>
+            <a:off x="548640" y="2606040"/>
+            <a:ext cx="10972800" cy="274320"/>
+          </a:xfrm>
+          <a:prstGeom prst="rect">
+            <a:avLst/>
+          </a:prstGeom>
+          <a:noFill/>
+        </p:spPr>
+        <p:txBody>
+          <a:bodyPr wrap="none">
+            <a:spAutoFit/>
+          </a:bodyPr>
+          <a:lstStyle/>
+          <a:p>
+            <a:pPr>
+              <a:defRPr sz="2000" b="1">
+                <a:solidFill>
+                  <a:srgbClr val="FFFFFF"/>
+                </a:solidFill>
+              </a:defRPr>
+            </a:pPr>
+            <a:r>
+              <a:t>With Index (enumerate):</a:t>
+            </a:r>
+          </a:p>
+        </p:txBody>
+      </p:sp>
+      <p:sp>
+        <p:nvSpPr>
+          <p:cNvPr id="13" name="Rectangle 12"/>
+          <p:cNvSpPr/>
+          <p:nvPr/>
+        </p:nvSpPr>
+        <p:spPr>
+          <a:xfrm>
+            <a:off x="640080" y="3017520"/>
+            <a:ext cx="10789920" cy="640080"/>
+          </a:xfrm>
+          <a:prstGeom prst="rect">
+            <a:avLst/>
+          </a:prstGeom>
+          <a:solidFill>
+            <a:srgbClr val="282C34"/>
+          </a:solidFill>
+          <a:ln>
+            <a:noFill/>
+          </a:ln>
+        </p:spPr>
+        <p:style>
+          <a:lnRef idx="1">
+            <a:schemeClr val="accent1"/>
+          </a:lnRef>
+          <a:fillRef idx="3">
+            <a:schemeClr val="accent1"/>
+          </a:fillRef>
+          <a:effectRef idx="2">
+            <a:schemeClr val="accent1"/>
+          </a:effectRef>
+          <a:fontRef idx="minor">
+            <a:schemeClr val="lt1"/>
+          </a:fontRef>
+        </p:style>
+        <p:txBody>
+          <a:bodyPr rtlCol="0" anchor="ctr"/>
+          <a:lstStyle/>
+          <a:p>
+            <a:pPr algn="ctr"/>
+          </a:p>
+        </p:txBody>
+      </p:sp>
+      <p:sp>
+        <p:nvSpPr>
+          <p:cNvPr id="14" name="Rectangle 13"/>
+          <p:cNvSpPr/>
+          <p:nvPr/>
+        </p:nvSpPr>
+        <p:spPr>
+          <a:xfrm>
+            <a:off x="640080" y="3017520"/>
+            <a:ext cx="73152" cy="640080"/>
+          </a:xfrm>
+          <a:prstGeom prst="rect">
+            <a:avLst/>
+          </a:prstGeom>
+          <a:solidFill>
+            <a:srgbClr val="61AFEF"/>
+          </a:solidFill>
+          <a:ln>
+            <a:noFill/>
+          </a:ln>
+        </p:spPr>
+        <p:style>
+          <a:lnRef idx="1">
+            <a:schemeClr val="accent1"/>
+          </a:lnRef>
+          <a:fillRef idx="3">
+            <a:schemeClr val="accent1"/>
+          </a:fillRef>
+          <a:effectRef idx="2">
+            <a:schemeClr val="accent1"/>
+          </a:effectRef>
+          <a:fontRef idx="minor">
+            <a:schemeClr val="lt1"/>
+          </a:fontRef>
+        </p:style>
+        <p:txBody>
+          <a:bodyPr rtlCol="0" anchor="ctr"/>
+          <a:lstStyle/>
+          <a:p>
+            <a:pPr algn="ctr"/>
+          </a:p>
+        </p:txBody>
+      </p:sp>
+      <p:sp>
+        <p:nvSpPr>
+          <p:cNvPr id="15" name="TextBox 14"/>
+          <p:cNvSpPr txBox="1"/>
+          <p:nvPr/>
+        </p:nvSpPr>
+        <p:spPr>
+          <a:xfrm>
+            <a:off x="914400" y="3063240"/>
+            <a:ext cx="10241280" cy="548640"/>
+          </a:xfrm>
+          <a:prstGeom prst="rect">
+            <a:avLst/>
+          </a:prstGeom>
+          <a:noFill/>
+        </p:spPr>
+        <p:txBody>
+          <a:bodyPr wrap="none">
+            <a:spAutoFit/>
+          </a:bodyPr>
+          <a:lstStyle/>
           <a:p>
             <a:pPr>
               <a:spcAft>
-                <a:spcPts val="600"/>
+                <a:spcPts val="200"/>
               </a:spcAft>
-              <a:defRPr sz="1600">
-                <a:solidFill>
-                  <a:srgbClr val="333333"/>
-                </a:solidFill>
-              </a:defRPr>
-            </a:pPr>
-            <a:r>
-              <a:t>    [4, 5, 6],</a:t>
+              <a:defRPr sz="1400">
+                <a:solidFill>
+                  <a:srgbClr val="ABB2BF"/>
+                </a:solidFill>
+                <a:latin typeface="Consolas"/>
+              </a:defRPr>
+            </a:pPr>
+            <a:r>
+              <a:t>for i, fruit in enumerate(fruits):</a:t>
             </a:r>
           </a:p>
           <a:p>
             <a:pPr>
               <a:spcAft>
-                <a:spcPts val="600"/>
+                <a:spcPts val="200"/>
               </a:spcAft>
-              <a:defRPr sz="1600">
-                <a:solidFill>
-                  <a:srgbClr val="333333"/>
-                </a:solidFill>
-              </a:defRPr>
-            </a:pPr>
-            <a:r>
-              <a:t>    [7, 8, 9]</a:t>
-            </a:r>
-          </a:p>
+              <a:defRPr sz="1400">
+                <a:solidFill>
+                  <a:srgbClr val="ABB2BF"/>
+                </a:solidFill>
+                <a:latin typeface="Consolas"/>
+              </a:defRPr>
+            </a:pPr>
+            <a:r>
+              <a:t>    print(f"{i}: {fruit}")</a:t>
+            </a:r>
+          </a:p>
+        </p:txBody>
+      </p:sp>
+      <p:sp>
+        <p:nvSpPr>
+          <p:cNvPr id="16" name="Rectangle 15"/>
+          <p:cNvSpPr/>
+          <p:nvPr/>
+        </p:nvSpPr>
+        <p:spPr>
+          <a:xfrm>
+            <a:off x="365760" y="3794760"/>
+            <a:ext cx="11430000" cy="365760"/>
+          </a:xfrm>
+          <a:prstGeom prst="rect">
+            <a:avLst/>
+          </a:prstGeom>
+          <a:solidFill>
+            <a:srgbClr val="0078D7"/>
+          </a:solidFill>
+          <a:ln>
+            <a:noFill/>
+          </a:ln>
+        </p:spPr>
+        <p:style>
+          <a:lnRef idx="1">
+            <a:schemeClr val="accent1"/>
+          </a:lnRef>
+          <a:fillRef idx="3">
+            <a:schemeClr val="accent1"/>
+          </a:fillRef>
+          <a:effectRef idx="2">
+            <a:schemeClr val="accent1"/>
+          </a:effectRef>
+          <a:fontRef idx="minor">
+            <a:schemeClr val="lt1"/>
+          </a:fontRef>
+        </p:style>
+        <p:txBody>
+          <a:bodyPr rtlCol="0" anchor="ctr"/>
+          <a:lstStyle/>
+          <a:p>
+            <a:pPr algn="ctr"/>
+          </a:p>
+        </p:txBody>
+      </p:sp>
+      <p:sp>
+        <p:nvSpPr>
+          <p:cNvPr id="17" name="TextBox 16"/>
+          <p:cNvSpPr txBox="1"/>
+          <p:nvPr/>
+        </p:nvSpPr>
+        <p:spPr>
+          <a:xfrm>
+            <a:off x="548640" y="3840480"/>
+            <a:ext cx="10972800" cy="274320"/>
+          </a:xfrm>
+          <a:prstGeom prst="rect">
+            <a:avLst/>
+          </a:prstGeom>
+          <a:noFill/>
+        </p:spPr>
+        <p:txBody>
+          <a:bodyPr wrap="none">
+            <a:spAutoFit/>
+          </a:bodyPr>
+          <a:lstStyle/>
+          <a:p>
+            <a:pPr>
+              <a:defRPr sz="2000" b="1">
+                <a:solidFill>
+                  <a:srgbClr val="FFFFFF"/>
+                </a:solidFill>
+              </a:defRPr>
+            </a:pPr>
+            <a:r>
+              <a:t>With Index (range):</a:t>
+            </a:r>
+          </a:p>
+        </p:txBody>
+      </p:sp>
+      <p:sp>
+        <p:nvSpPr>
+          <p:cNvPr id="18" name="Rectangle 17"/>
+          <p:cNvSpPr/>
+          <p:nvPr/>
+        </p:nvSpPr>
+        <p:spPr>
+          <a:xfrm>
+            <a:off x="640080" y="4251960"/>
+            <a:ext cx="10789920" cy="640080"/>
+          </a:xfrm>
+          <a:prstGeom prst="rect">
+            <a:avLst/>
+          </a:prstGeom>
+          <a:solidFill>
+            <a:srgbClr val="282C34"/>
+          </a:solidFill>
+          <a:ln>
+            <a:noFill/>
+          </a:ln>
+        </p:spPr>
+        <p:style>
+          <a:lnRef idx="1">
+            <a:schemeClr val="accent1"/>
+          </a:lnRef>
+          <a:fillRef idx="3">
+            <a:schemeClr val="accent1"/>
+          </a:fillRef>
+          <a:effectRef idx="2">
+            <a:schemeClr val="accent1"/>
+          </a:effectRef>
+          <a:fontRef idx="minor">
+            <a:schemeClr val="lt1"/>
+          </a:fontRef>
+        </p:style>
+        <p:txBody>
+          <a:bodyPr rtlCol="0" anchor="ctr"/>
+          <a:lstStyle/>
+          <a:p>
+            <a:pPr algn="ctr"/>
+          </a:p>
+        </p:txBody>
+      </p:sp>
+      <p:sp>
+        <p:nvSpPr>
+          <p:cNvPr id="19" name="Rectangle 18"/>
+          <p:cNvSpPr/>
+          <p:nvPr/>
+        </p:nvSpPr>
+        <p:spPr>
+          <a:xfrm>
+            <a:off x="640080" y="4251960"/>
+            <a:ext cx="73152" cy="640080"/>
+          </a:xfrm>
+          <a:prstGeom prst="rect">
+            <a:avLst/>
+          </a:prstGeom>
+          <a:solidFill>
+            <a:srgbClr val="61AFEF"/>
+          </a:solidFill>
+          <a:ln>
+            <a:noFill/>
+          </a:ln>
+        </p:spPr>
+        <p:style>
+          <a:lnRef idx="1">
+            <a:schemeClr val="accent1"/>
+          </a:lnRef>
+          <a:fillRef idx="3">
+            <a:schemeClr val="accent1"/>
+          </a:fillRef>
+          <a:effectRef idx="2">
+            <a:schemeClr val="accent1"/>
+          </a:effectRef>
+          <a:fontRef idx="minor">
+            <a:schemeClr val="lt1"/>
+          </a:fontRef>
+        </p:style>
+        <p:txBody>
+          <a:bodyPr rtlCol="0" anchor="ctr"/>
+          <a:lstStyle/>
+          <a:p>
+            <a:pPr algn="ctr"/>
+          </a:p>
+        </p:txBody>
+      </p:sp>
+      <p:sp>
+        <p:nvSpPr>
+          <p:cNvPr id="20" name="TextBox 19"/>
+          <p:cNvSpPr txBox="1"/>
+          <p:nvPr/>
+        </p:nvSpPr>
+        <p:spPr>
+          <a:xfrm>
+            <a:off x="914400" y="4297680"/>
+            <a:ext cx="10241280" cy="548640"/>
+          </a:xfrm>
+          <a:prstGeom prst="rect">
+            <a:avLst/>
+          </a:prstGeom>
+          <a:noFill/>
+        </p:spPr>
+        <p:txBody>
+          <a:bodyPr wrap="none">
+            <a:spAutoFit/>
+          </a:bodyPr>
+          <a:lstStyle/>
           <a:p>
             <a:pPr>
               <a:spcAft>
-                <a:spcPts val="600"/>
+                <a:spcPts val="200"/>
               </a:spcAft>
-              <a:defRPr sz="1600">
-                <a:solidFill>
-                  <a:srgbClr val="333333"/>
-                </a:solidFill>
-              </a:defRPr>
-            </a:pPr>
-            <a:r>
-              <a:t>]</a:t>
+              <a:defRPr sz="1400">
+                <a:solidFill>
+                  <a:srgbClr val="ABB2BF"/>
+                </a:solidFill>
+                <a:latin typeface="Consolas"/>
+              </a:defRPr>
+            </a:pPr>
+            <a:r>
+              <a:t>for i in range(len(fruits)):</a:t>
             </a:r>
           </a:p>
           <a:p>
             <a:pPr>
               <a:spcAft>
-                <a:spcPts val="600"/>
+                <a:spcPts val="200"/>
               </a:spcAft>
-              <a:defRPr b="1" sz="2000">
-                <a:solidFill>
-                  <a:srgbClr val="333333"/>
-                </a:solidFill>
-              </a:defRPr>
-            </a:pPr>
-            <a:r>
-              <a:t>Accessing:</a:t>
-            </a:r>
-          </a:p>
+              <a:defRPr sz="1400">
+                <a:solidFill>
+                  <a:srgbClr val="ABB2BF"/>
+                </a:solidFill>
+                <a:latin typeface="Consolas"/>
+              </a:defRPr>
+            </a:pPr>
+            <a:r>
+              <a:t>    print(f"{i}: {fruits[i]}")</a:t>
+            </a:r>
+          </a:p>
+        </p:txBody>
+      </p:sp>
+      <p:sp>
+        <p:nvSpPr>
+          <p:cNvPr id="21" name="Rectangle 20"/>
+          <p:cNvSpPr/>
+          <p:nvPr/>
+        </p:nvSpPr>
+        <p:spPr>
+          <a:xfrm>
+            <a:off x="365760" y="5029200"/>
+            <a:ext cx="11430000" cy="365760"/>
+          </a:xfrm>
+          <a:prstGeom prst="rect">
+            <a:avLst/>
+          </a:prstGeom>
+          <a:solidFill>
+            <a:srgbClr val="0078D7"/>
+          </a:solidFill>
+          <a:ln>
+            <a:noFill/>
+          </a:ln>
+        </p:spPr>
+        <p:style>
+          <a:lnRef idx="1">
+            <a:schemeClr val="accent1"/>
+          </a:lnRef>
+          <a:fillRef idx="3">
+            <a:schemeClr val="accent1"/>
+          </a:fillRef>
+          <a:effectRef idx="2">
+            <a:schemeClr val="accent1"/>
+          </a:effectRef>
+          <a:fontRef idx="minor">
+            <a:schemeClr val="lt1"/>
+          </a:fontRef>
+        </p:style>
+        <p:txBody>
+          <a:bodyPr rtlCol="0" anchor="ctr"/>
+          <a:lstStyle/>
+          <a:p>
+            <a:pPr algn="ctr"/>
+          </a:p>
+        </p:txBody>
+      </p:sp>
+      <p:sp>
+        <p:nvSpPr>
+          <p:cNvPr id="22" name="TextBox 21"/>
+          <p:cNvSpPr txBox="1"/>
+          <p:nvPr/>
+        </p:nvSpPr>
+        <p:spPr>
+          <a:xfrm>
+            <a:off x="548640" y="5074920"/>
+            <a:ext cx="10972800" cy="274320"/>
+          </a:xfrm>
+          <a:prstGeom prst="rect">
+            <a:avLst/>
+          </a:prstGeom>
+          <a:noFill/>
+        </p:spPr>
+        <p:txBody>
+          <a:bodyPr wrap="none">
+            <a:spAutoFit/>
+          </a:bodyPr>
+          <a:lstStyle/>
+          <a:p>
+            <a:pPr>
+              <a:defRPr sz="2000" b="1">
+                <a:solidFill>
+                  <a:srgbClr val="FFFFFF"/>
+                </a:solidFill>
+              </a:defRPr>
+            </a:pPr>
+            <a:r>
+              <a:t>List Comprehensions:</a:t>
+            </a:r>
+          </a:p>
+        </p:txBody>
+      </p:sp>
+      <p:sp>
+        <p:nvSpPr>
+          <p:cNvPr id="23" name="Rectangle 22"/>
+          <p:cNvSpPr/>
+          <p:nvPr/>
+        </p:nvSpPr>
+        <p:spPr>
+          <a:xfrm>
+            <a:off x="640080" y="5486400"/>
+            <a:ext cx="10789920" cy="640080"/>
+          </a:xfrm>
+          <a:prstGeom prst="rect">
+            <a:avLst/>
+          </a:prstGeom>
+          <a:solidFill>
+            <a:srgbClr val="282C34"/>
+          </a:solidFill>
+          <a:ln>
+            <a:noFill/>
+          </a:ln>
+        </p:spPr>
+        <p:style>
+          <a:lnRef idx="1">
+            <a:schemeClr val="accent1"/>
+          </a:lnRef>
+          <a:fillRef idx="3">
+            <a:schemeClr val="accent1"/>
+          </a:fillRef>
+          <a:effectRef idx="2">
+            <a:schemeClr val="accent1"/>
+          </a:effectRef>
+          <a:fontRef idx="minor">
+            <a:schemeClr val="lt1"/>
+          </a:fontRef>
+        </p:style>
+        <p:txBody>
+          <a:bodyPr rtlCol="0" anchor="ctr"/>
+          <a:lstStyle/>
+          <a:p>
+            <a:pPr algn="ctr"/>
+          </a:p>
+        </p:txBody>
+      </p:sp>
+      <p:sp>
+        <p:nvSpPr>
+          <p:cNvPr id="24" name="Rectangle 23"/>
+          <p:cNvSpPr/>
+          <p:nvPr/>
+        </p:nvSpPr>
+        <p:spPr>
+          <a:xfrm>
+            <a:off x="640080" y="5486400"/>
+            <a:ext cx="73152" cy="640080"/>
+          </a:xfrm>
+          <a:prstGeom prst="rect">
+            <a:avLst/>
+          </a:prstGeom>
+          <a:solidFill>
+            <a:srgbClr val="61AFEF"/>
+          </a:solidFill>
+          <a:ln>
+            <a:noFill/>
+          </a:ln>
+        </p:spPr>
+        <p:style>
+          <a:lnRef idx="1">
+            <a:schemeClr val="accent1"/>
+          </a:lnRef>
+          <a:fillRef idx="3">
+            <a:schemeClr val="accent1"/>
+          </a:fillRef>
+          <a:effectRef idx="2">
+            <a:schemeClr val="accent1"/>
+          </a:effectRef>
+          <a:fontRef idx="minor">
+            <a:schemeClr val="lt1"/>
+          </a:fontRef>
+        </p:style>
+        <p:txBody>
+          <a:bodyPr rtlCol="0" anchor="ctr"/>
+          <a:lstStyle/>
+          <a:p>
+            <a:pPr algn="ctr"/>
+          </a:p>
+        </p:txBody>
+      </p:sp>
+      <p:sp>
+        <p:nvSpPr>
+          <p:cNvPr id="25" name="TextBox 24"/>
+          <p:cNvSpPr txBox="1"/>
+          <p:nvPr/>
+        </p:nvSpPr>
+        <p:spPr>
+          <a:xfrm>
+            <a:off x="914400" y="5532120"/>
+            <a:ext cx="10241280" cy="548640"/>
+          </a:xfrm>
+          <a:prstGeom prst="rect">
+            <a:avLst/>
+          </a:prstGeom>
+          <a:noFill/>
+        </p:spPr>
+        <p:txBody>
+          <a:bodyPr wrap="none">
+            <a:spAutoFit/>
+          </a:bodyPr>
+          <a:lstStyle/>
           <a:p>
             <a:pPr>
               <a:spcAft>
-                <a:spcPts val="600"/>
+                <a:spcPts val="200"/>
               </a:spcAft>
-              <a:defRPr sz="1600">
-                <a:solidFill>
-                  <a:srgbClr val="333333"/>
-                </a:solidFill>
-              </a:defRPr>
-            </a:pPr>
-            <a:r>
-              <a:t>matrix[0]  # [1, 2, 3]</a:t>
+              <a:defRPr sz="1400">
+                <a:solidFill>
+                  <a:srgbClr val="ABB2BF"/>
+                </a:solidFill>
+                <a:latin typeface="Consolas"/>
+              </a:defRPr>
+            </a:pPr>
+            <a:r>
+              <a:t>squares = [x**2 for x in range(10)]</a:t>
             </a:r>
           </a:p>
           <a:p>
             <a:pPr>
               <a:spcAft>
-                <a:spcPts val="600"/>
+                <a:spcPts val="200"/>
               </a:spcAft>
-              <a:defRPr sz="1600">
-                <a:solidFill>
-                  <a:srgbClr val="333333"/>
-                </a:solidFill>
-              </a:defRPr>
-            </a:pPr>
-            <a:r>
-              <a:t>matrix[0][0]  # 1</a:t>
-            </a:r>
-          </a:p>
+              <a:defRPr sz="1400">
+                <a:solidFill>
+                  <a:srgbClr val="ABB2BF"/>
+                </a:solidFill>
+                <a:latin typeface="Consolas"/>
+              </a:defRPr>
+            </a:pPr>
+            <a:r>
+              <a:t>evens = [x for x in numbers if x % 2 == 0]</a:t>
+            </a:r>
+          </a:p>
+        </p:txBody>
+      </p:sp>
+      <p:sp>
+        <p:nvSpPr>
+          <p:cNvPr id="26" name="Rectangle 25"/>
+          <p:cNvSpPr/>
+          <p:nvPr/>
+        </p:nvSpPr>
+        <p:spPr>
+          <a:xfrm>
+            <a:off x="365760" y="6263640"/>
+            <a:ext cx="11430000" cy="365760"/>
+          </a:xfrm>
+          <a:prstGeom prst="rect">
+            <a:avLst/>
+          </a:prstGeom>
+          <a:solidFill>
+            <a:srgbClr val="0078D7"/>
+          </a:solidFill>
+          <a:ln>
+            <a:noFill/>
+          </a:ln>
+        </p:spPr>
+        <p:style>
+          <a:lnRef idx="1">
+            <a:schemeClr val="accent1"/>
+          </a:lnRef>
+          <a:fillRef idx="3">
+            <a:schemeClr val="accent1"/>
+          </a:fillRef>
+          <a:effectRef idx="2">
+            <a:schemeClr val="accent1"/>
+          </a:effectRef>
+          <a:fontRef idx="minor">
+            <a:schemeClr val="lt1"/>
+          </a:fontRef>
+        </p:style>
+        <p:txBody>
+          <a:bodyPr rtlCol="0" anchor="ctr"/>
+          <a:lstStyle/>
+          <a:p>
+            <a:pPr algn="ctr"/>
+          </a:p>
+        </p:txBody>
+      </p:sp>
+      <p:sp>
+        <p:nvSpPr>
+          <p:cNvPr id="27" name="TextBox 26"/>
+          <p:cNvSpPr txBox="1"/>
+          <p:nvPr/>
+        </p:nvSpPr>
+        <p:spPr>
+          <a:xfrm>
+            <a:off x="548640" y="6309360"/>
+            <a:ext cx="10972800" cy="274320"/>
+          </a:xfrm>
+          <a:prstGeom prst="rect">
+            <a:avLst/>
+          </a:prstGeom>
+          <a:noFill/>
+        </p:spPr>
+        <p:txBody>
+          <a:bodyPr wrap="none">
+            <a:spAutoFit/>
+          </a:bodyPr>
+          <a:lstStyle/>
           <a:p>
             <a:pPr>
-              <a:spcAft>
-                <a:spcPts val="600"/>
-              </a:spcAft>
-              <a:defRPr sz="1600">
-                <a:solidFill>
-                  <a:srgbClr val="333333"/>
-                </a:solidFill>
-              </a:defRPr>
-            </a:pPr>
-            <a:r>
-              <a:t>matrix[1][2]  # 6</a:t>
-            </a:r>
-          </a:p>
-          <a:p>
-            <a:pPr>
-              <a:spcAft>
-                <a:spcPts val="600"/>
-              </a:spcAft>
-              <a:defRPr b="1" sz="2000">
-                <a:solidFill>
-                  <a:srgbClr val="333333"/>
-                </a:solidFill>
-              </a:defRPr>
-            </a:pPr>
-            <a:r>
-              <a:t>Iterating:</a:t>
-            </a:r>
-          </a:p>
-          <a:p>
-            <a:pPr>
-              <a:spcAft>
-                <a:spcPts val="600"/>
-              </a:spcAft>
-              <a:defRPr b="1" sz="2000">
-                <a:solidFill>
-                  <a:srgbClr val="333333"/>
-                </a:solidFill>
-              </a:defRPr>
-            </a:pPr>
-            <a:r>
-              <a:t>for row in matrix:</a:t>
-            </a:r>
-          </a:p>
-          <a:p>
-            <a:pPr>
-              <a:spcAft>
-                <a:spcPts val="600"/>
-              </a:spcAft>
-              <a:defRPr sz="1600">
-                <a:solidFill>
-                  <a:srgbClr val="333333"/>
-                </a:solidFill>
-              </a:defRPr>
-            </a:pPr>
-            <a:r>
-              <a:t>    for item in row:</a:t>
-            </a:r>
-          </a:p>
-          <a:p>
-            <a:pPr>
-              <a:spcAft>
-                <a:spcPts val="600"/>
-              </a:spcAft>
-              <a:defRPr sz="1600">
-                <a:solidFill>
-                  <a:srgbClr val="333333"/>
-                </a:solidFill>
-              </a:defRPr>
-            </a:pPr>
-            <a:r>
-              <a:t>        print(item)</a:t>
-            </a:r>
-          </a:p>
-          <a:p>
-            <a:pPr>
-              <a:spcAft>
-                <a:spcPts val="600"/>
-              </a:spcAft>
-              <a:defRPr b="1" sz="2000">
-                <a:solidFill>
-                  <a:srgbClr val="333333"/>
-                </a:solidFill>
-              </a:defRPr>
-            </a:pPr>
-            <a:r>
-              <a:t>Use Cases:</a:t>
-            </a:r>
-          </a:p>
-          <a:p>
-            <a:pPr lvl="1">
-              <a:spcAft>
-                <a:spcPts val="400"/>
-              </a:spcAft>
-              <a:defRPr sz="1600">
-                <a:solidFill>
-                  <a:srgbClr val="333333"/>
-                </a:solidFill>
-              </a:defRPr>
-            </a:pPr>
-            <a:r>
-              <a:t>• 2D grids and boards</a:t>
-            </a:r>
-          </a:p>
-          <a:p>
-            <a:pPr lvl="1">
-              <a:spcAft>
-                <a:spcPts val="400"/>
-              </a:spcAft>
-              <a:defRPr sz="1600">
-                <a:solidFill>
-                  <a:srgbClr val="333333"/>
-                </a:solidFill>
-              </a:defRPr>
-            </a:pPr>
-            <a:r>
-              <a:t>• Tables of data</a:t>
-            </a:r>
-          </a:p>
-          <a:p>
-            <a:pPr lvl="1">
-              <a:spcAft>
-                <a:spcPts val="400"/>
-              </a:spcAft>
-              <a:defRPr sz="1600">
-                <a:solidFill>
-                  <a:srgbClr val="333333"/>
-                </a:solidFill>
-              </a:defRPr>
-            </a:pPr>
-            <a:r>
-              <a:t>• Coordinates</a:t>
-            </a:r>
-          </a:p>
-          <a:p>
-            <a:pPr lvl="1">
-              <a:spcAft>
-                <a:spcPts val="400"/>
-              </a:spcAft>
-              <a:defRPr sz="1600">
-                <a:solidFill>
-                  <a:srgbClr val="333333"/>
-                </a:solidFill>
-              </a:defRPr>
-            </a:pPr>
-            <a:r>
-              <a:t>• Multi-dimensional data</a:t>
+              <a:defRPr sz="2000" b="1">
+                <a:solidFill>
+                  <a:srgbClr val="FFFFFF"/>
+                </a:solidFill>
+              </a:defRPr>
+            </a:pPr>
+            <a:r>
+              <a:t>Processing:</a:t>
             </a:r>
           </a:p>
         </p:txBody>
@@ -5549,7 +9629,7 @@
             <a:avLst/>
           </a:prstGeom>
           <a:solidFill>
-            <a:srgbClr val="FFFFFF"/>
+            <a:srgbClr val="FAFAFA"/>
           </a:solidFill>
           <a:ln>
             <a:noFill/>
@@ -5586,7 +9666,7 @@
         <p:spPr>
           <a:xfrm>
             <a:off x="0" y="0"/>
-            <a:ext cx="12191695" cy="137160"/>
+            <a:ext cx="12191695" cy="1097280"/>
           </a:xfrm>
           <a:prstGeom prst="rect">
             <a:avLst/>
@@ -5622,13 +9702,56 @@
       </p:sp>
       <p:sp>
         <p:nvSpPr>
-          <p:cNvPr id="4" name="TextBox 3"/>
+          <p:cNvPr id="4" name="Rectangle 3"/>
+          <p:cNvSpPr/>
+          <p:nvPr/>
+        </p:nvSpPr>
+        <p:spPr>
+          <a:xfrm>
+            <a:off x="0" y="1097280"/>
+            <a:ext cx="137160" cy="5760720"/>
+          </a:xfrm>
+          <a:prstGeom prst="rect">
+            <a:avLst/>
+          </a:prstGeom>
+          <a:solidFill>
+            <a:srgbClr val="FFBB33"/>
+          </a:solidFill>
+          <a:ln>
+            <a:noFill/>
+          </a:ln>
+        </p:spPr>
+        <p:style>
+          <a:lnRef idx="1">
+            <a:schemeClr val="accent1"/>
+          </a:lnRef>
+          <a:fillRef idx="3">
+            <a:schemeClr val="accent1"/>
+          </a:fillRef>
+          <a:effectRef idx="2">
+            <a:schemeClr val="accent1"/>
+          </a:effectRef>
+          <a:fontRef idx="minor">
+            <a:schemeClr val="lt1"/>
+          </a:fontRef>
+        </p:style>
+        <p:txBody>
+          <a:bodyPr rtlCol="0" anchor="ctr"/>
+          <a:lstStyle/>
+          <a:p>
+            <a:pPr algn="ctr"/>
+          </a:p>
+        </p:txBody>
+      </p:sp>
+      <p:sp>
+        <p:nvSpPr>
+          <p:cNvPr id="5" name="TextBox 4"/>
           <p:cNvSpPr txBox="1"/>
           <p:nvPr/>
         </p:nvSpPr>
         <p:spPr>
           <a:xfrm>
-            <a:off x="457200" y="320040"/>
+            <a:off x="365760" y="274320"/>
             <a:ext cx="10972800" cy="640080"/>
           </a:xfrm>
           <a:prstGeom prst="rect">
@@ -5645,26 +9768,69 @@
             <a:pPr>
               <a:defRPr sz="3600" b="1">
                 <a:solidFill>
-                  <a:srgbClr val="003366"/>
-                </a:solidFill>
-              </a:defRPr>
-            </a:pPr>
-            <a:r>
-              <a:t>Common List Patterns</a:t>
-            </a:r>
-          </a:p>
-        </p:txBody>
-      </p:sp>
-      <p:sp>
-        <p:nvSpPr>
-          <p:cNvPr id="5" name="TextBox 4"/>
+                  <a:srgbClr val="FFFFFF"/>
+                </a:solidFill>
+              </a:defRPr>
+            </a:pPr>
+            <a:r>
+              <a:t>Nested Lists</a:t>
+            </a:r>
+          </a:p>
+        </p:txBody>
+      </p:sp>
+      <p:sp>
+        <p:nvSpPr>
+          <p:cNvPr id="6" name="Rectangle 5"/>
+          <p:cNvSpPr/>
+          <p:nvPr/>
+        </p:nvSpPr>
+        <p:spPr>
+          <a:xfrm>
+            <a:off x="365760" y="1325880"/>
+            <a:ext cx="11430000" cy="365760"/>
+          </a:xfrm>
+          <a:prstGeom prst="rect">
+            <a:avLst/>
+          </a:prstGeom>
+          <a:solidFill>
+            <a:srgbClr val="0078D7"/>
+          </a:solidFill>
+          <a:ln>
+            <a:noFill/>
+          </a:ln>
+        </p:spPr>
+        <p:style>
+          <a:lnRef idx="1">
+            <a:schemeClr val="accent1"/>
+          </a:lnRef>
+          <a:fillRef idx="3">
+            <a:schemeClr val="accent1"/>
+          </a:fillRef>
+          <a:effectRef idx="2">
+            <a:schemeClr val="accent1"/>
+          </a:effectRef>
+          <a:fontRef idx="minor">
+            <a:schemeClr val="lt1"/>
+          </a:fontRef>
+        </p:style>
+        <p:txBody>
+          <a:bodyPr rtlCol="0" anchor="ctr"/>
+          <a:lstStyle/>
+          <a:p>
+            <a:pPr algn="ctr"/>
+          </a:p>
+        </p:txBody>
+      </p:sp>
+      <p:sp>
+        <p:nvSpPr>
+          <p:cNvPr id="7" name="TextBox 6"/>
           <p:cNvSpPr txBox="1"/>
           <p:nvPr/>
         </p:nvSpPr>
         <p:spPr>
           <a:xfrm>
-            <a:off x="640080" y="1188720"/>
-            <a:ext cx="10789920" cy="5303520"/>
+            <a:off x="548640" y="1371600"/>
+            <a:ext cx="10972800" cy="274320"/>
           </a:xfrm>
           <a:prstGeom prst="rect">
             <a:avLst/>
@@ -5672,278 +9838,724 @@
           <a:noFill/>
         </p:spPr>
         <p:txBody>
-          <a:bodyPr wrap="square">
+          <a:bodyPr wrap="none">
             <a:spAutoFit/>
           </a:bodyPr>
           <a:lstStyle/>
           <a:p>
             <a:pPr>
-              <a:spcAft>
-                <a:spcPts val="600"/>
-              </a:spcAft>
-              <a:defRPr b="1" sz="2000">
-                <a:solidFill>
-                  <a:srgbClr val="333333"/>
-                </a:solidFill>
-              </a:defRPr>
-            </a:pPr>
-            <a:r>
-              <a:t>Building Lists:</a:t>
-            </a:r>
-          </a:p>
+              <a:defRPr sz="2000" b="1">
+                <a:solidFill>
+                  <a:srgbClr val="FFFFFF"/>
+                </a:solidFill>
+              </a:defRPr>
+            </a:pPr>
+            <a:r>
+              <a:t>Lists Within Lists:</a:t>
+            </a:r>
+          </a:p>
+        </p:txBody>
+      </p:sp>
+      <p:sp>
+        <p:nvSpPr>
+          <p:cNvPr id="8" name="Rectangle 7"/>
+          <p:cNvSpPr/>
+          <p:nvPr/>
+        </p:nvSpPr>
+        <p:spPr>
+          <a:xfrm>
+            <a:off x="640080" y="1783080"/>
+            <a:ext cx="10789920" cy="1097280"/>
+          </a:xfrm>
+          <a:prstGeom prst="rect">
+            <a:avLst/>
+          </a:prstGeom>
+          <a:solidFill>
+            <a:srgbClr val="282C34"/>
+          </a:solidFill>
+          <a:ln>
+            <a:noFill/>
+          </a:ln>
+        </p:spPr>
+        <p:style>
+          <a:lnRef idx="1">
+            <a:schemeClr val="accent1"/>
+          </a:lnRef>
+          <a:fillRef idx="3">
+            <a:schemeClr val="accent1"/>
+          </a:fillRef>
+          <a:effectRef idx="2">
+            <a:schemeClr val="accent1"/>
+          </a:effectRef>
+          <a:fontRef idx="minor">
+            <a:schemeClr val="lt1"/>
+          </a:fontRef>
+        </p:style>
+        <p:txBody>
+          <a:bodyPr rtlCol="0" anchor="ctr"/>
+          <a:lstStyle/>
+          <a:p>
+            <a:pPr algn="ctr"/>
+          </a:p>
+        </p:txBody>
+      </p:sp>
+      <p:sp>
+        <p:nvSpPr>
+          <p:cNvPr id="9" name="Rectangle 8"/>
+          <p:cNvSpPr/>
+          <p:nvPr/>
+        </p:nvSpPr>
+        <p:spPr>
+          <a:xfrm>
+            <a:off x="640080" y="1783080"/>
+            <a:ext cx="73152" cy="1097280"/>
+          </a:xfrm>
+          <a:prstGeom prst="rect">
+            <a:avLst/>
+          </a:prstGeom>
+          <a:solidFill>
+            <a:srgbClr val="61AFEF"/>
+          </a:solidFill>
+          <a:ln>
+            <a:noFill/>
+          </a:ln>
+        </p:spPr>
+        <p:style>
+          <a:lnRef idx="1">
+            <a:schemeClr val="accent1"/>
+          </a:lnRef>
+          <a:fillRef idx="3">
+            <a:schemeClr val="accent1"/>
+          </a:fillRef>
+          <a:effectRef idx="2">
+            <a:schemeClr val="accent1"/>
+          </a:effectRef>
+          <a:fontRef idx="minor">
+            <a:schemeClr val="lt1"/>
+          </a:fontRef>
+        </p:style>
+        <p:txBody>
+          <a:bodyPr rtlCol="0" anchor="ctr"/>
+          <a:lstStyle/>
+          <a:p>
+            <a:pPr algn="ctr"/>
+          </a:p>
+        </p:txBody>
+      </p:sp>
+      <p:sp>
+        <p:nvSpPr>
+          <p:cNvPr id="10" name="TextBox 9"/>
+          <p:cNvSpPr txBox="1"/>
+          <p:nvPr/>
+        </p:nvSpPr>
+        <p:spPr>
+          <a:xfrm>
+            <a:off x="914400" y="1828800"/>
+            <a:ext cx="10241280" cy="1005839"/>
+          </a:xfrm>
+          <a:prstGeom prst="rect">
+            <a:avLst/>
+          </a:prstGeom>
+          <a:noFill/>
+        </p:spPr>
+        <p:txBody>
+          <a:bodyPr wrap="none">
+            <a:spAutoFit/>
+          </a:bodyPr>
+          <a:lstStyle/>
           <a:p>
             <a:pPr>
               <a:spcAft>
-                <a:spcPts val="600"/>
+                <a:spcPts val="200"/>
               </a:spcAft>
-              <a:defRPr sz="1600">
-                <a:solidFill>
-                  <a:srgbClr val="333333"/>
-                </a:solidFill>
-              </a:defRPr>
-            </a:pPr>
-            <a:r>
-              <a:t>numbers = []</a:t>
+              <a:defRPr sz="1400">
+                <a:solidFill>
+                  <a:srgbClr val="ABB2BF"/>
+                </a:solidFill>
+                <a:latin typeface="Consolas"/>
+              </a:defRPr>
+            </a:pPr>
+            <a:r>
+              <a:t>matrix = [</a:t>
             </a:r>
           </a:p>
           <a:p>
             <a:pPr>
               <a:spcAft>
-                <a:spcPts val="600"/>
+                <a:spcPts val="200"/>
               </a:spcAft>
-              <a:defRPr b="1" sz="2000">
-                <a:solidFill>
-                  <a:srgbClr val="333333"/>
-                </a:solidFill>
-              </a:defRPr>
-            </a:pPr>
-            <a:r>
-              <a:t>for i in range(10):</a:t>
+              <a:defRPr sz="1400">
+                <a:solidFill>
+                  <a:srgbClr val="ABB2BF"/>
+                </a:solidFill>
+                <a:latin typeface="Consolas"/>
+              </a:defRPr>
+            </a:pPr>
+            <a:r>
+              <a:t>    [1, 2, 3],</a:t>
             </a:r>
           </a:p>
           <a:p>
             <a:pPr>
               <a:spcAft>
-                <a:spcPts val="600"/>
+                <a:spcPts val="200"/>
               </a:spcAft>
-              <a:defRPr sz="1600">
-                <a:solidFill>
-                  <a:srgbClr val="333333"/>
-                </a:solidFill>
-              </a:defRPr>
-            </a:pPr>
-            <a:r>
-              <a:t>    numbers.append(i * 2)</a:t>
+              <a:defRPr sz="1400">
+                <a:solidFill>
+                  <a:srgbClr val="ABB2BF"/>
+                </a:solidFill>
+                <a:latin typeface="Consolas"/>
+              </a:defRPr>
+            </a:pPr>
+            <a:r>
+              <a:t>    [4, 5, 6],</a:t>
             </a:r>
           </a:p>
           <a:p>
             <a:pPr>
               <a:spcAft>
-                <a:spcPts val="600"/>
+                <a:spcPts val="200"/>
               </a:spcAft>
-              <a:defRPr b="1" sz="2000">
+              <a:defRPr sz="1400">
+                <a:solidFill>
+                  <a:srgbClr val="ABB2BF"/>
+                </a:solidFill>
+                <a:latin typeface="Consolas"/>
+              </a:defRPr>
+            </a:pPr>
+            <a:r>
+              <a:t>    [7, 8, 9]</a:t>
+            </a:r>
+          </a:p>
+        </p:txBody>
+      </p:sp>
+      <p:sp>
+        <p:nvSpPr>
+          <p:cNvPr id="11" name="TextBox 10"/>
+          <p:cNvSpPr txBox="1"/>
+          <p:nvPr/>
+        </p:nvSpPr>
+        <p:spPr>
+          <a:xfrm>
+            <a:off x="457200" y="3063240"/>
+            <a:ext cx="11247120" cy="320040"/>
+          </a:xfrm>
+          <a:prstGeom prst="rect">
+            <a:avLst/>
+          </a:prstGeom>
+          <a:noFill/>
+        </p:spPr>
+        <p:txBody>
+          <a:bodyPr wrap="none">
+            <a:spAutoFit/>
+          </a:bodyPr>
+          <a:lstStyle/>
+          <a:p>
+            <a:pPr>
+              <a:defRPr sz="1700">
                 <a:solidFill>
                   <a:srgbClr val="333333"/>
                 </a:solidFill>
               </a:defRPr>
             </a:pPr>
             <a:r>
-              <a:t>Filtering:</a:t>
-            </a:r>
-          </a:p>
+              <a:t>]</a:t>
+            </a:r>
+          </a:p>
+        </p:txBody>
+      </p:sp>
+      <p:sp>
+        <p:nvSpPr>
+          <p:cNvPr id="12" name="Rectangle 11"/>
+          <p:cNvSpPr/>
+          <p:nvPr/>
+        </p:nvSpPr>
+        <p:spPr>
+          <a:xfrm>
+            <a:off x="365760" y="3291840"/>
+            <a:ext cx="11430000" cy="365760"/>
+          </a:xfrm>
+          <a:prstGeom prst="rect">
+            <a:avLst/>
+          </a:prstGeom>
+          <a:solidFill>
+            <a:srgbClr val="0078D7"/>
+          </a:solidFill>
+          <a:ln>
+            <a:noFill/>
+          </a:ln>
+        </p:spPr>
+        <p:style>
+          <a:lnRef idx="1">
+            <a:schemeClr val="accent1"/>
+          </a:lnRef>
+          <a:fillRef idx="3">
+            <a:schemeClr val="accent1"/>
+          </a:fillRef>
+          <a:effectRef idx="2">
+            <a:schemeClr val="accent1"/>
+          </a:effectRef>
+          <a:fontRef idx="minor">
+            <a:schemeClr val="lt1"/>
+          </a:fontRef>
+        </p:style>
+        <p:txBody>
+          <a:bodyPr rtlCol="0" anchor="ctr"/>
+          <a:lstStyle/>
+          <a:p>
+            <a:pPr algn="ctr"/>
+          </a:p>
+        </p:txBody>
+      </p:sp>
+      <p:sp>
+        <p:nvSpPr>
+          <p:cNvPr id="13" name="TextBox 12"/>
+          <p:cNvSpPr txBox="1"/>
+          <p:nvPr/>
+        </p:nvSpPr>
+        <p:spPr>
+          <a:xfrm>
+            <a:off x="548640" y="3337560"/>
+            <a:ext cx="10972800" cy="274320"/>
+          </a:xfrm>
+          <a:prstGeom prst="rect">
+            <a:avLst/>
+          </a:prstGeom>
+          <a:noFill/>
+        </p:spPr>
+        <p:txBody>
+          <a:bodyPr wrap="none">
+            <a:spAutoFit/>
+          </a:bodyPr>
+          <a:lstStyle/>
+          <a:p>
+            <a:pPr>
+              <a:defRPr sz="2000" b="1">
+                <a:solidFill>
+                  <a:srgbClr val="FFFFFF"/>
+                </a:solidFill>
+              </a:defRPr>
+            </a:pPr>
+            <a:r>
+              <a:t>Accessing:</a:t>
+            </a:r>
+          </a:p>
+        </p:txBody>
+      </p:sp>
+      <p:sp>
+        <p:nvSpPr>
+          <p:cNvPr id="14" name="TextBox 13"/>
+          <p:cNvSpPr txBox="1"/>
+          <p:nvPr/>
+        </p:nvSpPr>
+        <p:spPr>
+          <a:xfrm>
+            <a:off x="457200" y="3794760"/>
+            <a:ext cx="11247120" cy="320040"/>
+          </a:xfrm>
+          <a:prstGeom prst="rect">
+            <a:avLst/>
+          </a:prstGeom>
+          <a:noFill/>
+        </p:spPr>
+        <p:txBody>
+          <a:bodyPr wrap="none">
+            <a:spAutoFit/>
+          </a:bodyPr>
+          <a:lstStyle/>
+          <a:p>
+            <a:pPr>
+              <a:defRPr sz="1700">
+                <a:solidFill>
+                  <a:srgbClr val="333333"/>
+                </a:solidFill>
+              </a:defRPr>
+            </a:pPr>
+            <a:r>
+              <a:t>matrix[0]  # [1, 2, 3]</a:t>
+            </a:r>
+          </a:p>
+        </p:txBody>
+      </p:sp>
+      <p:sp>
+        <p:nvSpPr>
+          <p:cNvPr id="15" name="TextBox 14"/>
+          <p:cNvSpPr txBox="1"/>
+          <p:nvPr/>
+        </p:nvSpPr>
+        <p:spPr>
+          <a:xfrm>
+            <a:off x="457200" y="4069080"/>
+            <a:ext cx="11247120" cy="320040"/>
+          </a:xfrm>
+          <a:prstGeom prst="rect">
+            <a:avLst/>
+          </a:prstGeom>
+          <a:noFill/>
+        </p:spPr>
+        <p:txBody>
+          <a:bodyPr wrap="none">
+            <a:spAutoFit/>
+          </a:bodyPr>
+          <a:lstStyle/>
+          <a:p>
+            <a:pPr>
+              <a:defRPr sz="1700">
+                <a:solidFill>
+                  <a:srgbClr val="333333"/>
+                </a:solidFill>
+              </a:defRPr>
+            </a:pPr>
+            <a:r>
+              <a:t>matrix[0][0]  # 1</a:t>
+            </a:r>
+          </a:p>
+        </p:txBody>
+      </p:sp>
+      <p:sp>
+        <p:nvSpPr>
+          <p:cNvPr id="16" name="TextBox 15"/>
+          <p:cNvSpPr txBox="1"/>
+          <p:nvPr/>
+        </p:nvSpPr>
+        <p:spPr>
+          <a:xfrm>
+            <a:off x="457200" y="4343400"/>
+            <a:ext cx="11247120" cy="320040"/>
+          </a:xfrm>
+          <a:prstGeom prst="rect">
+            <a:avLst/>
+          </a:prstGeom>
+          <a:noFill/>
+        </p:spPr>
+        <p:txBody>
+          <a:bodyPr wrap="none">
+            <a:spAutoFit/>
+          </a:bodyPr>
+          <a:lstStyle/>
+          <a:p>
+            <a:pPr>
+              <a:defRPr sz="1700">
+                <a:solidFill>
+                  <a:srgbClr val="333333"/>
+                </a:solidFill>
+              </a:defRPr>
+            </a:pPr>
+            <a:r>
+              <a:t>matrix[1][2]  # 6</a:t>
+            </a:r>
+          </a:p>
+        </p:txBody>
+      </p:sp>
+      <p:sp>
+        <p:nvSpPr>
+          <p:cNvPr id="17" name="Rectangle 16"/>
+          <p:cNvSpPr/>
+          <p:nvPr/>
+        </p:nvSpPr>
+        <p:spPr>
+          <a:xfrm>
+            <a:off x="365760" y="4572000"/>
+            <a:ext cx="11430000" cy="365760"/>
+          </a:xfrm>
+          <a:prstGeom prst="rect">
+            <a:avLst/>
+          </a:prstGeom>
+          <a:solidFill>
+            <a:srgbClr val="0078D7"/>
+          </a:solidFill>
+          <a:ln>
+            <a:noFill/>
+          </a:ln>
+        </p:spPr>
+        <p:style>
+          <a:lnRef idx="1">
+            <a:schemeClr val="accent1"/>
+          </a:lnRef>
+          <a:fillRef idx="3">
+            <a:schemeClr val="accent1"/>
+          </a:fillRef>
+          <a:effectRef idx="2">
+            <a:schemeClr val="accent1"/>
+          </a:effectRef>
+          <a:fontRef idx="minor">
+            <a:schemeClr val="lt1"/>
+          </a:fontRef>
+        </p:style>
+        <p:txBody>
+          <a:bodyPr rtlCol="0" anchor="ctr"/>
+          <a:lstStyle/>
+          <a:p>
+            <a:pPr algn="ctr"/>
+          </a:p>
+        </p:txBody>
+      </p:sp>
+      <p:sp>
+        <p:nvSpPr>
+          <p:cNvPr id="18" name="TextBox 17"/>
+          <p:cNvSpPr txBox="1"/>
+          <p:nvPr/>
+        </p:nvSpPr>
+        <p:spPr>
+          <a:xfrm>
+            <a:off x="548640" y="4617720"/>
+            <a:ext cx="10972800" cy="274320"/>
+          </a:xfrm>
+          <a:prstGeom prst="rect">
+            <a:avLst/>
+          </a:prstGeom>
+          <a:noFill/>
+        </p:spPr>
+        <p:txBody>
+          <a:bodyPr wrap="none">
+            <a:spAutoFit/>
+          </a:bodyPr>
+          <a:lstStyle/>
+          <a:p>
+            <a:pPr>
+              <a:defRPr sz="2000" b="1">
+                <a:solidFill>
+                  <a:srgbClr val="FFFFFF"/>
+                </a:solidFill>
+              </a:defRPr>
+            </a:pPr>
+            <a:r>
+              <a:t>Iterating:</a:t>
+            </a:r>
+          </a:p>
+        </p:txBody>
+      </p:sp>
+      <p:sp>
+        <p:nvSpPr>
+          <p:cNvPr id="19" name="Rectangle 18"/>
+          <p:cNvSpPr/>
+          <p:nvPr/>
+        </p:nvSpPr>
+        <p:spPr>
+          <a:xfrm>
+            <a:off x="640080" y="5029200"/>
+            <a:ext cx="10789920" cy="868680"/>
+          </a:xfrm>
+          <a:prstGeom prst="rect">
+            <a:avLst/>
+          </a:prstGeom>
+          <a:solidFill>
+            <a:srgbClr val="282C34"/>
+          </a:solidFill>
+          <a:ln>
+            <a:noFill/>
+          </a:ln>
+        </p:spPr>
+        <p:style>
+          <a:lnRef idx="1">
+            <a:schemeClr val="accent1"/>
+          </a:lnRef>
+          <a:fillRef idx="3">
+            <a:schemeClr val="accent1"/>
+          </a:fillRef>
+          <a:effectRef idx="2">
+            <a:schemeClr val="accent1"/>
+          </a:effectRef>
+          <a:fontRef idx="minor">
+            <a:schemeClr val="lt1"/>
+          </a:fontRef>
+        </p:style>
+        <p:txBody>
+          <a:bodyPr rtlCol="0" anchor="ctr"/>
+          <a:lstStyle/>
+          <a:p>
+            <a:pPr algn="ctr"/>
+          </a:p>
+        </p:txBody>
+      </p:sp>
+      <p:sp>
+        <p:nvSpPr>
+          <p:cNvPr id="20" name="Rectangle 19"/>
+          <p:cNvSpPr/>
+          <p:nvPr/>
+        </p:nvSpPr>
+        <p:spPr>
+          <a:xfrm>
+            <a:off x="640080" y="5029200"/>
+            <a:ext cx="73152" cy="868680"/>
+          </a:xfrm>
+          <a:prstGeom prst="rect">
+            <a:avLst/>
+          </a:prstGeom>
+          <a:solidFill>
+            <a:srgbClr val="61AFEF"/>
+          </a:solidFill>
+          <a:ln>
+            <a:noFill/>
+          </a:ln>
+        </p:spPr>
+        <p:style>
+          <a:lnRef idx="1">
+            <a:schemeClr val="accent1"/>
+          </a:lnRef>
+          <a:fillRef idx="3">
+            <a:schemeClr val="accent1"/>
+          </a:fillRef>
+          <a:effectRef idx="2">
+            <a:schemeClr val="accent1"/>
+          </a:effectRef>
+          <a:fontRef idx="minor">
+            <a:schemeClr val="lt1"/>
+          </a:fontRef>
+        </p:style>
+        <p:txBody>
+          <a:bodyPr rtlCol="0" anchor="ctr"/>
+          <a:lstStyle/>
+          <a:p>
+            <a:pPr algn="ctr"/>
+          </a:p>
+        </p:txBody>
+      </p:sp>
+      <p:sp>
+        <p:nvSpPr>
+          <p:cNvPr id="21" name="TextBox 20"/>
+          <p:cNvSpPr txBox="1"/>
+          <p:nvPr/>
+        </p:nvSpPr>
+        <p:spPr>
+          <a:xfrm>
+            <a:off x="914400" y="5074920"/>
+            <a:ext cx="10241280" cy="777240"/>
+          </a:xfrm>
+          <a:prstGeom prst="rect">
+            <a:avLst/>
+          </a:prstGeom>
+          <a:noFill/>
+        </p:spPr>
+        <p:txBody>
+          <a:bodyPr wrap="none">
+            <a:spAutoFit/>
+          </a:bodyPr>
+          <a:lstStyle/>
           <a:p>
             <a:pPr>
               <a:spcAft>
-                <a:spcPts val="600"/>
+                <a:spcPts val="200"/>
               </a:spcAft>
-              <a:defRPr sz="1600">
-                <a:solidFill>
-                  <a:srgbClr val="333333"/>
-                </a:solidFill>
-              </a:defRPr>
-            </a:pPr>
-            <a:r>
-              <a:t>evens = []</a:t>
+              <a:defRPr sz="1400">
+                <a:solidFill>
+                  <a:srgbClr val="ABB2BF"/>
+                </a:solidFill>
+                <a:latin typeface="Consolas"/>
+              </a:defRPr>
+            </a:pPr>
+            <a:r>
+              <a:t>for row in matrix:</a:t>
             </a:r>
           </a:p>
           <a:p>
             <a:pPr>
               <a:spcAft>
-                <a:spcPts val="600"/>
+                <a:spcPts val="200"/>
               </a:spcAft>
-              <a:defRPr b="1" sz="2000">
-                <a:solidFill>
-                  <a:srgbClr val="333333"/>
-                </a:solidFill>
-              </a:defRPr>
-            </a:pPr>
-            <a:r>
-              <a:t>for num in numbers:</a:t>
+              <a:defRPr sz="1400">
+                <a:solidFill>
+                  <a:srgbClr val="ABB2BF"/>
+                </a:solidFill>
+                <a:latin typeface="Consolas"/>
+              </a:defRPr>
+            </a:pPr>
+            <a:r>
+              <a:t>    for item in row:</a:t>
             </a:r>
           </a:p>
           <a:p>
             <a:pPr>
               <a:spcAft>
-                <a:spcPts val="600"/>
+                <a:spcPts val="200"/>
               </a:spcAft>
-              <a:defRPr sz="1600">
-                <a:solidFill>
-                  <a:srgbClr val="333333"/>
-                </a:solidFill>
-              </a:defRPr>
-            </a:pPr>
-            <a:r>
-              <a:t>    if num % 2 == 0:</a:t>
-            </a:r>
-          </a:p>
+              <a:defRPr sz="1400">
+                <a:solidFill>
+                  <a:srgbClr val="ABB2BF"/>
+                </a:solidFill>
+                <a:latin typeface="Consolas"/>
+              </a:defRPr>
+            </a:pPr>
+            <a:r>
+              <a:t>        print(item)</a:t>
+            </a:r>
+          </a:p>
+        </p:txBody>
+      </p:sp>
+      <p:sp>
+        <p:nvSpPr>
+          <p:cNvPr id="22" name="Rectangle 21"/>
+          <p:cNvSpPr/>
+          <p:nvPr/>
+        </p:nvSpPr>
+        <p:spPr>
+          <a:xfrm>
+            <a:off x="365760" y="6035040"/>
+            <a:ext cx="11430000" cy="365760"/>
+          </a:xfrm>
+          <a:prstGeom prst="rect">
+            <a:avLst/>
+          </a:prstGeom>
+          <a:solidFill>
+            <a:srgbClr val="0078D7"/>
+          </a:solidFill>
+          <a:ln>
+            <a:noFill/>
+          </a:ln>
+        </p:spPr>
+        <p:style>
+          <a:lnRef idx="1">
+            <a:schemeClr val="accent1"/>
+          </a:lnRef>
+          <a:fillRef idx="3">
+            <a:schemeClr val="accent1"/>
+          </a:fillRef>
+          <a:effectRef idx="2">
+            <a:schemeClr val="accent1"/>
+          </a:effectRef>
+          <a:fontRef idx="minor">
+            <a:schemeClr val="lt1"/>
+          </a:fontRef>
+        </p:style>
+        <p:txBody>
+          <a:bodyPr rtlCol="0" anchor="ctr"/>
+          <a:lstStyle/>
+          <a:p>
+            <a:pPr algn="ctr"/>
+          </a:p>
+        </p:txBody>
+      </p:sp>
+      <p:sp>
+        <p:nvSpPr>
+          <p:cNvPr id="23" name="TextBox 22"/>
+          <p:cNvSpPr txBox="1"/>
+          <p:nvPr/>
+        </p:nvSpPr>
+        <p:spPr>
+          <a:xfrm>
+            <a:off x="548640" y="6080760"/>
+            <a:ext cx="10972800" cy="274320"/>
+          </a:xfrm>
+          <a:prstGeom prst="rect">
+            <a:avLst/>
+          </a:prstGeom>
+          <a:noFill/>
+        </p:spPr>
+        <p:txBody>
+          <a:bodyPr wrap="none">
+            <a:spAutoFit/>
+          </a:bodyPr>
+          <a:lstStyle/>
           <a:p>
             <a:pPr>
-              <a:spcAft>
-                <a:spcPts val="600"/>
-              </a:spcAft>
-              <a:defRPr sz="1600">
-                <a:solidFill>
-                  <a:srgbClr val="333333"/>
-                </a:solidFill>
-              </a:defRPr>
-            </a:pPr>
-            <a:r>
-              <a:t>        evens.append(num)</a:t>
-            </a:r>
-          </a:p>
-          <a:p>
-            <a:pPr>
-              <a:spcAft>
-                <a:spcPts val="600"/>
-              </a:spcAft>
-              <a:defRPr b="1" sz="2000">
-                <a:solidFill>
-                  <a:srgbClr val="333333"/>
-                </a:solidFill>
-              </a:defRPr>
-            </a:pPr>
-            <a:r>
-              <a:t>Finding Maximum:</a:t>
-            </a:r>
-          </a:p>
-          <a:p>
-            <a:pPr>
-              <a:spcAft>
-                <a:spcPts val="600"/>
-              </a:spcAft>
-              <a:defRPr sz="1600">
-                <a:solidFill>
-                  <a:srgbClr val="333333"/>
-                </a:solidFill>
-              </a:defRPr>
-            </a:pPr>
-            <a:r>
-              <a:t>max_val = numbers[0]</a:t>
-            </a:r>
-          </a:p>
-          <a:p>
-            <a:pPr>
-              <a:spcAft>
-                <a:spcPts val="600"/>
-              </a:spcAft>
-              <a:defRPr b="1" sz="2000">
-                <a:solidFill>
-                  <a:srgbClr val="333333"/>
-                </a:solidFill>
-              </a:defRPr>
-            </a:pPr>
-            <a:r>
-              <a:t>for num in numbers:</a:t>
-            </a:r>
-          </a:p>
-          <a:p>
-            <a:pPr>
-              <a:spcAft>
-                <a:spcPts val="600"/>
-              </a:spcAft>
-              <a:defRPr sz="1600">
-                <a:solidFill>
-                  <a:srgbClr val="333333"/>
-                </a:solidFill>
-              </a:defRPr>
-            </a:pPr>
-            <a:r>
-              <a:t>    if num &gt; max_val:</a:t>
-            </a:r>
-          </a:p>
-          <a:p>
-            <a:pPr>
-              <a:spcAft>
-                <a:spcPts val="600"/>
-              </a:spcAft>
-              <a:defRPr sz="1600">
-                <a:solidFill>
-                  <a:srgbClr val="333333"/>
-                </a:solidFill>
-              </a:defRPr>
-            </a:pPr>
-            <a:r>
-              <a:t>        max_val = num</a:t>
-            </a:r>
-          </a:p>
-          <a:p>
-            <a:pPr>
-              <a:spcAft>
-                <a:spcPts val="600"/>
-              </a:spcAft>
-              <a:defRPr b="1" sz="2000">
-                <a:solidFill>
-                  <a:srgbClr val="333333"/>
-                </a:solidFill>
-              </a:defRPr>
-            </a:pPr>
-            <a:r>
-              <a:t>Copying Lists:</a:t>
-            </a:r>
-          </a:p>
-          <a:p>
-            <a:pPr>
-              <a:spcAft>
-                <a:spcPts val="600"/>
-              </a:spcAft>
-              <a:defRPr sz="1600">
-                <a:solidFill>
-                  <a:srgbClr val="333333"/>
-                </a:solidFill>
-              </a:defRPr>
-            </a:pPr>
-            <a:r>
-              <a:t>copy = original.copy()</a:t>
-            </a:r>
-          </a:p>
-          <a:p>
-            <a:pPr>
-              <a:spcAft>
-                <a:spcPts val="600"/>
-              </a:spcAft>
-              <a:defRPr b="1" sz="2000">
-                <a:solidFill>
-                  <a:srgbClr val="333333"/>
-                </a:solidFill>
-              </a:defRPr>
-            </a:pPr>
-            <a:r>
-              <a:t>copy = original[:]</a:t>
-            </a:r>
-          </a:p>
-          <a:p>
-            <a:pPr>
-              <a:spcAft>
-                <a:spcPts val="600"/>
-              </a:spcAft>
-              <a:defRPr sz="1600">
-                <a:solidFill>
-                  <a:srgbClr val="333333"/>
-                </a:solidFill>
-              </a:defRPr>
-            </a:pPr>
-            <a:r>
-              <a:t>copy = list(original)</a:t>
+              <a:defRPr sz="2000" b="1">
+                <a:solidFill>
+                  <a:srgbClr val="FFFFFF"/>
+                </a:solidFill>
+              </a:defRPr>
+            </a:pPr>
+            <a:r>
+              <a:t>Use Cases:</a:t>
             </a:r>
           </a:p>
         </p:txBody>
@@ -5981,7 +10593,7 @@
             <a:avLst/>
           </a:prstGeom>
           <a:solidFill>
-            <a:srgbClr val="FFFFFF"/>
+            <a:srgbClr val="FAFAFA"/>
           </a:solidFill>
           <a:ln>
             <a:noFill/>
@@ -6018,7 +10630,7 @@
         <p:spPr>
           <a:xfrm>
             <a:off x="0" y="0"/>
-            <a:ext cx="12191695" cy="137160"/>
+            <a:ext cx="12191695" cy="1097280"/>
           </a:xfrm>
           <a:prstGeom prst="rect">
             <a:avLst/>
@@ -6054,13 +10666,56 @@
       </p:sp>
       <p:sp>
         <p:nvSpPr>
-          <p:cNvPr id="4" name="TextBox 3"/>
+          <p:cNvPr id="4" name="Rectangle 3"/>
+          <p:cNvSpPr/>
+          <p:nvPr/>
+        </p:nvSpPr>
+        <p:spPr>
+          <a:xfrm>
+            <a:off x="0" y="1097280"/>
+            <a:ext cx="137160" cy="5760720"/>
+          </a:xfrm>
+          <a:prstGeom prst="rect">
+            <a:avLst/>
+          </a:prstGeom>
+          <a:solidFill>
+            <a:srgbClr val="FFBB33"/>
+          </a:solidFill>
+          <a:ln>
+            <a:noFill/>
+          </a:ln>
+        </p:spPr>
+        <p:style>
+          <a:lnRef idx="1">
+            <a:schemeClr val="accent1"/>
+          </a:lnRef>
+          <a:fillRef idx="3">
+            <a:schemeClr val="accent1"/>
+          </a:fillRef>
+          <a:effectRef idx="2">
+            <a:schemeClr val="accent1"/>
+          </a:effectRef>
+          <a:fontRef idx="minor">
+            <a:schemeClr val="lt1"/>
+          </a:fontRef>
+        </p:style>
+        <p:txBody>
+          <a:bodyPr rtlCol="0" anchor="ctr"/>
+          <a:lstStyle/>
+          <a:p>
+            <a:pPr algn="ctr"/>
+          </a:p>
+        </p:txBody>
+      </p:sp>
+      <p:sp>
+        <p:nvSpPr>
+          <p:cNvPr id="5" name="TextBox 4"/>
           <p:cNvSpPr txBox="1"/>
           <p:nvPr/>
         </p:nvSpPr>
         <p:spPr>
           <a:xfrm>
-            <a:off x="457200" y="320040"/>
+            <a:off x="365760" y="274320"/>
             <a:ext cx="10972800" cy="640080"/>
           </a:xfrm>
           <a:prstGeom prst="rect">
@@ -6077,26 +10732,69 @@
             <a:pPr>
               <a:defRPr sz="3600" b="1">
                 <a:solidFill>
-                  <a:srgbClr val="003366"/>
-                </a:solidFill>
-              </a:defRPr>
-            </a:pPr>
-            <a:r>
-              <a:t>List Best Practices</a:t>
-            </a:r>
-          </a:p>
-        </p:txBody>
-      </p:sp>
-      <p:sp>
-        <p:nvSpPr>
-          <p:cNvPr id="5" name="TextBox 4"/>
+                  <a:srgbClr val="FFFFFF"/>
+                </a:solidFill>
+              </a:defRPr>
+            </a:pPr>
+            <a:r>
+              <a:t>Common List Patterns</a:t>
+            </a:r>
+          </a:p>
+        </p:txBody>
+      </p:sp>
+      <p:sp>
+        <p:nvSpPr>
+          <p:cNvPr id="6" name="Rectangle 5"/>
+          <p:cNvSpPr/>
+          <p:nvPr/>
+        </p:nvSpPr>
+        <p:spPr>
+          <a:xfrm>
+            <a:off x="365760" y="1325880"/>
+            <a:ext cx="11430000" cy="365760"/>
+          </a:xfrm>
+          <a:prstGeom prst="rect">
+            <a:avLst/>
+          </a:prstGeom>
+          <a:solidFill>
+            <a:srgbClr val="0078D7"/>
+          </a:solidFill>
+          <a:ln>
+            <a:noFill/>
+          </a:ln>
+        </p:spPr>
+        <p:style>
+          <a:lnRef idx="1">
+            <a:schemeClr val="accent1"/>
+          </a:lnRef>
+          <a:fillRef idx="3">
+            <a:schemeClr val="accent1"/>
+          </a:fillRef>
+          <a:effectRef idx="2">
+            <a:schemeClr val="accent1"/>
+          </a:effectRef>
+          <a:fontRef idx="minor">
+            <a:schemeClr val="lt1"/>
+          </a:fontRef>
+        </p:style>
+        <p:txBody>
+          <a:bodyPr rtlCol="0" anchor="ctr"/>
+          <a:lstStyle/>
+          <a:p>
+            <a:pPr algn="ctr"/>
+          </a:p>
+        </p:txBody>
+      </p:sp>
+      <p:sp>
+        <p:nvSpPr>
+          <p:cNvPr id="7" name="TextBox 6"/>
           <p:cNvSpPr txBox="1"/>
           <p:nvPr/>
         </p:nvSpPr>
         <p:spPr>
           <a:xfrm>
-            <a:off x="640080" y="1188720"/>
-            <a:ext cx="10789920" cy="5303520"/>
+            <a:off x="548640" y="1371600"/>
+            <a:ext cx="10972800" cy="274320"/>
           </a:xfrm>
           <a:prstGeom prst="rect">
             <a:avLst/>
@@ -6104,278 +10802,757 @@
           <a:noFill/>
         </p:spPr>
         <p:txBody>
-          <a:bodyPr wrap="square">
+          <a:bodyPr wrap="none">
             <a:spAutoFit/>
           </a:bodyPr>
           <a:lstStyle/>
           <a:p>
             <a:pPr>
-              <a:spcAft>
-                <a:spcPts val="600"/>
-              </a:spcAft>
-              <a:defRPr b="1" sz="2000">
-                <a:solidFill>
-                  <a:srgbClr val="333333"/>
-                </a:solidFill>
-              </a:defRPr>
-            </a:pPr>
-            <a:r>
-              <a:t>Do:</a:t>
-            </a:r>
-          </a:p>
-          <a:p>
-            <a:pPr lvl="1">
-              <a:spcAft>
-                <a:spcPts val="400"/>
-              </a:spcAft>
-              <a:defRPr sz="1600">
-                <a:solidFill>
-                  <a:srgbClr val="333333"/>
-                </a:solidFill>
-              </a:defRPr>
-            </a:pPr>
-            <a:r>
-              <a:t>• Use descriptive names</a:t>
-            </a:r>
-          </a:p>
-          <a:p>
-            <a:pPr lvl="1">
-              <a:spcAft>
-                <a:spcPts val="400"/>
-              </a:spcAft>
-              <a:defRPr sz="1600">
-                <a:solidFill>
-                  <a:srgbClr val="333333"/>
-                </a:solidFill>
-              </a:defRPr>
-            </a:pPr>
-            <a:r>
-              <a:t>• Check for empty: if my_list:</a:t>
-            </a:r>
-          </a:p>
-          <a:p>
-            <a:pPr lvl="1">
-              <a:spcAft>
-                <a:spcPts val="400"/>
-              </a:spcAft>
-              <a:defRPr sz="1600">
-                <a:solidFill>
-                  <a:srgbClr val="333333"/>
-                </a:solidFill>
-              </a:defRPr>
-            </a:pPr>
-            <a:r>
-              <a:t>• Use list comprehensions for simple cases</a:t>
-            </a:r>
-          </a:p>
-          <a:p>
-            <a:pPr lvl="1">
-              <a:spcAft>
-                <a:spcPts val="400"/>
-              </a:spcAft>
-              <a:defRPr sz="1600">
-                <a:solidFill>
-                  <a:srgbClr val="333333"/>
-                </a:solidFill>
-              </a:defRPr>
-            </a:pPr>
-            <a:r>
-              <a:t>• Initialize before building</a:t>
-            </a:r>
-          </a:p>
+              <a:defRPr sz="2000" b="1">
+                <a:solidFill>
+                  <a:srgbClr val="FFFFFF"/>
+                </a:solidFill>
+              </a:defRPr>
+            </a:pPr>
+            <a:r>
+              <a:t>Building Lists:</a:t>
+            </a:r>
+          </a:p>
+        </p:txBody>
+      </p:sp>
+      <p:sp>
+        <p:nvSpPr>
+          <p:cNvPr id="8" name="Rectangle 7"/>
+          <p:cNvSpPr/>
+          <p:nvPr/>
+        </p:nvSpPr>
+        <p:spPr>
+          <a:xfrm>
+            <a:off x="640080" y="1783080"/>
+            <a:ext cx="10789920" cy="868680"/>
+          </a:xfrm>
+          <a:prstGeom prst="rect">
+            <a:avLst/>
+          </a:prstGeom>
+          <a:solidFill>
+            <a:srgbClr val="282C34"/>
+          </a:solidFill>
+          <a:ln>
+            <a:noFill/>
+          </a:ln>
+        </p:spPr>
+        <p:style>
+          <a:lnRef idx="1">
+            <a:schemeClr val="accent1"/>
+          </a:lnRef>
+          <a:fillRef idx="3">
+            <a:schemeClr val="accent1"/>
+          </a:fillRef>
+          <a:effectRef idx="2">
+            <a:schemeClr val="accent1"/>
+          </a:effectRef>
+          <a:fontRef idx="minor">
+            <a:schemeClr val="lt1"/>
+          </a:fontRef>
+        </p:style>
+        <p:txBody>
+          <a:bodyPr rtlCol="0" anchor="ctr"/>
+          <a:lstStyle/>
+          <a:p>
+            <a:pPr algn="ctr"/>
+          </a:p>
+        </p:txBody>
+      </p:sp>
+      <p:sp>
+        <p:nvSpPr>
+          <p:cNvPr id="9" name="Rectangle 8"/>
+          <p:cNvSpPr/>
+          <p:nvPr/>
+        </p:nvSpPr>
+        <p:spPr>
+          <a:xfrm>
+            <a:off x="640080" y="1783080"/>
+            <a:ext cx="73152" cy="868680"/>
+          </a:xfrm>
+          <a:prstGeom prst="rect">
+            <a:avLst/>
+          </a:prstGeom>
+          <a:solidFill>
+            <a:srgbClr val="61AFEF"/>
+          </a:solidFill>
+          <a:ln>
+            <a:noFill/>
+          </a:ln>
+        </p:spPr>
+        <p:style>
+          <a:lnRef idx="1">
+            <a:schemeClr val="accent1"/>
+          </a:lnRef>
+          <a:fillRef idx="3">
+            <a:schemeClr val="accent1"/>
+          </a:fillRef>
+          <a:effectRef idx="2">
+            <a:schemeClr val="accent1"/>
+          </a:effectRef>
+          <a:fontRef idx="minor">
+            <a:schemeClr val="lt1"/>
+          </a:fontRef>
+        </p:style>
+        <p:txBody>
+          <a:bodyPr rtlCol="0" anchor="ctr"/>
+          <a:lstStyle/>
+          <a:p>
+            <a:pPr algn="ctr"/>
+          </a:p>
+        </p:txBody>
+      </p:sp>
+      <p:sp>
+        <p:nvSpPr>
+          <p:cNvPr id="10" name="TextBox 9"/>
+          <p:cNvSpPr txBox="1"/>
+          <p:nvPr/>
+        </p:nvSpPr>
+        <p:spPr>
+          <a:xfrm>
+            <a:off x="914400" y="1828800"/>
+            <a:ext cx="10241280" cy="777240"/>
+          </a:xfrm>
+          <a:prstGeom prst="rect">
+            <a:avLst/>
+          </a:prstGeom>
+          <a:noFill/>
+        </p:spPr>
+        <p:txBody>
+          <a:bodyPr wrap="none">
+            <a:spAutoFit/>
+          </a:bodyPr>
+          <a:lstStyle/>
           <a:p>
             <a:pPr>
               <a:spcAft>
-                <a:spcPts val="600"/>
+                <a:spcPts val="200"/>
               </a:spcAft>
-              <a:defRPr b="1" sz="2000">
-                <a:solidFill>
-                  <a:srgbClr val="333333"/>
-                </a:solidFill>
-              </a:defRPr>
-            </a:pPr>
-            <a:r>
-              <a:t>Avoid:</a:t>
-            </a:r>
-          </a:p>
-          <a:p>
-            <a:pPr lvl="1">
-              <a:spcAft>
-                <a:spcPts val="400"/>
-              </a:spcAft>
-              <a:defRPr sz="1600">
-                <a:solidFill>
-                  <a:srgbClr val="333333"/>
-                </a:solidFill>
-              </a:defRPr>
-            </a:pPr>
-            <a:r>
-              <a:t>• Modifying list while iterating</a:t>
-            </a:r>
-          </a:p>
-          <a:p>
-            <a:pPr lvl="1">
-              <a:spcAft>
-                <a:spcPts val="400"/>
-              </a:spcAft>
-              <a:defRPr sz="1600">
-                <a:solidFill>
-                  <a:srgbClr val="333333"/>
-                </a:solidFill>
-              </a:defRPr>
-            </a:pPr>
-            <a:r>
-              <a:t>• Using list as default parameter</a:t>
-            </a:r>
-          </a:p>
-          <a:p>
-            <a:pPr lvl="1">
-              <a:spcAft>
-                <a:spcPts val="400"/>
-              </a:spcAft>
-              <a:defRPr sz="1600">
-                <a:solidFill>
-                  <a:srgbClr val="333333"/>
-                </a:solidFill>
-              </a:defRPr>
-            </a:pPr>
-            <a:r>
-              <a:t>• Deep nesting (max 2-3 levels)</a:t>
+              <a:defRPr sz="1400">
+                <a:solidFill>
+                  <a:srgbClr val="ABB2BF"/>
+                </a:solidFill>
+                <a:latin typeface="Consolas"/>
+              </a:defRPr>
+            </a:pPr>
+            <a:r>
+              <a:t>numbers = []</a:t>
             </a:r>
           </a:p>
           <a:p>
             <a:pPr>
               <a:spcAft>
-                <a:spcPts val="600"/>
+                <a:spcPts val="200"/>
               </a:spcAft>
-              <a:defRPr b="1" sz="2000">
-                <a:solidFill>
-                  <a:srgbClr val="333333"/>
-                </a:solidFill>
-              </a:defRPr>
-            </a:pPr>
-            <a:r>
-              <a:t>Common Mistakes:</a:t>
-            </a:r>
-          </a:p>
-          <a:p>
-            <a:pPr lvl="1">
-              <a:spcAft>
-                <a:spcPts val="400"/>
-              </a:spcAft>
-              <a:defRPr sz="1600">
-                <a:solidFill>
-                  <a:srgbClr val="333333"/>
-                </a:solidFill>
-              </a:defRPr>
-            </a:pPr>
-            <a:r>
-              <a:t>• Index out of range</a:t>
-            </a:r>
-          </a:p>
-          <a:p>
-            <a:pPr lvl="1">
-              <a:spcAft>
-                <a:spcPts val="400"/>
-              </a:spcAft>
-              <a:defRPr sz="1600">
-                <a:solidFill>
-                  <a:srgbClr val="333333"/>
-                </a:solidFill>
-              </a:defRPr>
-            </a:pPr>
-            <a:r>
-              <a:t>• Confusing append() and extend()</a:t>
-            </a:r>
-          </a:p>
-          <a:p>
-            <a:pPr lvl="1">
-              <a:spcAft>
-                <a:spcPts val="400"/>
-              </a:spcAft>
-              <a:defRPr sz="1600">
-                <a:solidFill>
-                  <a:srgbClr val="333333"/>
-                </a:solidFill>
-              </a:defRPr>
-            </a:pPr>
-            <a:r>
-              <a:t>• Forgetting lists are mutable</a:t>
-            </a:r>
-          </a:p>
-          <a:p>
-            <a:pPr lvl="1">
-              <a:spcAft>
-                <a:spcPts val="400"/>
-              </a:spcAft>
-              <a:defRPr sz="1600">
-                <a:solidFill>
-                  <a:srgbClr val="333333"/>
-                </a:solidFill>
-              </a:defRPr>
-            </a:pPr>
-            <a:r>
-              <a:t>• Not copying when needed</a:t>
+              <a:defRPr sz="1400">
+                <a:solidFill>
+                  <a:srgbClr val="ABB2BF"/>
+                </a:solidFill>
+                <a:latin typeface="Consolas"/>
+              </a:defRPr>
+            </a:pPr>
+            <a:r>
+              <a:t>for i in range(10):</a:t>
             </a:r>
           </a:p>
           <a:p>
             <a:pPr>
               <a:spcAft>
-                <a:spcPts val="600"/>
+                <a:spcPts val="200"/>
               </a:spcAft>
-              <a:defRPr b="1" sz="2000">
-                <a:solidFill>
-                  <a:srgbClr val="333333"/>
-                </a:solidFill>
-              </a:defRPr>
-            </a:pPr>
-            <a:r>
-              <a:t>Performance:</a:t>
-            </a:r>
-          </a:p>
-          <a:p>
-            <a:pPr lvl="1">
+              <a:defRPr sz="1400">
+                <a:solidFill>
+                  <a:srgbClr val="ABB2BF"/>
+                </a:solidFill>
+                <a:latin typeface="Consolas"/>
+              </a:defRPr>
+            </a:pPr>
+            <a:r>
+              <a:t>    numbers.append(i * 2)</a:t>
+            </a:r>
+          </a:p>
+        </p:txBody>
+      </p:sp>
+      <p:sp>
+        <p:nvSpPr>
+          <p:cNvPr id="11" name="Rectangle 10"/>
+          <p:cNvSpPr/>
+          <p:nvPr/>
+        </p:nvSpPr>
+        <p:spPr>
+          <a:xfrm>
+            <a:off x="365760" y="2788920"/>
+            <a:ext cx="11430000" cy="365760"/>
+          </a:xfrm>
+          <a:prstGeom prst="rect">
+            <a:avLst/>
+          </a:prstGeom>
+          <a:solidFill>
+            <a:srgbClr val="0078D7"/>
+          </a:solidFill>
+          <a:ln>
+            <a:noFill/>
+          </a:ln>
+        </p:spPr>
+        <p:style>
+          <a:lnRef idx="1">
+            <a:schemeClr val="accent1"/>
+          </a:lnRef>
+          <a:fillRef idx="3">
+            <a:schemeClr val="accent1"/>
+          </a:fillRef>
+          <a:effectRef idx="2">
+            <a:schemeClr val="accent1"/>
+          </a:effectRef>
+          <a:fontRef idx="minor">
+            <a:schemeClr val="lt1"/>
+          </a:fontRef>
+        </p:style>
+        <p:txBody>
+          <a:bodyPr rtlCol="0" anchor="ctr"/>
+          <a:lstStyle/>
+          <a:p>
+            <a:pPr algn="ctr"/>
+          </a:p>
+        </p:txBody>
+      </p:sp>
+      <p:sp>
+        <p:nvSpPr>
+          <p:cNvPr id="12" name="TextBox 11"/>
+          <p:cNvSpPr txBox="1"/>
+          <p:nvPr/>
+        </p:nvSpPr>
+        <p:spPr>
+          <a:xfrm>
+            <a:off x="548640" y="2834640"/>
+            <a:ext cx="10972800" cy="274320"/>
+          </a:xfrm>
+          <a:prstGeom prst="rect">
+            <a:avLst/>
+          </a:prstGeom>
+          <a:noFill/>
+        </p:spPr>
+        <p:txBody>
+          <a:bodyPr wrap="none">
+            <a:spAutoFit/>
+          </a:bodyPr>
+          <a:lstStyle/>
+          <a:p>
+            <a:pPr>
+              <a:defRPr sz="2000" b="1">
+                <a:solidFill>
+                  <a:srgbClr val="FFFFFF"/>
+                </a:solidFill>
+              </a:defRPr>
+            </a:pPr>
+            <a:r>
+              <a:t>Filtering:</a:t>
+            </a:r>
+          </a:p>
+        </p:txBody>
+      </p:sp>
+      <p:sp>
+        <p:nvSpPr>
+          <p:cNvPr id="13" name="Rectangle 12"/>
+          <p:cNvSpPr/>
+          <p:nvPr/>
+        </p:nvSpPr>
+        <p:spPr>
+          <a:xfrm>
+            <a:off x="640080" y="3246120"/>
+            <a:ext cx="10789920" cy="1097280"/>
+          </a:xfrm>
+          <a:prstGeom prst="rect">
+            <a:avLst/>
+          </a:prstGeom>
+          <a:solidFill>
+            <a:srgbClr val="282C34"/>
+          </a:solidFill>
+          <a:ln>
+            <a:noFill/>
+          </a:ln>
+        </p:spPr>
+        <p:style>
+          <a:lnRef idx="1">
+            <a:schemeClr val="accent1"/>
+          </a:lnRef>
+          <a:fillRef idx="3">
+            <a:schemeClr val="accent1"/>
+          </a:fillRef>
+          <a:effectRef idx="2">
+            <a:schemeClr val="accent1"/>
+          </a:effectRef>
+          <a:fontRef idx="minor">
+            <a:schemeClr val="lt1"/>
+          </a:fontRef>
+        </p:style>
+        <p:txBody>
+          <a:bodyPr rtlCol="0" anchor="ctr"/>
+          <a:lstStyle/>
+          <a:p>
+            <a:pPr algn="ctr"/>
+          </a:p>
+        </p:txBody>
+      </p:sp>
+      <p:sp>
+        <p:nvSpPr>
+          <p:cNvPr id="14" name="Rectangle 13"/>
+          <p:cNvSpPr/>
+          <p:nvPr/>
+        </p:nvSpPr>
+        <p:spPr>
+          <a:xfrm>
+            <a:off x="640080" y="3246120"/>
+            <a:ext cx="73152" cy="1097280"/>
+          </a:xfrm>
+          <a:prstGeom prst="rect">
+            <a:avLst/>
+          </a:prstGeom>
+          <a:solidFill>
+            <a:srgbClr val="61AFEF"/>
+          </a:solidFill>
+          <a:ln>
+            <a:noFill/>
+          </a:ln>
+        </p:spPr>
+        <p:style>
+          <a:lnRef idx="1">
+            <a:schemeClr val="accent1"/>
+          </a:lnRef>
+          <a:fillRef idx="3">
+            <a:schemeClr val="accent1"/>
+          </a:fillRef>
+          <a:effectRef idx="2">
+            <a:schemeClr val="accent1"/>
+          </a:effectRef>
+          <a:fontRef idx="minor">
+            <a:schemeClr val="lt1"/>
+          </a:fontRef>
+        </p:style>
+        <p:txBody>
+          <a:bodyPr rtlCol="0" anchor="ctr"/>
+          <a:lstStyle/>
+          <a:p>
+            <a:pPr algn="ctr"/>
+          </a:p>
+        </p:txBody>
+      </p:sp>
+      <p:sp>
+        <p:nvSpPr>
+          <p:cNvPr id="15" name="TextBox 14"/>
+          <p:cNvSpPr txBox="1"/>
+          <p:nvPr/>
+        </p:nvSpPr>
+        <p:spPr>
+          <a:xfrm>
+            <a:off x="914400" y="3291840"/>
+            <a:ext cx="10241280" cy="1005839"/>
+          </a:xfrm>
+          <a:prstGeom prst="rect">
+            <a:avLst/>
+          </a:prstGeom>
+          <a:noFill/>
+        </p:spPr>
+        <p:txBody>
+          <a:bodyPr wrap="none">
+            <a:spAutoFit/>
+          </a:bodyPr>
+          <a:lstStyle/>
+          <a:p>
+            <a:pPr>
               <a:spcAft>
-                <a:spcPts val="400"/>
+                <a:spcPts val="200"/>
               </a:spcAft>
-              <a:defRPr sz="1600">
-                <a:solidFill>
-                  <a:srgbClr val="333333"/>
-                </a:solidFill>
-              </a:defRPr>
-            </a:pPr>
-            <a:r>
-              <a:t>• append() is fast</a:t>
-            </a:r>
-          </a:p>
-          <a:p>
-            <a:pPr lvl="1">
+              <a:defRPr sz="1400">
+                <a:solidFill>
+                  <a:srgbClr val="ABB2BF"/>
+                </a:solidFill>
+                <a:latin typeface="Consolas"/>
+              </a:defRPr>
+            </a:pPr>
+            <a:r>
+              <a:t>evens = []</a:t>
+            </a:r>
+          </a:p>
+          <a:p>
+            <a:pPr>
               <a:spcAft>
-                <a:spcPts val="400"/>
+                <a:spcPts val="200"/>
               </a:spcAft>
-              <a:defRPr sz="1600">
-                <a:solidFill>
-                  <a:srgbClr val="333333"/>
-                </a:solidFill>
-              </a:defRPr>
-            </a:pPr>
-            <a:r>
-              <a:t>• insert(0, x) is slow</a:t>
-            </a:r>
-          </a:p>
-          <a:p>
-            <a:pPr lvl="1">
+              <a:defRPr sz="1400">
+                <a:solidFill>
+                  <a:srgbClr val="ABB2BF"/>
+                </a:solidFill>
+                <a:latin typeface="Consolas"/>
+              </a:defRPr>
+            </a:pPr>
+            <a:r>
+              <a:t>for num in numbers:</a:t>
+            </a:r>
+          </a:p>
+          <a:p>
+            <a:pPr>
               <a:spcAft>
-                <a:spcPts val="400"/>
+                <a:spcPts val="200"/>
               </a:spcAft>
-              <a:defRPr sz="1600">
-                <a:solidFill>
-                  <a:srgbClr val="333333"/>
-                </a:solidFill>
-              </a:defRPr>
-            </a:pPr>
-            <a:r>
-              <a:t>• Use deque for frequent insertions</a:t>
+              <a:defRPr sz="1400">
+                <a:solidFill>
+                  <a:srgbClr val="ABB2BF"/>
+                </a:solidFill>
+                <a:latin typeface="Consolas"/>
+              </a:defRPr>
+            </a:pPr>
+            <a:r>
+              <a:t>    if num % 2 == 0:</a:t>
+            </a:r>
+          </a:p>
+          <a:p>
+            <a:pPr>
+              <a:spcAft>
+                <a:spcPts val="200"/>
+              </a:spcAft>
+              <a:defRPr sz="1400">
+                <a:solidFill>
+                  <a:srgbClr val="ABB2BF"/>
+                </a:solidFill>
+                <a:latin typeface="Consolas"/>
+              </a:defRPr>
+            </a:pPr>
+            <a:r>
+              <a:t>        evens.append(num)</a:t>
+            </a:r>
+          </a:p>
+        </p:txBody>
+      </p:sp>
+      <p:sp>
+        <p:nvSpPr>
+          <p:cNvPr id="16" name="Rectangle 15"/>
+          <p:cNvSpPr/>
+          <p:nvPr/>
+        </p:nvSpPr>
+        <p:spPr>
+          <a:xfrm>
+            <a:off x="365760" y="4480560"/>
+            <a:ext cx="11430000" cy="365760"/>
+          </a:xfrm>
+          <a:prstGeom prst="rect">
+            <a:avLst/>
+          </a:prstGeom>
+          <a:solidFill>
+            <a:srgbClr val="0078D7"/>
+          </a:solidFill>
+          <a:ln>
+            <a:noFill/>
+          </a:ln>
+        </p:spPr>
+        <p:style>
+          <a:lnRef idx="1">
+            <a:schemeClr val="accent1"/>
+          </a:lnRef>
+          <a:fillRef idx="3">
+            <a:schemeClr val="accent1"/>
+          </a:fillRef>
+          <a:effectRef idx="2">
+            <a:schemeClr val="accent1"/>
+          </a:effectRef>
+          <a:fontRef idx="minor">
+            <a:schemeClr val="lt1"/>
+          </a:fontRef>
+        </p:style>
+        <p:txBody>
+          <a:bodyPr rtlCol="0" anchor="ctr"/>
+          <a:lstStyle/>
+          <a:p>
+            <a:pPr algn="ctr"/>
+          </a:p>
+        </p:txBody>
+      </p:sp>
+      <p:sp>
+        <p:nvSpPr>
+          <p:cNvPr id="17" name="TextBox 16"/>
+          <p:cNvSpPr txBox="1"/>
+          <p:nvPr/>
+        </p:nvSpPr>
+        <p:spPr>
+          <a:xfrm>
+            <a:off x="548640" y="4526280"/>
+            <a:ext cx="10972800" cy="274320"/>
+          </a:xfrm>
+          <a:prstGeom prst="rect">
+            <a:avLst/>
+          </a:prstGeom>
+          <a:noFill/>
+        </p:spPr>
+        <p:txBody>
+          <a:bodyPr wrap="none">
+            <a:spAutoFit/>
+          </a:bodyPr>
+          <a:lstStyle/>
+          <a:p>
+            <a:pPr>
+              <a:defRPr sz="2000" b="1">
+                <a:solidFill>
+                  <a:srgbClr val="FFFFFF"/>
+                </a:solidFill>
+              </a:defRPr>
+            </a:pPr>
+            <a:r>
+              <a:t>Finding Maximum:</a:t>
+            </a:r>
+          </a:p>
+        </p:txBody>
+      </p:sp>
+      <p:sp>
+        <p:nvSpPr>
+          <p:cNvPr id="18" name="Rectangle 17"/>
+          <p:cNvSpPr/>
+          <p:nvPr/>
+        </p:nvSpPr>
+        <p:spPr>
+          <a:xfrm>
+            <a:off x="640080" y="4937760"/>
+            <a:ext cx="10789920" cy="1097280"/>
+          </a:xfrm>
+          <a:prstGeom prst="rect">
+            <a:avLst/>
+          </a:prstGeom>
+          <a:solidFill>
+            <a:srgbClr val="282C34"/>
+          </a:solidFill>
+          <a:ln>
+            <a:noFill/>
+          </a:ln>
+        </p:spPr>
+        <p:style>
+          <a:lnRef idx="1">
+            <a:schemeClr val="accent1"/>
+          </a:lnRef>
+          <a:fillRef idx="3">
+            <a:schemeClr val="accent1"/>
+          </a:fillRef>
+          <a:effectRef idx="2">
+            <a:schemeClr val="accent1"/>
+          </a:effectRef>
+          <a:fontRef idx="minor">
+            <a:schemeClr val="lt1"/>
+          </a:fontRef>
+        </p:style>
+        <p:txBody>
+          <a:bodyPr rtlCol="0" anchor="ctr"/>
+          <a:lstStyle/>
+          <a:p>
+            <a:pPr algn="ctr"/>
+          </a:p>
+        </p:txBody>
+      </p:sp>
+      <p:sp>
+        <p:nvSpPr>
+          <p:cNvPr id="19" name="Rectangle 18"/>
+          <p:cNvSpPr/>
+          <p:nvPr/>
+        </p:nvSpPr>
+        <p:spPr>
+          <a:xfrm>
+            <a:off x="640080" y="4937760"/>
+            <a:ext cx="73152" cy="1097280"/>
+          </a:xfrm>
+          <a:prstGeom prst="rect">
+            <a:avLst/>
+          </a:prstGeom>
+          <a:solidFill>
+            <a:srgbClr val="61AFEF"/>
+          </a:solidFill>
+          <a:ln>
+            <a:noFill/>
+          </a:ln>
+        </p:spPr>
+        <p:style>
+          <a:lnRef idx="1">
+            <a:schemeClr val="accent1"/>
+          </a:lnRef>
+          <a:fillRef idx="3">
+            <a:schemeClr val="accent1"/>
+          </a:fillRef>
+          <a:effectRef idx="2">
+            <a:schemeClr val="accent1"/>
+          </a:effectRef>
+          <a:fontRef idx="minor">
+            <a:schemeClr val="lt1"/>
+          </a:fontRef>
+        </p:style>
+        <p:txBody>
+          <a:bodyPr rtlCol="0" anchor="ctr"/>
+          <a:lstStyle/>
+          <a:p>
+            <a:pPr algn="ctr"/>
+          </a:p>
+        </p:txBody>
+      </p:sp>
+      <p:sp>
+        <p:nvSpPr>
+          <p:cNvPr id="20" name="TextBox 19"/>
+          <p:cNvSpPr txBox="1"/>
+          <p:nvPr/>
+        </p:nvSpPr>
+        <p:spPr>
+          <a:xfrm>
+            <a:off x="914400" y="4983480"/>
+            <a:ext cx="10241280" cy="1005839"/>
+          </a:xfrm>
+          <a:prstGeom prst="rect">
+            <a:avLst/>
+          </a:prstGeom>
+          <a:noFill/>
+        </p:spPr>
+        <p:txBody>
+          <a:bodyPr wrap="none">
+            <a:spAutoFit/>
+          </a:bodyPr>
+          <a:lstStyle/>
+          <a:p>
+            <a:pPr>
+              <a:spcAft>
+                <a:spcPts val="200"/>
+              </a:spcAft>
+              <a:defRPr sz="1400">
+                <a:solidFill>
+                  <a:srgbClr val="ABB2BF"/>
+                </a:solidFill>
+                <a:latin typeface="Consolas"/>
+              </a:defRPr>
+            </a:pPr>
+            <a:r>
+              <a:t>max_val = numbers[0]</a:t>
+            </a:r>
+          </a:p>
+          <a:p>
+            <a:pPr>
+              <a:spcAft>
+                <a:spcPts val="200"/>
+              </a:spcAft>
+              <a:defRPr sz="1400">
+                <a:solidFill>
+                  <a:srgbClr val="ABB2BF"/>
+                </a:solidFill>
+                <a:latin typeface="Consolas"/>
+              </a:defRPr>
+            </a:pPr>
+            <a:r>
+              <a:t>for num in numbers:</a:t>
+            </a:r>
+          </a:p>
+          <a:p>
+            <a:pPr>
+              <a:spcAft>
+                <a:spcPts val="200"/>
+              </a:spcAft>
+              <a:defRPr sz="1400">
+                <a:solidFill>
+                  <a:srgbClr val="ABB2BF"/>
+                </a:solidFill>
+                <a:latin typeface="Consolas"/>
+              </a:defRPr>
+            </a:pPr>
+            <a:r>
+              <a:t>    if num &gt; max_val:</a:t>
+            </a:r>
+          </a:p>
+          <a:p>
+            <a:pPr>
+              <a:spcAft>
+                <a:spcPts val="200"/>
+              </a:spcAft>
+              <a:defRPr sz="1400">
+                <a:solidFill>
+                  <a:srgbClr val="ABB2BF"/>
+                </a:solidFill>
+                <a:latin typeface="Consolas"/>
+              </a:defRPr>
+            </a:pPr>
+            <a:r>
+              <a:t>        max_val = num</a:t>
+            </a:r>
+          </a:p>
+        </p:txBody>
+      </p:sp>
+      <p:sp>
+        <p:nvSpPr>
+          <p:cNvPr id="21" name="Rectangle 20"/>
+          <p:cNvSpPr/>
+          <p:nvPr/>
+        </p:nvSpPr>
+        <p:spPr>
+          <a:xfrm>
+            <a:off x="365760" y="6172200"/>
+            <a:ext cx="11430000" cy="365760"/>
+          </a:xfrm>
+          <a:prstGeom prst="rect">
+            <a:avLst/>
+          </a:prstGeom>
+          <a:solidFill>
+            <a:srgbClr val="0078D7"/>
+          </a:solidFill>
+          <a:ln>
+            <a:noFill/>
+          </a:ln>
+        </p:spPr>
+        <p:style>
+          <a:lnRef idx="1">
+            <a:schemeClr val="accent1"/>
+          </a:lnRef>
+          <a:fillRef idx="3">
+            <a:schemeClr val="accent1"/>
+          </a:fillRef>
+          <a:effectRef idx="2">
+            <a:schemeClr val="accent1"/>
+          </a:effectRef>
+          <a:fontRef idx="minor">
+            <a:schemeClr val="lt1"/>
+          </a:fontRef>
+        </p:style>
+        <p:txBody>
+          <a:bodyPr rtlCol="0" anchor="ctr"/>
+          <a:lstStyle/>
+          <a:p>
+            <a:pPr algn="ctr"/>
+          </a:p>
+        </p:txBody>
+      </p:sp>
+      <p:sp>
+        <p:nvSpPr>
+          <p:cNvPr id="22" name="TextBox 21"/>
+          <p:cNvSpPr txBox="1"/>
+          <p:nvPr/>
+        </p:nvSpPr>
+        <p:spPr>
+          <a:xfrm>
+            <a:off x="548640" y="6217920"/>
+            <a:ext cx="10972800" cy="274320"/>
+          </a:xfrm>
+          <a:prstGeom prst="rect">
+            <a:avLst/>
+          </a:prstGeom>
+          <a:noFill/>
+        </p:spPr>
+        <p:txBody>
+          <a:bodyPr wrap="none">
+            <a:spAutoFit/>
+          </a:bodyPr>
+          <a:lstStyle/>
+          <a:p>
+            <a:pPr>
+              <a:defRPr sz="2000" b="1">
+                <a:solidFill>
+                  <a:srgbClr val="FFFFFF"/>
+                </a:solidFill>
+              </a:defRPr>
+            </a:pPr>
+            <a:r>
+              <a:t>Copying Lists:</a:t>
             </a:r>
           </a:p>
         </p:txBody>
